--- a/outputs/gpt-live-application-research/gpt-live应用探索研究报告-汇报版.pptx
+++ b/outputs/gpt-live-application-research/gpt-live应用探索研究报告-汇报版.pptx
@@ -17,6 +17,12 @@
     <p:sldId id="265" r:id="rId16"/>
     <p:sldId id="266" r:id="rId17"/>
     <p:sldId id="267" r:id="rId18"/>
+    <p:sldId id="268" r:id="rId19"/>
+    <p:sldId id="269" r:id="rId20"/>
+    <p:sldId id="270" r:id="rId21"/>
+    <p:sldId id="271" r:id="rId22"/>
+    <p:sldId id="272" r:id="rId23"/>
+    <p:sldId id="273" r:id="rId24"/>
   </p:sldIdLst>
   <p:sldSz cx="12191695" cy="6858000" type="screen4x3"/>
   <p:notesSz cx="6858000" cy="9144000"/>
@@ -3285,7 +3291,7 @@
               </a:defRPr>
             </a:pPr>
             <a:r>
-              <a:t>2026.07  ·  EVIDENCE-DRIVEN  ·  12 SLIDES</a:t>
+              <a:t>2026.07  ·  EVIDENCE-DRIVEN  ·  18 SLIDES</a:t>
             </a:r>
           </a:p>
         </p:txBody>
@@ -3424,7 +3430,7 @@
               </a:defRPr>
             </a:pPr>
             <a:r>
-              <a:t>附录A：建议的生产评测集</a:t>
+              <a:t>4.3 架构竞争的本质</a:t>
             </a:r>
           </a:p>
         </p:txBody>
@@ -3493,7 +3499,7 @@
               </a:defRPr>
             </a:pPr>
             <a:r>
-              <a:t>暂无可展示内容</a:t>
+              <a:t>原生S2S的低延迟与韵律保留；</a:t>
             </a:r>
           </a:p>
         </p:txBody>
@@ -3543,7 +3549,343 @@
       </p:sp>
       <p:sp>
         <p:nvSpPr>
-          <p:cNvPr id="7" name="TextBox 6"/>
+          <p:cNvPr id="7" name="Rounded Rectangle 6"/>
+          <p:cNvSpPr/>
+          <p:nvPr/>
+        </p:nvSpPr>
+        <p:spPr>
+          <a:xfrm>
+            <a:off x="6176772" y="1600200"/>
+            <a:ext cx="5372100" cy="1965960"/>
+          </a:xfrm>
+          <a:prstGeom prst="roundRect">
+            <a:avLst/>
+          </a:prstGeom>
+          <a:solidFill>
+            <a:srgbClr val="10243C"/>
+          </a:solidFill>
+          <a:ln>
+            <a:solidFill>
+              <a:srgbClr val="294B68"/>
+            </a:solidFill>
+          </a:ln>
+        </p:spPr>
+        <p:style>
+          <a:lnRef idx="1">
+            <a:schemeClr val="accent1"/>
+          </a:lnRef>
+          <a:fillRef idx="3">
+            <a:schemeClr val="accent1"/>
+          </a:fillRef>
+          <a:effectRef idx="2">
+            <a:schemeClr val="accent1"/>
+          </a:effectRef>
+          <a:fontRef idx="minor">
+            <a:schemeClr val="lt1"/>
+          </a:fontRef>
+        </p:style>
+        <p:txBody>
+          <a:bodyPr rtlCol="0" anchor="ctr" lIns="228600" rIns="182880" tIns="164592"/>
+          <a:lstStyle/>
+          <a:p>
+            <a:pPr algn="ctr">
+              <a:defRPr sz="1200" b="1">
+                <a:solidFill>
+                  <a:srgbClr val="55A7FF"/>
+                </a:solidFill>
+              </a:defRPr>
+            </a:pPr>
+            <a:r>
+              <a:t>02</a:t>
+            </a:r>
+          </a:p>
+          <a:p>
+            <a:pPr>
+              <a:spcBef>
+                <a:spcPts val="800"/>
+              </a:spcBef>
+              <a:defRPr sz="1500">
+                <a:solidFill>
+                  <a:srgbClr val="F4F8FC"/>
+                </a:solidFill>
+              </a:defRPr>
+            </a:pPr>
+            <a:r>
+              <a:t>级联系统的可观测、可替换和合规控制；</a:t>
+            </a:r>
+          </a:p>
+        </p:txBody>
+      </p:sp>
+      <p:sp>
+        <p:nvSpPr>
+          <p:cNvPr id="8" name="Rectangle 7"/>
+          <p:cNvSpPr/>
+          <p:nvPr/>
+        </p:nvSpPr>
+        <p:spPr>
+          <a:xfrm>
+            <a:off x="6176772" y="1801368"/>
+            <a:ext cx="54864" cy="438912"/>
+          </a:xfrm>
+          <a:prstGeom prst="rect">
+            <a:avLst/>
+          </a:prstGeom>
+          <a:solidFill>
+            <a:srgbClr val="55A7FF"/>
+          </a:solidFill>
+          <a:ln>
+            <a:noFill/>
+          </a:ln>
+        </p:spPr>
+        <p:style>
+          <a:lnRef idx="1">
+            <a:schemeClr val="accent1"/>
+          </a:lnRef>
+          <a:fillRef idx="3">
+            <a:schemeClr val="accent1"/>
+          </a:fillRef>
+          <a:effectRef idx="2">
+            <a:schemeClr val="accent1"/>
+          </a:effectRef>
+          <a:fontRef idx="minor">
+            <a:schemeClr val="lt1"/>
+          </a:fontRef>
+        </p:style>
+        <p:txBody>
+          <a:bodyPr rtlCol="0" anchor="ctr"/>
+          <a:lstStyle/>
+          <a:p>
+            <a:pPr algn="ctr"/>
+          </a:p>
+        </p:txBody>
+      </p:sp>
+      <p:sp>
+        <p:nvSpPr>
+          <p:cNvPr id="9" name="Rounded Rectangle 8"/>
+          <p:cNvSpPr/>
+          <p:nvPr/>
+        </p:nvSpPr>
+        <p:spPr>
+          <a:xfrm>
+            <a:off x="658368" y="3730752"/>
+            <a:ext cx="5372100" cy="1965960"/>
+          </a:xfrm>
+          <a:prstGeom prst="roundRect">
+            <a:avLst/>
+          </a:prstGeom>
+          <a:solidFill>
+            <a:srgbClr val="10243C"/>
+          </a:solidFill>
+          <a:ln>
+            <a:solidFill>
+              <a:srgbClr val="294B68"/>
+            </a:solidFill>
+          </a:ln>
+        </p:spPr>
+        <p:style>
+          <a:lnRef idx="1">
+            <a:schemeClr val="accent1"/>
+          </a:lnRef>
+          <a:fillRef idx="3">
+            <a:schemeClr val="accent1"/>
+          </a:fillRef>
+          <a:effectRef idx="2">
+            <a:schemeClr val="accent1"/>
+          </a:effectRef>
+          <a:fontRef idx="minor">
+            <a:schemeClr val="lt1"/>
+          </a:fontRef>
+        </p:style>
+        <p:txBody>
+          <a:bodyPr rtlCol="0" anchor="ctr" lIns="228600" rIns="182880" tIns="164592"/>
+          <a:lstStyle/>
+          <a:p>
+            <a:pPr algn="ctr">
+              <a:defRPr sz="1200" b="1">
+                <a:solidFill>
+                  <a:srgbClr val="FFBE55"/>
+                </a:solidFill>
+              </a:defRPr>
+            </a:pPr>
+            <a:r>
+              <a:t>03</a:t>
+            </a:r>
+          </a:p>
+          <a:p>
+            <a:pPr>
+              <a:spcBef>
+                <a:spcPts val="800"/>
+              </a:spcBef>
+              <a:defRPr sz="1500">
+                <a:solidFill>
+                  <a:srgbClr val="F4F8FC"/>
+                </a:solidFill>
+              </a:defRPr>
+            </a:pPr>
+            <a:r>
+              <a:t>前沿推理/Agent能力；</a:t>
+            </a:r>
+          </a:p>
+        </p:txBody>
+      </p:sp>
+      <p:sp>
+        <p:nvSpPr>
+          <p:cNvPr id="10" name="Rectangle 9"/>
+          <p:cNvSpPr/>
+          <p:nvPr/>
+        </p:nvSpPr>
+        <p:spPr>
+          <a:xfrm>
+            <a:off x="658368" y="3931920"/>
+            <a:ext cx="54864" cy="438912"/>
+          </a:xfrm>
+          <a:prstGeom prst="rect">
+            <a:avLst/>
+          </a:prstGeom>
+          <a:solidFill>
+            <a:srgbClr val="FFBE55"/>
+          </a:solidFill>
+          <a:ln>
+            <a:noFill/>
+          </a:ln>
+        </p:spPr>
+        <p:style>
+          <a:lnRef idx="1">
+            <a:schemeClr val="accent1"/>
+          </a:lnRef>
+          <a:fillRef idx="3">
+            <a:schemeClr val="accent1"/>
+          </a:fillRef>
+          <a:effectRef idx="2">
+            <a:schemeClr val="accent1"/>
+          </a:effectRef>
+          <a:fontRef idx="minor">
+            <a:schemeClr val="lt1"/>
+          </a:fontRef>
+        </p:style>
+        <p:txBody>
+          <a:bodyPr rtlCol="0" anchor="ctr"/>
+          <a:lstStyle/>
+          <a:p>
+            <a:pPr algn="ctr"/>
+          </a:p>
+        </p:txBody>
+      </p:sp>
+      <p:sp>
+        <p:nvSpPr>
+          <p:cNvPr id="11" name="Rounded Rectangle 10"/>
+          <p:cNvSpPr/>
+          <p:nvPr/>
+        </p:nvSpPr>
+        <p:spPr>
+          <a:xfrm>
+            <a:off x="6176772" y="3730752"/>
+            <a:ext cx="5372100" cy="1965960"/>
+          </a:xfrm>
+          <a:prstGeom prst="roundRect">
+            <a:avLst/>
+          </a:prstGeom>
+          <a:solidFill>
+            <a:srgbClr val="10243C"/>
+          </a:solidFill>
+          <a:ln>
+            <a:solidFill>
+              <a:srgbClr val="294B68"/>
+            </a:solidFill>
+          </a:ln>
+        </p:spPr>
+        <p:style>
+          <a:lnRef idx="1">
+            <a:schemeClr val="accent1"/>
+          </a:lnRef>
+          <a:fillRef idx="3">
+            <a:schemeClr val="accent1"/>
+          </a:fillRef>
+          <a:effectRef idx="2">
+            <a:schemeClr val="accent1"/>
+          </a:effectRef>
+          <a:fontRef idx="minor">
+            <a:schemeClr val="lt1"/>
+          </a:fontRef>
+        </p:style>
+        <p:txBody>
+          <a:bodyPr rtlCol="0" anchor="ctr" lIns="228600" rIns="182880" tIns="164592"/>
+          <a:lstStyle/>
+          <a:p>
+            <a:pPr algn="ctr">
+              <a:defRPr sz="1200" b="1">
+                <a:solidFill>
+                  <a:srgbClr val="46D6C8"/>
+                </a:solidFill>
+              </a:defRPr>
+            </a:pPr>
+            <a:r>
+              <a:t>04</a:t>
+            </a:r>
+          </a:p>
+          <a:p>
+            <a:pPr>
+              <a:spcBef>
+                <a:spcPts val="800"/>
+              </a:spcBef>
+              <a:defRPr sz="1500">
+                <a:solidFill>
+                  <a:srgbClr val="F4F8FC"/>
+                </a:solidFill>
+              </a:defRPr>
+            </a:pPr>
+            <a:r>
+              <a:t>成本、地域、语言和企业部署。</a:t>
+            </a:r>
+          </a:p>
+        </p:txBody>
+      </p:sp>
+      <p:sp>
+        <p:nvSpPr>
+          <p:cNvPr id="12" name="Rectangle 11"/>
+          <p:cNvSpPr/>
+          <p:nvPr/>
+        </p:nvSpPr>
+        <p:spPr>
+          <a:xfrm>
+            <a:off x="6176772" y="3931920"/>
+            <a:ext cx="54864" cy="438912"/>
+          </a:xfrm>
+          <a:prstGeom prst="rect">
+            <a:avLst/>
+          </a:prstGeom>
+          <a:solidFill>
+            <a:srgbClr val="46D6C8"/>
+          </a:solidFill>
+          <a:ln>
+            <a:noFill/>
+          </a:ln>
+        </p:spPr>
+        <p:style>
+          <a:lnRef idx="1">
+            <a:schemeClr val="accent1"/>
+          </a:lnRef>
+          <a:fillRef idx="3">
+            <a:schemeClr val="accent1"/>
+          </a:fillRef>
+          <a:effectRef idx="2">
+            <a:schemeClr val="accent1"/>
+          </a:effectRef>
+          <a:fontRef idx="minor">
+            <a:schemeClr val="lt1"/>
+          </a:fontRef>
+        </p:style>
+        <p:txBody>
+          <a:bodyPr rtlCol="0" anchor="ctr"/>
+          <a:lstStyle/>
+          <a:p>
+            <a:pPr algn="ctr"/>
+          </a:p>
+        </p:txBody>
+      </p:sp>
+      <p:sp>
+        <p:nvSpPr>
+          <p:cNvPr id="13" name="TextBox 12"/>
           <p:cNvSpPr txBox="1"/>
           <p:nvPr/>
         </p:nvSpPr>
@@ -3571,7 +3913,7 @@
               </a:defRPr>
             </a:pPr>
             <a:r>
-              <a:t>10 / 12</a:t>
+              <a:t>10 / 18</a:t>
             </a:r>
           </a:p>
         </p:txBody>
@@ -3710,7 +4052,7 @@
               </a:defRPr>
             </a:pPr>
             <a:r>
-              <a:t>附录B：主要参考资料</a:t>
+              <a:t>五、风险与局限</a:t>
             </a:r>
           </a:p>
         </p:txBody>
@@ -3723,8 +4065,8 @@
         </p:nvSpPr>
         <p:spPr>
           <a:xfrm>
-            <a:off x="658368" y="1645920"/>
-            <a:ext cx="3429000" cy="1783080"/>
+            <a:off x="658368" y="1600200"/>
+            <a:ext cx="3581400" cy="1965960"/>
           </a:xfrm>
           <a:prstGeom prst="roundRect">
             <a:avLst/>
@@ -3734,7 +4076,7 @@
           </a:solidFill>
           <a:ln>
             <a:solidFill>
-              <a:srgbClr val="2C5675"/>
+              <a:srgbClr val="294B68"/>
             </a:solidFill>
           </a:ln>
         </p:spPr>
@@ -3753,18 +4095,18 @@
           </a:fontRef>
         </p:style>
         <p:txBody>
-          <a:bodyPr rtlCol="0" anchor="ctr"/>
+          <a:bodyPr rtlCol="0" anchor="ctr" lIns="228600" rIns="182880" tIns="164592"/>
           <a:lstStyle/>
           <a:p>
             <a:pPr algn="ctr">
-              <a:defRPr sz="3000" b="1">
+              <a:defRPr sz="1200" b="1">
                 <a:solidFill>
                   <a:srgbClr val="46D6C8"/>
                 </a:solidFill>
               </a:defRPr>
             </a:pPr>
             <a:r>
-              <a:t>20001274</a:t>
+              <a:t>01</a:t>
             </a:r>
           </a:p>
           <a:p>
@@ -3772,28 +4114,71 @@
               <a:spcBef>
                 <a:spcPts val="800"/>
               </a:spcBef>
-              <a:defRPr sz="1200">
-                <a:solidFill>
-                  <a:srgbClr val="9AB2C8"/>
-                </a:solidFill>
-              </a:defRPr>
-            </a:pPr>
-            <a:r>
-              <a:t>关键证据</a:t>
-            </a:r>
-          </a:p>
-        </p:txBody>
-      </p:sp>
-      <p:sp>
-        <p:nvSpPr>
-          <p:cNvPr id="6" name="Rounded Rectangle 5"/>
-          <p:cNvSpPr/>
-          <p:nvPr/>
-        </p:nvSpPr>
-        <p:spPr>
-          <a:xfrm>
-            <a:off x="4389120" y="1645920"/>
-            <a:ext cx="3429000" cy="1783080"/>
+              <a:defRPr sz="1500">
+                <a:solidFill>
+                  <a:srgbClr val="F4F8FC"/>
+                </a:solidFill>
+              </a:defRPr>
+            </a:pPr>
+            <a:r>
+              <a:t>幻觉被自然声音放大。 流畅、自信和情绪化的语音容易让用户高估答案真实性。</a:t>
+            </a:r>
+          </a:p>
+        </p:txBody>
+      </p:sp>
+      <p:sp>
+        <p:nvSpPr>
+          <p:cNvPr id="6" name="Rectangle 5"/>
+          <p:cNvSpPr/>
+          <p:nvPr/>
+        </p:nvSpPr>
+        <p:spPr>
+          <a:xfrm>
+            <a:off x="658368" y="1801368"/>
+            <a:ext cx="54864" cy="438912"/>
+          </a:xfrm>
+          <a:prstGeom prst="rect">
+            <a:avLst/>
+          </a:prstGeom>
+          <a:solidFill>
+            <a:srgbClr val="46D6C8"/>
+          </a:solidFill>
+          <a:ln>
+            <a:noFill/>
+          </a:ln>
+        </p:spPr>
+        <p:style>
+          <a:lnRef idx="1">
+            <a:schemeClr val="accent1"/>
+          </a:lnRef>
+          <a:fillRef idx="3">
+            <a:schemeClr val="accent1"/>
+          </a:fillRef>
+          <a:effectRef idx="2">
+            <a:schemeClr val="accent1"/>
+          </a:effectRef>
+          <a:fontRef idx="minor">
+            <a:schemeClr val="lt1"/>
+          </a:fontRef>
+        </p:style>
+        <p:txBody>
+          <a:bodyPr rtlCol="0" anchor="ctr"/>
+          <a:lstStyle/>
+          <a:p>
+            <a:pPr algn="ctr"/>
+          </a:p>
+        </p:txBody>
+      </p:sp>
+      <p:sp>
+        <p:nvSpPr>
+          <p:cNvPr id="7" name="Rounded Rectangle 6"/>
+          <p:cNvSpPr/>
+          <p:nvPr/>
+        </p:nvSpPr>
+        <p:spPr>
+          <a:xfrm>
+            <a:off x="4386071" y="1600200"/>
+            <a:ext cx="3581400" cy="1965960"/>
           </a:xfrm>
           <a:prstGeom prst="roundRect">
             <a:avLst/>
@@ -3803,7 +4188,7 @@
           </a:solidFill>
           <a:ln>
             <a:solidFill>
-              <a:srgbClr val="2C5675"/>
+              <a:srgbClr val="294B68"/>
             </a:solidFill>
           </a:ln>
         </p:spPr>
@@ -3822,18 +4207,18 @@
           </a:fontRef>
         </p:style>
         <p:txBody>
-          <a:bodyPr rtlCol="0" anchor="ctr"/>
+          <a:bodyPr rtlCol="0" anchor="ctr" lIns="228600" rIns="182880" tIns="164592"/>
           <a:lstStyle/>
           <a:p>
             <a:pPr algn="ctr">
-              <a:defRPr sz="3000" b="1">
-                <a:solidFill>
-                  <a:srgbClr val="46D6C8"/>
-                </a:solidFill>
-              </a:defRPr>
-            </a:pPr>
-            <a:r>
-              <a:t>10</a:t>
+              <a:defRPr sz="1200" b="1">
+                <a:solidFill>
+                  <a:srgbClr val="FFBE55"/>
+                </a:solidFill>
+              </a:defRPr>
+            </a:pPr>
+            <a:r>
+              <a:t>02</a:t>
             </a:r>
           </a:p>
           <a:p>
@@ -3841,28 +4226,71 @@
               <a:spcBef>
                 <a:spcPts val="800"/>
               </a:spcBef>
-              <a:defRPr sz="1200">
-                <a:solidFill>
-                  <a:srgbClr val="9AB2C8"/>
-                </a:solidFill>
-              </a:defRPr>
-            </a:pPr>
-            <a:r>
-              <a:t>关键证据</a:t>
-            </a:r>
-          </a:p>
-        </p:txBody>
-      </p:sp>
-      <p:sp>
-        <p:nvSpPr>
-          <p:cNvPr id="7" name="Rounded Rectangle 6"/>
-          <p:cNvSpPr/>
-          <p:nvPr/>
-        </p:nvSpPr>
-        <p:spPr>
-          <a:xfrm>
-            <a:off x="8119872" y="1645920"/>
-            <a:ext cx="3429000" cy="1783080"/>
+              <a:defRPr sz="1500">
+                <a:solidFill>
+                  <a:srgbClr val="F4F8FC"/>
+                </a:solidFill>
+              </a:defRPr>
+            </a:pPr>
+            <a:r>
+              <a:t>说话人归属与误触发。 背景对话、电视、多人会话可能被当作对模型的指令。</a:t>
+            </a:r>
+          </a:p>
+        </p:txBody>
+      </p:sp>
+      <p:sp>
+        <p:nvSpPr>
+          <p:cNvPr id="8" name="Rectangle 7"/>
+          <p:cNvSpPr/>
+          <p:nvPr/>
+        </p:nvSpPr>
+        <p:spPr>
+          <a:xfrm>
+            <a:off x="4386071" y="1801368"/>
+            <a:ext cx="54864" cy="438912"/>
+          </a:xfrm>
+          <a:prstGeom prst="rect">
+            <a:avLst/>
+          </a:prstGeom>
+          <a:solidFill>
+            <a:srgbClr val="FFBE55"/>
+          </a:solidFill>
+          <a:ln>
+            <a:noFill/>
+          </a:ln>
+        </p:spPr>
+        <p:style>
+          <a:lnRef idx="1">
+            <a:schemeClr val="accent1"/>
+          </a:lnRef>
+          <a:fillRef idx="3">
+            <a:schemeClr val="accent1"/>
+          </a:fillRef>
+          <a:effectRef idx="2">
+            <a:schemeClr val="accent1"/>
+          </a:effectRef>
+          <a:fontRef idx="minor">
+            <a:schemeClr val="lt1"/>
+          </a:fontRef>
+        </p:style>
+        <p:txBody>
+          <a:bodyPr rtlCol="0" anchor="ctr"/>
+          <a:lstStyle/>
+          <a:p>
+            <a:pPr algn="ctr"/>
+          </a:p>
+        </p:txBody>
+      </p:sp>
+      <p:sp>
+        <p:nvSpPr>
+          <p:cNvPr id="9" name="Rounded Rectangle 8"/>
+          <p:cNvSpPr/>
+          <p:nvPr/>
+        </p:nvSpPr>
+        <p:spPr>
+          <a:xfrm>
+            <a:off x="8113776" y="1600200"/>
+            <a:ext cx="3581400" cy="1965960"/>
           </a:xfrm>
           <a:prstGeom prst="roundRect">
             <a:avLst/>
@@ -3872,7 +4300,7 @@
           </a:solidFill>
           <a:ln>
             <a:solidFill>
-              <a:srgbClr val="2C5675"/>
+              <a:srgbClr val="294B68"/>
             </a:solidFill>
           </a:ln>
         </p:spPr>
@@ -3891,18 +4319,18 @@
           </a:fontRef>
         </p:style>
         <p:txBody>
-          <a:bodyPr rtlCol="0" anchor="ctr"/>
+          <a:bodyPr rtlCol="0" anchor="ctr" lIns="228600" rIns="182880" tIns="164592"/>
           <a:lstStyle/>
           <a:p>
             <a:pPr algn="ctr">
-              <a:defRPr sz="3000" b="1">
-                <a:solidFill>
-                  <a:srgbClr val="46D6C8"/>
-                </a:solidFill>
-              </a:defRPr>
-            </a:pPr>
-            <a:r>
-              <a:t>11</a:t>
+              <a:defRPr sz="1200" b="1">
+                <a:solidFill>
+                  <a:srgbClr val="FF6B6B"/>
+                </a:solidFill>
+              </a:defRPr>
+            </a:pPr>
+            <a:r>
+              <a:t>03</a:t>
             </a:r>
           </a:p>
           <a:p>
@@ -3910,28 +4338,71 @@
               <a:spcBef>
                 <a:spcPts val="800"/>
               </a:spcBef>
-              <a:defRPr sz="1200">
-                <a:solidFill>
-                  <a:srgbClr val="9AB2C8"/>
-                </a:solidFill>
-              </a:defRPr>
-            </a:pPr>
-            <a:r>
-              <a:t>关键证据</a:t>
-            </a:r>
-          </a:p>
-        </p:txBody>
-      </p:sp>
-      <p:sp>
-        <p:nvSpPr>
-          <p:cNvPr id="8" name="Rounded Rectangle 7"/>
-          <p:cNvSpPr/>
-          <p:nvPr/>
-        </p:nvSpPr>
-        <p:spPr>
-          <a:xfrm>
-            <a:off x="658368" y="3794760"/>
-            <a:ext cx="3429000" cy="1783080"/>
+              <a:defRPr sz="1500">
+                <a:solidFill>
+                  <a:srgbClr val="F4F8FC"/>
+                </a:solidFill>
+              </a:defRPr>
+            </a:pPr>
+            <a:r>
+              <a:t>打断竞争。 太敏感会频繁停下，太迟钝会压制用户；网络往返和播放缓冲也是打断时延的一部分。</a:t>
+            </a:r>
+          </a:p>
+        </p:txBody>
+      </p:sp>
+      <p:sp>
+        <p:nvSpPr>
+          <p:cNvPr id="10" name="Rectangle 9"/>
+          <p:cNvSpPr/>
+          <p:nvPr/>
+        </p:nvSpPr>
+        <p:spPr>
+          <a:xfrm>
+            <a:off x="8113776" y="1801368"/>
+            <a:ext cx="54864" cy="438912"/>
+          </a:xfrm>
+          <a:prstGeom prst="rect">
+            <a:avLst/>
+          </a:prstGeom>
+          <a:solidFill>
+            <a:srgbClr val="FF6B6B"/>
+          </a:solidFill>
+          <a:ln>
+            <a:noFill/>
+          </a:ln>
+        </p:spPr>
+        <p:style>
+          <a:lnRef idx="1">
+            <a:schemeClr val="accent1"/>
+          </a:lnRef>
+          <a:fillRef idx="3">
+            <a:schemeClr val="accent1"/>
+          </a:fillRef>
+          <a:effectRef idx="2">
+            <a:schemeClr val="accent1"/>
+          </a:effectRef>
+          <a:fontRef idx="minor">
+            <a:schemeClr val="lt1"/>
+          </a:fontRef>
+        </p:style>
+        <p:txBody>
+          <a:bodyPr rtlCol="0" anchor="ctr"/>
+          <a:lstStyle/>
+          <a:p>
+            <a:pPr algn="ctr"/>
+          </a:p>
+        </p:txBody>
+      </p:sp>
+      <p:sp>
+        <p:nvSpPr>
+          <p:cNvPr id="11" name="Rounded Rectangle 10"/>
+          <p:cNvSpPr/>
+          <p:nvPr/>
+        </p:nvSpPr>
+        <p:spPr>
+          <a:xfrm>
+            <a:off x="658368" y="3730752"/>
+            <a:ext cx="3581400" cy="1965960"/>
           </a:xfrm>
           <a:prstGeom prst="roundRect">
             <a:avLst/>
@@ -3941,7 +4412,7 @@
           </a:solidFill>
           <a:ln>
             <a:solidFill>
-              <a:srgbClr val="2C5675"/>
+              <a:srgbClr val="294B68"/>
             </a:solidFill>
           </a:ln>
         </p:spPr>
@@ -3960,18 +4431,18 @@
           </a:fontRef>
         </p:style>
         <p:txBody>
-          <a:bodyPr rtlCol="0" anchor="ctr"/>
+          <a:bodyPr rtlCol="0" anchor="ctr" lIns="228600" rIns="182880" tIns="164592"/>
           <a:lstStyle/>
           <a:p>
             <a:pPr algn="ctr">
-              <a:defRPr sz="3000" b="1">
+              <a:defRPr sz="1200" b="1">
                 <a:solidFill>
                   <a:srgbClr val="46D6C8"/>
                 </a:solidFill>
               </a:defRPr>
             </a:pPr>
             <a:r>
-              <a:t>2604.15804</a:t>
+              <a:t>04</a:t>
             </a:r>
           </a:p>
           <a:p>
@@ -3979,28 +4450,71 @@
               <a:spcBef>
                 <a:spcPts val="800"/>
               </a:spcBef>
-              <a:defRPr sz="1200">
-                <a:solidFill>
-                  <a:srgbClr val="9AB2C8"/>
-                </a:solidFill>
-              </a:defRPr>
-            </a:pPr>
-            <a:r>
-              <a:t>关键证据</a:t>
-            </a:r>
-          </a:p>
-        </p:txBody>
-      </p:sp>
-      <p:sp>
-        <p:nvSpPr>
-          <p:cNvPr id="9" name="Rounded Rectangle 8"/>
-          <p:cNvSpPr/>
-          <p:nvPr/>
-        </p:nvSpPr>
-        <p:spPr>
-          <a:xfrm>
-            <a:off x="4389120" y="3794760"/>
-            <a:ext cx="3429000" cy="1783080"/>
+              <a:defRPr sz="1500">
+                <a:solidFill>
+                  <a:srgbClr val="F4F8FC"/>
+                </a:solidFill>
+              </a:defRPr>
+            </a:pPr>
+            <a:r>
+              <a:t>委托链不透明。 用户难以判断当前答案来自GPT‑Live、GPT‑5.5、搜索还是工具，审计需额外记录。</a:t>
+            </a:r>
+          </a:p>
+        </p:txBody>
+      </p:sp>
+      <p:sp>
+        <p:nvSpPr>
+          <p:cNvPr id="12" name="Rectangle 11"/>
+          <p:cNvSpPr/>
+          <p:nvPr/>
+        </p:nvSpPr>
+        <p:spPr>
+          <a:xfrm>
+            <a:off x="658368" y="3931920"/>
+            <a:ext cx="54864" cy="438912"/>
+          </a:xfrm>
+          <a:prstGeom prst="rect">
+            <a:avLst/>
+          </a:prstGeom>
+          <a:solidFill>
+            <a:srgbClr val="46D6C8"/>
+          </a:solidFill>
+          <a:ln>
+            <a:noFill/>
+          </a:ln>
+        </p:spPr>
+        <p:style>
+          <a:lnRef idx="1">
+            <a:schemeClr val="accent1"/>
+          </a:lnRef>
+          <a:fillRef idx="3">
+            <a:schemeClr val="accent1"/>
+          </a:fillRef>
+          <a:effectRef idx="2">
+            <a:schemeClr val="accent1"/>
+          </a:effectRef>
+          <a:fontRef idx="minor">
+            <a:schemeClr val="lt1"/>
+          </a:fontRef>
+        </p:style>
+        <p:txBody>
+          <a:bodyPr rtlCol="0" anchor="ctr"/>
+          <a:lstStyle/>
+          <a:p>
+            <a:pPr algn="ctr"/>
+          </a:p>
+        </p:txBody>
+      </p:sp>
+      <p:sp>
+        <p:nvSpPr>
+          <p:cNvPr id="13" name="Rounded Rectangle 12"/>
+          <p:cNvSpPr/>
+          <p:nvPr/>
+        </p:nvSpPr>
+        <p:spPr>
+          <a:xfrm>
+            <a:off x="4386071" y="3730752"/>
+            <a:ext cx="3581400" cy="1965960"/>
           </a:xfrm>
           <a:prstGeom prst="roundRect">
             <a:avLst/>
@@ -4010,7 +4524,7 @@
           </a:solidFill>
           <a:ln>
             <a:solidFill>
-              <a:srgbClr val="2C5675"/>
+              <a:srgbClr val="294B68"/>
             </a:solidFill>
           </a:ln>
         </p:spPr>
@@ -4029,18 +4543,18 @@
           </a:fontRef>
         </p:style>
         <p:txBody>
-          <a:bodyPr rtlCol="0" anchor="ctr"/>
+          <a:bodyPr rtlCol="0" anchor="ctr" lIns="228600" rIns="182880" tIns="164592"/>
           <a:lstStyle/>
           <a:p>
             <a:pPr algn="ctr">
-              <a:defRPr sz="3000" b="1">
-                <a:solidFill>
-                  <a:srgbClr val="46D6C8"/>
-                </a:solidFill>
-              </a:defRPr>
-            </a:pPr>
-            <a:r>
-              <a:t>12</a:t>
+              <a:defRPr sz="1200" b="1">
+                <a:solidFill>
+                  <a:srgbClr val="FFBE55"/>
+                </a:solidFill>
+              </a:defRPr>
+            </a:pPr>
+            <a:r>
+              <a:t>05</a:t>
             </a:r>
           </a:p>
           <a:p>
@@ -4048,28 +4562,71 @@
               <a:spcBef>
                 <a:spcPts val="800"/>
               </a:spcBef>
-              <a:defRPr sz="1200">
-                <a:solidFill>
-                  <a:srgbClr val="9AB2C8"/>
-                </a:solidFill>
-              </a:defRPr>
-            </a:pPr>
-            <a:r>
-              <a:t>关键证据</a:t>
-            </a:r>
-          </a:p>
-        </p:txBody>
-      </p:sp>
-      <p:sp>
-        <p:nvSpPr>
-          <p:cNvPr id="10" name="Rounded Rectangle 9"/>
-          <p:cNvSpPr/>
-          <p:nvPr/>
-        </p:nvSpPr>
-        <p:spPr>
-          <a:xfrm>
-            <a:off x="8119872" y="3794760"/>
-            <a:ext cx="3429000" cy="1783080"/>
+              <a:defRPr sz="1500">
+                <a:solidFill>
+                  <a:srgbClr val="F4F8FC"/>
+                </a:solidFill>
+              </a:defRPr>
+            </a:pPr>
+            <a:r>
+              <a:t>上下文漂移。 长会话中摘要、记忆与任务状态可能不一致，尤其是中断和并发工具返回时。</a:t>
+            </a:r>
+          </a:p>
+        </p:txBody>
+      </p:sp>
+      <p:sp>
+        <p:nvSpPr>
+          <p:cNvPr id="14" name="Rectangle 13"/>
+          <p:cNvSpPr/>
+          <p:nvPr/>
+        </p:nvSpPr>
+        <p:spPr>
+          <a:xfrm>
+            <a:off x="4386071" y="3931920"/>
+            <a:ext cx="54864" cy="438912"/>
+          </a:xfrm>
+          <a:prstGeom prst="rect">
+            <a:avLst/>
+          </a:prstGeom>
+          <a:solidFill>
+            <a:srgbClr val="FFBE55"/>
+          </a:solidFill>
+          <a:ln>
+            <a:noFill/>
+          </a:ln>
+        </p:spPr>
+        <p:style>
+          <a:lnRef idx="1">
+            <a:schemeClr val="accent1"/>
+          </a:lnRef>
+          <a:fillRef idx="3">
+            <a:schemeClr val="accent1"/>
+          </a:fillRef>
+          <a:effectRef idx="2">
+            <a:schemeClr val="accent1"/>
+          </a:effectRef>
+          <a:fontRef idx="minor">
+            <a:schemeClr val="lt1"/>
+          </a:fontRef>
+        </p:style>
+        <p:txBody>
+          <a:bodyPr rtlCol="0" anchor="ctr"/>
+          <a:lstStyle/>
+          <a:p>
+            <a:pPr algn="ctr"/>
+          </a:p>
+        </p:txBody>
+      </p:sp>
+      <p:sp>
+        <p:nvSpPr>
+          <p:cNvPr id="15" name="Rounded Rectangle 14"/>
+          <p:cNvSpPr/>
+          <p:nvPr/>
+        </p:nvSpPr>
+        <p:spPr>
+          <a:xfrm>
+            <a:off x="8113776" y="3730752"/>
+            <a:ext cx="3581400" cy="1965960"/>
           </a:xfrm>
           <a:prstGeom prst="roundRect">
             <a:avLst/>
@@ -4079,7 +4636,7 @@
           </a:solidFill>
           <a:ln>
             <a:solidFill>
-              <a:srgbClr val="2C5675"/>
+              <a:srgbClr val="294B68"/>
             </a:solidFill>
           </a:ln>
         </p:spPr>
@@ -4098,18 +4655,18 @@
           </a:fontRef>
         </p:style>
         <p:txBody>
-          <a:bodyPr rtlCol="0" anchor="ctr"/>
+          <a:bodyPr rtlCol="0" anchor="ctr" lIns="228600" rIns="182880" tIns="164592"/>
           <a:lstStyle/>
           <a:p>
             <a:pPr algn="ctr">
-              <a:defRPr sz="3000" b="1">
-                <a:solidFill>
-                  <a:srgbClr val="46D6C8"/>
-                </a:solidFill>
-              </a:defRPr>
-            </a:pPr>
-            <a:r>
-              <a:t>6561</a:t>
+              <a:defRPr sz="1200" b="1">
+                <a:solidFill>
+                  <a:srgbClr val="FF6B6B"/>
+                </a:solidFill>
+              </a:defRPr>
+            </a:pPr>
+            <a:r>
+              <a:t>06</a:t>
             </a:r>
           </a:p>
           <a:p>
@@ -4117,21 +4674,64 @@
               <a:spcBef>
                 <a:spcPts val="800"/>
               </a:spcBef>
-              <a:defRPr sz="1200">
-                <a:solidFill>
-                  <a:srgbClr val="9AB2C8"/>
-                </a:solidFill>
-              </a:defRPr>
-            </a:pPr>
-            <a:r>
-              <a:t>关键证据</a:t>
-            </a:r>
-          </a:p>
-        </p:txBody>
-      </p:sp>
-      <p:sp>
-        <p:nvSpPr>
-          <p:cNvPr id="11" name="TextBox 10"/>
+              <a:defRPr sz="1500">
+                <a:solidFill>
+                  <a:srgbClr val="F4F8FC"/>
+                </a:solidFill>
+              </a:defRPr>
+            </a:pPr>
+            <a:r>
+              <a:t>语言不均衡。 OpenAI承认部分语言有非母语口音或流利度缺口；中文方言和专业术语必须专项评测。</a:t>
+            </a:r>
+          </a:p>
+        </p:txBody>
+      </p:sp>
+      <p:sp>
+        <p:nvSpPr>
+          <p:cNvPr id="16" name="Rectangle 15"/>
+          <p:cNvSpPr/>
+          <p:nvPr/>
+        </p:nvSpPr>
+        <p:spPr>
+          <a:xfrm>
+            <a:off x="8113776" y="3931920"/>
+            <a:ext cx="54864" cy="438912"/>
+          </a:xfrm>
+          <a:prstGeom prst="rect">
+            <a:avLst/>
+          </a:prstGeom>
+          <a:solidFill>
+            <a:srgbClr val="FF6B6B"/>
+          </a:solidFill>
+          <a:ln>
+            <a:noFill/>
+          </a:ln>
+        </p:spPr>
+        <p:style>
+          <a:lnRef idx="1">
+            <a:schemeClr val="accent1"/>
+          </a:lnRef>
+          <a:fillRef idx="3">
+            <a:schemeClr val="accent1"/>
+          </a:fillRef>
+          <a:effectRef idx="2">
+            <a:schemeClr val="accent1"/>
+          </a:effectRef>
+          <a:fontRef idx="minor">
+            <a:schemeClr val="lt1"/>
+          </a:fontRef>
+        </p:style>
+        <p:txBody>
+          <a:bodyPr rtlCol="0" anchor="ctr"/>
+          <a:lstStyle/>
+          <a:p>
+            <a:pPr algn="ctr"/>
+          </a:p>
+        </p:txBody>
+      </p:sp>
+      <p:sp>
+        <p:nvSpPr>
+          <p:cNvPr id="17" name="TextBox 16"/>
           <p:cNvSpPr txBox="1"/>
           <p:nvPr/>
         </p:nvSpPr>
@@ -4159,7 +4759,7 @@
               </a:defRPr>
             </a:pPr>
             <a:r>
-              <a:t>11 / 12</a:t>
+              <a:t>11 / 18</a:t>
             </a:r>
           </a:p>
         </p:txBody>
@@ -4298,7 +4898,7 @@
               </a:defRPr>
             </a:pPr>
             <a:r>
-              <a:t>全量关联链接</a:t>
+              <a:t>6.1 需求信号</a:t>
             </a:r>
           </a:p>
         </p:txBody>
@@ -4311,8 +4911,8 @@
         </p:nvSpPr>
         <p:spPr>
           <a:xfrm>
-            <a:off x="658368" y="1645920"/>
-            <a:ext cx="3429000" cy="1783080"/>
+            <a:off x="658368" y="1600200"/>
+            <a:ext cx="5372100" cy="1965960"/>
           </a:xfrm>
           <a:prstGeom prst="roundRect">
             <a:avLst/>
@@ -4322,7 +4922,7 @@
           </a:solidFill>
           <a:ln>
             <a:solidFill>
-              <a:srgbClr val="2C5675"/>
+              <a:srgbClr val="294B68"/>
             </a:solidFill>
           </a:ln>
         </p:spPr>
@@ -4341,18 +4941,18 @@
           </a:fontRef>
         </p:style>
         <p:txBody>
-          <a:bodyPr rtlCol="0" anchor="ctr"/>
+          <a:bodyPr rtlCol="0" anchor="ctr" lIns="228600" rIns="182880" tIns="164592"/>
           <a:lstStyle/>
           <a:p>
             <a:pPr algn="ctr">
-              <a:defRPr sz="3000" b="1">
+              <a:defRPr sz="1200" b="1">
                 <a:solidFill>
                   <a:srgbClr val="46D6C8"/>
                 </a:solidFill>
               </a:defRPr>
             </a:pPr>
             <a:r>
-              <a:t>20001274</a:t>
+              <a:t>01</a:t>
             </a:r>
           </a:p>
           <a:p>
@@ -4360,28 +4960,71 @@
               <a:spcBef>
                 <a:spcPts val="800"/>
               </a:spcBef>
-              <a:defRPr sz="1200">
-                <a:solidFill>
-                  <a:srgbClr val="9AB2C8"/>
-                </a:solidFill>
-              </a:defRPr>
-            </a:pPr>
-            <a:r>
-              <a:t>关键证据</a:t>
-            </a:r>
-          </a:p>
-        </p:txBody>
-      </p:sp>
-      <p:sp>
-        <p:nvSpPr>
-          <p:cNvPr id="6" name="Rounded Rectangle 5"/>
-          <p:cNvSpPr/>
-          <p:nvPr/>
-        </p:nvSpPr>
-        <p:spPr>
-          <a:xfrm>
-            <a:off x="4389120" y="1645920"/>
-            <a:ext cx="3429000" cy="1783080"/>
+              <a:defRPr sz="1100">
+                <a:solidFill>
+                  <a:srgbClr val="F4F8FC"/>
+                </a:solidFill>
+              </a:defRPr>
+            </a:pPr>
+            <a:r>
+              <a:t>OpenAI称每周已有超过1.5亿用户使用Voice和Dictation，证明语音入口已具备大众使用基础。OpenAI (https://openai.com/index/introducing-gpt-live/)</a:t>
+            </a:r>
+          </a:p>
+        </p:txBody>
+      </p:sp>
+      <p:sp>
+        <p:nvSpPr>
+          <p:cNvPr id="6" name="Rectangle 5"/>
+          <p:cNvSpPr/>
+          <p:nvPr/>
+        </p:nvSpPr>
+        <p:spPr>
+          <a:xfrm>
+            <a:off x="658368" y="1801368"/>
+            <a:ext cx="54864" cy="438912"/>
+          </a:xfrm>
+          <a:prstGeom prst="rect">
+            <a:avLst/>
+          </a:prstGeom>
+          <a:solidFill>
+            <a:srgbClr val="46D6C8"/>
+          </a:solidFill>
+          <a:ln>
+            <a:noFill/>
+          </a:ln>
+        </p:spPr>
+        <p:style>
+          <a:lnRef idx="1">
+            <a:schemeClr val="accent1"/>
+          </a:lnRef>
+          <a:fillRef idx="3">
+            <a:schemeClr val="accent1"/>
+          </a:fillRef>
+          <a:effectRef idx="2">
+            <a:schemeClr val="accent1"/>
+          </a:effectRef>
+          <a:fontRef idx="minor">
+            <a:schemeClr val="lt1"/>
+          </a:fontRef>
+        </p:style>
+        <p:txBody>
+          <a:bodyPr rtlCol="0" anchor="ctr"/>
+          <a:lstStyle/>
+          <a:p>
+            <a:pPr algn="ctr"/>
+          </a:p>
+        </p:txBody>
+      </p:sp>
+      <p:sp>
+        <p:nvSpPr>
+          <p:cNvPr id="7" name="Rounded Rectangle 6"/>
+          <p:cNvSpPr/>
+          <p:nvPr/>
+        </p:nvSpPr>
+        <p:spPr>
+          <a:xfrm>
+            <a:off x="6176772" y="1600200"/>
+            <a:ext cx="5372100" cy="1965960"/>
           </a:xfrm>
           <a:prstGeom prst="roundRect">
             <a:avLst/>
@@ -4391,7 +5034,7 @@
           </a:solidFill>
           <a:ln>
             <a:solidFill>
-              <a:srgbClr val="2C5675"/>
+              <a:srgbClr val="294B68"/>
             </a:solidFill>
           </a:ln>
         </p:spPr>
@@ -4410,18 +5053,18 @@
           </a:fontRef>
         </p:style>
         <p:txBody>
-          <a:bodyPr rtlCol="0" anchor="ctr"/>
+          <a:bodyPr rtlCol="0" anchor="ctr" lIns="228600" rIns="182880" tIns="164592"/>
           <a:lstStyle/>
           <a:p>
             <a:pPr algn="ctr">
-              <a:defRPr sz="3000" b="1">
-                <a:solidFill>
-                  <a:srgbClr val="46D6C8"/>
-                </a:solidFill>
-              </a:defRPr>
-            </a:pPr>
-            <a:r>
-              <a:t>10</a:t>
+              <a:defRPr sz="1200" b="1">
+                <a:solidFill>
+                  <a:srgbClr val="55A7FF"/>
+                </a:solidFill>
+              </a:defRPr>
+            </a:pPr>
+            <a:r>
+              <a:t>02</a:t>
             </a:r>
           </a:p>
           <a:p>
@@ -4429,28 +5072,71 @@
               <a:spcBef>
                 <a:spcPts val="800"/>
               </a:spcBef>
-              <a:defRPr sz="1200">
-                <a:solidFill>
-                  <a:srgbClr val="9AB2C8"/>
-                </a:solidFill>
-              </a:defRPr>
-            </a:pPr>
-            <a:r>
-              <a:t>关键证据</a:t>
-            </a:r>
-          </a:p>
-        </p:txBody>
-      </p:sp>
-      <p:sp>
-        <p:nvSpPr>
-          <p:cNvPr id="7" name="Rounded Rectangle 6"/>
-          <p:cNvSpPr/>
-          <p:nvPr/>
-        </p:nvSpPr>
-        <p:spPr>
-          <a:xfrm>
-            <a:off x="8119872" y="1645920"/>
-            <a:ext cx="3429000" cy="1783080"/>
+              <a:defRPr sz="1100">
+                <a:solidFill>
+                  <a:srgbClr val="F4F8FC"/>
+                </a:solidFill>
+              </a:defRPr>
+            </a:pPr>
+            <a:r>
+              <a:t>Gartner对187名客服负责人的调查显示，85%计划在2025年探索或试点面向客户的对话式生成AI；其中44%在探索语音机器人、11%在试点、5%已部署。但61%存在知识库文章积压，说明主要瓶颈常在知识与流程，而不只在模型。Gartner (https://www.gartner.com/en/newsroom/press-releases/2024-1</a:t>
+            </a:r>
+          </a:p>
+        </p:txBody>
+      </p:sp>
+      <p:sp>
+        <p:nvSpPr>
+          <p:cNvPr id="8" name="Rectangle 7"/>
+          <p:cNvSpPr/>
+          <p:nvPr/>
+        </p:nvSpPr>
+        <p:spPr>
+          <a:xfrm>
+            <a:off x="6176772" y="1801368"/>
+            <a:ext cx="54864" cy="438912"/>
+          </a:xfrm>
+          <a:prstGeom prst="rect">
+            <a:avLst/>
+          </a:prstGeom>
+          <a:solidFill>
+            <a:srgbClr val="55A7FF"/>
+          </a:solidFill>
+          <a:ln>
+            <a:noFill/>
+          </a:ln>
+        </p:spPr>
+        <p:style>
+          <a:lnRef idx="1">
+            <a:schemeClr val="accent1"/>
+          </a:lnRef>
+          <a:fillRef idx="3">
+            <a:schemeClr val="accent1"/>
+          </a:fillRef>
+          <a:effectRef idx="2">
+            <a:schemeClr val="accent1"/>
+          </a:effectRef>
+          <a:fontRef idx="minor">
+            <a:schemeClr val="lt1"/>
+          </a:fontRef>
+        </p:style>
+        <p:txBody>
+          <a:bodyPr rtlCol="0" anchor="ctr"/>
+          <a:lstStyle/>
+          <a:p>
+            <a:pPr algn="ctr"/>
+          </a:p>
+        </p:txBody>
+      </p:sp>
+      <p:sp>
+        <p:nvSpPr>
+          <p:cNvPr id="9" name="Rounded Rectangle 8"/>
+          <p:cNvSpPr/>
+          <p:nvPr/>
+        </p:nvSpPr>
+        <p:spPr>
+          <a:xfrm>
+            <a:off x="658368" y="3730752"/>
+            <a:ext cx="5372100" cy="1965960"/>
           </a:xfrm>
           <a:prstGeom prst="roundRect">
             <a:avLst/>
@@ -4460,7 +5146,7 @@
           </a:solidFill>
           <a:ln>
             <a:solidFill>
-              <a:srgbClr val="2C5675"/>
+              <a:srgbClr val="294B68"/>
             </a:solidFill>
           </a:ln>
         </p:spPr>
@@ -4479,18 +5165,18 @@
           </a:fontRef>
         </p:style>
         <p:txBody>
-          <a:bodyPr rtlCol="0" anchor="ctr"/>
+          <a:bodyPr rtlCol="0" anchor="ctr" lIns="228600" rIns="182880" tIns="164592"/>
           <a:lstStyle/>
           <a:p>
             <a:pPr algn="ctr">
-              <a:defRPr sz="3000" b="1">
-                <a:solidFill>
-                  <a:srgbClr val="46D6C8"/>
-                </a:solidFill>
-              </a:defRPr>
-            </a:pPr>
-            <a:r>
-              <a:t>11</a:t>
+              <a:defRPr sz="1200" b="1">
+                <a:solidFill>
+                  <a:srgbClr val="FFBE55"/>
+                </a:solidFill>
+              </a:defRPr>
+            </a:pPr>
+            <a:r>
+              <a:t>03</a:t>
             </a:r>
           </a:p>
           <a:p>
@@ -4498,28 +5184,71 @@
               <a:spcBef>
                 <a:spcPts val="800"/>
               </a:spcBef>
-              <a:defRPr sz="1200">
-                <a:solidFill>
-                  <a:srgbClr val="9AB2C8"/>
-                </a:solidFill>
-              </a:defRPr>
-            </a:pPr>
-            <a:r>
-              <a:t>关键证据</a:t>
-            </a:r>
-          </a:p>
-        </p:txBody>
-      </p:sp>
-      <p:sp>
-        <p:nvSpPr>
-          <p:cNvPr id="8" name="Rounded Rectangle 7"/>
-          <p:cNvSpPr/>
-          <p:nvPr/>
-        </p:nvSpPr>
-        <p:spPr>
-          <a:xfrm>
-            <a:off x="658368" y="3794760"/>
-            <a:ext cx="3429000" cy="1783080"/>
+              <a:defRPr sz="1100">
+                <a:solidFill>
+                  <a:srgbClr val="F4F8FC"/>
+                </a:solidFill>
+              </a:defRPr>
+            </a:pPr>
+            <a:r>
+              <a:t>Gartner又指出，95%的客服领导者计划保留人工坐席，预计到2027年一半原计划大幅裁员的组织会放弃该计划，合理形态是“数字优先但非只有数字”。Gartner (https://www.gartner.com/en/newsroom/press-releases/2025-06-10-gartner-predicts-50-percent-of-orga</a:t>
+            </a:r>
+          </a:p>
+        </p:txBody>
+      </p:sp>
+      <p:sp>
+        <p:nvSpPr>
+          <p:cNvPr id="10" name="Rectangle 9"/>
+          <p:cNvSpPr/>
+          <p:nvPr/>
+        </p:nvSpPr>
+        <p:spPr>
+          <a:xfrm>
+            <a:off x="658368" y="3931920"/>
+            <a:ext cx="54864" cy="438912"/>
+          </a:xfrm>
+          <a:prstGeom prst="rect">
+            <a:avLst/>
+          </a:prstGeom>
+          <a:solidFill>
+            <a:srgbClr val="FFBE55"/>
+          </a:solidFill>
+          <a:ln>
+            <a:noFill/>
+          </a:ln>
+        </p:spPr>
+        <p:style>
+          <a:lnRef idx="1">
+            <a:schemeClr val="accent1"/>
+          </a:lnRef>
+          <a:fillRef idx="3">
+            <a:schemeClr val="accent1"/>
+          </a:fillRef>
+          <a:effectRef idx="2">
+            <a:schemeClr val="accent1"/>
+          </a:effectRef>
+          <a:fontRef idx="minor">
+            <a:schemeClr val="lt1"/>
+          </a:fontRef>
+        </p:style>
+        <p:txBody>
+          <a:bodyPr rtlCol="0" anchor="ctr"/>
+          <a:lstStyle/>
+          <a:p>
+            <a:pPr algn="ctr"/>
+          </a:p>
+        </p:txBody>
+      </p:sp>
+      <p:sp>
+        <p:nvSpPr>
+          <p:cNvPr id="11" name="Rounded Rectangle 10"/>
+          <p:cNvSpPr/>
+          <p:nvPr/>
+        </p:nvSpPr>
+        <p:spPr>
+          <a:xfrm>
+            <a:off x="6176772" y="3730752"/>
+            <a:ext cx="5372100" cy="1965960"/>
           </a:xfrm>
           <a:prstGeom prst="roundRect">
             <a:avLst/>
@@ -4529,7 +5258,7 @@
           </a:solidFill>
           <a:ln>
             <a:solidFill>
-              <a:srgbClr val="2C5675"/>
+              <a:srgbClr val="294B68"/>
             </a:solidFill>
           </a:ln>
         </p:spPr>
@@ -4548,18 +5277,18 @@
           </a:fontRef>
         </p:style>
         <p:txBody>
-          <a:bodyPr rtlCol="0" anchor="ctr"/>
+          <a:bodyPr rtlCol="0" anchor="ctr" lIns="228600" rIns="182880" tIns="164592"/>
           <a:lstStyle/>
           <a:p>
             <a:pPr algn="ctr">
-              <a:defRPr sz="3000" b="1">
+              <a:defRPr sz="1200" b="1">
                 <a:solidFill>
                   <a:srgbClr val="46D6C8"/>
                 </a:solidFill>
               </a:defRPr>
             </a:pPr>
             <a:r>
-              <a:t>2604.15804</a:t>
+              <a:t>04</a:t>
             </a:r>
           </a:p>
           <a:p>
@@ -4567,28 +5296,245 @@
               <a:spcBef>
                 <a:spcPts val="800"/>
               </a:spcBef>
-              <a:defRPr sz="1200">
+              <a:defRPr sz="1100">
+                <a:solidFill>
+                  <a:srgbClr val="F4F8FC"/>
+                </a:solidFill>
+              </a:defRPr>
+            </a:pPr>
+            <a:r>
+              <a:t>Travelers的Realtime API事故报案助手在全美推广后，使用该助手的客户中85%–90%通过AI完成报案，说明边界清晰、数据结构明确、可转人工的高价值流程能够规模化。OpenAI/Travelers案例 (https://openai.com/index/travelers/)</a:t>
+            </a:r>
+          </a:p>
+        </p:txBody>
+      </p:sp>
+      <p:sp>
+        <p:nvSpPr>
+          <p:cNvPr id="12" name="Rectangle 11"/>
+          <p:cNvSpPr/>
+          <p:nvPr/>
+        </p:nvSpPr>
+        <p:spPr>
+          <a:xfrm>
+            <a:off x="6176772" y="3931920"/>
+            <a:ext cx="54864" cy="438912"/>
+          </a:xfrm>
+          <a:prstGeom prst="rect">
+            <a:avLst/>
+          </a:prstGeom>
+          <a:solidFill>
+            <a:srgbClr val="46D6C8"/>
+          </a:solidFill>
+          <a:ln>
+            <a:noFill/>
+          </a:ln>
+        </p:spPr>
+        <p:style>
+          <a:lnRef idx="1">
+            <a:schemeClr val="accent1"/>
+          </a:lnRef>
+          <a:fillRef idx="3">
+            <a:schemeClr val="accent1"/>
+          </a:fillRef>
+          <a:effectRef idx="2">
+            <a:schemeClr val="accent1"/>
+          </a:effectRef>
+          <a:fontRef idx="minor">
+            <a:schemeClr val="lt1"/>
+          </a:fontRef>
+        </p:style>
+        <p:txBody>
+          <a:bodyPr rtlCol="0" anchor="ctr"/>
+          <a:lstStyle/>
+          <a:p>
+            <a:pPr algn="ctr"/>
+          </a:p>
+        </p:txBody>
+      </p:sp>
+      <p:sp>
+        <p:nvSpPr>
+          <p:cNvPr id="13" name="TextBox 12"/>
+          <p:cNvSpPr txBox="1"/>
+          <p:nvPr/>
+        </p:nvSpPr>
+        <p:spPr>
+          <a:xfrm>
+            <a:off x="10881360" y="6327648"/>
+            <a:ext cx="594360" cy="228600"/>
+          </a:xfrm>
+          <a:prstGeom prst="rect">
+            <a:avLst/>
+          </a:prstGeom>
+          <a:noFill/>
+        </p:spPr>
+        <p:txBody>
+          <a:bodyPr wrap="none">
+            <a:spAutoFit/>
+          </a:bodyPr>
+          <a:lstStyle/>
+          <a:p>
+            <a:pPr>
+              <a:defRPr sz="900">
                 <a:solidFill>
                   <a:srgbClr val="9AB2C8"/>
                 </a:solidFill>
               </a:defRPr>
             </a:pPr>
             <a:r>
-              <a:t>关键证据</a:t>
-            </a:r>
-          </a:p>
-        </p:txBody>
-      </p:sp>
-      <p:sp>
-        <p:nvSpPr>
-          <p:cNvPr id="9" name="Rounded Rectangle 8"/>
-          <p:cNvSpPr/>
-          <p:nvPr/>
-        </p:nvSpPr>
-        <p:spPr>
-          <a:xfrm>
-            <a:off x="4389120" y="3794760"/>
-            <a:ext cx="3429000" cy="1783080"/>
+              <a:t>12 / 18</a:t>
+            </a:r>
+          </a:p>
+        </p:txBody>
+      </p:sp>
+    </p:spTree>
+  </p:cSld>
+  <p:clrMapOvr>
+    <a:masterClrMapping/>
+  </p:clrMapOvr>
+</p:sld>
+</file>
+
+<file path=ppt/slides/slide13.xml><?xml version="1.0" encoding="utf-8"?>
+<p:sld xmlns:a="http://schemas.openxmlformats.org/drawingml/2006/main" xmlns:p="http://schemas.openxmlformats.org/presentationml/2006/main" xmlns:r="http://schemas.openxmlformats.org/officeDocument/2006/relationships">
+  <p:cSld>
+    <p:bg>
+      <p:bgPr>
+        <a:solidFill>
+          <a:srgbClr val="07111F"/>
+        </a:solidFill>
+        <a:effectLst/>
+      </p:bgPr>
+    </p:bg>
+    <p:spTree>
+      <p:nvGrpSpPr>
+        <p:cNvPr id="1" name=""/>
+        <p:cNvGrpSpPr/>
+        <p:nvPr/>
+      </p:nvGrpSpPr>
+      <p:grpSpPr/>
+      <p:sp>
+        <p:nvSpPr>
+          <p:cNvPr id="2" name="Rectangle 1"/>
+          <p:cNvSpPr/>
+          <p:nvPr/>
+        </p:nvSpPr>
+        <p:spPr>
+          <a:xfrm>
+            <a:off x="0" y="0"/>
+            <a:ext cx="109728" cy="6858000"/>
+          </a:xfrm>
+          <a:prstGeom prst="rect">
+            <a:avLst/>
+          </a:prstGeom>
+          <a:solidFill>
+            <a:srgbClr val="46D6C8"/>
+          </a:solidFill>
+          <a:ln>
+            <a:noFill/>
+          </a:ln>
+        </p:spPr>
+        <p:style>
+          <a:lnRef idx="1">
+            <a:schemeClr val="accent1"/>
+          </a:lnRef>
+          <a:fillRef idx="3">
+            <a:schemeClr val="accent1"/>
+          </a:fillRef>
+          <a:effectRef idx="2">
+            <a:schemeClr val="accent1"/>
+          </a:effectRef>
+          <a:fontRef idx="minor">
+            <a:schemeClr val="lt1"/>
+          </a:fontRef>
+        </p:style>
+        <p:txBody>
+          <a:bodyPr rtlCol="0" anchor="ctr"/>
+          <a:lstStyle/>
+          <a:p>
+            <a:pPr algn="ctr"/>
+          </a:p>
+        </p:txBody>
+      </p:sp>
+      <p:sp>
+        <p:nvSpPr>
+          <p:cNvPr id="3" name="TextBox 2"/>
+          <p:cNvSpPr txBox="1"/>
+          <p:nvPr/>
+        </p:nvSpPr>
+        <p:spPr>
+          <a:xfrm>
+            <a:off x="658368" y="310896"/>
+            <a:ext cx="5943600" cy="274320"/>
+          </a:xfrm>
+          <a:prstGeom prst="rect">
+            <a:avLst/>
+          </a:prstGeom>
+          <a:noFill/>
+        </p:spPr>
+        <p:txBody>
+          <a:bodyPr wrap="none">
+            <a:spAutoFit/>
+          </a:bodyPr>
+          <a:lstStyle/>
+          <a:p>
+            <a:pPr>
+              <a:defRPr sz="900" b="1">
+                <a:solidFill>
+                  <a:srgbClr val="46D6C8"/>
+                </a:solidFill>
+              </a:defRPr>
+            </a:pPr>
+            <a:r>
+              <a:t>GPT-LIVE  /  APPLICATION RESEARCH</a:t>
+            </a:r>
+          </a:p>
+        </p:txBody>
+      </p:sp>
+      <p:sp>
+        <p:nvSpPr>
+          <p:cNvPr id="4" name="TextBox 3"/>
+          <p:cNvSpPr txBox="1"/>
+          <p:nvPr/>
+        </p:nvSpPr>
+        <p:spPr>
+          <a:xfrm>
+            <a:off x="658368" y="685800"/>
+            <a:ext cx="10698480" cy="658368"/>
+          </a:xfrm>
+          <a:prstGeom prst="rect">
+            <a:avLst/>
+          </a:prstGeom>
+          <a:noFill/>
+        </p:spPr>
+        <p:txBody>
+          <a:bodyPr wrap="none">
+            <a:spAutoFit/>
+          </a:bodyPr>
+          <a:lstStyle/>
+          <a:p>
+            <a:pPr algn="l">
+              <a:defRPr sz="2700" b="1">
+                <a:solidFill>
+                  <a:srgbClr val="F4F8FC"/>
+                </a:solidFill>
+              </a:defRPr>
+            </a:pPr>
+            <a:r>
+              <a:t>6.2 场景优先级</a:t>
+            </a:r>
+          </a:p>
+        </p:txBody>
+      </p:sp>
+      <p:sp>
+        <p:nvSpPr>
+          <p:cNvPr id="5" name="Rounded Rectangle 4"/>
+          <p:cNvSpPr/>
+          <p:nvPr/>
+        </p:nvSpPr>
+        <p:spPr>
+          <a:xfrm>
+            <a:off x="658368" y="1600200"/>
+            <a:ext cx="3581400" cy="1965960"/>
           </a:xfrm>
           <a:prstGeom prst="roundRect">
             <a:avLst/>
@@ -4598,7 +5544,7 @@
           </a:solidFill>
           <a:ln>
             <a:solidFill>
-              <a:srgbClr val="2C5675"/>
+              <a:srgbClr val="294B68"/>
             </a:solidFill>
           </a:ln>
         </p:spPr>
@@ -4617,18 +5563,18 @@
           </a:fontRef>
         </p:style>
         <p:txBody>
-          <a:bodyPr rtlCol="0" anchor="ctr"/>
+          <a:bodyPr rtlCol="0" anchor="ctr" lIns="228600" rIns="182880" tIns="164592"/>
           <a:lstStyle/>
           <a:p>
             <a:pPr algn="ctr">
-              <a:defRPr sz="3000" b="1">
+              <a:defRPr sz="1200" b="1">
                 <a:solidFill>
                   <a:srgbClr val="46D6C8"/>
                 </a:solidFill>
               </a:defRPr>
             </a:pPr>
             <a:r>
-              <a:t>12</a:t>
+              <a:t>复杂客服与售后排障</a:t>
             </a:r>
           </a:p>
           <a:p>
@@ -4636,28 +5582,71 @@
               <a:spcBef>
                 <a:spcPts val="800"/>
               </a:spcBef>
-              <a:defRPr sz="1200">
-                <a:solidFill>
-                  <a:srgbClr val="9AB2C8"/>
-                </a:solidFill>
-              </a:defRPr>
-            </a:pPr>
-            <a:r>
-              <a:t>关键证据</a:t>
-            </a:r>
-          </a:p>
-        </p:txBody>
-      </p:sp>
-      <p:sp>
-        <p:nvSpPr>
-          <p:cNvPr id="10" name="Rounded Rectangle 9"/>
-          <p:cNvSpPr/>
-          <p:nvPr/>
-        </p:nvSpPr>
-        <p:spPr>
-          <a:xfrm>
-            <a:off x="8119872" y="3794760"/>
-            <a:ext cx="3429000" cy="1783080"/>
+              <a:defRPr sz="1500">
+                <a:solidFill>
+                  <a:srgbClr val="F4F8FC"/>
+                </a:solidFill>
+              </a:defRPr>
+            </a:pPr>
+            <a:r>
+              <a:t>用户需求：不抢话、边查边解释、修改订单/账户；GPT‑Live适配度：高；风险：中；建议：P0；限定流程、工具白名单、全程可转人工</a:t>
+            </a:r>
+          </a:p>
+        </p:txBody>
+      </p:sp>
+      <p:sp>
+        <p:nvSpPr>
+          <p:cNvPr id="6" name="Rectangle 5"/>
+          <p:cNvSpPr/>
+          <p:nvPr/>
+        </p:nvSpPr>
+        <p:spPr>
+          <a:xfrm>
+            <a:off x="658368" y="1801368"/>
+            <a:ext cx="54864" cy="438912"/>
+          </a:xfrm>
+          <a:prstGeom prst="rect">
+            <a:avLst/>
+          </a:prstGeom>
+          <a:solidFill>
+            <a:srgbClr val="46D6C8"/>
+          </a:solidFill>
+          <a:ln>
+            <a:noFill/>
+          </a:ln>
+        </p:spPr>
+        <p:style>
+          <a:lnRef idx="1">
+            <a:schemeClr val="accent1"/>
+          </a:lnRef>
+          <a:fillRef idx="3">
+            <a:schemeClr val="accent1"/>
+          </a:fillRef>
+          <a:effectRef idx="2">
+            <a:schemeClr val="accent1"/>
+          </a:effectRef>
+          <a:fontRef idx="minor">
+            <a:schemeClr val="lt1"/>
+          </a:fontRef>
+        </p:style>
+        <p:txBody>
+          <a:bodyPr rtlCol="0" anchor="ctr"/>
+          <a:lstStyle/>
+          <a:p>
+            <a:pPr algn="ctr"/>
+          </a:p>
+        </p:txBody>
+      </p:sp>
+      <p:sp>
+        <p:nvSpPr>
+          <p:cNvPr id="7" name="Rounded Rectangle 6"/>
+          <p:cNvSpPr/>
+          <p:nvPr/>
+        </p:nvSpPr>
+        <p:spPr>
+          <a:xfrm>
+            <a:off x="4386071" y="1600200"/>
+            <a:ext cx="3581400" cy="1965960"/>
           </a:xfrm>
           <a:prstGeom prst="roundRect">
             <a:avLst/>
@@ -4667,7 +5656,7 @@
           </a:solidFill>
           <a:ln>
             <a:solidFill>
-              <a:srgbClr val="2C5675"/>
+              <a:srgbClr val="294B68"/>
             </a:solidFill>
           </a:ln>
         </p:spPr>
@@ -4686,18 +5675,18 @@
           </a:fontRef>
         </p:style>
         <p:txBody>
-          <a:bodyPr rtlCol="0" anchor="ctr"/>
+          <a:bodyPr rtlCol="0" anchor="ctr" lIns="228600" rIns="182880" tIns="164592"/>
           <a:lstStyle/>
           <a:p>
             <a:pPr algn="ctr">
-              <a:defRPr sz="3000" b="1">
-                <a:solidFill>
-                  <a:srgbClr val="46D6C8"/>
-                </a:solidFill>
-              </a:defRPr>
-            </a:pPr>
-            <a:r>
-              <a:t>13</a:t>
+              <a:defRPr sz="1200" b="1">
+                <a:solidFill>
+                  <a:srgbClr val="55A7FF"/>
+                </a:solidFill>
+              </a:defRPr>
+            </a:pPr>
+            <a:r>
+              <a:t>事故报案/理赔资料收集</a:t>
             </a:r>
           </a:p>
           <a:p>
@@ -4705,21 +5694,512 @@
               <a:spcBef>
                 <a:spcPts val="800"/>
               </a:spcBef>
-              <a:defRPr sz="1200">
-                <a:solidFill>
-                  <a:srgbClr val="9AB2C8"/>
-                </a:solidFill>
-              </a:defRPr>
-            </a:pPr>
-            <a:r>
-              <a:t>关键证据</a:t>
-            </a:r>
-          </a:p>
-        </p:txBody>
-      </p:sp>
-      <p:sp>
-        <p:nvSpPr>
-          <p:cNvPr id="11" name="TextBox 10"/>
+              <a:defRPr sz="1500">
+                <a:solidFill>
+                  <a:srgbClr val="F4F8FC"/>
+                </a:solidFill>
+              </a:defRPr>
+            </a:pPr>
+            <a:r>
+              <a:t>用户需求：情绪安抚、连续追问、结构化录入；GPT‑Live适配度：高；风险：高；建议：P0/P1；只收集与提交，不自动裁决赔付</a:t>
+            </a:r>
+          </a:p>
+        </p:txBody>
+      </p:sp>
+      <p:sp>
+        <p:nvSpPr>
+          <p:cNvPr id="8" name="Rectangle 7"/>
+          <p:cNvSpPr/>
+          <p:nvPr/>
+        </p:nvSpPr>
+        <p:spPr>
+          <a:xfrm>
+            <a:off x="4386071" y="1801368"/>
+            <a:ext cx="54864" cy="438912"/>
+          </a:xfrm>
+          <a:prstGeom prst="rect">
+            <a:avLst/>
+          </a:prstGeom>
+          <a:solidFill>
+            <a:srgbClr val="55A7FF"/>
+          </a:solidFill>
+          <a:ln>
+            <a:noFill/>
+          </a:ln>
+        </p:spPr>
+        <p:style>
+          <a:lnRef idx="1">
+            <a:schemeClr val="accent1"/>
+          </a:lnRef>
+          <a:fillRef idx="3">
+            <a:schemeClr val="accent1"/>
+          </a:fillRef>
+          <a:effectRef idx="2">
+            <a:schemeClr val="accent1"/>
+          </a:effectRef>
+          <a:fontRef idx="minor">
+            <a:schemeClr val="lt1"/>
+          </a:fontRef>
+        </p:style>
+        <p:txBody>
+          <a:bodyPr rtlCol="0" anchor="ctr"/>
+          <a:lstStyle/>
+          <a:p>
+            <a:pPr algn="ctr"/>
+          </a:p>
+        </p:txBody>
+      </p:sp>
+      <p:sp>
+        <p:nvSpPr>
+          <p:cNvPr id="9" name="Rounded Rectangle 8"/>
+          <p:cNvSpPr/>
+          <p:nvPr/>
+        </p:nvSpPr>
+        <p:spPr>
+          <a:xfrm>
+            <a:off x="8113776" y="1600200"/>
+            <a:ext cx="3581400" cy="1965960"/>
+          </a:xfrm>
+          <a:prstGeom prst="roundRect">
+            <a:avLst/>
+          </a:prstGeom>
+          <a:solidFill>
+            <a:srgbClr val="10243C"/>
+          </a:solidFill>
+          <a:ln>
+            <a:solidFill>
+              <a:srgbClr val="294B68"/>
+            </a:solidFill>
+          </a:ln>
+        </p:spPr>
+        <p:style>
+          <a:lnRef idx="1">
+            <a:schemeClr val="accent1"/>
+          </a:lnRef>
+          <a:fillRef idx="3">
+            <a:schemeClr val="accent1"/>
+          </a:fillRef>
+          <a:effectRef idx="2">
+            <a:schemeClr val="accent1"/>
+          </a:effectRef>
+          <a:fontRef idx="minor">
+            <a:schemeClr val="lt1"/>
+          </a:fontRef>
+        </p:style>
+        <p:txBody>
+          <a:bodyPr rtlCol="0" anchor="ctr" lIns="228600" rIns="182880" tIns="164592"/>
+          <a:lstStyle/>
+          <a:p>
+            <a:pPr algn="ctr">
+              <a:defRPr sz="1200" b="1">
+                <a:solidFill>
+                  <a:srgbClr val="FFBE55"/>
+                </a:solidFill>
+              </a:defRPr>
+            </a:pPr>
+            <a:r>
+              <a:t>语言陪练与口语教学</a:t>
+            </a:r>
+          </a:p>
+          <a:p>
+            <a:pPr>
+              <a:spcBef>
+                <a:spcPts val="800"/>
+              </a:spcBef>
+              <a:defRPr sz="1500">
+                <a:solidFill>
+                  <a:srgbClr val="F4F8FC"/>
+                </a:solidFill>
+              </a:defRPr>
+            </a:pPr>
+            <a:r>
+              <a:t>用户需求：高频纠音、角色对话、即时反馈；GPT‑Live适配度：高；风险：中；建议：P0；突出节奏与中断，教师可查看摘要</a:t>
+            </a:r>
+          </a:p>
+        </p:txBody>
+      </p:sp>
+      <p:sp>
+        <p:nvSpPr>
+          <p:cNvPr id="10" name="Rectangle 9"/>
+          <p:cNvSpPr/>
+          <p:nvPr/>
+        </p:nvSpPr>
+        <p:spPr>
+          <a:xfrm>
+            <a:off x="8113776" y="1801368"/>
+            <a:ext cx="54864" cy="438912"/>
+          </a:xfrm>
+          <a:prstGeom prst="rect">
+            <a:avLst/>
+          </a:prstGeom>
+          <a:solidFill>
+            <a:srgbClr val="FFBE55"/>
+          </a:solidFill>
+          <a:ln>
+            <a:noFill/>
+          </a:ln>
+        </p:spPr>
+        <p:style>
+          <a:lnRef idx="1">
+            <a:schemeClr val="accent1"/>
+          </a:lnRef>
+          <a:fillRef idx="3">
+            <a:schemeClr val="accent1"/>
+          </a:fillRef>
+          <a:effectRef idx="2">
+            <a:schemeClr val="accent1"/>
+          </a:effectRef>
+          <a:fontRef idx="minor">
+            <a:schemeClr val="lt1"/>
+          </a:fontRef>
+        </p:style>
+        <p:txBody>
+          <a:bodyPr rtlCol="0" anchor="ctr"/>
+          <a:lstStyle/>
+          <a:p>
+            <a:pPr algn="ctr"/>
+          </a:p>
+        </p:txBody>
+      </p:sp>
+      <p:sp>
+        <p:nvSpPr>
+          <p:cNvPr id="11" name="Rounded Rectangle 10"/>
+          <p:cNvSpPr/>
+          <p:nvPr/>
+        </p:nvSpPr>
+        <p:spPr>
+          <a:xfrm>
+            <a:off x="658368" y="3730752"/>
+            <a:ext cx="3581400" cy="1965960"/>
+          </a:xfrm>
+          <a:prstGeom prst="roundRect">
+            <a:avLst/>
+          </a:prstGeom>
+          <a:solidFill>
+            <a:srgbClr val="10243C"/>
+          </a:solidFill>
+          <a:ln>
+            <a:solidFill>
+              <a:srgbClr val="294B68"/>
+            </a:solidFill>
+          </a:ln>
+        </p:spPr>
+        <p:style>
+          <a:lnRef idx="1">
+            <a:schemeClr val="accent1"/>
+          </a:lnRef>
+          <a:fillRef idx="3">
+            <a:schemeClr val="accent1"/>
+          </a:fillRef>
+          <a:effectRef idx="2">
+            <a:schemeClr val="accent1"/>
+          </a:effectRef>
+          <a:fontRef idx="minor">
+            <a:schemeClr val="lt1"/>
+          </a:fontRef>
+        </p:style>
+        <p:txBody>
+          <a:bodyPr rtlCol="0" anchor="ctr" lIns="228600" rIns="182880" tIns="164592"/>
+          <a:lstStyle/>
+          <a:p>
+            <a:pPr algn="ctr">
+              <a:defRPr sz="1200" b="1">
+                <a:solidFill>
+                  <a:srgbClr val="46D6C8"/>
+                </a:solidFill>
+              </a:defRPr>
+            </a:pPr>
+            <a:r>
+              <a:t>实时翻译与跨境协作</a:t>
+            </a:r>
+          </a:p>
+          <a:p>
+            <a:pPr>
+              <a:spcBef>
+                <a:spcPts val="800"/>
+              </a:spcBef>
+              <a:defRPr sz="1500">
+                <a:solidFill>
+                  <a:srgbClr val="F4F8FC"/>
+                </a:solidFill>
+              </a:defRPr>
+            </a:pPr>
+            <a:r>
+              <a:t>用户需求：边听边译、保持语气；GPT‑Live适配度：高；风险：中高；建议：P1；限定语言对，保留原文字幕，重要场合人工同传</a:t>
+            </a:r>
+          </a:p>
+        </p:txBody>
+      </p:sp>
+      <p:sp>
+        <p:nvSpPr>
+          <p:cNvPr id="12" name="Rectangle 11"/>
+          <p:cNvSpPr/>
+          <p:nvPr/>
+        </p:nvSpPr>
+        <p:spPr>
+          <a:xfrm>
+            <a:off x="658368" y="3931920"/>
+            <a:ext cx="54864" cy="438912"/>
+          </a:xfrm>
+          <a:prstGeom prst="rect">
+            <a:avLst/>
+          </a:prstGeom>
+          <a:solidFill>
+            <a:srgbClr val="46D6C8"/>
+          </a:solidFill>
+          <a:ln>
+            <a:noFill/>
+          </a:ln>
+        </p:spPr>
+        <p:style>
+          <a:lnRef idx="1">
+            <a:schemeClr val="accent1"/>
+          </a:lnRef>
+          <a:fillRef idx="3">
+            <a:schemeClr val="accent1"/>
+          </a:fillRef>
+          <a:effectRef idx="2">
+            <a:schemeClr val="accent1"/>
+          </a:effectRef>
+          <a:fontRef idx="minor">
+            <a:schemeClr val="lt1"/>
+          </a:fontRef>
+        </p:style>
+        <p:txBody>
+          <a:bodyPr rtlCol="0" anchor="ctr"/>
+          <a:lstStyle/>
+          <a:p>
+            <a:pPr algn="ctr"/>
+          </a:p>
+        </p:txBody>
+      </p:sp>
+      <p:sp>
+        <p:nvSpPr>
+          <p:cNvPr id="13" name="Rounded Rectangle 12"/>
+          <p:cNvSpPr/>
+          <p:nvPr/>
+        </p:nvSpPr>
+        <p:spPr>
+          <a:xfrm>
+            <a:off x="4386071" y="3730752"/>
+            <a:ext cx="3581400" cy="1965960"/>
+          </a:xfrm>
+          <a:prstGeom prst="roundRect">
+            <a:avLst/>
+          </a:prstGeom>
+          <a:solidFill>
+            <a:srgbClr val="10243C"/>
+          </a:solidFill>
+          <a:ln>
+            <a:solidFill>
+              <a:srgbClr val="294B68"/>
+            </a:solidFill>
+          </a:ln>
+        </p:spPr>
+        <p:style>
+          <a:lnRef idx="1">
+            <a:schemeClr val="accent1"/>
+          </a:lnRef>
+          <a:fillRef idx="3">
+            <a:schemeClr val="accent1"/>
+          </a:fillRef>
+          <a:effectRef idx="2">
+            <a:schemeClr val="accent1"/>
+          </a:effectRef>
+          <a:fontRef idx="minor">
+            <a:schemeClr val="lt1"/>
+          </a:fontRef>
+        </p:style>
+        <p:txBody>
+          <a:bodyPr rtlCol="0" anchor="ctr" lIns="228600" rIns="182880" tIns="164592"/>
+          <a:lstStyle/>
+          <a:p>
+            <a:pPr algn="ctr">
+              <a:defRPr sz="1200" b="1">
+                <a:solidFill>
+                  <a:srgbClr val="55A7FF"/>
+                </a:solidFill>
+              </a:defRPr>
+            </a:pPr>
+            <a:r>
+              <a:t>销售/顾问助手</a:t>
+            </a:r>
+          </a:p>
+          <a:p>
+            <a:pPr>
+              <a:spcBef>
+                <a:spcPts val="800"/>
+              </a:spcBef>
+              <a:defRPr sz="1500">
+                <a:solidFill>
+                  <a:srgbClr val="F4F8FC"/>
+                </a:solidFill>
+              </a:defRPr>
+            </a:pPr>
+            <a:r>
+              <a:t>用户需求：边交流边查产品、报价和CRM；GPT‑Live适配度：高；风险：高；建议：P1；价格与承诺必须来自工具，不允许模型自由生成</a:t>
+            </a:r>
+          </a:p>
+        </p:txBody>
+      </p:sp>
+      <p:sp>
+        <p:nvSpPr>
+          <p:cNvPr id="14" name="Rectangle 13"/>
+          <p:cNvSpPr/>
+          <p:nvPr/>
+        </p:nvSpPr>
+        <p:spPr>
+          <a:xfrm>
+            <a:off x="4386071" y="3931920"/>
+            <a:ext cx="54864" cy="438912"/>
+          </a:xfrm>
+          <a:prstGeom prst="rect">
+            <a:avLst/>
+          </a:prstGeom>
+          <a:solidFill>
+            <a:srgbClr val="55A7FF"/>
+          </a:solidFill>
+          <a:ln>
+            <a:noFill/>
+          </a:ln>
+        </p:spPr>
+        <p:style>
+          <a:lnRef idx="1">
+            <a:schemeClr val="accent1"/>
+          </a:lnRef>
+          <a:fillRef idx="3">
+            <a:schemeClr val="accent1"/>
+          </a:fillRef>
+          <a:effectRef idx="2">
+            <a:schemeClr val="accent1"/>
+          </a:effectRef>
+          <a:fontRef idx="minor">
+            <a:schemeClr val="lt1"/>
+          </a:fontRef>
+        </p:style>
+        <p:txBody>
+          <a:bodyPr rtlCol="0" anchor="ctr"/>
+          <a:lstStyle/>
+          <a:p>
+            <a:pPr algn="ctr"/>
+          </a:p>
+        </p:txBody>
+      </p:sp>
+      <p:sp>
+        <p:nvSpPr>
+          <p:cNvPr id="15" name="Rounded Rectangle 14"/>
+          <p:cNvSpPr/>
+          <p:nvPr/>
+        </p:nvSpPr>
+        <p:spPr>
+          <a:xfrm>
+            <a:off x="8113776" y="3730752"/>
+            <a:ext cx="3581400" cy="1965960"/>
+          </a:xfrm>
+          <a:prstGeom prst="roundRect">
+            <a:avLst/>
+          </a:prstGeom>
+          <a:solidFill>
+            <a:srgbClr val="10243C"/>
+          </a:solidFill>
+          <a:ln>
+            <a:solidFill>
+              <a:srgbClr val="294B68"/>
+            </a:solidFill>
+          </a:ln>
+        </p:spPr>
+        <p:style>
+          <a:lnRef idx="1">
+            <a:schemeClr val="accent1"/>
+          </a:lnRef>
+          <a:fillRef idx="3">
+            <a:schemeClr val="accent1"/>
+          </a:fillRef>
+          <a:effectRef idx="2">
+            <a:schemeClr val="accent1"/>
+          </a:effectRef>
+          <a:fontRef idx="minor">
+            <a:schemeClr val="lt1"/>
+          </a:fontRef>
+        </p:style>
+        <p:txBody>
+          <a:bodyPr rtlCol="0" anchor="ctr" lIns="228600" rIns="182880" tIns="164592"/>
+          <a:lstStyle/>
+          <a:p>
+            <a:pPr algn="ctr">
+              <a:defRPr sz="1200" b="1">
+                <a:solidFill>
+                  <a:srgbClr val="FFBE55"/>
+                </a:solidFill>
+              </a:defRPr>
+            </a:pPr>
+            <a:r>
+              <a:t>会议与访谈助手</a:t>
+            </a:r>
+          </a:p>
+          <a:p>
+            <a:pPr>
+              <a:spcBef>
+                <a:spcPts val="800"/>
+              </a:spcBef>
+              <a:defRPr sz="1500">
+                <a:solidFill>
+                  <a:srgbClr val="F4F8FC"/>
+                </a:solidFill>
+              </a:defRPr>
+            </a:pPr>
+            <a:r>
+              <a:t>用户需求：持续听取、追问、总结与待办；GPT‑Live适配度：中高；风险：中；建议：P1；需多人说话人识别、权限与录音同意</a:t>
+            </a:r>
+          </a:p>
+        </p:txBody>
+      </p:sp>
+      <p:sp>
+        <p:nvSpPr>
+          <p:cNvPr id="16" name="Rectangle 15"/>
+          <p:cNvSpPr/>
+          <p:nvPr/>
+        </p:nvSpPr>
+        <p:spPr>
+          <a:xfrm>
+            <a:off x="8113776" y="3931920"/>
+            <a:ext cx="54864" cy="438912"/>
+          </a:xfrm>
+          <a:prstGeom prst="rect">
+            <a:avLst/>
+          </a:prstGeom>
+          <a:solidFill>
+            <a:srgbClr val="FFBE55"/>
+          </a:solidFill>
+          <a:ln>
+            <a:noFill/>
+          </a:ln>
+        </p:spPr>
+        <p:style>
+          <a:lnRef idx="1">
+            <a:schemeClr val="accent1"/>
+          </a:lnRef>
+          <a:fillRef idx="3">
+            <a:schemeClr val="accent1"/>
+          </a:fillRef>
+          <a:effectRef idx="2">
+            <a:schemeClr val="accent1"/>
+          </a:effectRef>
+          <a:fontRef idx="minor">
+            <a:schemeClr val="lt1"/>
+          </a:fontRef>
+        </p:style>
+        <p:txBody>
+          <a:bodyPr rtlCol="0" anchor="ctr"/>
+          <a:lstStyle/>
+          <a:p>
+            <a:pPr algn="ctr"/>
+          </a:p>
+        </p:txBody>
+      </p:sp>
+      <p:sp>
+        <p:nvSpPr>
+          <p:cNvPr id="17" name="TextBox 16"/>
           <p:cNvSpPr txBox="1"/>
           <p:nvPr/>
         </p:nvSpPr>
@@ -4747,7 +6227,4237 @@
               </a:defRPr>
             </a:pPr>
             <a:r>
-              <a:t>12 / 12</a:t>
+              <a:t>13 / 18</a:t>
+            </a:r>
+          </a:p>
+        </p:txBody>
+      </p:sp>
+    </p:spTree>
+  </p:cSld>
+  <p:clrMapOvr>
+    <a:masterClrMapping/>
+  </p:clrMapOvr>
+</p:sld>
+</file>
+
+<file path=ppt/slides/slide14.xml><?xml version="1.0" encoding="utf-8"?>
+<p:sld xmlns:a="http://schemas.openxmlformats.org/drawingml/2006/main" xmlns:p="http://schemas.openxmlformats.org/presentationml/2006/main" xmlns:r="http://schemas.openxmlformats.org/officeDocument/2006/relationships">
+  <p:cSld>
+    <p:bg>
+      <p:bgPr>
+        <a:solidFill>
+          <a:srgbClr val="07111F"/>
+        </a:solidFill>
+        <a:effectLst/>
+      </p:bgPr>
+    </p:bg>
+    <p:spTree>
+      <p:nvGrpSpPr>
+        <p:cNvPr id="1" name=""/>
+        <p:cNvGrpSpPr/>
+        <p:nvPr/>
+      </p:nvGrpSpPr>
+      <p:grpSpPr/>
+      <p:sp>
+        <p:nvSpPr>
+          <p:cNvPr id="2" name="Rectangle 1"/>
+          <p:cNvSpPr/>
+          <p:nvPr/>
+        </p:nvSpPr>
+        <p:spPr>
+          <a:xfrm>
+            <a:off x="0" y="0"/>
+            <a:ext cx="109728" cy="6858000"/>
+          </a:xfrm>
+          <a:prstGeom prst="rect">
+            <a:avLst/>
+          </a:prstGeom>
+          <a:solidFill>
+            <a:srgbClr val="46D6C8"/>
+          </a:solidFill>
+          <a:ln>
+            <a:noFill/>
+          </a:ln>
+        </p:spPr>
+        <p:style>
+          <a:lnRef idx="1">
+            <a:schemeClr val="accent1"/>
+          </a:lnRef>
+          <a:fillRef idx="3">
+            <a:schemeClr val="accent1"/>
+          </a:fillRef>
+          <a:effectRef idx="2">
+            <a:schemeClr val="accent1"/>
+          </a:effectRef>
+          <a:fontRef idx="minor">
+            <a:schemeClr val="lt1"/>
+          </a:fontRef>
+        </p:style>
+        <p:txBody>
+          <a:bodyPr rtlCol="0" anchor="ctr"/>
+          <a:lstStyle/>
+          <a:p>
+            <a:pPr algn="ctr"/>
+          </a:p>
+        </p:txBody>
+      </p:sp>
+      <p:sp>
+        <p:nvSpPr>
+          <p:cNvPr id="3" name="TextBox 2"/>
+          <p:cNvSpPr txBox="1"/>
+          <p:nvPr/>
+        </p:nvSpPr>
+        <p:spPr>
+          <a:xfrm>
+            <a:off x="658368" y="310896"/>
+            <a:ext cx="5943600" cy="274320"/>
+          </a:xfrm>
+          <a:prstGeom prst="rect">
+            <a:avLst/>
+          </a:prstGeom>
+          <a:noFill/>
+        </p:spPr>
+        <p:txBody>
+          <a:bodyPr wrap="none">
+            <a:spAutoFit/>
+          </a:bodyPr>
+          <a:lstStyle/>
+          <a:p>
+            <a:pPr>
+              <a:defRPr sz="900" b="1">
+                <a:solidFill>
+                  <a:srgbClr val="46D6C8"/>
+                </a:solidFill>
+              </a:defRPr>
+            </a:pPr>
+            <a:r>
+              <a:t>GPT-LIVE  /  APPLICATION RESEARCH</a:t>
+            </a:r>
+          </a:p>
+        </p:txBody>
+      </p:sp>
+      <p:sp>
+        <p:nvSpPr>
+          <p:cNvPr id="4" name="TextBox 3"/>
+          <p:cNvSpPr txBox="1"/>
+          <p:nvPr/>
+        </p:nvSpPr>
+        <p:spPr>
+          <a:xfrm>
+            <a:off x="658368" y="685800"/>
+            <a:ext cx="10698480" cy="658368"/>
+          </a:xfrm>
+          <a:prstGeom prst="rect">
+            <a:avLst/>
+          </a:prstGeom>
+          <a:noFill/>
+        </p:spPr>
+        <p:txBody>
+          <a:bodyPr wrap="none">
+            <a:spAutoFit/>
+          </a:bodyPr>
+          <a:lstStyle/>
+          <a:p>
+            <a:pPr algn="l">
+              <a:defRPr sz="2700" b="1">
+                <a:solidFill>
+                  <a:srgbClr val="F4F8FC"/>
+                </a:solidFill>
+              </a:defRPr>
+            </a:pPr>
+            <a:r>
+              <a:t>6.3 最值得验证的三个产品原型</a:t>
+            </a:r>
+          </a:p>
+        </p:txBody>
+      </p:sp>
+      <p:sp>
+        <p:nvSpPr>
+          <p:cNvPr id="5" name="Rounded Rectangle 4"/>
+          <p:cNvSpPr/>
+          <p:nvPr/>
+        </p:nvSpPr>
+        <p:spPr>
+          <a:xfrm>
+            <a:off x="658368" y="1600200"/>
+            <a:ext cx="3581400" cy="1965960"/>
+          </a:xfrm>
+          <a:prstGeom prst="roundRect">
+            <a:avLst/>
+          </a:prstGeom>
+          <a:solidFill>
+            <a:srgbClr val="10243C"/>
+          </a:solidFill>
+          <a:ln>
+            <a:solidFill>
+              <a:srgbClr val="294B68"/>
+            </a:solidFill>
+          </a:ln>
+        </p:spPr>
+        <p:style>
+          <a:lnRef idx="1">
+            <a:schemeClr val="accent1"/>
+          </a:lnRef>
+          <a:fillRef idx="3">
+            <a:schemeClr val="accent1"/>
+          </a:fillRef>
+          <a:effectRef idx="2">
+            <a:schemeClr val="accent1"/>
+          </a:effectRef>
+          <a:fontRef idx="minor">
+            <a:schemeClr val="lt1"/>
+          </a:fontRef>
+        </p:style>
+        <p:txBody>
+          <a:bodyPr rtlCol="0" anchor="ctr" lIns="228600" rIns="182880" tIns="164592"/>
+          <a:lstStyle/>
+          <a:p>
+            <a:pPr algn="ctr">
+              <a:defRPr sz="1200" b="1">
+                <a:solidFill>
+                  <a:srgbClr val="46D6C8"/>
+                </a:solidFill>
+              </a:defRPr>
+            </a:pPr>
+            <a:r>
+              <a:t>01</a:t>
+            </a:r>
+          </a:p>
+          <a:p>
+            <a:pPr>
+              <a:spcBef>
+                <a:spcPts val="800"/>
+              </a:spcBef>
+              <a:defRPr sz="1500">
+                <a:solidFill>
+                  <a:srgbClr val="F4F8FC"/>
+                </a:solidFill>
+              </a:defRPr>
+            </a:pPr>
+            <a:r>
+              <a:t>任务完成率；</a:t>
+            </a:r>
+          </a:p>
+        </p:txBody>
+      </p:sp>
+      <p:sp>
+        <p:nvSpPr>
+          <p:cNvPr id="6" name="Rectangle 5"/>
+          <p:cNvSpPr/>
+          <p:nvPr/>
+        </p:nvSpPr>
+        <p:spPr>
+          <a:xfrm>
+            <a:off x="658368" y="1801368"/>
+            <a:ext cx="54864" cy="438912"/>
+          </a:xfrm>
+          <a:prstGeom prst="rect">
+            <a:avLst/>
+          </a:prstGeom>
+          <a:solidFill>
+            <a:srgbClr val="46D6C8"/>
+          </a:solidFill>
+          <a:ln>
+            <a:noFill/>
+          </a:ln>
+        </p:spPr>
+        <p:style>
+          <a:lnRef idx="1">
+            <a:schemeClr val="accent1"/>
+          </a:lnRef>
+          <a:fillRef idx="3">
+            <a:schemeClr val="accent1"/>
+          </a:fillRef>
+          <a:effectRef idx="2">
+            <a:schemeClr val="accent1"/>
+          </a:effectRef>
+          <a:fontRef idx="minor">
+            <a:schemeClr val="lt1"/>
+          </a:fontRef>
+        </p:style>
+        <p:txBody>
+          <a:bodyPr rtlCol="0" anchor="ctr"/>
+          <a:lstStyle/>
+          <a:p>
+            <a:pPr algn="ctr"/>
+          </a:p>
+        </p:txBody>
+      </p:sp>
+      <p:sp>
+        <p:nvSpPr>
+          <p:cNvPr id="7" name="Rounded Rectangle 6"/>
+          <p:cNvSpPr/>
+          <p:nvPr/>
+        </p:nvSpPr>
+        <p:spPr>
+          <a:xfrm>
+            <a:off x="4386071" y="1600200"/>
+            <a:ext cx="3581400" cy="1965960"/>
+          </a:xfrm>
+          <a:prstGeom prst="roundRect">
+            <a:avLst/>
+          </a:prstGeom>
+          <a:solidFill>
+            <a:srgbClr val="10243C"/>
+          </a:solidFill>
+          <a:ln>
+            <a:solidFill>
+              <a:srgbClr val="294B68"/>
+            </a:solidFill>
+          </a:ln>
+        </p:spPr>
+        <p:style>
+          <a:lnRef idx="1">
+            <a:schemeClr val="accent1"/>
+          </a:lnRef>
+          <a:fillRef idx="3">
+            <a:schemeClr val="accent1"/>
+          </a:fillRef>
+          <a:effectRef idx="2">
+            <a:schemeClr val="accent1"/>
+          </a:effectRef>
+          <a:fontRef idx="minor">
+            <a:schemeClr val="lt1"/>
+          </a:fontRef>
+        </p:style>
+        <p:txBody>
+          <a:bodyPr rtlCol="0" anchor="ctr" lIns="228600" rIns="182880" tIns="164592"/>
+          <a:lstStyle/>
+          <a:p>
+            <a:pPr algn="ctr">
+              <a:defRPr sz="1200" b="1">
+                <a:solidFill>
+                  <a:srgbClr val="55A7FF"/>
+                </a:solidFill>
+              </a:defRPr>
+            </a:pPr>
+            <a:r>
+              <a:t>02</a:t>
+            </a:r>
+          </a:p>
+          <a:p>
+            <a:pPr>
+              <a:spcBef>
+                <a:spcPts val="800"/>
+              </a:spcBef>
+              <a:defRPr sz="1500">
+                <a:solidFill>
+                  <a:srgbClr val="F4F8FC"/>
+                </a:solidFill>
+              </a:defRPr>
+            </a:pPr>
+            <a:r>
+              <a:t>首音P50/P95与工具调用尾延迟；</a:t>
+            </a:r>
+          </a:p>
+        </p:txBody>
+      </p:sp>
+      <p:sp>
+        <p:nvSpPr>
+          <p:cNvPr id="8" name="Rectangle 7"/>
+          <p:cNvSpPr/>
+          <p:nvPr/>
+        </p:nvSpPr>
+        <p:spPr>
+          <a:xfrm>
+            <a:off x="4386071" y="1801368"/>
+            <a:ext cx="54864" cy="438912"/>
+          </a:xfrm>
+          <a:prstGeom prst="rect">
+            <a:avLst/>
+          </a:prstGeom>
+          <a:solidFill>
+            <a:srgbClr val="55A7FF"/>
+          </a:solidFill>
+          <a:ln>
+            <a:noFill/>
+          </a:ln>
+        </p:spPr>
+        <p:style>
+          <a:lnRef idx="1">
+            <a:schemeClr val="accent1"/>
+          </a:lnRef>
+          <a:fillRef idx="3">
+            <a:schemeClr val="accent1"/>
+          </a:fillRef>
+          <a:effectRef idx="2">
+            <a:schemeClr val="accent1"/>
+          </a:effectRef>
+          <a:fontRef idx="minor">
+            <a:schemeClr val="lt1"/>
+          </a:fontRef>
+        </p:style>
+        <p:txBody>
+          <a:bodyPr rtlCol="0" anchor="ctr"/>
+          <a:lstStyle/>
+          <a:p>
+            <a:pPr algn="ctr"/>
+          </a:p>
+        </p:txBody>
+      </p:sp>
+      <p:sp>
+        <p:nvSpPr>
+          <p:cNvPr id="9" name="Rounded Rectangle 8"/>
+          <p:cNvSpPr/>
+          <p:nvPr/>
+        </p:nvSpPr>
+        <p:spPr>
+          <a:xfrm>
+            <a:off x="8113776" y="1600200"/>
+            <a:ext cx="3581400" cy="1965960"/>
+          </a:xfrm>
+          <a:prstGeom prst="roundRect">
+            <a:avLst/>
+          </a:prstGeom>
+          <a:solidFill>
+            <a:srgbClr val="10243C"/>
+          </a:solidFill>
+          <a:ln>
+            <a:solidFill>
+              <a:srgbClr val="294B68"/>
+            </a:solidFill>
+          </a:ln>
+        </p:spPr>
+        <p:style>
+          <a:lnRef idx="1">
+            <a:schemeClr val="accent1"/>
+          </a:lnRef>
+          <a:fillRef idx="3">
+            <a:schemeClr val="accent1"/>
+          </a:fillRef>
+          <a:effectRef idx="2">
+            <a:schemeClr val="accent1"/>
+          </a:effectRef>
+          <a:fontRef idx="minor">
+            <a:schemeClr val="lt1"/>
+          </a:fontRef>
+        </p:style>
+        <p:txBody>
+          <a:bodyPr rtlCol="0" anchor="ctr" lIns="228600" rIns="182880" tIns="164592"/>
+          <a:lstStyle/>
+          <a:p>
+            <a:pPr algn="ctr">
+              <a:defRPr sz="1200" b="1">
+                <a:solidFill>
+                  <a:srgbClr val="FFBE55"/>
+                </a:solidFill>
+              </a:defRPr>
+            </a:pPr>
+            <a:r>
+              <a:t>03</a:t>
+            </a:r>
+          </a:p>
+          <a:p>
+            <a:pPr>
+              <a:spcBef>
+                <a:spcPts val="800"/>
+              </a:spcBef>
+              <a:defRPr sz="1500">
+                <a:solidFill>
+                  <a:srgbClr val="F4F8FC"/>
+                </a:solidFill>
+              </a:defRPr>
+            </a:pPr>
+            <a:r>
+              <a:t>误打断/漏打断率；</a:t>
+            </a:r>
+          </a:p>
+        </p:txBody>
+      </p:sp>
+      <p:sp>
+        <p:nvSpPr>
+          <p:cNvPr id="10" name="Rectangle 9"/>
+          <p:cNvSpPr/>
+          <p:nvPr/>
+        </p:nvSpPr>
+        <p:spPr>
+          <a:xfrm>
+            <a:off x="8113776" y="1801368"/>
+            <a:ext cx="54864" cy="438912"/>
+          </a:xfrm>
+          <a:prstGeom prst="rect">
+            <a:avLst/>
+          </a:prstGeom>
+          <a:solidFill>
+            <a:srgbClr val="FFBE55"/>
+          </a:solidFill>
+          <a:ln>
+            <a:noFill/>
+          </a:ln>
+        </p:spPr>
+        <p:style>
+          <a:lnRef idx="1">
+            <a:schemeClr val="accent1"/>
+          </a:lnRef>
+          <a:fillRef idx="3">
+            <a:schemeClr val="accent1"/>
+          </a:fillRef>
+          <a:effectRef idx="2">
+            <a:schemeClr val="accent1"/>
+          </a:effectRef>
+          <a:fontRef idx="minor">
+            <a:schemeClr val="lt1"/>
+          </a:fontRef>
+        </p:style>
+        <p:txBody>
+          <a:bodyPr rtlCol="0" anchor="ctr"/>
+          <a:lstStyle/>
+          <a:p>
+            <a:pPr algn="ctr"/>
+          </a:p>
+        </p:txBody>
+      </p:sp>
+      <p:sp>
+        <p:nvSpPr>
+          <p:cNvPr id="11" name="Rounded Rectangle 10"/>
+          <p:cNvSpPr/>
+          <p:nvPr/>
+        </p:nvSpPr>
+        <p:spPr>
+          <a:xfrm>
+            <a:off x="658368" y="3730752"/>
+            <a:ext cx="3581400" cy="1965960"/>
+          </a:xfrm>
+          <a:prstGeom prst="roundRect">
+            <a:avLst/>
+          </a:prstGeom>
+          <a:solidFill>
+            <a:srgbClr val="10243C"/>
+          </a:solidFill>
+          <a:ln>
+            <a:solidFill>
+              <a:srgbClr val="294B68"/>
+            </a:solidFill>
+          </a:ln>
+        </p:spPr>
+        <p:style>
+          <a:lnRef idx="1">
+            <a:schemeClr val="accent1"/>
+          </a:lnRef>
+          <a:fillRef idx="3">
+            <a:schemeClr val="accent1"/>
+          </a:fillRef>
+          <a:effectRef idx="2">
+            <a:schemeClr val="accent1"/>
+          </a:effectRef>
+          <a:fontRef idx="minor">
+            <a:schemeClr val="lt1"/>
+          </a:fontRef>
+        </p:style>
+        <p:txBody>
+          <a:bodyPr rtlCol="0" anchor="ctr" lIns="228600" rIns="182880" tIns="164592"/>
+          <a:lstStyle/>
+          <a:p>
+            <a:pPr algn="ctr">
+              <a:defRPr sz="1200" b="1">
+                <a:solidFill>
+                  <a:srgbClr val="46D6C8"/>
+                </a:solidFill>
+              </a:defRPr>
+            </a:pPr>
+            <a:r>
+              <a:t>04</a:t>
+            </a:r>
+          </a:p>
+          <a:p>
+            <a:pPr>
+              <a:spcBef>
+                <a:spcPts val="800"/>
+              </a:spcBef>
+              <a:defRPr sz="1500">
+                <a:solidFill>
+                  <a:srgbClr val="F4F8FC"/>
+                </a:solidFill>
+              </a:defRPr>
+            </a:pPr>
+            <a:r>
+              <a:t>关键信息捕获准确率；</a:t>
+            </a:r>
+          </a:p>
+        </p:txBody>
+      </p:sp>
+      <p:sp>
+        <p:nvSpPr>
+          <p:cNvPr id="12" name="Rectangle 11"/>
+          <p:cNvSpPr/>
+          <p:nvPr/>
+        </p:nvSpPr>
+        <p:spPr>
+          <a:xfrm>
+            <a:off x="658368" y="3931920"/>
+            <a:ext cx="54864" cy="438912"/>
+          </a:xfrm>
+          <a:prstGeom prst="rect">
+            <a:avLst/>
+          </a:prstGeom>
+          <a:solidFill>
+            <a:srgbClr val="46D6C8"/>
+          </a:solidFill>
+          <a:ln>
+            <a:noFill/>
+          </a:ln>
+        </p:spPr>
+        <p:style>
+          <a:lnRef idx="1">
+            <a:schemeClr val="accent1"/>
+          </a:lnRef>
+          <a:fillRef idx="3">
+            <a:schemeClr val="accent1"/>
+          </a:fillRef>
+          <a:effectRef idx="2">
+            <a:schemeClr val="accent1"/>
+          </a:effectRef>
+          <a:fontRef idx="minor">
+            <a:schemeClr val="lt1"/>
+          </a:fontRef>
+        </p:style>
+        <p:txBody>
+          <a:bodyPr rtlCol="0" anchor="ctr"/>
+          <a:lstStyle/>
+          <a:p>
+            <a:pPr algn="ctr"/>
+          </a:p>
+        </p:txBody>
+      </p:sp>
+      <p:sp>
+        <p:nvSpPr>
+          <p:cNvPr id="13" name="Rounded Rectangle 12"/>
+          <p:cNvSpPr/>
+          <p:nvPr/>
+        </p:nvSpPr>
+        <p:spPr>
+          <a:xfrm>
+            <a:off x="4386071" y="3730752"/>
+            <a:ext cx="3581400" cy="1965960"/>
+          </a:xfrm>
+          <a:prstGeom prst="roundRect">
+            <a:avLst/>
+          </a:prstGeom>
+          <a:solidFill>
+            <a:srgbClr val="10243C"/>
+          </a:solidFill>
+          <a:ln>
+            <a:solidFill>
+              <a:srgbClr val="294B68"/>
+            </a:solidFill>
+          </a:ln>
+        </p:spPr>
+        <p:style>
+          <a:lnRef idx="1">
+            <a:schemeClr val="accent1"/>
+          </a:lnRef>
+          <a:fillRef idx="3">
+            <a:schemeClr val="accent1"/>
+          </a:fillRef>
+          <a:effectRef idx="2">
+            <a:schemeClr val="accent1"/>
+          </a:effectRef>
+          <a:fontRef idx="minor">
+            <a:schemeClr val="lt1"/>
+          </a:fontRef>
+        </p:style>
+        <p:txBody>
+          <a:bodyPr rtlCol="0" anchor="ctr" lIns="228600" rIns="182880" tIns="164592"/>
+          <a:lstStyle/>
+          <a:p>
+            <a:pPr algn="ctr">
+              <a:defRPr sz="1200" b="1">
+                <a:solidFill>
+                  <a:srgbClr val="55A7FF"/>
+                </a:solidFill>
+              </a:defRPr>
+            </a:pPr>
+            <a:r>
+              <a:t>05</a:t>
+            </a:r>
+          </a:p>
+          <a:p>
+            <a:pPr>
+              <a:spcBef>
+                <a:spcPts val="800"/>
+              </a:spcBef>
+              <a:defRPr sz="1500">
+                <a:solidFill>
+                  <a:srgbClr val="F4F8FC"/>
+                </a:solidFill>
+              </a:defRPr>
+            </a:pPr>
+            <a:r>
+              <a:t>转人工率与转人工后重复陈述率；</a:t>
+            </a:r>
+          </a:p>
+        </p:txBody>
+      </p:sp>
+      <p:sp>
+        <p:nvSpPr>
+          <p:cNvPr id="14" name="Rectangle 13"/>
+          <p:cNvSpPr/>
+          <p:nvPr/>
+        </p:nvSpPr>
+        <p:spPr>
+          <a:xfrm>
+            <a:off x="4386071" y="3931920"/>
+            <a:ext cx="54864" cy="438912"/>
+          </a:xfrm>
+          <a:prstGeom prst="rect">
+            <a:avLst/>
+          </a:prstGeom>
+          <a:solidFill>
+            <a:srgbClr val="55A7FF"/>
+          </a:solidFill>
+          <a:ln>
+            <a:noFill/>
+          </a:ln>
+        </p:spPr>
+        <p:style>
+          <a:lnRef idx="1">
+            <a:schemeClr val="accent1"/>
+          </a:lnRef>
+          <a:fillRef idx="3">
+            <a:schemeClr val="accent1"/>
+          </a:fillRef>
+          <a:effectRef idx="2">
+            <a:schemeClr val="accent1"/>
+          </a:effectRef>
+          <a:fontRef idx="minor">
+            <a:schemeClr val="lt1"/>
+          </a:fontRef>
+        </p:style>
+        <p:txBody>
+          <a:bodyPr rtlCol="0" anchor="ctr"/>
+          <a:lstStyle/>
+          <a:p>
+            <a:pPr algn="ctr"/>
+          </a:p>
+        </p:txBody>
+      </p:sp>
+      <p:sp>
+        <p:nvSpPr>
+          <p:cNvPr id="15" name="Rounded Rectangle 14"/>
+          <p:cNvSpPr/>
+          <p:nvPr/>
+        </p:nvSpPr>
+        <p:spPr>
+          <a:xfrm>
+            <a:off x="8113776" y="3730752"/>
+            <a:ext cx="3581400" cy="1965960"/>
+          </a:xfrm>
+          <a:prstGeom prst="roundRect">
+            <a:avLst/>
+          </a:prstGeom>
+          <a:solidFill>
+            <a:srgbClr val="10243C"/>
+          </a:solidFill>
+          <a:ln>
+            <a:solidFill>
+              <a:srgbClr val="294B68"/>
+            </a:solidFill>
+          </a:ln>
+        </p:spPr>
+        <p:style>
+          <a:lnRef idx="1">
+            <a:schemeClr val="accent1"/>
+          </a:lnRef>
+          <a:fillRef idx="3">
+            <a:schemeClr val="accent1"/>
+          </a:fillRef>
+          <a:effectRef idx="2">
+            <a:schemeClr val="accent1"/>
+          </a:effectRef>
+          <a:fontRef idx="minor">
+            <a:schemeClr val="lt1"/>
+          </a:fontRef>
+        </p:style>
+        <p:txBody>
+          <a:bodyPr rtlCol="0" anchor="ctr" lIns="228600" rIns="182880" tIns="164592"/>
+          <a:lstStyle/>
+          <a:p>
+            <a:pPr algn="ctr">
+              <a:defRPr sz="1200" b="1">
+                <a:solidFill>
+                  <a:srgbClr val="FFBE55"/>
+                </a:solidFill>
+              </a:defRPr>
+            </a:pPr>
+            <a:r>
+              <a:t>06</a:t>
+            </a:r>
+          </a:p>
+          <a:p>
+            <a:pPr>
+              <a:spcBef>
+                <a:spcPts val="800"/>
+              </a:spcBef>
+              <a:defRPr sz="1500">
+                <a:solidFill>
+                  <a:srgbClr val="F4F8FC"/>
+                </a:solidFill>
+              </a:defRPr>
+            </a:pPr>
+            <a:r>
+              <a:t>每次解决成本、CSAT和合规违规数。</a:t>
+            </a:r>
+          </a:p>
+        </p:txBody>
+      </p:sp>
+      <p:sp>
+        <p:nvSpPr>
+          <p:cNvPr id="16" name="Rectangle 15"/>
+          <p:cNvSpPr/>
+          <p:nvPr/>
+        </p:nvSpPr>
+        <p:spPr>
+          <a:xfrm>
+            <a:off x="8113776" y="3931920"/>
+            <a:ext cx="54864" cy="438912"/>
+          </a:xfrm>
+          <a:prstGeom prst="rect">
+            <a:avLst/>
+          </a:prstGeom>
+          <a:solidFill>
+            <a:srgbClr val="FFBE55"/>
+          </a:solidFill>
+          <a:ln>
+            <a:noFill/>
+          </a:ln>
+        </p:spPr>
+        <p:style>
+          <a:lnRef idx="1">
+            <a:schemeClr val="accent1"/>
+          </a:lnRef>
+          <a:fillRef idx="3">
+            <a:schemeClr val="accent1"/>
+          </a:fillRef>
+          <a:effectRef idx="2">
+            <a:schemeClr val="accent1"/>
+          </a:effectRef>
+          <a:fontRef idx="minor">
+            <a:schemeClr val="lt1"/>
+          </a:fontRef>
+        </p:style>
+        <p:txBody>
+          <a:bodyPr rtlCol="0" anchor="ctr"/>
+          <a:lstStyle/>
+          <a:p>
+            <a:pPr algn="ctr"/>
+          </a:p>
+        </p:txBody>
+      </p:sp>
+      <p:sp>
+        <p:nvSpPr>
+          <p:cNvPr id="17" name="TextBox 16"/>
+          <p:cNvSpPr txBox="1"/>
+          <p:nvPr/>
+        </p:nvSpPr>
+        <p:spPr>
+          <a:xfrm>
+            <a:off x="10881360" y="6327648"/>
+            <a:ext cx="594360" cy="228600"/>
+          </a:xfrm>
+          <a:prstGeom prst="rect">
+            <a:avLst/>
+          </a:prstGeom>
+          <a:noFill/>
+        </p:spPr>
+        <p:txBody>
+          <a:bodyPr wrap="none">
+            <a:spAutoFit/>
+          </a:bodyPr>
+          <a:lstStyle/>
+          <a:p>
+            <a:pPr>
+              <a:defRPr sz="900">
+                <a:solidFill>
+                  <a:srgbClr val="9AB2C8"/>
+                </a:solidFill>
+              </a:defRPr>
+            </a:pPr>
+            <a:r>
+              <a:t>14 / 18</a:t>
+            </a:r>
+          </a:p>
+        </p:txBody>
+      </p:sp>
+    </p:spTree>
+  </p:cSld>
+  <p:clrMapOvr>
+    <a:masterClrMapping/>
+  </p:clrMapOvr>
+</p:sld>
+</file>
+
+<file path=ppt/slides/slide15.xml><?xml version="1.0" encoding="utf-8"?>
+<p:sld xmlns:a="http://schemas.openxmlformats.org/drawingml/2006/main" xmlns:p="http://schemas.openxmlformats.org/presentationml/2006/main" xmlns:r="http://schemas.openxmlformats.org/officeDocument/2006/relationships">
+  <p:cSld>
+    <p:bg>
+      <p:bgPr>
+        <a:solidFill>
+          <a:srgbClr val="07111F"/>
+        </a:solidFill>
+        <a:effectLst/>
+      </p:bgPr>
+    </p:bg>
+    <p:spTree>
+      <p:nvGrpSpPr>
+        <p:cNvPr id="1" name=""/>
+        <p:cNvGrpSpPr/>
+        <p:nvPr/>
+      </p:nvGrpSpPr>
+      <p:grpSpPr/>
+      <p:sp>
+        <p:nvSpPr>
+          <p:cNvPr id="2" name="Rectangle 1"/>
+          <p:cNvSpPr/>
+          <p:nvPr/>
+        </p:nvSpPr>
+        <p:spPr>
+          <a:xfrm>
+            <a:off x="0" y="0"/>
+            <a:ext cx="109728" cy="6858000"/>
+          </a:xfrm>
+          <a:prstGeom prst="rect">
+            <a:avLst/>
+          </a:prstGeom>
+          <a:solidFill>
+            <a:srgbClr val="46D6C8"/>
+          </a:solidFill>
+          <a:ln>
+            <a:noFill/>
+          </a:ln>
+        </p:spPr>
+        <p:style>
+          <a:lnRef idx="1">
+            <a:schemeClr val="accent1"/>
+          </a:lnRef>
+          <a:fillRef idx="3">
+            <a:schemeClr val="accent1"/>
+          </a:fillRef>
+          <a:effectRef idx="2">
+            <a:schemeClr val="accent1"/>
+          </a:effectRef>
+          <a:fontRef idx="minor">
+            <a:schemeClr val="lt1"/>
+          </a:fontRef>
+        </p:style>
+        <p:txBody>
+          <a:bodyPr rtlCol="0" anchor="ctr"/>
+          <a:lstStyle/>
+          <a:p>
+            <a:pPr algn="ctr"/>
+          </a:p>
+        </p:txBody>
+      </p:sp>
+      <p:sp>
+        <p:nvSpPr>
+          <p:cNvPr id="3" name="TextBox 2"/>
+          <p:cNvSpPr txBox="1"/>
+          <p:nvPr/>
+        </p:nvSpPr>
+        <p:spPr>
+          <a:xfrm>
+            <a:off x="658368" y="310896"/>
+            <a:ext cx="5943600" cy="274320"/>
+          </a:xfrm>
+          <a:prstGeom prst="rect">
+            <a:avLst/>
+          </a:prstGeom>
+          <a:noFill/>
+        </p:spPr>
+        <p:txBody>
+          <a:bodyPr wrap="none">
+            <a:spAutoFit/>
+          </a:bodyPr>
+          <a:lstStyle/>
+          <a:p>
+            <a:pPr>
+              <a:defRPr sz="900" b="1">
+                <a:solidFill>
+                  <a:srgbClr val="46D6C8"/>
+                </a:solidFill>
+              </a:defRPr>
+            </a:pPr>
+            <a:r>
+              <a:t>GPT-LIVE  /  APPLICATION RESEARCH</a:t>
+            </a:r>
+          </a:p>
+        </p:txBody>
+      </p:sp>
+      <p:sp>
+        <p:nvSpPr>
+          <p:cNvPr id="4" name="TextBox 3"/>
+          <p:cNvSpPr txBox="1"/>
+          <p:nvPr/>
+        </p:nvSpPr>
+        <p:spPr>
+          <a:xfrm>
+            <a:off x="658368" y="685800"/>
+            <a:ext cx="10698480" cy="658368"/>
+          </a:xfrm>
+          <a:prstGeom prst="rect">
+            <a:avLst/>
+          </a:prstGeom>
+          <a:noFill/>
+        </p:spPr>
+        <p:txBody>
+          <a:bodyPr wrap="none">
+            <a:spAutoFit/>
+          </a:bodyPr>
+          <a:lstStyle/>
+          <a:p>
+            <a:pPr algn="l">
+              <a:defRPr sz="2700" b="1">
+                <a:solidFill>
+                  <a:srgbClr val="F4F8FC"/>
+                </a:solidFill>
+              </a:defRPr>
+            </a:pPr>
+            <a:r>
+              <a:t>七、落地路线与决策建议</a:t>
+            </a:r>
+          </a:p>
+        </p:txBody>
+      </p:sp>
+      <p:sp>
+        <p:nvSpPr>
+          <p:cNvPr id="5" name="Rounded Rectangle 4"/>
+          <p:cNvSpPr/>
+          <p:nvPr/>
+        </p:nvSpPr>
+        <p:spPr>
+          <a:xfrm>
+            <a:off x="658368" y="1600200"/>
+            <a:ext cx="3581400" cy="1965960"/>
+          </a:xfrm>
+          <a:prstGeom prst="roundRect">
+            <a:avLst/>
+          </a:prstGeom>
+          <a:solidFill>
+            <a:srgbClr val="10243C"/>
+          </a:solidFill>
+          <a:ln>
+            <a:solidFill>
+              <a:srgbClr val="294B68"/>
+            </a:solidFill>
+          </a:ln>
+        </p:spPr>
+        <p:style>
+          <a:lnRef idx="1">
+            <a:schemeClr val="accent1"/>
+          </a:lnRef>
+          <a:fillRef idx="3">
+            <a:schemeClr val="accent1"/>
+          </a:fillRef>
+          <a:effectRef idx="2">
+            <a:schemeClr val="accent1"/>
+          </a:effectRef>
+          <a:fontRef idx="minor">
+            <a:schemeClr val="lt1"/>
+          </a:fontRef>
+        </p:style>
+        <p:txBody>
+          <a:bodyPr rtlCol="0" anchor="ctr" lIns="228600" rIns="182880" tIns="164592"/>
+          <a:lstStyle/>
+          <a:p>
+            <a:pPr algn="ctr">
+              <a:defRPr sz="1200" b="1">
+                <a:solidFill>
+                  <a:srgbClr val="46D6C8"/>
+                </a:solidFill>
+              </a:defRPr>
+            </a:pPr>
+            <a:r>
+              <a:t>01</a:t>
+            </a:r>
+          </a:p>
+          <a:p>
+            <a:pPr>
+              <a:spcBef>
+                <a:spcPts val="800"/>
+              </a:spcBef>
+              <a:defRPr sz="1500">
+                <a:solidFill>
+                  <a:srgbClr val="F4F8FC"/>
+                </a:solidFill>
+              </a:defRPr>
+            </a:pPr>
+            <a:r>
+              <a:t>从1–2个边界清晰、低损失、可人工兜底的流程选取真实通话样本。</a:t>
+            </a:r>
+          </a:p>
+        </p:txBody>
+      </p:sp>
+      <p:sp>
+        <p:nvSpPr>
+          <p:cNvPr id="6" name="Rectangle 5"/>
+          <p:cNvSpPr/>
+          <p:nvPr/>
+        </p:nvSpPr>
+        <p:spPr>
+          <a:xfrm>
+            <a:off x="658368" y="1801368"/>
+            <a:ext cx="54864" cy="438912"/>
+          </a:xfrm>
+          <a:prstGeom prst="rect">
+            <a:avLst/>
+          </a:prstGeom>
+          <a:solidFill>
+            <a:srgbClr val="46D6C8"/>
+          </a:solidFill>
+          <a:ln>
+            <a:noFill/>
+          </a:ln>
+        </p:spPr>
+        <p:style>
+          <a:lnRef idx="1">
+            <a:schemeClr val="accent1"/>
+          </a:lnRef>
+          <a:fillRef idx="3">
+            <a:schemeClr val="accent1"/>
+          </a:fillRef>
+          <a:effectRef idx="2">
+            <a:schemeClr val="accent1"/>
+          </a:effectRef>
+          <a:fontRef idx="minor">
+            <a:schemeClr val="lt1"/>
+          </a:fontRef>
+        </p:style>
+        <p:txBody>
+          <a:bodyPr rtlCol="0" anchor="ctr"/>
+          <a:lstStyle/>
+          <a:p>
+            <a:pPr algn="ctr"/>
+          </a:p>
+        </p:txBody>
+      </p:sp>
+      <p:sp>
+        <p:nvSpPr>
+          <p:cNvPr id="7" name="Rounded Rectangle 6"/>
+          <p:cNvSpPr/>
+          <p:nvPr/>
+        </p:nvSpPr>
+        <p:spPr>
+          <a:xfrm>
+            <a:off x="4386071" y="1600200"/>
+            <a:ext cx="3581400" cy="1965960"/>
+          </a:xfrm>
+          <a:prstGeom prst="roundRect">
+            <a:avLst/>
+          </a:prstGeom>
+          <a:solidFill>
+            <a:srgbClr val="10243C"/>
+          </a:solidFill>
+          <a:ln>
+            <a:solidFill>
+              <a:srgbClr val="294B68"/>
+            </a:solidFill>
+          </a:ln>
+        </p:spPr>
+        <p:style>
+          <a:lnRef idx="1">
+            <a:schemeClr val="accent1"/>
+          </a:lnRef>
+          <a:fillRef idx="3">
+            <a:schemeClr val="accent1"/>
+          </a:fillRef>
+          <a:effectRef idx="2">
+            <a:schemeClr val="accent1"/>
+          </a:effectRef>
+          <a:fontRef idx="minor">
+            <a:schemeClr val="lt1"/>
+          </a:fontRef>
+        </p:style>
+        <p:txBody>
+          <a:bodyPr rtlCol="0" anchor="ctr" lIns="228600" rIns="182880" tIns="164592"/>
+          <a:lstStyle/>
+          <a:p>
+            <a:pPr algn="ctr">
+              <a:defRPr sz="1200" b="1">
+                <a:solidFill>
+                  <a:srgbClr val="55A7FF"/>
+                </a:solidFill>
+              </a:defRPr>
+            </a:pPr>
+            <a:r>
+              <a:t>02</a:t>
+            </a:r>
+          </a:p>
+          <a:p>
+            <a:pPr>
+              <a:spcBef>
+                <a:spcPts val="800"/>
+              </a:spcBef>
+              <a:defRPr sz="1500">
+                <a:solidFill>
+                  <a:srgbClr val="F4F8FC"/>
+                </a:solidFill>
+              </a:defRPr>
+            </a:pPr>
+            <a:r>
+              <a:t>建立与厂商无关的Realtime Adapter，统一音频事件、VAD、打断、工具、转写和审计协议。</a:t>
+            </a:r>
+          </a:p>
+        </p:txBody>
+      </p:sp>
+      <p:sp>
+        <p:nvSpPr>
+          <p:cNvPr id="8" name="Rectangle 7"/>
+          <p:cNvSpPr/>
+          <p:nvPr/>
+        </p:nvSpPr>
+        <p:spPr>
+          <a:xfrm>
+            <a:off x="4386071" y="1801368"/>
+            <a:ext cx="54864" cy="438912"/>
+          </a:xfrm>
+          <a:prstGeom prst="rect">
+            <a:avLst/>
+          </a:prstGeom>
+          <a:solidFill>
+            <a:srgbClr val="55A7FF"/>
+          </a:solidFill>
+          <a:ln>
+            <a:noFill/>
+          </a:ln>
+        </p:spPr>
+        <p:style>
+          <a:lnRef idx="1">
+            <a:schemeClr val="accent1"/>
+          </a:lnRef>
+          <a:fillRef idx="3">
+            <a:schemeClr val="accent1"/>
+          </a:fillRef>
+          <a:effectRef idx="2">
+            <a:schemeClr val="accent1"/>
+          </a:effectRef>
+          <a:fontRef idx="minor">
+            <a:schemeClr val="lt1"/>
+          </a:fontRef>
+        </p:style>
+        <p:txBody>
+          <a:bodyPr rtlCol="0" anchor="ctr"/>
+          <a:lstStyle/>
+          <a:p>
+            <a:pPr algn="ctr"/>
+          </a:p>
+        </p:txBody>
+      </p:sp>
+      <p:sp>
+        <p:nvSpPr>
+          <p:cNvPr id="9" name="Rounded Rectangle 8"/>
+          <p:cNvSpPr/>
+          <p:nvPr/>
+        </p:nvSpPr>
+        <p:spPr>
+          <a:xfrm>
+            <a:off x="8113776" y="1600200"/>
+            <a:ext cx="3581400" cy="1965960"/>
+          </a:xfrm>
+          <a:prstGeom prst="roundRect">
+            <a:avLst/>
+          </a:prstGeom>
+          <a:solidFill>
+            <a:srgbClr val="10243C"/>
+          </a:solidFill>
+          <a:ln>
+            <a:solidFill>
+              <a:srgbClr val="294B68"/>
+            </a:solidFill>
+          </a:ln>
+        </p:spPr>
+        <p:style>
+          <a:lnRef idx="1">
+            <a:schemeClr val="accent1"/>
+          </a:lnRef>
+          <a:fillRef idx="3">
+            <a:schemeClr val="accent1"/>
+          </a:fillRef>
+          <a:effectRef idx="2">
+            <a:schemeClr val="accent1"/>
+          </a:effectRef>
+          <a:fontRef idx="minor">
+            <a:schemeClr val="lt1"/>
+          </a:fontRef>
+        </p:style>
+        <p:txBody>
+          <a:bodyPr rtlCol="0" anchor="ctr" lIns="228600" rIns="182880" tIns="164592"/>
+          <a:lstStyle/>
+          <a:p>
+            <a:pPr algn="ctr">
+              <a:defRPr sz="1200" b="1">
+                <a:solidFill>
+                  <a:srgbClr val="FFBE55"/>
+                </a:solidFill>
+              </a:defRPr>
+            </a:pPr>
+            <a:r>
+              <a:t>03</a:t>
+            </a:r>
+          </a:p>
+          <a:p>
+            <a:pPr>
+              <a:spcBef>
+                <a:spcPts val="800"/>
+              </a:spcBef>
+              <a:defRPr sz="1500">
+                <a:solidFill>
+                  <a:srgbClr val="F4F8FC"/>
+                </a:solidFill>
+              </a:defRPr>
+            </a:pPr>
+            <a:r>
+              <a:t>用已开放的OpenAI Realtime、Gemini Live、Qwen‑Omni Realtime和豆包做同口径对比。</a:t>
+            </a:r>
+          </a:p>
+        </p:txBody>
+      </p:sp>
+      <p:sp>
+        <p:nvSpPr>
+          <p:cNvPr id="10" name="Rectangle 9"/>
+          <p:cNvSpPr/>
+          <p:nvPr/>
+        </p:nvSpPr>
+        <p:spPr>
+          <a:xfrm>
+            <a:off x="8113776" y="1801368"/>
+            <a:ext cx="54864" cy="438912"/>
+          </a:xfrm>
+          <a:prstGeom prst="rect">
+            <a:avLst/>
+          </a:prstGeom>
+          <a:solidFill>
+            <a:srgbClr val="FFBE55"/>
+          </a:solidFill>
+          <a:ln>
+            <a:noFill/>
+          </a:ln>
+        </p:spPr>
+        <p:style>
+          <a:lnRef idx="1">
+            <a:schemeClr val="accent1"/>
+          </a:lnRef>
+          <a:fillRef idx="3">
+            <a:schemeClr val="accent1"/>
+          </a:fillRef>
+          <a:effectRef idx="2">
+            <a:schemeClr val="accent1"/>
+          </a:effectRef>
+          <a:fontRef idx="minor">
+            <a:schemeClr val="lt1"/>
+          </a:fontRef>
+        </p:style>
+        <p:txBody>
+          <a:bodyPr rtlCol="0" anchor="ctr"/>
+          <a:lstStyle/>
+          <a:p>
+            <a:pPr algn="ctr"/>
+          </a:p>
+        </p:txBody>
+      </p:sp>
+      <p:sp>
+        <p:nvSpPr>
+          <p:cNvPr id="11" name="Rounded Rectangle 10"/>
+          <p:cNvSpPr/>
+          <p:nvPr/>
+        </p:nvSpPr>
+        <p:spPr>
+          <a:xfrm>
+            <a:off x="658368" y="3730752"/>
+            <a:ext cx="3581400" cy="1965960"/>
+          </a:xfrm>
+          <a:prstGeom prst="roundRect">
+            <a:avLst/>
+          </a:prstGeom>
+          <a:solidFill>
+            <a:srgbClr val="10243C"/>
+          </a:solidFill>
+          <a:ln>
+            <a:solidFill>
+              <a:srgbClr val="294B68"/>
+            </a:solidFill>
+          </a:ln>
+        </p:spPr>
+        <p:style>
+          <a:lnRef idx="1">
+            <a:schemeClr val="accent1"/>
+          </a:lnRef>
+          <a:fillRef idx="3">
+            <a:schemeClr val="accent1"/>
+          </a:fillRef>
+          <a:effectRef idx="2">
+            <a:schemeClr val="accent1"/>
+          </a:effectRef>
+          <a:fontRef idx="minor">
+            <a:schemeClr val="lt1"/>
+          </a:fontRef>
+        </p:style>
+        <p:txBody>
+          <a:bodyPr rtlCol="0" anchor="ctr" lIns="228600" rIns="182880" tIns="164592"/>
+          <a:lstStyle/>
+          <a:p>
+            <a:pPr algn="ctr">
+              <a:defRPr sz="1200" b="1">
+                <a:solidFill>
+                  <a:srgbClr val="46D6C8"/>
+                </a:solidFill>
+              </a:defRPr>
+            </a:pPr>
+            <a:r>
+              <a:t>04</a:t>
+            </a:r>
+          </a:p>
+          <a:p>
+            <a:pPr>
+              <a:spcBef>
+                <a:spcPts val="800"/>
+              </a:spcBef>
+              <a:defRPr sz="1500">
+                <a:solidFill>
+                  <a:srgbClr val="F4F8FC"/>
+                </a:solidFill>
+              </a:defRPr>
+            </a:pPr>
+            <a:r>
+              <a:t>禁止只用厂商demo评分；至少覆盖中文普通话、目标方言、8kHz电话、弱网、多人和噪声。</a:t>
+            </a:r>
+          </a:p>
+        </p:txBody>
+      </p:sp>
+      <p:sp>
+        <p:nvSpPr>
+          <p:cNvPr id="12" name="Rectangle 11"/>
+          <p:cNvSpPr/>
+          <p:nvPr/>
+        </p:nvSpPr>
+        <p:spPr>
+          <a:xfrm>
+            <a:off x="658368" y="3931920"/>
+            <a:ext cx="54864" cy="438912"/>
+          </a:xfrm>
+          <a:prstGeom prst="rect">
+            <a:avLst/>
+          </a:prstGeom>
+          <a:solidFill>
+            <a:srgbClr val="46D6C8"/>
+          </a:solidFill>
+          <a:ln>
+            <a:noFill/>
+          </a:ln>
+        </p:spPr>
+        <p:style>
+          <a:lnRef idx="1">
+            <a:schemeClr val="accent1"/>
+          </a:lnRef>
+          <a:fillRef idx="3">
+            <a:schemeClr val="accent1"/>
+          </a:fillRef>
+          <a:effectRef idx="2">
+            <a:schemeClr val="accent1"/>
+          </a:effectRef>
+          <a:fontRef idx="minor">
+            <a:schemeClr val="lt1"/>
+          </a:fontRef>
+        </p:style>
+        <p:txBody>
+          <a:bodyPr rtlCol="0" anchor="ctr"/>
+          <a:lstStyle/>
+          <a:p>
+            <a:pPr algn="ctr"/>
+          </a:p>
+        </p:txBody>
+      </p:sp>
+      <p:sp>
+        <p:nvSpPr>
+          <p:cNvPr id="13" name="Rounded Rectangle 12"/>
+          <p:cNvSpPr/>
+          <p:nvPr/>
+        </p:nvSpPr>
+        <p:spPr>
+          <a:xfrm>
+            <a:off x="4386071" y="3730752"/>
+            <a:ext cx="3581400" cy="1965960"/>
+          </a:xfrm>
+          <a:prstGeom prst="roundRect">
+            <a:avLst/>
+          </a:prstGeom>
+          <a:solidFill>
+            <a:srgbClr val="10243C"/>
+          </a:solidFill>
+          <a:ln>
+            <a:solidFill>
+              <a:srgbClr val="294B68"/>
+            </a:solidFill>
+          </a:ln>
+        </p:spPr>
+        <p:style>
+          <a:lnRef idx="1">
+            <a:schemeClr val="accent1"/>
+          </a:lnRef>
+          <a:fillRef idx="3">
+            <a:schemeClr val="accent1"/>
+          </a:fillRef>
+          <a:effectRef idx="2">
+            <a:schemeClr val="accent1"/>
+          </a:effectRef>
+          <a:fontRef idx="minor">
+            <a:schemeClr val="lt1"/>
+          </a:fontRef>
+        </p:style>
+        <p:txBody>
+          <a:bodyPr rtlCol="0" anchor="ctr" lIns="228600" rIns="182880" tIns="164592"/>
+          <a:lstStyle/>
+          <a:p>
+            <a:pPr algn="ctr">
+              <a:defRPr sz="1200" b="1">
+                <a:solidFill>
+                  <a:srgbClr val="55A7FF"/>
+                </a:solidFill>
+              </a:defRPr>
+            </a:pPr>
+            <a:r>
+              <a:t>05</a:t>
+            </a:r>
+          </a:p>
+          <a:p>
+            <a:pPr>
+              <a:spcBef>
+                <a:spcPts val="800"/>
+              </a:spcBef>
+              <a:defRPr sz="1500">
+                <a:solidFill>
+                  <a:srgbClr val="F4F8FC"/>
+                </a:solidFill>
+              </a:defRPr>
+            </a:pPr>
+            <a:r>
+              <a:t>先做“辅助/收集/查询”，后做不可逆动作；所有写操作二次确认。</a:t>
+            </a:r>
+          </a:p>
+        </p:txBody>
+      </p:sp>
+      <p:sp>
+        <p:nvSpPr>
+          <p:cNvPr id="14" name="Rectangle 13"/>
+          <p:cNvSpPr/>
+          <p:nvPr/>
+        </p:nvSpPr>
+        <p:spPr>
+          <a:xfrm>
+            <a:off x="4386071" y="3931920"/>
+            <a:ext cx="54864" cy="438912"/>
+          </a:xfrm>
+          <a:prstGeom prst="rect">
+            <a:avLst/>
+          </a:prstGeom>
+          <a:solidFill>
+            <a:srgbClr val="55A7FF"/>
+          </a:solidFill>
+          <a:ln>
+            <a:noFill/>
+          </a:ln>
+        </p:spPr>
+        <p:style>
+          <a:lnRef idx="1">
+            <a:schemeClr val="accent1"/>
+          </a:lnRef>
+          <a:fillRef idx="3">
+            <a:schemeClr val="accent1"/>
+          </a:fillRef>
+          <a:effectRef idx="2">
+            <a:schemeClr val="accent1"/>
+          </a:effectRef>
+          <a:fontRef idx="minor">
+            <a:schemeClr val="lt1"/>
+          </a:fontRef>
+        </p:style>
+        <p:txBody>
+          <a:bodyPr rtlCol="0" anchor="ctr"/>
+          <a:lstStyle/>
+          <a:p>
+            <a:pPr algn="ctr"/>
+          </a:p>
+        </p:txBody>
+      </p:sp>
+      <p:sp>
+        <p:nvSpPr>
+          <p:cNvPr id="15" name="Rounded Rectangle 14"/>
+          <p:cNvSpPr/>
+          <p:nvPr/>
+        </p:nvSpPr>
+        <p:spPr>
+          <a:xfrm>
+            <a:off x="8113776" y="3730752"/>
+            <a:ext cx="3581400" cy="1965960"/>
+          </a:xfrm>
+          <a:prstGeom prst="roundRect">
+            <a:avLst/>
+          </a:prstGeom>
+          <a:solidFill>
+            <a:srgbClr val="10243C"/>
+          </a:solidFill>
+          <a:ln>
+            <a:solidFill>
+              <a:srgbClr val="294B68"/>
+            </a:solidFill>
+          </a:ln>
+        </p:spPr>
+        <p:style>
+          <a:lnRef idx="1">
+            <a:schemeClr val="accent1"/>
+          </a:lnRef>
+          <a:fillRef idx="3">
+            <a:schemeClr val="accent1"/>
+          </a:fillRef>
+          <a:effectRef idx="2">
+            <a:schemeClr val="accent1"/>
+          </a:effectRef>
+          <a:fontRef idx="minor">
+            <a:schemeClr val="lt1"/>
+          </a:fontRef>
+        </p:style>
+        <p:txBody>
+          <a:bodyPr rtlCol="0" anchor="ctr" lIns="228600" rIns="182880" tIns="164592"/>
+          <a:lstStyle/>
+          <a:p>
+            <a:pPr algn="ctr">
+              <a:defRPr sz="1200" b="1">
+                <a:solidFill>
+                  <a:srgbClr val="FFBE55"/>
+                </a:solidFill>
+              </a:defRPr>
+            </a:pPr>
+            <a:r>
+              <a:t>06</a:t>
+            </a:r>
+          </a:p>
+          <a:p>
+            <a:pPr>
+              <a:spcBef>
+                <a:spcPts val="800"/>
+              </a:spcBef>
+              <a:defRPr sz="1500">
+                <a:solidFill>
+                  <a:srgbClr val="F4F8FC"/>
+                </a:solidFill>
+              </a:defRPr>
+            </a:pPr>
+            <a:r>
+              <a:t>中文与目标方言任务成功率不低于现网；</a:t>
+            </a:r>
+          </a:p>
+        </p:txBody>
+      </p:sp>
+      <p:sp>
+        <p:nvSpPr>
+          <p:cNvPr id="16" name="Rectangle 15"/>
+          <p:cNvSpPr/>
+          <p:nvPr/>
+        </p:nvSpPr>
+        <p:spPr>
+          <a:xfrm>
+            <a:off x="8113776" y="3931920"/>
+            <a:ext cx="54864" cy="438912"/>
+          </a:xfrm>
+          <a:prstGeom prst="rect">
+            <a:avLst/>
+          </a:prstGeom>
+          <a:solidFill>
+            <a:srgbClr val="FFBE55"/>
+          </a:solidFill>
+          <a:ln>
+            <a:noFill/>
+          </a:ln>
+        </p:spPr>
+        <p:style>
+          <a:lnRef idx="1">
+            <a:schemeClr val="accent1"/>
+          </a:lnRef>
+          <a:fillRef idx="3">
+            <a:schemeClr val="accent1"/>
+          </a:fillRef>
+          <a:effectRef idx="2">
+            <a:schemeClr val="accent1"/>
+          </a:effectRef>
+          <a:fontRef idx="minor">
+            <a:schemeClr val="lt1"/>
+          </a:fontRef>
+        </p:style>
+        <p:txBody>
+          <a:bodyPr rtlCol="0" anchor="ctr"/>
+          <a:lstStyle/>
+          <a:p>
+            <a:pPr algn="ctr"/>
+          </a:p>
+        </p:txBody>
+      </p:sp>
+      <p:sp>
+        <p:nvSpPr>
+          <p:cNvPr id="17" name="TextBox 16"/>
+          <p:cNvSpPr txBox="1"/>
+          <p:nvPr/>
+        </p:nvSpPr>
+        <p:spPr>
+          <a:xfrm>
+            <a:off x="10881360" y="6327648"/>
+            <a:ext cx="594360" cy="228600"/>
+          </a:xfrm>
+          <a:prstGeom prst="rect">
+            <a:avLst/>
+          </a:prstGeom>
+          <a:noFill/>
+        </p:spPr>
+        <p:txBody>
+          <a:bodyPr wrap="none">
+            <a:spAutoFit/>
+          </a:bodyPr>
+          <a:lstStyle/>
+          <a:p>
+            <a:pPr>
+              <a:defRPr sz="900">
+                <a:solidFill>
+                  <a:srgbClr val="9AB2C8"/>
+                </a:solidFill>
+              </a:defRPr>
+            </a:pPr>
+            <a:r>
+              <a:t>15 / 18</a:t>
+            </a:r>
+          </a:p>
+        </p:txBody>
+      </p:sp>
+    </p:spTree>
+  </p:cSld>
+  <p:clrMapOvr>
+    <a:masterClrMapping/>
+  </p:clrMapOvr>
+</p:sld>
+</file>
+
+<file path=ppt/slides/slide16.xml><?xml version="1.0" encoding="utf-8"?>
+<p:sld xmlns:a="http://schemas.openxmlformats.org/drawingml/2006/main" xmlns:p="http://schemas.openxmlformats.org/presentationml/2006/main" xmlns:r="http://schemas.openxmlformats.org/officeDocument/2006/relationships">
+  <p:cSld>
+    <p:bg>
+      <p:bgPr>
+        <a:solidFill>
+          <a:srgbClr val="07111F"/>
+        </a:solidFill>
+        <a:effectLst/>
+      </p:bgPr>
+    </p:bg>
+    <p:spTree>
+      <p:nvGrpSpPr>
+        <p:cNvPr id="1" name=""/>
+        <p:cNvGrpSpPr/>
+        <p:nvPr/>
+      </p:nvGrpSpPr>
+      <p:grpSpPr/>
+      <p:sp>
+        <p:nvSpPr>
+          <p:cNvPr id="2" name="Rectangle 1"/>
+          <p:cNvSpPr/>
+          <p:nvPr/>
+        </p:nvSpPr>
+        <p:spPr>
+          <a:xfrm>
+            <a:off x="0" y="0"/>
+            <a:ext cx="109728" cy="6858000"/>
+          </a:xfrm>
+          <a:prstGeom prst="rect">
+            <a:avLst/>
+          </a:prstGeom>
+          <a:solidFill>
+            <a:srgbClr val="46D6C8"/>
+          </a:solidFill>
+          <a:ln>
+            <a:noFill/>
+          </a:ln>
+        </p:spPr>
+        <p:style>
+          <a:lnRef idx="1">
+            <a:schemeClr val="accent1"/>
+          </a:lnRef>
+          <a:fillRef idx="3">
+            <a:schemeClr val="accent1"/>
+          </a:fillRef>
+          <a:effectRef idx="2">
+            <a:schemeClr val="accent1"/>
+          </a:effectRef>
+          <a:fontRef idx="minor">
+            <a:schemeClr val="lt1"/>
+          </a:fontRef>
+        </p:style>
+        <p:txBody>
+          <a:bodyPr rtlCol="0" anchor="ctr"/>
+          <a:lstStyle/>
+          <a:p>
+            <a:pPr algn="ctr"/>
+          </a:p>
+        </p:txBody>
+      </p:sp>
+      <p:sp>
+        <p:nvSpPr>
+          <p:cNvPr id="3" name="TextBox 2"/>
+          <p:cNvSpPr txBox="1"/>
+          <p:nvPr/>
+        </p:nvSpPr>
+        <p:spPr>
+          <a:xfrm>
+            <a:off x="658368" y="310896"/>
+            <a:ext cx="5943600" cy="274320"/>
+          </a:xfrm>
+          <a:prstGeom prst="rect">
+            <a:avLst/>
+          </a:prstGeom>
+          <a:noFill/>
+        </p:spPr>
+        <p:txBody>
+          <a:bodyPr wrap="none">
+            <a:spAutoFit/>
+          </a:bodyPr>
+          <a:lstStyle/>
+          <a:p>
+            <a:pPr>
+              <a:defRPr sz="900" b="1">
+                <a:solidFill>
+                  <a:srgbClr val="46D6C8"/>
+                </a:solidFill>
+              </a:defRPr>
+            </a:pPr>
+            <a:r>
+              <a:t>GPT-LIVE  /  APPLICATION RESEARCH</a:t>
+            </a:r>
+          </a:p>
+        </p:txBody>
+      </p:sp>
+      <p:sp>
+        <p:nvSpPr>
+          <p:cNvPr id="4" name="TextBox 3"/>
+          <p:cNvSpPr txBox="1"/>
+          <p:nvPr/>
+        </p:nvSpPr>
+        <p:spPr>
+          <a:xfrm>
+            <a:off x="658368" y="685800"/>
+            <a:ext cx="10698480" cy="658368"/>
+          </a:xfrm>
+          <a:prstGeom prst="rect">
+            <a:avLst/>
+          </a:prstGeom>
+          <a:noFill/>
+        </p:spPr>
+        <p:txBody>
+          <a:bodyPr wrap="none">
+            <a:spAutoFit/>
+          </a:bodyPr>
+          <a:lstStyle/>
+          <a:p>
+            <a:pPr algn="l">
+              <a:defRPr sz="2700" b="1">
+                <a:solidFill>
+                  <a:srgbClr val="F4F8FC"/>
+                </a:solidFill>
+              </a:defRPr>
+            </a:pPr>
+            <a:r>
+              <a:t>附录A：建议的生产评测集</a:t>
+            </a:r>
+          </a:p>
+        </p:txBody>
+      </p:sp>
+      <p:sp>
+        <p:nvSpPr>
+          <p:cNvPr id="5" name="Rounded Rectangle 4"/>
+          <p:cNvSpPr/>
+          <p:nvPr/>
+        </p:nvSpPr>
+        <p:spPr>
+          <a:xfrm>
+            <a:off x="658368" y="1600200"/>
+            <a:ext cx="3581400" cy="1965960"/>
+          </a:xfrm>
+          <a:prstGeom prst="roundRect">
+            <a:avLst/>
+          </a:prstGeom>
+          <a:solidFill>
+            <a:srgbClr val="10243C"/>
+          </a:solidFill>
+          <a:ln>
+            <a:solidFill>
+              <a:srgbClr val="294B68"/>
+            </a:solidFill>
+          </a:ln>
+        </p:spPr>
+        <p:style>
+          <a:lnRef idx="1">
+            <a:schemeClr val="accent1"/>
+          </a:lnRef>
+          <a:fillRef idx="3">
+            <a:schemeClr val="accent1"/>
+          </a:fillRef>
+          <a:effectRef idx="2">
+            <a:schemeClr val="accent1"/>
+          </a:effectRef>
+          <a:fontRef idx="minor">
+            <a:schemeClr val="lt1"/>
+          </a:fontRef>
+        </p:style>
+        <p:txBody>
+          <a:bodyPr rtlCol="0" anchor="ctr" lIns="228600" rIns="182880" tIns="164592"/>
+          <a:lstStyle/>
+          <a:p>
+            <a:pPr algn="ctr">
+              <a:defRPr sz="1200" b="1">
+                <a:solidFill>
+                  <a:srgbClr val="46D6C8"/>
+                </a:solidFill>
+              </a:defRPr>
+            </a:pPr>
+            <a:r>
+              <a:t>音频环境</a:t>
+            </a:r>
+          </a:p>
+          <a:p>
+            <a:pPr>
+              <a:spcBef>
+                <a:spcPts val="800"/>
+              </a:spcBef>
+              <a:defRPr sz="1500">
+                <a:solidFill>
+                  <a:srgbClr val="F4F8FC"/>
+                </a:solidFill>
+              </a:defRPr>
+            </a:pPr>
+            <a:r>
+              <a:t>最低覆盖：安静、街道、车内、办公室多人、电话8kHz、弱网与丢包</a:t>
+            </a:r>
+          </a:p>
+        </p:txBody>
+      </p:sp>
+      <p:sp>
+        <p:nvSpPr>
+          <p:cNvPr id="6" name="Rectangle 5"/>
+          <p:cNvSpPr/>
+          <p:nvPr/>
+        </p:nvSpPr>
+        <p:spPr>
+          <a:xfrm>
+            <a:off x="658368" y="1801368"/>
+            <a:ext cx="54864" cy="438912"/>
+          </a:xfrm>
+          <a:prstGeom prst="rect">
+            <a:avLst/>
+          </a:prstGeom>
+          <a:solidFill>
+            <a:srgbClr val="46D6C8"/>
+          </a:solidFill>
+          <a:ln>
+            <a:noFill/>
+          </a:ln>
+        </p:spPr>
+        <p:style>
+          <a:lnRef idx="1">
+            <a:schemeClr val="accent1"/>
+          </a:lnRef>
+          <a:fillRef idx="3">
+            <a:schemeClr val="accent1"/>
+          </a:fillRef>
+          <a:effectRef idx="2">
+            <a:schemeClr val="accent1"/>
+          </a:effectRef>
+          <a:fontRef idx="minor">
+            <a:schemeClr val="lt1"/>
+          </a:fontRef>
+        </p:style>
+        <p:txBody>
+          <a:bodyPr rtlCol="0" anchor="ctr"/>
+          <a:lstStyle/>
+          <a:p>
+            <a:pPr algn="ctr"/>
+          </a:p>
+        </p:txBody>
+      </p:sp>
+      <p:sp>
+        <p:nvSpPr>
+          <p:cNvPr id="7" name="Rounded Rectangle 6"/>
+          <p:cNvSpPr/>
+          <p:nvPr/>
+        </p:nvSpPr>
+        <p:spPr>
+          <a:xfrm>
+            <a:off x="4386071" y="1600200"/>
+            <a:ext cx="3581400" cy="1965960"/>
+          </a:xfrm>
+          <a:prstGeom prst="roundRect">
+            <a:avLst/>
+          </a:prstGeom>
+          <a:solidFill>
+            <a:srgbClr val="10243C"/>
+          </a:solidFill>
+          <a:ln>
+            <a:solidFill>
+              <a:srgbClr val="294B68"/>
+            </a:solidFill>
+          </a:ln>
+        </p:spPr>
+        <p:style>
+          <a:lnRef idx="1">
+            <a:schemeClr val="accent1"/>
+          </a:lnRef>
+          <a:fillRef idx="3">
+            <a:schemeClr val="accent1"/>
+          </a:fillRef>
+          <a:effectRef idx="2">
+            <a:schemeClr val="accent1"/>
+          </a:effectRef>
+          <a:fontRef idx="minor">
+            <a:schemeClr val="lt1"/>
+          </a:fontRef>
+        </p:style>
+        <p:txBody>
+          <a:bodyPr rtlCol="0" anchor="ctr" lIns="228600" rIns="182880" tIns="164592"/>
+          <a:lstStyle/>
+          <a:p>
+            <a:pPr algn="ctr">
+              <a:defRPr sz="1200" b="1">
+                <a:solidFill>
+                  <a:srgbClr val="55A7FF"/>
+                </a:solidFill>
+              </a:defRPr>
+            </a:pPr>
+            <a:r>
+              <a:t>说话方式</a:t>
+            </a:r>
+          </a:p>
+          <a:p>
+            <a:pPr>
+              <a:spcBef>
+                <a:spcPts val="800"/>
+              </a:spcBef>
+              <a:defRPr sz="1500">
+                <a:solidFill>
+                  <a:srgbClr val="F4F8FC"/>
+                </a:solidFill>
+              </a:defRPr>
+            </a:pPr>
+            <a:r>
+              <a:t>最低覆盖：停顿、口吃、重复、半句改口、快速插话、低声、情绪化</a:t>
+            </a:r>
+          </a:p>
+        </p:txBody>
+      </p:sp>
+      <p:sp>
+        <p:nvSpPr>
+          <p:cNvPr id="8" name="Rectangle 7"/>
+          <p:cNvSpPr/>
+          <p:nvPr/>
+        </p:nvSpPr>
+        <p:spPr>
+          <a:xfrm>
+            <a:off x="4386071" y="1801368"/>
+            <a:ext cx="54864" cy="438912"/>
+          </a:xfrm>
+          <a:prstGeom prst="rect">
+            <a:avLst/>
+          </a:prstGeom>
+          <a:solidFill>
+            <a:srgbClr val="55A7FF"/>
+          </a:solidFill>
+          <a:ln>
+            <a:noFill/>
+          </a:ln>
+        </p:spPr>
+        <p:style>
+          <a:lnRef idx="1">
+            <a:schemeClr val="accent1"/>
+          </a:lnRef>
+          <a:fillRef idx="3">
+            <a:schemeClr val="accent1"/>
+          </a:fillRef>
+          <a:effectRef idx="2">
+            <a:schemeClr val="accent1"/>
+          </a:effectRef>
+          <a:fontRef idx="minor">
+            <a:schemeClr val="lt1"/>
+          </a:fontRef>
+        </p:style>
+        <p:txBody>
+          <a:bodyPr rtlCol="0" anchor="ctr"/>
+          <a:lstStyle/>
+          <a:p>
+            <a:pPr algn="ctr"/>
+          </a:p>
+        </p:txBody>
+      </p:sp>
+      <p:sp>
+        <p:nvSpPr>
+          <p:cNvPr id="9" name="Rounded Rectangle 8"/>
+          <p:cNvSpPr/>
+          <p:nvPr/>
+        </p:nvSpPr>
+        <p:spPr>
+          <a:xfrm>
+            <a:off x="8113776" y="1600200"/>
+            <a:ext cx="3581400" cy="1965960"/>
+          </a:xfrm>
+          <a:prstGeom prst="roundRect">
+            <a:avLst/>
+          </a:prstGeom>
+          <a:solidFill>
+            <a:srgbClr val="10243C"/>
+          </a:solidFill>
+          <a:ln>
+            <a:solidFill>
+              <a:srgbClr val="294B68"/>
+            </a:solidFill>
+          </a:ln>
+        </p:spPr>
+        <p:style>
+          <a:lnRef idx="1">
+            <a:schemeClr val="accent1"/>
+          </a:lnRef>
+          <a:fillRef idx="3">
+            <a:schemeClr val="accent1"/>
+          </a:fillRef>
+          <a:effectRef idx="2">
+            <a:schemeClr val="accent1"/>
+          </a:effectRef>
+          <a:fontRef idx="minor">
+            <a:schemeClr val="lt1"/>
+          </a:fontRef>
+        </p:style>
+        <p:txBody>
+          <a:bodyPr rtlCol="0" anchor="ctr" lIns="228600" rIns="182880" tIns="164592"/>
+          <a:lstStyle/>
+          <a:p>
+            <a:pPr algn="ctr">
+              <a:defRPr sz="1200" b="1">
+                <a:solidFill>
+                  <a:srgbClr val="FFBE55"/>
+                </a:solidFill>
+              </a:defRPr>
+            </a:pPr>
+            <a:r>
+              <a:t>语言</a:t>
+            </a:r>
+          </a:p>
+          <a:p>
+            <a:pPr>
+              <a:spcBef>
+                <a:spcPts val="800"/>
+              </a:spcBef>
+              <a:defRPr sz="1500">
+                <a:solidFill>
+                  <a:srgbClr val="F4F8FC"/>
+                </a:solidFill>
+              </a:defRPr>
+            </a:pPr>
+            <a:r>
+              <a:t>最低覆盖：普通话、业务方言、英语及主要跨语言组合</a:t>
+            </a:r>
+          </a:p>
+        </p:txBody>
+      </p:sp>
+      <p:sp>
+        <p:nvSpPr>
+          <p:cNvPr id="10" name="Rectangle 9"/>
+          <p:cNvSpPr/>
+          <p:nvPr/>
+        </p:nvSpPr>
+        <p:spPr>
+          <a:xfrm>
+            <a:off x="8113776" y="1801368"/>
+            <a:ext cx="54864" cy="438912"/>
+          </a:xfrm>
+          <a:prstGeom prst="rect">
+            <a:avLst/>
+          </a:prstGeom>
+          <a:solidFill>
+            <a:srgbClr val="FFBE55"/>
+          </a:solidFill>
+          <a:ln>
+            <a:noFill/>
+          </a:ln>
+        </p:spPr>
+        <p:style>
+          <a:lnRef idx="1">
+            <a:schemeClr val="accent1"/>
+          </a:lnRef>
+          <a:fillRef idx="3">
+            <a:schemeClr val="accent1"/>
+          </a:fillRef>
+          <a:effectRef idx="2">
+            <a:schemeClr val="accent1"/>
+          </a:effectRef>
+          <a:fontRef idx="minor">
+            <a:schemeClr val="lt1"/>
+          </a:fontRef>
+        </p:style>
+        <p:txBody>
+          <a:bodyPr rtlCol="0" anchor="ctr"/>
+          <a:lstStyle/>
+          <a:p>
+            <a:pPr algn="ctr"/>
+          </a:p>
+        </p:txBody>
+      </p:sp>
+      <p:sp>
+        <p:nvSpPr>
+          <p:cNvPr id="11" name="Rounded Rectangle 10"/>
+          <p:cNvSpPr/>
+          <p:nvPr/>
+        </p:nvSpPr>
+        <p:spPr>
+          <a:xfrm>
+            <a:off x="658368" y="3730752"/>
+            <a:ext cx="3581400" cy="1965960"/>
+          </a:xfrm>
+          <a:prstGeom prst="roundRect">
+            <a:avLst/>
+          </a:prstGeom>
+          <a:solidFill>
+            <a:srgbClr val="10243C"/>
+          </a:solidFill>
+          <a:ln>
+            <a:solidFill>
+              <a:srgbClr val="294B68"/>
+            </a:solidFill>
+          </a:ln>
+        </p:spPr>
+        <p:style>
+          <a:lnRef idx="1">
+            <a:schemeClr val="accent1"/>
+          </a:lnRef>
+          <a:fillRef idx="3">
+            <a:schemeClr val="accent1"/>
+          </a:fillRef>
+          <a:effectRef idx="2">
+            <a:schemeClr val="accent1"/>
+          </a:effectRef>
+          <a:fontRef idx="minor">
+            <a:schemeClr val="lt1"/>
+          </a:fontRef>
+        </p:style>
+        <p:txBody>
+          <a:bodyPr rtlCol="0" anchor="ctr" lIns="228600" rIns="182880" tIns="164592"/>
+          <a:lstStyle/>
+          <a:p>
+            <a:pPr algn="ctr">
+              <a:defRPr sz="1200" b="1">
+                <a:solidFill>
+                  <a:srgbClr val="46D6C8"/>
+                </a:solidFill>
+              </a:defRPr>
+            </a:pPr>
+            <a:r>
+              <a:t>任务</a:t>
+            </a:r>
+          </a:p>
+          <a:p>
+            <a:pPr>
+              <a:spcBef>
+                <a:spcPts val="800"/>
+              </a:spcBef>
+              <a:defRPr sz="1500">
+                <a:solidFill>
+                  <a:srgbClr val="F4F8FC"/>
+                </a:solidFill>
+              </a:defRPr>
+            </a:pPr>
+            <a:r>
+              <a:t>最低覆盖：查询、收集、修改、取消、投诉、歧义澄清、人工升级</a:t>
+            </a:r>
+          </a:p>
+        </p:txBody>
+      </p:sp>
+      <p:sp>
+        <p:nvSpPr>
+          <p:cNvPr id="12" name="Rectangle 11"/>
+          <p:cNvSpPr/>
+          <p:nvPr/>
+        </p:nvSpPr>
+        <p:spPr>
+          <a:xfrm>
+            <a:off x="658368" y="3931920"/>
+            <a:ext cx="54864" cy="438912"/>
+          </a:xfrm>
+          <a:prstGeom prst="rect">
+            <a:avLst/>
+          </a:prstGeom>
+          <a:solidFill>
+            <a:srgbClr val="46D6C8"/>
+          </a:solidFill>
+          <a:ln>
+            <a:noFill/>
+          </a:ln>
+        </p:spPr>
+        <p:style>
+          <a:lnRef idx="1">
+            <a:schemeClr val="accent1"/>
+          </a:lnRef>
+          <a:fillRef idx="3">
+            <a:schemeClr val="accent1"/>
+          </a:fillRef>
+          <a:effectRef idx="2">
+            <a:schemeClr val="accent1"/>
+          </a:effectRef>
+          <a:fontRef idx="minor">
+            <a:schemeClr val="lt1"/>
+          </a:fontRef>
+        </p:style>
+        <p:txBody>
+          <a:bodyPr rtlCol="0" anchor="ctr"/>
+          <a:lstStyle/>
+          <a:p>
+            <a:pPr algn="ctr"/>
+          </a:p>
+        </p:txBody>
+      </p:sp>
+      <p:sp>
+        <p:nvSpPr>
+          <p:cNvPr id="13" name="Rounded Rectangle 12"/>
+          <p:cNvSpPr/>
+          <p:nvPr/>
+        </p:nvSpPr>
+        <p:spPr>
+          <a:xfrm>
+            <a:off x="4386071" y="3730752"/>
+            <a:ext cx="3581400" cy="1965960"/>
+          </a:xfrm>
+          <a:prstGeom prst="roundRect">
+            <a:avLst/>
+          </a:prstGeom>
+          <a:solidFill>
+            <a:srgbClr val="10243C"/>
+          </a:solidFill>
+          <a:ln>
+            <a:solidFill>
+              <a:srgbClr val="294B68"/>
+            </a:solidFill>
+          </a:ln>
+        </p:spPr>
+        <p:style>
+          <a:lnRef idx="1">
+            <a:schemeClr val="accent1"/>
+          </a:lnRef>
+          <a:fillRef idx="3">
+            <a:schemeClr val="accent1"/>
+          </a:fillRef>
+          <a:effectRef idx="2">
+            <a:schemeClr val="accent1"/>
+          </a:effectRef>
+          <a:fontRef idx="minor">
+            <a:schemeClr val="lt1"/>
+          </a:fontRef>
+        </p:style>
+        <p:txBody>
+          <a:bodyPr rtlCol="0" anchor="ctr" lIns="228600" rIns="182880" tIns="164592"/>
+          <a:lstStyle/>
+          <a:p>
+            <a:pPr algn="ctr">
+              <a:defRPr sz="1200" b="1">
+                <a:solidFill>
+                  <a:srgbClr val="55A7FF"/>
+                </a:solidFill>
+              </a:defRPr>
+            </a:pPr>
+            <a:r>
+              <a:t>攻击</a:t>
+            </a:r>
+          </a:p>
+          <a:p>
+            <a:pPr>
+              <a:spcBef>
+                <a:spcPts val="800"/>
+              </a:spcBef>
+              <a:defRPr sz="1500">
+                <a:solidFill>
+                  <a:srgbClr val="F4F8FC"/>
+                </a:solidFill>
+              </a:defRPr>
+            </a:pPr>
+            <a:r>
+              <a:t>最低覆盖：提示注入、越权工具、身份冒充、背景音指令、敏感数据套取</a:t>
+            </a:r>
+          </a:p>
+        </p:txBody>
+      </p:sp>
+      <p:sp>
+        <p:nvSpPr>
+          <p:cNvPr id="14" name="Rectangle 13"/>
+          <p:cNvSpPr/>
+          <p:nvPr/>
+        </p:nvSpPr>
+        <p:spPr>
+          <a:xfrm>
+            <a:off x="4386071" y="3931920"/>
+            <a:ext cx="54864" cy="438912"/>
+          </a:xfrm>
+          <a:prstGeom prst="rect">
+            <a:avLst/>
+          </a:prstGeom>
+          <a:solidFill>
+            <a:srgbClr val="55A7FF"/>
+          </a:solidFill>
+          <a:ln>
+            <a:noFill/>
+          </a:ln>
+        </p:spPr>
+        <p:style>
+          <a:lnRef idx="1">
+            <a:schemeClr val="accent1"/>
+          </a:lnRef>
+          <a:fillRef idx="3">
+            <a:schemeClr val="accent1"/>
+          </a:fillRef>
+          <a:effectRef idx="2">
+            <a:schemeClr val="accent1"/>
+          </a:effectRef>
+          <a:fontRef idx="minor">
+            <a:schemeClr val="lt1"/>
+          </a:fontRef>
+        </p:style>
+        <p:txBody>
+          <a:bodyPr rtlCol="0" anchor="ctr"/>
+          <a:lstStyle/>
+          <a:p>
+            <a:pPr algn="ctr"/>
+          </a:p>
+        </p:txBody>
+      </p:sp>
+      <p:sp>
+        <p:nvSpPr>
+          <p:cNvPr id="15" name="Rounded Rectangle 14"/>
+          <p:cNvSpPr/>
+          <p:nvPr/>
+        </p:nvSpPr>
+        <p:spPr>
+          <a:xfrm>
+            <a:off x="8113776" y="3730752"/>
+            <a:ext cx="3581400" cy="1965960"/>
+          </a:xfrm>
+          <a:prstGeom prst="roundRect">
+            <a:avLst/>
+          </a:prstGeom>
+          <a:solidFill>
+            <a:srgbClr val="10243C"/>
+          </a:solidFill>
+          <a:ln>
+            <a:solidFill>
+              <a:srgbClr val="294B68"/>
+            </a:solidFill>
+          </a:ln>
+        </p:spPr>
+        <p:style>
+          <a:lnRef idx="1">
+            <a:schemeClr val="accent1"/>
+          </a:lnRef>
+          <a:fillRef idx="3">
+            <a:schemeClr val="accent1"/>
+          </a:fillRef>
+          <a:effectRef idx="2">
+            <a:schemeClr val="accent1"/>
+          </a:effectRef>
+          <a:fontRef idx="minor">
+            <a:schemeClr val="lt1"/>
+          </a:fontRef>
+        </p:style>
+        <p:txBody>
+          <a:bodyPr rtlCol="0" anchor="ctr" lIns="228600" rIns="182880" tIns="164592"/>
+          <a:lstStyle/>
+          <a:p>
+            <a:pPr algn="ctr">
+              <a:defRPr sz="1200" b="1">
+                <a:solidFill>
+                  <a:srgbClr val="FFBE55"/>
+                </a:solidFill>
+              </a:defRPr>
+            </a:pPr>
+            <a:r>
+              <a:t>指标</a:t>
+            </a:r>
+          </a:p>
+          <a:p>
+            <a:pPr>
+              <a:spcBef>
+                <a:spcPts val="800"/>
+              </a:spcBef>
+              <a:defRPr sz="1500">
+                <a:solidFill>
+                  <a:srgbClr val="F4F8FC"/>
+                </a:solidFill>
+              </a:defRPr>
+            </a:pPr>
+            <a:r>
+              <a:t>最低覆盖：任务成功、字段准确、首音/打断P50/P95、工具正确率、事实错误、转人工、成本</a:t>
+            </a:r>
+          </a:p>
+        </p:txBody>
+      </p:sp>
+      <p:sp>
+        <p:nvSpPr>
+          <p:cNvPr id="16" name="Rectangle 15"/>
+          <p:cNvSpPr/>
+          <p:nvPr/>
+        </p:nvSpPr>
+        <p:spPr>
+          <a:xfrm>
+            <a:off x="8113776" y="3931920"/>
+            <a:ext cx="54864" cy="438912"/>
+          </a:xfrm>
+          <a:prstGeom prst="rect">
+            <a:avLst/>
+          </a:prstGeom>
+          <a:solidFill>
+            <a:srgbClr val="FFBE55"/>
+          </a:solidFill>
+          <a:ln>
+            <a:noFill/>
+          </a:ln>
+        </p:spPr>
+        <p:style>
+          <a:lnRef idx="1">
+            <a:schemeClr val="accent1"/>
+          </a:lnRef>
+          <a:fillRef idx="3">
+            <a:schemeClr val="accent1"/>
+          </a:fillRef>
+          <a:effectRef idx="2">
+            <a:schemeClr val="accent1"/>
+          </a:effectRef>
+          <a:fontRef idx="minor">
+            <a:schemeClr val="lt1"/>
+          </a:fontRef>
+        </p:style>
+        <p:txBody>
+          <a:bodyPr rtlCol="0" anchor="ctr"/>
+          <a:lstStyle/>
+          <a:p>
+            <a:pPr algn="ctr"/>
+          </a:p>
+        </p:txBody>
+      </p:sp>
+      <p:sp>
+        <p:nvSpPr>
+          <p:cNvPr id="17" name="TextBox 16"/>
+          <p:cNvSpPr txBox="1"/>
+          <p:nvPr/>
+        </p:nvSpPr>
+        <p:spPr>
+          <a:xfrm>
+            <a:off x="10881360" y="6327648"/>
+            <a:ext cx="594360" cy="228600"/>
+          </a:xfrm>
+          <a:prstGeom prst="rect">
+            <a:avLst/>
+          </a:prstGeom>
+          <a:noFill/>
+        </p:spPr>
+        <p:txBody>
+          <a:bodyPr wrap="none">
+            <a:spAutoFit/>
+          </a:bodyPr>
+          <a:lstStyle/>
+          <a:p>
+            <a:pPr>
+              <a:defRPr sz="900">
+                <a:solidFill>
+                  <a:srgbClr val="9AB2C8"/>
+                </a:solidFill>
+              </a:defRPr>
+            </a:pPr>
+            <a:r>
+              <a:t>16 / 18</a:t>
+            </a:r>
+          </a:p>
+        </p:txBody>
+      </p:sp>
+    </p:spTree>
+  </p:cSld>
+  <p:clrMapOvr>
+    <a:masterClrMapping/>
+  </p:clrMapOvr>
+</p:sld>
+</file>
+
+<file path=ppt/slides/slide17.xml><?xml version="1.0" encoding="utf-8"?>
+<p:sld xmlns:a="http://schemas.openxmlformats.org/drawingml/2006/main" xmlns:p="http://schemas.openxmlformats.org/presentationml/2006/main" xmlns:r="http://schemas.openxmlformats.org/officeDocument/2006/relationships">
+  <p:cSld>
+    <p:bg>
+      <p:bgPr>
+        <a:solidFill>
+          <a:srgbClr val="07111F"/>
+        </a:solidFill>
+        <a:effectLst/>
+      </p:bgPr>
+    </p:bg>
+    <p:spTree>
+      <p:nvGrpSpPr>
+        <p:cNvPr id="1" name=""/>
+        <p:cNvGrpSpPr/>
+        <p:nvPr/>
+      </p:nvGrpSpPr>
+      <p:grpSpPr/>
+      <p:sp>
+        <p:nvSpPr>
+          <p:cNvPr id="2" name="Rectangle 1"/>
+          <p:cNvSpPr/>
+          <p:nvPr/>
+        </p:nvSpPr>
+        <p:spPr>
+          <a:xfrm>
+            <a:off x="0" y="0"/>
+            <a:ext cx="109728" cy="6858000"/>
+          </a:xfrm>
+          <a:prstGeom prst="rect">
+            <a:avLst/>
+          </a:prstGeom>
+          <a:solidFill>
+            <a:srgbClr val="46D6C8"/>
+          </a:solidFill>
+          <a:ln>
+            <a:noFill/>
+          </a:ln>
+        </p:spPr>
+        <p:style>
+          <a:lnRef idx="1">
+            <a:schemeClr val="accent1"/>
+          </a:lnRef>
+          <a:fillRef idx="3">
+            <a:schemeClr val="accent1"/>
+          </a:fillRef>
+          <a:effectRef idx="2">
+            <a:schemeClr val="accent1"/>
+          </a:effectRef>
+          <a:fontRef idx="minor">
+            <a:schemeClr val="lt1"/>
+          </a:fontRef>
+        </p:style>
+        <p:txBody>
+          <a:bodyPr rtlCol="0" anchor="ctr"/>
+          <a:lstStyle/>
+          <a:p>
+            <a:pPr algn="ctr"/>
+          </a:p>
+        </p:txBody>
+      </p:sp>
+      <p:sp>
+        <p:nvSpPr>
+          <p:cNvPr id="3" name="TextBox 2"/>
+          <p:cNvSpPr txBox="1"/>
+          <p:nvPr/>
+        </p:nvSpPr>
+        <p:spPr>
+          <a:xfrm>
+            <a:off x="658368" y="310896"/>
+            <a:ext cx="5943600" cy="274320"/>
+          </a:xfrm>
+          <a:prstGeom prst="rect">
+            <a:avLst/>
+          </a:prstGeom>
+          <a:noFill/>
+        </p:spPr>
+        <p:txBody>
+          <a:bodyPr wrap="none">
+            <a:spAutoFit/>
+          </a:bodyPr>
+          <a:lstStyle/>
+          <a:p>
+            <a:pPr>
+              <a:defRPr sz="900" b="1">
+                <a:solidFill>
+                  <a:srgbClr val="46D6C8"/>
+                </a:solidFill>
+              </a:defRPr>
+            </a:pPr>
+            <a:r>
+              <a:t>GPT-LIVE  /  APPLICATION RESEARCH</a:t>
+            </a:r>
+          </a:p>
+        </p:txBody>
+      </p:sp>
+      <p:sp>
+        <p:nvSpPr>
+          <p:cNvPr id="4" name="TextBox 3"/>
+          <p:cNvSpPr txBox="1"/>
+          <p:nvPr/>
+        </p:nvSpPr>
+        <p:spPr>
+          <a:xfrm>
+            <a:off x="658368" y="685800"/>
+            <a:ext cx="10698480" cy="658368"/>
+          </a:xfrm>
+          <a:prstGeom prst="rect">
+            <a:avLst/>
+          </a:prstGeom>
+          <a:noFill/>
+        </p:spPr>
+        <p:txBody>
+          <a:bodyPr wrap="none">
+            <a:spAutoFit/>
+          </a:bodyPr>
+          <a:lstStyle/>
+          <a:p>
+            <a:pPr algn="l">
+              <a:defRPr sz="2700" b="1">
+                <a:solidFill>
+                  <a:srgbClr val="F4F8FC"/>
+                </a:solidFill>
+              </a:defRPr>
+            </a:pPr>
+            <a:r>
+              <a:t>附录B：主要参考资料</a:t>
+            </a:r>
+          </a:p>
+        </p:txBody>
+      </p:sp>
+      <p:sp>
+        <p:nvSpPr>
+          <p:cNvPr id="5" name="Rounded Rectangle 4"/>
+          <p:cNvSpPr/>
+          <p:nvPr/>
+        </p:nvSpPr>
+        <p:spPr>
+          <a:xfrm>
+            <a:off x="658368" y="1600200"/>
+            <a:ext cx="3581400" cy="1965960"/>
+          </a:xfrm>
+          <a:prstGeom prst="roundRect">
+            <a:avLst/>
+          </a:prstGeom>
+          <a:solidFill>
+            <a:srgbClr val="10243C"/>
+          </a:solidFill>
+          <a:ln>
+            <a:solidFill>
+              <a:srgbClr val="294B68"/>
+            </a:solidFill>
+          </a:ln>
+        </p:spPr>
+        <p:style>
+          <a:lnRef idx="1">
+            <a:schemeClr val="accent1"/>
+          </a:lnRef>
+          <a:fillRef idx="3">
+            <a:schemeClr val="accent1"/>
+          </a:fillRef>
+          <a:effectRef idx="2">
+            <a:schemeClr val="accent1"/>
+          </a:effectRef>
+          <a:fontRef idx="minor">
+            <a:schemeClr val="lt1"/>
+          </a:fontRef>
+        </p:style>
+        <p:txBody>
+          <a:bodyPr rtlCol="0" anchor="ctr" lIns="228600" rIns="182880" tIns="164592"/>
+          <a:lstStyle/>
+          <a:p>
+            <a:pPr algn="ctr">
+              <a:defRPr sz="1200" b="1">
+                <a:solidFill>
+                  <a:srgbClr val="46D6C8"/>
+                </a:solidFill>
+              </a:defRPr>
+            </a:pPr>
+            <a:r>
+              <a:t>01</a:t>
+            </a:r>
+          </a:p>
+          <a:p>
+            <a:pPr>
+              <a:spcBef>
+                <a:spcPts val="800"/>
+              </a:spcBef>
+              <a:defRPr sz="1500">
+                <a:solidFill>
+                  <a:srgbClr val="F4F8FC"/>
+                </a:solidFill>
+              </a:defRPr>
+            </a:pPr>
+            <a:r>
+              <a:t>OpenAI：Introducing GPT‑Live (https://openai.com/index/introducing-gpt-live/)</a:t>
+            </a:r>
+          </a:p>
+        </p:txBody>
+      </p:sp>
+      <p:sp>
+        <p:nvSpPr>
+          <p:cNvPr id="6" name="Rectangle 5"/>
+          <p:cNvSpPr/>
+          <p:nvPr/>
+        </p:nvSpPr>
+        <p:spPr>
+          <a:xfrm>
+            <a:off x="658368" y="1801368"/>
+            <a:ext cx="54864" cy="438912"/>
+          </a:xfrm>
+          <a:prstGeom prst="rect">
+            <a:avLst/>
+          </a:prstGeom>
+          <a:solidFill>
+            <a:srgbClr val="46D6C8"/>
+          </a:solidFill>
+          <a:ln>
+            <a:noFill/>
+          </a:ln>
+        </p:spPr>
+        <p:style>
+          <a:lnRef idx="1">
+            <a:schemeClr val="accent1"/>
+          </a:lnRef>
+          <a:fillRef idx="3">
+            <a:schemeClr val="accent1"/>
+          </a:fillRef>
+          <a:effectRef idx="2">
+            <a:schemeClr val="accent1"/>
+          </a:effectRef>
+          <a:fontRef idx="minor">
+            <a:schemeClr val="lt1"/>
+          </a:fontRef>
+        </p:style>
+        <p:txBody>
+          <a:bodyPr rtlCol="0" anchor="ctr"/>
+          <a:lstStyle/>
+          <a:p>
+            <a:pPr algn="ctr"/>
+          </a:p>
+        </p:txBody>
+      </p:sp>
+      <p:sp>
+        <p:nvSpPr>
+          <p:cNvPr id="7" name="Rounded Rectangle 6"/>
+          <p:cNvSpPr/>
+          <p:nvPr/>
+        </p:nvSpPr>
+        <p:spPr>
+          <a:xfrm>
+            <a:off x="4386071" y="1600200"/>
+            <a:ext cx="3581400" cy="1965960"/>
+          </a:xfrm>
+          <a:prstGeom prst="roundRect">
+            <a:avLst/>
+          </a:prstGeom>
+          <a:solidFill>
+            <a:srgbClr val="10243C"/>
+          </a:solidFill>
+          <a:ln>
+            <a:solidFill>
+              <a:srgbClr val="294B68"/>
+            </a:solidFill>
+          </a:ln>
+        </p:spPr>
+        <p:style>
+          <a:lnRef idx="1">
+            <a:schemeClr val="accent1"/>
+          </a:lnRef>
+          <a:fillRef idx="3">
+            <a:schemeClr val="accent1"/>
+          </a:fillRef>
+          <a:effectRef idx="2">
+            <a:schemeClr val="accent1"/>
+          </a:effectRef>
+          <a:fontRef idx="minor">
+            <a:schemeClr val="lt1"/>
+          </a:fontRef>
+        </p:style>
+        <p:txBody>
+          <a:bodyPr rtlCol="0" anchor="ctr" lIns="228600" rIns="182880" tIns="164592"/>
+          <a:lstStyle/>
+          <a:p>
+            <a:pPr algn="ctr">
+              <a:defRPr sz="1200" b="1">
+                <a:solidFill>
+                  <a:srgbClr val="55A7FF"/>
+                </a:solidFill>
+              </a:defRPr>
+            </a:pPr>
+            <a:r>
+              <a:t>02</a:t>
+            </a:r>
+          </a:p>
+          <a:p>
+            <a:pPr>
+              <a:spcBef>
+                <a:spcPts val="800"/>
+              </a:spcBef>
+              <a:defRPr sz="1500">
+                <a:solidFill>
+                  <a:srgbClr val="F4F8FC"/>
+                </a:solidFill>
+              </a:defRPr>
+            </a:pPr>
+            <a:r>
+              <a:t>OpenAI：GPT‑Live System Card (https://deploymentsafety.openai.com/gpt-live)</a:t>
+            </a:r>
+          </a:p>
+        </p:txBody>
+      </p:sp>
+      <p:sp>
+        <p:nvSpPr>
+          <p:cNvPr id="8" name="Rectangle 7"/>
+          <p:cNvSpPr/>
+          <p:nvPr/>
+        </p:nvSpPr>
+        <p:spPr>
+          <a:xfrm>
+            <a:off x="4386071" y="1801368"/>
+            <a:ext cx="54864" cy="438912"/>
+          </a:xfrm>
+          <a:prstGeom prst="rect">
+            <a:avLst/>
+          </a:prstGeom>
+          <a:solidFill>
+            <a:srgbClr val="55A7FF"/>
+          </a:solidFill>
+          <a:ln>
+            <a:noFill/>
+          </a:ln>
+        </p:spPr>
+        <p:style>
+          <a:lnRef idx="1">
+            <a:schemeClr val="accent1"/>
+          </a:lnRef>
+          <a:fillRef idx="3">
+            <a:schemeClr val="accent1"/>
+          </a:fillRef>
+          <a:effectRef idx="2">
+            <a:schemeClr val="accent1"/>
+          </a:effectRef>
+          <a:fontRef idx="minor">
+            <a:schemeClr val="lt1"/>
+          </a:fontRef>
+        </p:style>
+        <p:txBody>
+          <a:bodyPr rtlCol="0" anchor="ctr"/>
+          <a:lstStyle/>
+          <a:p>
+            <a:pPr algn="ctr"/>
+          </a:p>
+        </p:txBody>
+      </p:sp>
+      <p:sp>
+        <p:nvSpPr>
+          <p:cNvPr id="9" name="Rounded Rectangle 8"/>
+          <p:cNvSpPr/>
+          <p:nvPr/>
+        </p:nvSpPr>
+        <p:spPr>
+          <a:xfrm>
+            <a:off x="8113776" y="1600200"/>
+            <a:ext cx="3581400" cy="1965960"/>
+          </a:xfrm>
+          <a:prstGeom prst="roundRect">
+            <a:avLst/>
+          </a:prstGeom>
+          <a:solidFill>
+            <a:srgbClr val="10243C"/>
+          </a:solidFill>
+          <a:ln>
+            <a:solidFill>
+              <a:srgbClr val="294B68"/>
+            </a:solidFill>
+          </a:ln>
+        </p:spPr>
+        <p:style>
+          <a:lnRef idx="1">
+            <a:schemeClr val="accent1"/>
+          </a:lnRef>
+          <a:fillRef idx="3">
+            <a:schemeClr val="accent1"/>
+          </a:fillRef>
+          <a:effectRef idx="2">
+            <a:schemeClr val="accent1"/>
+          </a:effectRef>
+          <a:fontRef idx="minor">
+            <a:schemeClr val="lt1"/>
+          </a:fontRef>
+        </p:style>
+        <p:txBody>
+          <a:bodyPr rtlCol="0" anchor="ctr" lIns="228600" rIns="182880" tIns="164592"/>
+          <a:lstStyle/>
+          <a:p>
+            <a:pPr algn="ctr">
+              <a:defRPr sz="1200" b="1">
+                <a:solidFill>
+                  <a:srgbClr val="FFBE55"/>
+                </a:solidFill>
+              </a:defRPr>
+            </a:pPr>
+            <a:r>
+              <a:t>03</a:t>
+            </a:r>
+          </a:p>
+          <a:p>
+            <a:pPr>
+              <a:spcBef>
+                <a:spcPts val="800"/>
+              </a:spcBef>
+              <a:defRPr sz="1100">
+                <a:solidFill>
+                  <a:srgbClr val="F4F8FC"/>
+                </a:solidFill>
+              </a:defRPr>
+            </a:pPr>
+            <a:r>
+              <a:t>OpenAI：ChatGPT Voice帮助中心 (https://help.openai.com/en/articles/20001274-chatgpt-voice)</a:t>
+            </a:r>
+          </a:p>
+        </p:txBody>
+      </p:sp>
+      <p:sp>
+        <p:nvSpPr>
+          <p:cNvPr id="10" name="Rectangle 9"/>
+          <p:cNvSpPr/>
+          <p:nvPr/>
+        </p:nvSpPr>
+        <p:spPr>
+          <a:xfrm>
+            <a:off x="8113776" y="1801368"/>
+            <a:ext cx="54864" cy="438912"/>
+          </a:xfrm>
+          <a:prstGeom prst="rect">
+            <a:avLst/>
+          </a:prstGeom>
+          <a:solidFill>
+            <a:srgbClr val="FFBE55"/>
+          </a:solidFill>
+          <a:ln>
+            <a:noFill/>
+          </a:ln>
+        </p:spPr>
+        <p:style>
+          <a:lnRef idx="1">
+            <a:schemeClr val="accent1"/>
+          </a:lnRef>
+          <a:fillRef idx="3">
+            <a:schemeClr val="accent1"/>
+          </a:fillRef>
+          <a:effectRef idx="2">
+            <a:schemeClr val="accent1"/>
+          </a:effectRef>
+          <a:fontRef idx="minor">
+            <a:schemeClr val="lt1"/>
+          </a:fontRef>
+        </p:style>
+        <p:txBody>
+          <a:bodyPr rtlCol="0" anchor="ctr"/>
+          <a:lstStyle/>
+          <a:p>
+            <a:pPr algn="ctr"/>
+          </a:p>
+        </p:txBody>
+      </p:sp>
+      <p:sp>
+        <p:nvSpPr>
+          <p:cNvPr id="11" name="Rounded Rectangle 10"/>
+          <p:cNvSpPr/>
+          <p:nvPr/>
+        </p:nvSpPr>
+        <p:spPr>
+          <a:xfrm>
+            <a:off x="658368" y="3730752"/>
+            <a:ext cx="3581400" cy="1965960"/>
+          </a:xfrm>
+          <a:prstGeom prst="roundRect">
+            <a:avLst/>
+          </a:prstGeom>
+          <a:solidFill>
+            <a:srgbClr val="10243C"/>
+          </a:solidFill>
+          <a:ln>
+            <a:solidFill>
+              <a:srgbClr val="294B68"/>
+            </a:solidFill>
+          </a:ln>
+        </p:spPr>
+        <p:style>
+          <a:lnRef idx="1">
+            <a:schemeClr val="accent1"/>
+          </a:lnRef>
+          <a:fillRef idx="3">
+            <a:schemeClr val="accent1"/>
+          </a:fillRef>
+          <a:effectRef idx="2">
+            <a:schemeClr val="accent1"/>
+          </a:effectRef>
+          <a:fontRef idx="minor">
+            <a:schemeClr val="lt1"/>
+          </a:fontRef>
+        </p:style>
+        <p:txBody>
+          <a:bodyPr rtlCol="0" anchor="ctr" lIns="228600" rIns="182880" tIns="164592"/>
+          <a:lstStyle/>
+          <a:p>
+            <a:pPr algn="ctr">
+              <a:defRPr sz="1200" b="1">
+                <a:solidFill>
+                  <a:srgbClr val="46D6C8"/>
+                </a:solidFill>
+              </a:defRPr>
+            </a:pPr>
+            <a:r>
+              <a:t>04</a:t>
+            </a:r>
+          </a:p>
+          <a:p>
+            <a:pPr>
+              <a:spcBef>
+                <a:spcPts val="800"/>
+              </a:spcBef>
+              <a:defRPr sz="1100">
+                <a:solidFill>
+                  <a:srgbClr val="F4F8FC"/>
+                </a:solidFill>
+              </a:defRPr>
+            </a:pPr>
+            <a:r>
+              <a:t>OpenAI：Realtime and audio开发指南 (https://developers.openai.com/api/docs/guides/realtime)</a:t>
+            </a:r>
+          </a:p>
+        </p:txBody>
+      </p:sp>
+      <p:sp>
+        <p:nvSpPr>
+          <p:cNvPr id="12" name="Rectangle 11"/>
+          <p:cNvSpPr/>
+          <p:nvPr/>
+        </p:nvSpPr>
+        <p:spPr>
+          <a:xfrm>
+            <a:off x="658368" y="3931920"/>
+            <a:ext cx="54864" cy="438912"/>
+          </a:xfrm>
+          <a:prstGeom prst="rect">
+            <a:avLst/>
+          </a:prstGeom>
+          <a:solidFill>
+            <a:srgbClr val="46D6C8"/>
+          </a:solidFill>
+          <a:ln>
+            <a:noFill/>
+          </a:ln>
+        </p:spPr>
+        <p:style>
+          <a:lnRef idx="1">
+            <a:schemeClr val="accent1"/>
+          </a:lnRef>
+          <a:fillRef idx="3">
+            <a:schemeClr val="accent1"/>
+          </a:fillRef>
+          <a:effectRef idx="2">
+            <a:schemeClr val="accent1"/>
+          </a:effectRef>
+          <a:fontRef idx="minor">
+            <a:schemeClr val="lt1"/>
+          </a:fontRef>
+        </p:style>
+        <p:txBody>
+          <a:bodyPr rtlCol="0" anchor="ctr"/>
+          <a:lstStyle/>
+          <a:p>
+            <a:pPr algn="ctr"/>
+          </a:p>
+        </p:txBody>
+      </p:sp>
+      <p:sp>
+        <p:nvSpPr>
+          <p:cNvPr id="13" name="Rounded Rectangle 12"/>
+          <p:cNvSpPr/>
+          <p:nvPr/>
+        </p:nvSpPr>
+        <p:spPr>
+          <a:xfrm>
+            <a:off x="4386071" y="3730752"/>
+            <a:ext cx="3581400" cy="1965960"/>
+          </a:xfrm>
+          <a:prstGeom prst="roundRect">
+            <a:avLst/>
+          </a:prstGeom>
+          <a:solidFill>
+            <a:srgbClr val="10243C"/>
+          </a:solidFill>
+          <a:ln>
+            <a:solidFill>
+              <a:srgbClr val="294B68"/>
+            </a:solidFill>
+          </a:ln>
+        </p:spPr>
+        <p:style>
+          <a:lnRef idx="1">
+            <a:schemeClr val="accent1"/>
+          </a:lnRef>
+          <a:fillRef idx="3">
+            <a:schemeClr val="accent1"/>
+          </a:fillRef>
+          <a:effectRef idx="2">
+            <a:schemeClr val="accent1"/>
+          </a:effectRef>
+          <a:fontRef idx="minor">
+            <a:schemeClr val="lt1"/>
+          </a:fontRef>
+        </p:style>
+        <p:txBody>
+          <a:bodyPr rtlCol="0" anchor="ctr" lIns="228600" rIns="182880" tIns="164592"/>
+          <a:lstStyle/>
+          <a:p>
+            <a:pPr algn="ctr">
+              <a:defRPr sz="1200" b="1">
+                <a:solidFill>
+                  <a:srgbClr val="55A7FF"/>
+                </a:solidFill>
+              </a:defRPr>
+            </a:pPr>
+            <a:r>
+              <a:t>05</a:t>
+            </a:r>
+          </a:p>
+          <a:p>
+            <a:pPr>
+              <a:spcBef>
+                <a:spcPts val="800"/>
+              </a:spcBef>
+              <a:defRPr sz="1100">
+                <a:solidFill>
+                  <a:srgbClr val="F4F8FC"/>
+                </a:solidFill>
+              </a:defRPr>
+            </a:pPr>
+            <a:r>
+              <a:t>OpenAI：Introducing gpt‑realtime (https://openai.com/index/introducing-gpt-realtime/)</a:t>
+            </a:r>
+          </a:p>
+        </p:txBody>
+      </p:sp>
+      <p:sp>
+        <p:nvSpPr>
+          <p:cNvPr id="14" name="Rectangle 13"/>
+          <p:cNvSpPr/>
+          <p:nvPr/>
+        </p:nvSpPr>
+        <p:spPr>
+          <a:xfrm>
+            <a:off x="4386071" y="3931920"/>
+            <a:ext cx="54864" cy="438912"/>
+          </a:xfrm>
+          <a:prstGeom prst="rect">
+            <a:avLst/>
+          </a:prstGeom>
+          <a:solidFill>
+            <a:srgbClr val="55A7FF"/>
+          </a:solidFill>
+          <a:ln>
+            <a:noFill/>
+          </a:ln>
+        </p:spPr>
+        <p:style>
+          <a:lnRef idx="1">
+            <a:schemeClr val="accent1"/>
+          </a:lnRef>
+          <a:fillRef idx="3">
+            <a:schemeClr val="accent1"/>
+          </a:fillRef>
+          <a:effectRef idx="2">
+            <a:schemeClr val="accent1"/>
+          </a:effectRef>
+          <a:fontRef idx="minor">
+            <a:schemeClr val="lt1"/>
+          </a:fontRef>
+        </p:style>
+        <p:txBody>
+          <a:bodyPr rtlCol="0" anchor="ctr"/>
+          <a:lstStyle/>
+          <a:p>
+            <a:pPr algn="ctr"/>
+          </a:p>
+        </p:txBody>
+      </p:sp>
+      <p:sp>
+        <p:nvSpPr>
+          <p:cNvPr id="15" name="Rounded Rectangle 14"/>
+          <p:cNvSpPr/>
+          <p:nvPr/>
+        </p:nvSpPr>
+        <p:spPr>
+          <a:xfrm>
+            <a:off x="8113776" y="3730752"/>
+            <a:ext cx="3581400" cy="1965960"/>
+          </a:xfrm>
+          <a:prstGeom prst="roundRect">
+            <a:avLst/>
+          </a:prstGeom>
+          <a:solidFill>
+            <a:srgbClr val="10243C"/>
+          </a:solidFill>
+          <a:ln>
+            <a:solidFill>
+              <a:srgbClr val="294B68"/>
+            </a:solidFill>
+          </a:ln>
+        </p:spPr>
+        <p:style>
+          <a:lnRef idx="1">
+            <a:schemeClr val="accent1"/>
+          </a:lnRef>
+          <a:fillRef idx="3">
+            <a:schemeClr val="accent1"/>
+          </a:fillRef>
+          <a:effectRef idx="2">
+            <a:schemeClr val="accent1"/>
+          </a:effectRef>
+          <a:fontRef idx="minor">
+            <a:schemeClr val="lt1"/>
+          </a:fontRef>
+        </p:style>
+        <p:txBody>
+          <a:bodyPr rtlCol="0" anchor="ctr" lIns="228600" rIns="182880" tIns="164592"/>
+          <a:lstStyle/>
+          <a:p>
+            <a:pPr algn="ctr">
+              <a:defRPr sz="1200" b="1">
+                <a:solidFill>
+                  <a:srgbClr val="FFBE55"/>
+                </a:solidFill>
+              </a:defRPr>
+            </a:pPr>
+            <a:r>
+              <a:t>06</a:t>
+            </a:r>
+          </a:p>
+          <a:p>
+            <a:pPr>
+              <a:spcBef>
+                <a:spcPts val="800"/>
+              </a:spcBef>
+              <a:defRPr sz="1500">
+                <a:solidFill>
+                  <a:srgbClr val="F4F8FC"/>
+                </a:solidFill>
+              </a:defRPr>
+            </a:pPr>
+            <a:r>
+              <a:t>Google：Gemini Live API概览 (https://ai.google.dev/gemini-api/docs/live-api)</a:t>
+            </a:r>
+          </a:p>
+        </p:txBody>
+      </p:sp>
+      <p:sp>
+        <p:nvSpPr>
+          <p:cNvPr id="16" name="Rectangle 15"/>
+          <p:cNvSpPr/>
+          <p:nvPr/>
+        </p:nvSpPr>
+        <p:spPr>
+          <a:xfrm>
+            <a:off x="8113776" y="3931920"/>
+            <a:ext cx="54864" cy="438912"/>
+          </a:xfrm>
+          <a:prstGeom prst="rect">
+            <a:avLst/>
+          </a:prstGeom>
+          <a:solidFill>
+            <a:srgbClr val="FFBE55"/>
+          </a:solidFill>
+          <a:ln>
+            <a:noFill/>
+          </a:ln>
+        </p:spPr>
+        <p:style>
+          <a:lnRef idx="1">
+            <a:schemeClr val="accent1"/>
+          </a:lnRef>
+          <a:fillRef idx="3">
+            <a:schemeClr val="accent1"/>
+          </a:fillRef>
+          <a:effectRef idx="2">
+            <a:schemeClr val="accent1"/>
+          </a:effectRef>
+          <a:fontRef idx="minor">
+            <a:schemeClr val="lt1"/>
+          </a:fontRef>
+        </p:style>
+        <p:txBody>
+          <a:bodyPr rtlCol="0" anchor="ctr"/>
+          <a:lstStyle/>
+          <a:p>
+            <a:pPr algn="ctr"/>
+          </a:p>
+        </p:txBody>
+      </p:sp>
+      <p:sp>
+        <p:nvSpPr>
+          <p:cNvPr id="17" name="TextBox 16"/>
+          <p:cNvSpPr txBox="1"/>
+          <p:nvPr/>
+        </p:nvSpPr>
+        <p:spPr>
+          <a:xfrm>
+            <a:off x="10881360" y="6327648"/>
+            <a:ext cx="594360" cy="228600"/>
+          </a:xfrm>
+          <a:prstGeom prst="rect">
+            <a:avLst/>
+          </a:prstGeom>
+          <a:noFill/>
+        </p:spPr>
+        <p:txBody>
+          <a:bodyPr wrap="none">
+            <a:spAutoFit/>
+          </a:bodyPr>
+          <a:lstStyle/>
+          <a:p>
+            <a:pPr>
+              <a:defRPr sz="900">
+                <a:solidFill>
+                  <a:srgbClr val="9AB2C8"/>
+                </a:solidFill>
+              </a:defRPr>
+            </a:pPr>
+            <a:r>
+              <a:t>17 / 18</a:t>
+            </a:r>
+          </a:p>
+        </p:txBody>
+      </p:sp>
+    </p:spTree>
+  </p:cSld>
+  <p:clrMapOvr>
+    <a:masterClrMapping/>
+  </p:clrMapOvr>
+</p:sld>
+</file>
+
+<file path=ppt/slides/slide18.xml><?xml version="1.0" encoding="utf-8"?>
+<p:sld xmlns:a="http://schemas.openxmlformats.org/drawingml/2006/main" xmlns:p="http://schemas.openxmlformats.org/presentationml/2006/main" xmlns:r="http://schemas.openxmlformats.org/officeDocument/2006/relationships">
+  <p:cSld>
+    <p:bg>
+      <p:bgPr>
+        <a:solidFill>
+          <a:srgbClr val="07111F"/>
+        </a:solidFill>
+        <a:effectLst/>
+      </p:bgPr>
+    </p:bg>
+    <p:spTree>
+      <p:nvGrpSpPr>
+        <p:cNvPr id="1" name=""/>
+        <p:cNvGrpSpPr/>
+        <p:nvPr/>
+      </p:nvGrpSpPr>
+      <p:grpSpPr/>
+      <p:sp>
+        <p:nvSpPr>
+          <p:cNvPr id="2" name="Rectangle 1"/>
+          <p:cNvSpPr/>
+          <p:nvPr/>
+        </p:nvSpPr>
+        <p:spPr>
+          <a:xfrm>
+            <a:off x="0" y="0"/>
+            <a:ext cx="109728" cy="6858000"/>
+          </a:xfrm>
+          <a:prstGeom prst="rect">
+            <a:avLst/>
+          </a:prstGeom>
+          <a:solidFill>
+            <a:srgbClr val="46D6C8"/>
+          </a:solidFill>
+          <a:ln>
+            <a:noFill/>
+          </a:ln>
+        </p:spPr>
+        <p:style>
+          <a:lnRef idx="1">
+            <a:schemeClr val="accent1"/>
+          </a:lnRef>
+          <a:fillRef idx="3">
+            <a:schemeClr val="accent1"/>
+          </a:fillRef>
+          <a:effectRef idx="2">
+            <a:schemeClr val="accent1"/>
+          </a:effectRef>
+          <a:fontRef idx="minor">
+            <a:schemeClr val="lt1"/>
+          </a:fontRef>
+        </p:style>
+        <p:txBody>
+          <a:bodyPr rtlCol="0" anchor="ctr"/>
+          <a:lstStyle/>
+          <a:p>
+            <a:pPr algn="ctr"/>
+          </a:p>
+        </p:txBody>
+      </p:sp>
+      <p:sp>
+        <p:nvSpPr>
+          <p:cNvPr id="3" name="TextBox 2"/>
+          <p:cNvSpPr txBox="1"/>
+          <p:nvPr/>
+        </p:nvSpPr>
+        <p:spPr>
+          <a:xfrm>
+            <a:off x="658368" y="310896"/>
+            <a:ext cx="5943600" cy="274320"/>
+          </a:xfrm>
+          <a:prstGeom prst="rect">
+            <a:avLst/>
+          </a:prstGeom>
+          <a:noFill/>
+        </p:spPr>
+        <p:txBody>
+          <a:bodyPr wrap="none">
+            <a:spAutoFit/>
+          </a:bodyPr>
+          <a:lstStyle/>
+          <a:p>
+            <a:pPr>
+              <a:defRPr sz="900" b="1">
+                <a:solidFill>
+                  <a:srgbClr val="46D6C8"/>
+                </a:solidFill>
+              </a:defRPr>
+            </a:pPr>
+            <a:r>
+              <a:t>GPT-LIVE  /  APPLICATION RESEARCH</a:t>
+            </a:r>
+          </a:p>
+        </p:txBody>
+      </p:sp>
+      <p:sp>
+        <p:nvSpPr>
+          <p:cNvPr id="4" name="TextBox 3"/>
+          <p:cNvSpPr txBox="1"/>
+          <p:nvPr/>
+        </p:nvSpPr>
+        <p:spPr>
+          <a:xfrm>
+            <a:off x="658368" y="685800"/>
+            <a:ext cx="10698480" cy="658368"/>
+          </a:xfrm>
+          <a:prstGeom prst="rect">
+            <a:avLst/>
+          </a:prstGeom>
+          <a:noFill/>
+        </p:spPr>
+        <p:txBody>
+          <a:bodyPr wrap="none">
+            <a:spAutoFit/>
+          </a:bodyPr>
+          <a:lstStyle/>
+          <a:p>
+            <a:pPr algn="l">
+              <a:defRPr sz="2700" b="1">
+                <a:solidFill>
+                  <a:srgbClr val="F4F8FC"/>
+                </a:solidFill>
+              </a:defRPr>
+            </a:pPr>
+            <a:r>
+              <a:t>全量关联链接</a:t>
+            </a:r>
+          </a:p>
+        </p:txBody>
+      </p:sp>
+      <p:sp>
+        <p:nvSpPr>
+          <p:cNvPr id="5" name="Rounded Rectangle 4"/>
+          <p:cNvSpPr/>
+          <p:nvPr/>
+        </p:nvSpPr>
+        <p:spPr>
+          <a:xfrm>
+            <a:off x="658368" y="1600200"/>
+            <a:ext cx="3581400" cy="1965960"/>
+          </a:xfrm>
+          <a:prstGeom prst="roundRect">
+            <a:avLst/>
+          </a:prstGeom>
+          <a:solidFill>
+            <a:srgbClr val="10243C"/>
+          </a:solidFill>
+          <a:ln>
+            <a:solidFill>
+              <a:srgbClr val="294B68"/>
+            </a:solidFill>
+          </a:ln>
+        </p:spPr>
+        <p:style>
+          <a:lnRef idx="1">
+            <a:schemeClr val="accent1"/>
+          </a:lnRef>
+          <a:fillRef idx="3">
+            <a:schemeClr val="accent1"/>
+          </a:fillRef>
+          <a:effectRef idx="2">
+            <a:schemeClr val="accent1"/>
+          </a:effectRef>
+          <a:fontRef idx="minor">
+            <a:schemeClr val="lt1"/>
+          </a:fontRef>
+        </p:style>
+        <p:txBody>
+          <a:bodyPr rtlCol="0" anchor="ctr" lIns="228600" rIns="182880" tIns="164592"/>
+          <a:lstStyle/>
+          <a:p>
+            <a:pPr algn="ctr">
+              <a:defRPr sz="1200" b="1">
+                <a:solidFill>
+                  <a:srgbClr val="46D6C8"/>
+                </a:solidFill>
+              </a:defRPr>
+            </a:pPr>
+            <a:r>
+              <a:t>01</a:t>
+            </a:r>
+          </a:p>
+          <a:p>
+            <a:pPr>
+              <a:spcBef>
+                <a:spcPts val="800"/>
+              </a:spcBef>
+              <a:defRPr sz="1500">
+                <a:solidFill>
+                  <a:srgbClr val="F4F8FC"/>
+                </a:solidFill>
+              </a:defRPr>
+            </a:pPr>
+            <a:r>
+              <a:t>OpenAI官方发布 (https://openai.com/index/introducing-gpt-live/)</a:t>
+            </a:r>
+          </a:p>
+        </p:txBody>
+      </p:sp>
+      <p:sp>
+        <p:nvSpPr>
+          <p:cNvPr id="6" name="Rectangle 5"/>
+          <p:cNvSpPr/>
+          <p:nvPr/>
+        </p:nvSpPr>
+        <p:spPr>
+          <a:xfrm>
+            <a:off x="658368" y="1801368"/>
+            <a:ext cx="54864" cy="438912"/>
+          </a:xfrm>
+          <a:prstGeom prst="rect">
+            <a:avLst/>
+          </a:prstGeom>
+          <a:solidFill>
+            <a:srgbClr val="46D6C8"/>
+          </a:solidFill>
+          <a:ln>
+            <a:noFill/>
+          </a:ln>
+        </p:spPr>
+        <p:style>
+          <a:lnRef idx="1">
+            <a:schemeClr val="accent1"/>
+          </a:lnRef>
+          <a:fillRef idx="3">
+            <a:schemeClr val="accent1"/>
+          </a:fillRef>
+          <a:effectRef idx="2">
+            <a:schemeClr val="accent1"/>
+          </a:effectRef>
+          <a:fontRef idx="minor">
+            <a:schemeClr val="lt1"/>
+          </a:fontRef>
+        </p:style>
+        <p:txBody>
+          <a:bodyPr rtlCol="0" anchor="ctr"/>
+          <a:lstStyle/>
+          <a:p>
+            <a:pPr algn="ctr"/>
+          </a:p>
+        </p:txBody>
+      </p:sp>
+      <p:sp>
+        <p:nvSpPr>
+          <p:cNvPr id="7" name="Rounded Rectangle 6"/>
+          <p:cNvSpPr/>
+          <p:nvPr/>
+        </p:nvSpPr>
+        <p:spPr>
+          <a:xfrm>
+            <a:off x="4386071" y="1600200"/>
+            <a:ext cx="3581400" cy="1965960"/>
+          </a:xfrm>
+          <a:prstGeom prst="roundRect">
+            <a:avLst/>
+          </a:prstGeom>
+          <a:solidFill>
+            <a:srgbClr val="10243C"/>
+          </a:solidFill>
+          <a:ln>
+            <a:solidFill>
+              <a:srgbClr val="294B68"/>
+            </a:solidFill>
+          </a:ln>
+        </p:spPr>
+        <p:style>
+          <a:lnRef idx="1">
+            <a:schemeClr val="accent1"/>
+          </a:lnRef>
+          <a:fillRef idx="3">
+            <a:schemeClr val="accent1"/>
+          </a:fillRef>
+          <a:effectRef idx="2">
+            <a:schemeClr val="accent1"/>
+          </a:effectRef>
+          <a:fontRef idx="minor">
+            <a:schemeClr val="lt1"/>
+          </a:fontRef>
+        </p:style>
+        <p:txBody>
+          <a:bodyPr rtlCol="0" anchor="ctr" lIns="228600" rIns="182880" tIns="164592"/>
+          <a:lstStyle/>
+          <a:p>
+            <a:pPr algn="ctr">
+              <a:defRPr sz="1200" b="1">
+                <a:solidFill>
+                  <a:srgbClr val="55A7FF"/>
+                </a:solidFill>
+              </a:defRPr>
+            </a:pPr>
+            <a:r>
+              <a:t>02</a:t>
+            </a:r>
+          </a:p>
+          <a:p>
+            <a:pPr>
+              <a:spcBef>
+                <a:spcPts val="800"/>
+              </a:spcBef>
+              <a:defRPr sz="1100">
+                <a:solidFill>
+                  <a:srgbClr val="F4F8FC"/>
+                </a:solidFill>
+              </a:defRPr>
+            </a:pPr>
+            <a:r>
+              <a:t>The Decoder转录 (https://the-decoder.com/chatgpt-can-now-listen-and-talk-at-the-same-time-making-ai-conversations-seem-more-human/)</a:t>
+            </a:r>
+          </a:p>
+        </p:txBody>
+      </p:sp>
+      <p:sp>
+        <p:nvSpPr>
+          <p:cNvPr id="8" name="Rectangle 7"/>
+          <p:cNvSpPr/>
+          <p:nvPr/>
+        </p:nvSpPr>
+        <p:spPr>
+          <a:xfrm>
+            <a:off x="4386071" y="1801368"/>
+            <a:ext cx="54864" cy="438912"/>
+          </a:xfrm>
+          <a:prstGeom prst="rect">
+            <a:avLst/>
+          </a:prstGeom>
+          <a:solidFill>
+            <a:srgbClr val="55A7FF"/>
+          </a:solidFill>
+          <a:ln>
+            <a:noFill/>
+          </a:ln>
+        </p:spPr>
+        <p:style>
+          <a:lnRef idx="1">
+            <a:schemeClr val="accent1"/>
+          </a:lnRef>
+          <a:fillRef idx="3">
+            <a:schemeClr val="accent1"/>
+          </a:fillRef>
+          <a:effectRef idx="2">
+            <a:schemeClr val="accent1"/>
+          </a:effectRef>
+          <a:fontRef idx="minor">
+            <a:schemeClr val="lt1"/>
+          </a:fontRef>
+        </p:style>
+        <p:txBody>
+          <a:bodyPr rtlCol="0" anchor="ctr"/>
+          <a:lstStyle/>
+          <a:p>
+            <a:pPr algn="ctr"/>
+          </a:p>
+        </p:txBody>
+      </p:sp>
+      <p:sp>
+        <p:nvSpPr>
+          <p:cNvPr id="9" name="Rounded Rectangle 8"/>
+          <p:cNvSpPr/>
+          <p:nvPr/>
+        </p:nvSpPr>
+        <p:spPr>
+          <a:xfrm>
+            <a:off x="8113776" y="1600200"/>
+            <a:ext cx="3581400" cy="1965960"/>
+          </a:xfrm>
+          <a:prstGeom prst="roundRect">
+            <a:avLst/>
+          </a:prstGeom>
+          <a:solidFill>
+            <a:srgbClr val="10243C"/>
+          </a:solidFill>
+          <a:ln>
+            <a:solidFill>
+              <a:srgbClr val="294B68"/>
+            </a:solidFill>
+          </a:ln>
+        </p:spPr>
+        <p:style>
+          <a:lnRef idx="1">
+            <a:schemeClr val="accent1"/>
+          </a:lnRef>
+          <a:fillRef idx="3">
+            <a:schemeClr val="accent1"/>
+          </a:fillRef>
+          <a:effectRef idx="2">
+            <a:schemeClr val="accent1"/>
+          </a:effectRef>
+          <a:fontRef idx="minor">
+            <a:schemeClr val="lt1"/>
+          </a:fontRef>
+        </p:style>
+        <p:txBody>
+          <a:bodyPr rtlCol="0" anchor="ctr" lIns="228600" rIns="182880" tIns="164592"/>
+          <a:lstStyle/>
+          <a:p>
+            <a:pPr algn="ctr">
+              <a:defRPr sz="1200" b="1">
+                <a:solidFill>
+                  <a:srgbClr val="FFBE55"/>
+                </a:solidFill>
+              </a:defRPr>
+            </a:pPr>
+            <a:r>
+              <a:t>03</a:t>
+            </a:r>
+          </a:p>
+          <a:p>
+            <a:pPr>
+              <a:spcBef>
+                <a:spcPts val="800"/>
+              </a:spcBef>
+              <a:defRPr sz="1500">
+                <a:solidFill>
+                  <a:srgbClr val="F4F8FC"/>
+                </a:solidFill>
+              </a:defRPr>
+            </a:pPr>
+            <a:r>
+              <a:t>ChatGPT Voice帮助中心 (https://help.openai.com/en/articles/20001274-chatgpt-voice)</a:t>
+            </a:r>
+          </a:p>
+        </p:txBody>
+      </p:sp>
+      <p:sp>
+        <p:nvSpPr>
+          <p:cNvPr id="10" name="Rectangle 9"/>
+          <p:cNvSpPr/>
+          <p:nvPr/>
+        </p:nvSpPr>
+        <p:spPr>
+          <a:xfrm>
+            <a:off x="8113776" y="1801368"/>
+            <a:ext cx="54864" cy="438912"/>
+          </a:xfrm>
+          <a:prstGeom prst="rect">
+            <a:avLst/>
+          </a:prstGeom>
+          <a:solidFill>
+            <a:srgbClr val="FFBE55"/>
+          </a:solidFill>
+          <a:ln>
+            <a:noFill/>
+          </a:ln>
+        </p:spPr>
+        <p:style>
+          <a:lnRef idx="1">
+            <a:schemeClr val="accent1"/>
+          </a:lnRef>
+          <a:fillRef idx="3">
+            <a:schemeClr val="accent1"/>
+          </a:fillRef>
+          <a:effectRef idx="2">
+            <a:schemeClr val="accent1"/>
+          </a:effectRef>
+          <a:fontRef idx="minor">
+            <a:schemeClr val="lt1"/>
+          </a:fontRef>
+        </p:style>
+        <p:txBody>
+          <a:bodyPr rtlCol="0" anchor="ctr"/>
+          <a:lstStyle/>
+          <a:p>
+            <a:pPr algn="ctr"/>
+          </a:p>
+        </p:txBody>
+      </p:sp>
+      <p:sp>
+        <p:nvSpPr>
+          <p:cNvPr id="11" name="Rounded Rectangle 10"/>
+          <p:cNvSpPr/>
+          <p:nvPr/>
+        </p:nvSpPr>
+        <p:spPr>
+          <a:xfrm>
+            <a:off x="658368" y="3730752"/>
+            <a:ext cx="3581400" cy="1965960"/>
+          </a:xfrm>
+          <a:prstGeom prst="roundRect">
+            <a:avLst/>
+          </a:prstGeom>
+          <a:solidFill>
+            <a:srgbClr val="10243C"/>
+          </a:solidFill>
+          <a:ln>
+            <a:solidFill>
+              <a:srgbClr val="294B68"/>
+            </a:solidFill>
+          </a:ln>
+        </p:spPr>
+        <p:style>
+          <a:lnRef idx="1">
+            <a:schemeClr val="accent1"/>
+          </a:lnRef>
+          <a:fillRef idx="3">
+            <a:schemeClr val="accent1"/>
+          </a:fillRef>
+          <a:effectRef idx="2">
+            <a:schemeClr val="accent1"/>
+          </a:effectRef>
+          <a:fontRef idx="minor">
+            <a:schemeClr val="lt1"/>
+          </a:fontRef>
+        </p:style>
+        <p:txBody>
+          <a:bodyPr rtlCol="0" anchor="ctr" lIns="228600" rIns="182880" tIns="164592"/>
+          <a:lstStyle/>
+          <a:p>
+            <a:pPr algn="ctr">
+              <a:defRPr sz="1200" b="1">
+                <a:solidFill>
+                  <a:srgbClr val="46D6C8"/>
+                </a:solidFill>
+              </a:defRPr>
+            </a:pPr>
+            <a:r>
+              <a:t>04</a:t>
+            </a:r>
+          </a:p>
+          <a:p>
+            <a:pPr>
+              <a:spcBef>
+                <a:spcPts val="800"/>
+              </a:spcBef>
+              <a:defRPr sz="1500">
+                <a:solidFill>
+                  <a:srgbClr val="F4F8FC"/>
+                </a:solidFill>
+              </a:defRPr>
+            </a:pPr>
+            <a:r>
+              <a:t>OpenAI Realtime开发文档 (https://developers.openai.com/api/docs/guides/realtime)</a:t>
+            </a:r>
+          </a:p>
+        </p:txBody>
+      </p:sp>
+      <p:sp>
+        <p:nvSpPr>
+          <p:cNvPr id="12" name="Rectangle 11"/>
+          <p:cNvSpPr/>
+          <p:nvPr/>
+        </p:nvSpPr>
+        <p:spPr>
+          <a:xfrm>
+            <a:off x="658368" y="3931920"/>
+            <a:ext cx="54864" cy="438912"/>
+          </a:xfrm>
+          <a:prstGeom prst="rect">
+            <a:avLst/>
+          </a:prstGeom>
+          <a:solidFill>
+            <a:srgbClr val="46D6C8"/>
+          </a:solidFill>
+          <a:ln>
+            <a:noFill/>
+          </a:ln>
+        </p:spPr>
+        <p:style>
+          <a:lnRef idx="1">
+            <a:schemeClr val="accent1"/>
+          </a:lnRef>
+          <a:fillRef idx="3">
+            <a:schemeClr val="accent1"/>
+          </a:fillRef>
+          <a:effectRef idx="2">
+            <a:schemeClr val="accent1"/>
+          </a:effectRef>
+          <a:fontRef idx="minor">
+            <a:schemeClr val="lt1"/>
+          </a:fontRef>
+        </p:style>
+        <p:txBody>
+          <a:bodyPr rtlCol="0" anchor="ctr"/>
+          <a:lstStyle/>
+          <a:p>
+            <a:pPr algn="ctr"/>
+          </a:p>
+        </p:txBody>
+      </p:sp>
+      <p:sp>
+        <p:nvSpPr>
+          <p:cNvPr id="13" name="Rounded Rectangle 12"/>
+          <p:cNvSpPr/>
+          <p:nvPr/>
+        </p:nvSpPr>
+        <p:spPr>
+          <a:xfrm>
+            <a:off x="4386071" y="3730752"/>
+            <a:ext cx="3581400" cy="1965960"/>
+          </a:xfrm>
+          <a:prstGeom prst="roundRect">
+            <a:avLst/>
+          </a:prstGeom>
+          <a:solidFill>
+            <a:srgbClr val="10243C"/>
+          </a:solidFill>
+          <a:ln>
+            <a:solidFill>
+              <a:srgbClr val="294B68"/>
+            </a:solidFill>
+          </a:ln>
+        </p:spPr>
+        <p:style>
+          <a:lnRef idx="1">
+            <a:schemeClr val="accent1"/>
+          </a:lnRef>
+          <a:fillRef idx="3">
+            <a:schemeClr val="accent1"/>
+          </a:fillRef>
+          <a:effectRef idx="2">
+            <a:schemeClr val="accent1"/>
+          </a:effectRef>
+          <a:fontRef idx="minor">
+            <a:schemeClr val="lt1"/>
+          </a:fontRef>
+        </p:style>
+        <p:txBody>
+          <a:bodyPr rtlCol="0" anchor="ctr" lIns="228600" rIns="182880" tIns="164592"/>
+          <a:lstStyle/>
+          <a:p>
+            <a:pPr algn="ctr">
+              <a:defRPr sz="1200" b="1">
+                <a:solidFill>
+                  <a:srgbClr val="55A7FF"/>
+                </a:solidFill>
+              </a:defRPr>
+            </a:pPr>
+            <a:r>
+              <a:t>05</a:t>
+            </a:r>
+          </a:p>
+          <a:p>
+            <a:pPr>
+              <a:spcBef>
+                <a:spcPts val="800"/>
+              </a:spcBef>
+              <a:defRPr sz="1500">
+                <a:solidFill>
+                  <a:srgbClr val="F4F8FC"/>
+                </a:solidFill>
+              </a:defRPr>
+            </a:pPr>
+            <a:r>
+              <a:t>RuntimeWire (https://runtimewire.com/article/openai-gpt-live-chatgpt-voice)</a:t>
+            </a:r>
+          </a:p>
+        </p:txBody>
+      </p:sp>
+      <p:sp>
+        <p:nvSpPr>
+          <p:cNvPr id="14" name="Rectangle 13"/>
+          <p:cNvSpPr/>
+          <p:nvPr/>
+        </p:nvSpPr>
+        <p:spPr>
+          <a:xfrm>
+            <a:off x="4386071" y="3931920"/>
+            <a:ext cx="54864" cy="438912"/>
+          </a:xfrm>
+          <a:prstGeom prst="rect">
+            <a:avLst/>
+          </a:prstGeom>
+          <a:solidFill>
+            <a:srgbClr val="55A7FF"/>
+          </a:solidFill>
+          <a:ln>
+            <a:noFill/>
+          </a:ln>
+        </p:spPr>
+        <p:style>
+          <a:lnRef idx="1">
+            <a:schemeClr val="accent1"/>
+          </a:lnRef>
+          <a:fillRef idx="3">
+            <a:schemeClr val="accent1"/>
+          </a:fillRef>
+          <a:effectRef idx="2">
+            <a:schemeClr val="accent1"/>
+          </a:effectRef>
+          <a:fontRef idx="minor">
+            <a:schemeClr val="lt1"/>
+          </a:fontRef>
+        </p:style>
+        <p:txBody>
+          <a:bodyPr rtlCol="0" anchor="ctr"/>
+          <a:lstStyle/>
+          <a:p>
+            <a:pPr algn="ctr"/>
+          </a:p>
+        </p:txBody>
+      </p:sp>
+      <p:sp>
+        <p:nvSpPr>
+          <p:cNvPr id="15" name="Rounded Rectangle 14"/>
+          <p:cNvSpPr/>
+          <p:nvPr/>
+        </p:nvSpPr>
+        <p:spPr>
+          <a:xfrm>
+            <a:off x="8113776" y="3730752"/>
+            <a:ext cx="3581400" cy="1965960"/>
+          </a:xfrm>
+          <a:prstGeom prst="roundRect">
+            <a:avLst/>
+          </a:prstGeom>
+          <a:solidFill>
+            <a:srgbClr val="10243C"/>
+          </a:solidFill>
+          <a:ln>
+            <a:solidFill>
+              <a:srgbClr val="294B68"/>
+            </a:solidFill>
+          </a:ln>
+        </p:spPr>
+        <p:style>
+          <a:lnRef idx="1">
+            <a:schemeClr val="accent1"/>
+          </a:lnRef>
+          <a:fillRef idx="3">
+            <a:schemeClr val="accent1"/>
+          </a:fillRef>
+          <a:effectRef idx="2">
+            <a:schemeClr val="accent1"/>
+          </a:effectRef>
+          <a:fontRef idx="minor">
+            <a:schemeClr val="lt1"/>
+          </a:fontRef>
+        </p:style>
+        <p:txBody>
+          <a:bodyPr rtlCol="0" anchor="ctr" lIns="228600" rIns="182880" tIns="164592"/>
+          <a:lstStyle/>
+          <a:p>
+            <a:pPr algn="ctr">
+              <a:defRPr sz="1200" b="1">
+                <a:solidFill>
+                  <a:srgbClr val="FFBE55"/>
+                </a:solidFill>
+              </a:defRPr>
+            </a:pPr>
+            <a:r>
+              <a:t>06</a:t>
+            </a:r>
+          </a:p>
+          <a:p>
+            <a:pPr>
+              <a:spcBef>
+                <a:spcPts val="800"/>
+              </a:spcBef>
+              <a:defRPr sz="1100">
+                <a:solidFill>
+                  <a:srgbClr val="F4F8FC"/>
+                </a:solidFill>
+              </a:defRPr>
+            </a:pPr>
+            <a:r>
+              <a:t>Agora测试转录 (https://medium.com/agora-io/openai-didnt-publish-gpt-live-s-latency-so-we-measured-it-cf73016db989)</a:t>
+            </a:r>
+          </a:p>
+        </p:txBody>
+      </p:sp>
+      <p:sp>
+        <p:nvSpPr>
+          <p:cNvPr id="16" name="Rectangle 15"/>
+          <p:cNvSpPr/>
+          <p:nvPr/>
+        </p:nvSpPr>
+        <p:spPr>
+          <a:xfrm>
+            <a:off x="8113776" y="3931920"/>
+            <a:ext cx="54864" cy="438912"/>
+          </a:xfrm>
+          <a:prstGeom prst="rect">
+            <a:avLst/>
+          </a:prstGeom>
+          <a:solidFill>
+            <a:srgbClr val="FFBE55"/>
+          </a:solidFill>
+          <a:ln>
+            <a:noFill/>
+          </a:ln>
+        </p:spPr>
+        <p:style>
+          <a:lnRef idx="1">
+            <a:schemeClr val="accent1"/>
+          </a:lnRef>
+          <a:fillRef idx="3">
+            <a:schemeClr val="accent1"/>
+          </a:fillRef>
+          <a:effectRef idx="2">
+            <a:schemeClr val="accent1"/>
+          </a:effectRef>
+          <a:fontRef idx="minor">
+            <a:schemeClr val="lt1"/>
+          </a:fontRef>
+        </p:style>
+        <p:txBody>
+          <a:bodyPr rtlCol="0" anchor="ctr"/>
+          <a:lstStyle/>
+          <a:p>
+            <a:pPr algn="ctr"/>
+          </a:p>
+        </p:txBody>
+      </p:sp>
+      <p:sp>
+        <p:nvSpPr>
+          <p:cNvPr id="17" name="TextBox 16"/>
+          <p:cNvSpPr txBox="1"/>
+          <p:nvPr/>
+        </p:nvSpPr>
+        <p:spPr>
+          <a:xfrm>
+            <a:off x="10881360" y="6327648"/>
+            <a:ext cx="594360" cy="228600"/>
+          </a:xfrm>
+          <a:prstGeom prst="rect">
+            <a:avLst/>
+          </a:prstGeom>
+          <a:noFill/>
+        </p:spPr>
+        <p:txBody>
+          <a:bodyPr wrap="none">
+            <a:spAutoFit/>
+          </a:bodyPr>
+          <a:lstStyle/>
+          <a:p>
+            <a:pPr>
+              <a:defRPr sz="900">
+                <a:solidFill>
+                  <a:srgbClr val="9AB2C8"/>
+                </a:solidFill>
+              </a:defRPr>
+            </a:pPr>
+            <a:r>
+              <a:t>18 / 18</a:t>
             </a:r>
           </a:p>
         </p:txBody>
@@ -4948,14 +10658,14 @@
               <a:spcBef>
                 <a:spcPts val="800"/>
               </a:spcBef>
-              <a:defRPr sz="1200">
+              <a:defRPr sz="1100">
                 <a:solidFill>
                   <a:srgbClr val="F4F8FC"/>
                 </a:solidFill>
               </a:defRPr>
             </a:pPr>
             <a:r>
-              <a:t>GPT‑Live的核心创新不是单纯“把语音识别做得更准”，而是把语音交互从轮流发言升级为持续、全双工协作：模型在输出语音时仍持续听取输入，并多次判断应该继续说、停顿、倾听、接受打断、简短回应或调用工具。第二个关键变化是把“交互控制”与“复杂</a:t>
+              <a:t>GPT‑Live的核心创新不是单纯“把语音识别做得更准”，而是把语音交互从轮流发言升级为持续、全双工协作：模型在输出语音时仍持续听取输入，并多次判断应该继续说、停顿、倾听、接受打断、简短回应或调用工具。第二个关键变化是把“交互控制”与“复杂工作”解耦：GPT‑Live负责维持低延迟对话，搜索、深度推理和Agent任务委托给GPT‑5.5等后台模型，因此可以边</a:t>
             </a:r>
           </a:p>
         </p:txBody>
@@ -5060,14 +10770,14 @@
               <a:spcBef>
                 <a:spcPts val="800"/>
               </a:spcBef>
-              <a:defRPr sz="1200">
+              <a:defRPr sz="1100">
                 <a:solidFill>
                   <a:srgbClr val="F4F8FC"/>
                 </a:solidFill>
               </a:defRPr>
             </a:pPr>
             <a:r>
-              <a:t>这一架构使GPT‑Live同时改善了两类问题：一是语音层的停顿误判、抢话、打断和交流节奏；二是旧语音模型知识、搜索与推理上限低于前沿文本模型的问题。OpenAI厂商评测显示，GPT‑Live‑1在5–10分钟对话的人类偏好测试中被选择的比例</a:t>
+              <a:t>这一架构使GPT‑Live同时改善了两类问题：一是语音层的停顿误判、抢话、打断和交流节奏；二是旧语音模型知识、搜索与推理上限低于前沿文本模型的问题。OpenAI厂商评测显示，GPT‑Live‑1在5–10分钟对话的人类偏好测试中被选择的比例为75.7%，GPT‑Live‑1 mini为69.2%；GPT‑Live‑1 High在GPQA和BrowseComp</a:t>
             </a:r>
           </a:p>
         </p:txBody>
@@ -5172,14 +10882,14 @@
               <a:spcBef>
                 <a:spcPts val="800"/>
               </a:spcBef>
-              <a:defRPr sz="1200">
+              <a:defRPr sz="1100">
                 <a:solidFill>
                   <a:srgbClr val="F4F8FC"/>
                 </a:solidFill>
               </a:defRPr>
             </a:pPr>
             <a:r>
-              <a:t>GPT‑Live最有价值的市场不是所有电话或所有客服，而是需要“持续听、自然插话、后台查找或执行任务”的交互：复杂客服、事故报案、实时辅导、语言陪练、跨语言协作、无障碍助手和现场作业助手。低风险、流程稳定、可核验、容易转人工的场景应优先；医</a:t>
+              <a:t>GPT‑Live最有价值的市场不是所有电话或所有客服，而是需要“持续听、自然插话、后台查找或执行任务”的交互：复杂客服、事故报案、实时辅导、语言陪练、跨语言协作、无障碍助手和现场作业助手。低风险、流程稳定、可核验、容易转人工的场景应优先；医疗诊断、心理治疗、金融交易指令、未成年人情感陪伴等高风险场景不应直接自治。</a:t>
             </a:r>
           </a:p>
         </p:txBody>
@@ -5284,14 +10994,14 @@
               <a:spcBef>
                 <a:spcPts val="800"/>
               </a:spcBef>
-              <a:defRPr sz="1200">
+              <a:defRPr sz="1100">
                 <a:solidFill>
                   <a:srgbClr val="F4F8FC"/>
                 </a:solidFill>
               </a:defRPr>
             </a:pPr>
             <a:r>
-              <a:t>短期落地存在一个决定性约束：GPT‑Live目前只在ChatGPT消费产品中逐步推出，API“计划稍后提供”，且Business、Enterprise、Edu工作区首发不可用。ChatGPT Voice帮助中心 (https://help.</a:t>
+              <a:t>短期落地存在一个决定性约束：GPT‑Live目前只在ChatGPT消费产品中逐步推出，API“计划稍后提供”，且Business、Enterprise、Edu工作区首发不可用。ChatGPT Voice帮助中心 (https://help.openai.com/en/articles/20001274-chatgpt-voice) 因而企业不能把GPT‑Li</a:t>
             </a:r>
           </a:p>
         </p:txBody>
@@ -5369,7 +11079,7 @@
               </a:defRPr>
             </a:pPr>
             <a:r>
-              <a:t>02 / 12</a:t>
+              <a:t>02 / 18</a:t>
             </a:r>
           </a:p>
         </p:txBody>
@@ -5562,7 +11272,119 @@
               </a:defRPr>
             </a:pPr>
             <a:r>
-              <a:t>01</a:t>
+              <a:t>GPT‑Live‑1</a:t>
+            </a:r>
+          </a:p>
+          <a:p>
+            <a:pPr>
+              <a:spcBef>
+                <a:spcPts val="800"/>
+              </a:spcBef>
+              <a:defRPr sz="1100">
+                <a:solidFill>
+                  <a:srgbClr val="F4F8FC"/>
+                </a:solidFill>
+              </a:defRPr>
+            </a:pPr>
+            <a:r>
+              <a:t>用户：Go、Plus、Pro用户；后台智能：Instant使用GPT‑5.5 Instant；Medium/High使用GPT‑5.5 Thinking；当前渠道：ChatGPT网页、iOS、Android逐步推出；关键限制：API未开放；首发无视频/屏幕共享</a:t>
+            </a:r>
+          </a:p>
+        </p:txBody>
+      </p:sp>
+      <p:sp>
+        <p:nvSpPr>
+          <p:cNvPr id="6" name="Rectangle 5"/>
+          <p:cNvSpPr/>
+          <p:nvPr/>
+        </p:nvSpPr>
+        <p:spPr>
+          <a:xfrm>
+            <a:off x="658368" y="1801368"/>
+            <a:ext cx="54864" cy="438912"/>
+          </a:xfrm>
+          <a:prstGeom prst="rect">
+            <a:avLst/>
+          </a:prstGeom>
+          <a:solidFill>
+            <a:srgbClr val="46D6C8"/>
+          </a:solidFill>
+          <a:ln>
+            <a:noFill/>
+          </a:ln>
+        </p:spPr>
+        <p:style>
+          <a:lnRef idx="1">
+            <a:schemeClr val="accent1"/>
+          </a:lnRef>
+          <a:fillRef idx="3">
+            <a:schemeClr val="accent1"/>
+          </a:fillRef>
+          <a:effectRef idx="2">
+            <a:schemeClr val="accent1"/>
+          </a:effectRef>
+          <a:fontRef idx="minor">
+            <a:schemeClr val="lt1"/>
+          </a:fontRef>
+        </p:style>
+        <p:txBody>
+          <a:bodyPr rtlCol="0" anchor="ctr"/>
+          <a:lstStyle/>
+          <a:p>
+            <a:pPr algn="ctr"/>
+          </a:p>
+        </p:txBody>
+      </p:sp>
+      <p:sp>
+        <p:nvSpPr>
+          <p:cNvPr id="7" name="Rounded Rectangle 6"/>
+          <p:cNvSpPr/>
+          <p:nvPr/>
+        </p:nvSpPr>
+        <p:spPr>
+          <a:xfrm>
+            <a:off x="6176772" y="1600200"/>
+            <a:ext cx="5372100" cy="1965960"/>
+          </a:xfrm>
+          <a:prstGeom prst="roundRect">
+            <a:avLst/>
+          </a:prstGeom>
+          <a:solidFill>
+            <a:srgbClr val="10243C"/>
+          </a:solidFill>
+          <a:ln>
+            <a:solidFill>
+              <a:srgbClr val="294B68"/>
+            </a:solidFill>
+          </a:ln>
+        </p:spPr>
+        <p:style>
+          <a:lnRef idx="1">
+            <a:schemeClr val="accent1"/>
+          </a:lnRef>
+          <a:fillRef idx="3">
+            <a:schemeClr val="accent1"/>
+          </a:fillRef>
+          <a:effectRef idx="2">
+            <a:schemeClr val="accent1"/>
+          </a:effectRef>
+          <a:fontRef idx="minor">
+            <a:schemeClr val="lt1"/>
+          </a:fontRef>
+        </p:style>
+        <p:txBody>
+          <a:bodyPr rtlCol="0" anchor="ctr" lIns="228600" rIns="182880" tIns="164592"/>
+          <a:lstStyle/>
+          <a:p>
+            <a:pPr algn="ctr">
+              <a:defRPr sz="1200" b="1">
+                <a:solidFill>
+                  <a:srgbClr val="55A7FF"/>
+                </a:solidFill>
+              </a:defRPr>
+            </a:pPr>
+            <a:r>
+              <a:t>GPT‑Live‑1 mini</a:t>
             </a:r>
           </a:p>
           <a:p>
@@ -5577,27 +11399,27 @@
               </a:defRPr>
             </a:pPr>
             <a:r>
-              <a:t>不是传统ASR→LLM→TTS管线。 传统级联方式易在转写和合成间丢失语气、停顿等信息，并叠加多段时延。</a:t>
-            </a:r>
-          </a:p>
-        </p:txBody>
-      </p:sp>
-      <p:sp>
-        <p:nvSpPr>
-          <p:cNvPr id="6" name="Rectangle 5"/>
-          <p:cNvSpPr/>
-          <p:nvPr/>
-        </p:nvSpPr>
-        <p:spPr>
-          <a:xfrm>
-            <a:off x="658368" y="1801368"/>
+              <a:t>用户：Free用户；后台智能：GPT‑5.5 Instant；当前渠道：ChatGPT网页、iOS、Android逐步推出；关键限制：能力与配额低于完整版</a:t>
+            </a:r>
+          </a:p>
+        </p:txBody>
+      </p:sp>
+      <p:sp>
+        <p:nvSpPr>
+          <p:cNvPr id="8" name="Rectangle 7"/>
+          <p:cNvSpPr/>
+          <p:nvPr/>
+        </p:nvSpPr>
+        <p:spPr>
+          <a:xfrm>
+            <a:off x="6176772" y="1801368"/>
             <a:ext cx="54864" cy="438912"/>
           </a:xfrm>
           <a:prstGeom prst="rect">
             <a:avLst/>
           </a:prstGeom>
           <a:solidFill>
-            <a:srgbClr val="46D6C8"/>
+            <a:srgbClr val="55A7FF"/>
           </a:solidFill>
           <a:ln>
             <a:noFill/>
@@ -5627,13 +11449,13 @@
       </p:sp>
       <p:sp>
         <p:nvSpPr>
-          <p:cNvPr id="7" name="Rounded Rectangle 6"/>
-          <p:cNvSpPr/>
-          <p:nvPr/>
-        </p:nvSpPr>
-        <p:spPr>
-          <a:xfrm>
-            <a:off x="6176772" y="1600200"/>
+          <p:cNvPr id="9" name="Rounded Rectangle 8"/>
+          <p:cNvSpPr/>
+          <p:nvPr/>
+        </p:nvSpPr>
+        <p:spPr>
+          <a:xfrm>
+            <a:off x="658368" y="3730752"/>
             <a:ext cx="5372100" cy="1965960"/>
           </a:xfrm>
           <a:prstGeom prst="roundRect">
@@ -5669,12 +11491,12 @@
             <a:pPr algn="ctr">
               <a:defRPr sz="1200" b="1">
                 <a:solidFill>
-                  <a:srgbClr val="55A7FF"/>
-                </a:solidFill>
-              </a:defRPr>
-            </a:pPr>
-            <a:r>
-              <a:t>02</a:t>
+                  <a:srgbClr val="FFBE55"/>
+                </a:solidFill>
+              </a:defRPr>
+            </a:pPr>
+            <a:r>
+              <a:t>GPT‑Realtime系列</a:t>
             </a:r>
           </a:p>
           <a:p>
@@ -5682,126 +11504,14 @@
               <a:spcBef>
                 <a:spcPts val="800"/>
               </a:spcBef>
-              <a:defRPr sz="1200">
+              <a:defRPr sz="1100">
                 <a:solidFill>
                   <a:srgbClr val="F4F8FC"/>
                 </a:solidFill>
               </a:defRPr>
             </a:pPr>
             <a:r>
-              <a:t>不是只减少延迟的Advanced Voice Mode升级。 Advanced Voice Mode已经使用单一音频模型，但仍以离散轮次运行；GPT‑Live进一步改为持续全双工处理。</a:t>
-            </a:r>
-          </a:p>
-        </p:txBody>
-      </p:sp>
-      <p:sp>
-        <p:nvSpPr>
-          <p:cNvPr id="8" name="Rectangle 7"/>
-          <p:cNvSpPr/>
-          <p:nvPr/>
-        </p:nvSpPr>
-        <p:spPr>
-          <a:xfrm>
-            <a:off x="6176772" y="1801368"/>
-            <a:ext cx="54864" cy="438912"/>
-          </a:xfrm>
-          <a:prstGeom prst="rect">
-            <a:avLst/>
-          </a:prstGeom>
-          <a:solidFill>
-            <a:srgbClr val="55A7FF"/>
-          </a:solidFill>
-          <a:ln>
-            <a:noFill/>
-          </a:ln>
-        </p:spPr>
-        <p:style>
-          <a:lnRef idx="1">
-            <a:schemeClr val="accent1"/>
-          </a:lnRef>
-          <a:fillRef idx="3">
-            <a:schemeClr val="accent1"/>
-          </a:fillRef>
-          <a:effectRef idx="2">
-            <a:schemeClr val="accent1"/>
-          </a:effectRef>
-          <a:fontRef idx="minor">
-            <a:schemeClr val="lt1"/>
-          </a:fontRef>
-        </p:style>
-        <p:txBody>
-          <a:bodyPr rtlCol="0" anchor="ctr"/>
-          <a:lstStyle/>
-          <a:p>
-            <a:pPr algn="ctr"/>
-          </a:p>
-        </p:txBody>
-      </p:sp>
-      <p:sp>
-        <p:nvSpPr>
-          <p:cNvPr id="9" name="Rounded Rectangle 8"/>
-          <p:cNvSpPr/>
-          <p:nvPr/>
-        </p:nvSpPr>
-        <p:spPr>
-          <a:xfrm>
-            <a:off x="658368" y="3730752"/>
-            <a:ext cx="5372100" cy="1965960"/>
-          </a:xfrm>
-          <a:prstGeom prst="roundRect">
-            <a:avLst/>
-          </a:prstGeom>
-          <a:solidFill>
-            <a:srgbClr val="10243C"/>
-          </a:solidFill>
-          <a:ln>
-            <a:solidFill>
-              <a:srgbClr val="294B68"/>
-            </a:solidFill>
-          </a:ln>
-        </p:spPr>
-        <p:style>
-          <a:lnRef idx="1">
-            <a:schemeClr val="accent1"/>
-          </a:lnRef>
-          <a:fillRef idx="3">
-            <a:schemeClr val="accent1"/>
-          </a:fillRef>
-          <a:effectRef idx="2">
-            <a:schemeClr val="accent1"/>
-          </a:effectRef>
-          <a:fontRef idx="minor">
-            <a:schemeClr val="lt1"/>
-          </a:fontRef>
-        </p:style>
-        <p:txBody>
-          <a:bodyPr rtlCol="0" anchor="ctr" lIns="228600" rIns="182880" tIns="164592"/>
-          <a:lstStyle/>
-          <a:p>
-            <a:pPr algn="ctr">
-              <a:defRPr sz="1200" b="1">
-                <a:solidFill>
-                  <a:srgbClr val="FFBE55"/>
-                </a:solidFill>
-              </a:defRPr>
-            </a:pPr>
-            <a:r>
-              <a:t>03</a:t>
-            </a:r>
-          </a:p>
-          <a:p>
-            <a:pPr>
-              <a:spcBef>
-                <a:spcPts val="800"/>
-              </a:spcBef>
-              <a:defRPr sz="1500">
-                <a:solidFill>
-                  <a:srgbClr val="F4F8FC"/>
-                </a:solidFill>
-              </a:defRPr>
-            </a:pPr>
-            <a:r>
-              <a:t>不是GPT‑5.5的语音版。 GPT‑Live负责交互控制，复杂任务可委托GPT‑5.5；其能力是系统组合结果。</a:t>
+              <a:t>用户：开发者；后台智能：Realtime原生语音模型，当前文档推荐gpt-realtime-2.1；当前渠道：Realtime API，WebRTC/WebSocket/SIP；关键限制：与GPT‑Live不是同一产品；需自行构建交互与安全系统</a:t>
             </a:r>
           </a:p>
         </p:txBody>
@@ -5851,119 +11561,7 @@
       </p:sp>
       <p:sp>
         <p:nvSpPr>
-          <p:cNvPr id="11" name="Rounded Rectangle 10"/>
-          <p:cNvSpPr/>
-          <p:nvPr/>
-        </p:nvSpPr>
-        <p:spPr>
-          <a:xfrm>
-            <a:off x="6176772" y="3730752"/>
-            <a:ext cx="5372100" cy="1965960"/>
-          </a:xfrm>
-          <a:prstGeom prst="roundRect">
-            <a:avLst/>
-          </a:prstGeom>
-          <a:solidFill>
-            <a:srgbClr val="10243C"/>
-          </a:solidFill>
-          <a:ln>
-            <a:solidFill>
-              <a:srgbClr val="294B68"/>
-            </a:solidFill>
-          </a:ln>
-        </p:spPr>
-        <p:style>
-          <a:lnRef idx="1">
-            <a:schemeClr val="accent1"/>
-          </a:lnRef>
-          <a:fillRef idx="3">
-            <a:schemeClr val="accent1"/>
-          </a:fillRef>
-          <a:effectRef idx="2">
-            <a:schemeClr val="accent1"/>
-          </a:effectRef>
-          <a:fontRef idx="minor">
-            <a:schemeClr val="lt1"/>
-          </a:fontRef>
-        </p:style>
-        <p:txBody>
-          <a:bodyPr rtlCol="0" anchor="ctr" lIns="228600" rIns="182880" tIns="164592"/>
-          <a:lstStyle/>
-          <a:p>
-            <a:pPr algn="ctr">
-              <a:defRPr sz="1200" b="1">
-                <a:solidFill>
-                  <a:srgbClr val="46D6C8"/>
-                </a:solidFill>
-              </a:defRPr>
-            </a:pPr>
-            <a:r>
-              <a:t>04</a:t>
-            </a:r>
-          </a:p>
-          <a:p>
-            <a:pPr>
-              <a:spcBef>
-                <a:spcPts val="800"/>
-              </a:spcBef>
-              <a:defRPr sz="1200">
-                <a:solidFill>
-                  <a:srgbClr val="F4F8FC"/>
-                </a:solidFill>
-              </a:defRPr>
-            </a:pPr>
-            <a:r>
-              <a:t>不是当前可采购的企业API。 OpenAI仅表示计划开放API，未给出日期、价格、SLA或企业数据治理条款。OpenAI官方发布 (https://openai.com/index/introducing-gpt-live/)</a:t>
-            </a:r>
-          </a:p>
-        </p:txBody>
-      </p:sp>
-      <p:sp>
-        <p:nvSpPr>
-          <p:cNvPr id="12" name="Rectangle 11"/>
-          <p:cNvSpPr/>
-          <p:nvPr/>
-        </p:nvSpPr>
-        <p:spPr>
-          <a:xfrm>
-            <a:off x="6176772" y="3931920"/>
-            <a:ext cx="54864" cy="438912"/>
-          </a:xfrm>
-          <a:prstGeom prst="rect">
-            <a:avLst/>
-          </a:prstGeom>
-          <a:solidFill>
-            <a:srgbClr val="46D6C8"/>
-          </a:solidFill>
-          <a:ln>
-            <a:noFill/>
-          </a:ln>
-        </p:spPr>
-        <p:style>
-          <a:lnRef idx="1">
-            <a:schemeClr val="accent1"/>
-          </a:lnRef>
-          <a:fillRef idx="3">
-            <a:schemeClr val="accent1"/>
-          </a:fillRef>
-          <a:effectRef idx="2">
-            <a:schemeClr val="accent1"/>
-          </a:effectRef>
-          <a:fontRef idx="minor">
-            <a:schemeClr val="lt1"/>
-          </a:fontRef>
-        </p:style>
-        <p:txBody>
-          <a:bodyPr rtlCol="0" anchor="ctr"/>
-          <a:lstStyle/>
-          <a:p>
-            <a:pPr algn="ctr"/>
-          </a:p>
-        </p:txBody>
-      </p:sp>
-      <p:sp>
-        <p:nvSpPr>
-          <p:cNvPr id="13" name="TextBox 12"/>
+          <p:cNvPr id="11" name="TextBox 10"/>
           <p:cNvSpPr txBox="1"/>
           <p:nvPr/>
         </p:nvSpPr>
@@ -5991,7 +11589,7 @@
               </a:defRPr>
             </a:pPr>
             <a:r>
-              <a:t>03 / 12</a:t>
+              <a:t>03 / 18</a:t>
             </a:r>
           </a:p>
         </p:txBody>
@@ -7881,7 +13479,7 @@
               </a:defRPr>
             </a:pPr>
             <a:r>
-              <a:t>04 / 12</a:t>
+              <a:t>04 / 18</a:t>
             </a:r>
           </a:p>
         </p:txBody>
@@ -8020,7 +13618,7 @@
               </a:defRPr>
             </a:pPr>
             <a:r>
-              <a:t>三、能力、边界与表现</a:t>
+              <a:t>3.1 能力矩阵</a:t>
             </a:r>
           </a:p>
         </p:txBody>
@@ -8033,8 +13631,8 @@
         </p:nvSpPr>
         <p:spPr>
           <a:xfrm>
-            <a:off x="658368" y="1645920"/>
-            <a:ext cx="3429000" cy="1783080"/>
+            <a:off x="658368" y="1600200"/>
+            <a:ext cx="3581400" cy="1965960"/>
           </a:xfrm>
           <a:prstGeom prst="roundRect">
             <a:avLst/>
@@ -8044,7 +13642,7 @@
           </a:solidFill>
           <a:ln>
             <a:solidFill>
-              <a:srgbClr val="2C5675"/>
+              <a:srgbClr val="294B68"/>
             </a:solidFill>
           </a:ln>
         </p:spPr>
@@ -8063,18 +13661,18 @@
           </a:fontRef>
         </p:style>
         <p:txBody>
-          <a:bodyPr rtlCol="0" anchor="ctr"/>
+          <a:bodyPr rtlCol="0" anchor="ctr" lIns="228600" rIns="182880" tIns="164592"/>
           <a:lstStyle/>
           <a:p>
             <a:pPr algn="ctr">
-              <a:defRPr sz="3000" b="1">
+              <a:defRPr sz="1200" b="1">
                 <a:solidFill>
                   <a:srgbClr val="46D6C8"/>
                 </a:solidFill>
               </a:defRPr>
             </a:pPr>
             <a:r>
-              <a:t>10分钟</a:t>
+              <a:t>同听同说</a:t>
             </a:r>
           </a:p>
           <a:p>
@@ -8082,28 +13680,71 @@
               <a:spcBef>
                 <a:spcPts val="800"/>
               </a:spcBef>
-              <a:defRPr sz="1200">
-                <a:solidFill>
-                  <a:srgbClr val="9AB2C8"/>
-                </a:solidFill>
-              </a:defRPr>
-            </a:pPr>
-            <a:r>
-              <a:t>3.1 能力矩阵</a:t>
-            </a:r>
-          </a:p>
-        </p:txBody>
-      </p:sp>
-      <p:sp>
-        <p:nvSpPr>
-          <p:cNvPr id="6" name="Rounded Rectangle 5"/>
-          <p:cNvSpPr/>
-          <p:nvPr/>
-        </p:nvSpPr>
-        <p:spPr>
-          <a:xfrm>
-            <a:off x="4389120" y="1645920"/>
-            <a:ext cx="3429000" cy="1783080"/>
+              <a:defRPr sz="1500">
+                <a:solidFill>
+                  <a:srgbClr val="F4F8FC"/>
+                </a:solidFill>
+              </a:defRPr>
+            </a:pPr>
+            <a:r>
+              <a:t>当前表现判断：核心优势；证据：官方确认full-duplex，可边输出边监听；边界：重叠讲话、网络抖动、扬声器回声仍影响识别</a:t>
+            </a:r>
+          </a:p>
+        </p:txBody>
+      </p:sp>
+      <p:sp>
+        <p:nvSpPr>
+          <p:cNvPr id="6" name="Rectangle 5"/>
+          <p:cNvSpPr/>
+          <p:nvPr/>
+        </p:nvSpPr>
+        <p:spPr>
+          <a:xfrm>
+            <a:off x="658368" y="1801368"/>
+            <a:ext cx="54864" cy="438912"/>
+          </a:xfrm>
+          <a:prstGeom prst="rect">
+            <a:avLst/>
+          </a:prstGeom>
+          <a:solidFill>
+            <a:srgbClr val="46D6C8"/>
+          </a:solidFill>
+          <a:ln>
+            <a:noFill/>
+          </a:ln>
+        </p:spPr>
+        <p:style>
+          <a:lnRef idx="1">
+            <a:schemeClr val="accent1"/>
+          </a:lnRef>
+          <a:fillRef idx="3">
+            <a:schemeClr val="accent1"/>
+          </a:fillRef>
+          <a:effectRef idx="2">
+            <a:schemeClr val="accent1"/>
+          </a:effectRef>
+          <a:fontRef idx="minor">
+            <a:schemeClr val="lt1"/>
+          </a:fontRef>
+        </p:style>
+        <p:txBody>
+          <a:bodyPr rtlCol="0" anchor="ctr"/>
+          <a:lstStyle/>
+          <a:p>
+            <a:pPr algn="ctr"/>
+          </a:p>
+        </p:txBody>
+      </p:sp>
+      <p:sp>
+        <p:nvSpPr>
+          <p:cNvPr id="7" name="Rounded Rectangle 6"/>
+          <p:cNvSpPr/>
+          <p:nvPr/>
+        </p:nvSpPr>
+        <p:spPr>
+          <a:xfrm>
+            <a:off x="4386071" y="1600200"/>
+            <a:ext cx="3581400" cy="1965960"/>
           </a:xfrm>
           <a:prstGeom prst="roundRect">
             <a:avLst/>
@@ -8113,7 +13754,7 @@
           </a:solidFill>
           <a:ln>
             <a:solidFill>
-              <a:srgbClr val="2C5675"/>
+              <a:srgbClr val="294B68"/>
             </a:solidFill>
           </a:ln>
         </p:spPr>
@@ -8132,18 +13773,18 @@
           </a:fontRef>
         </p:style>
         <p:txBody>
-          <a:bodyPr rtlCol="0" anchor="ctr"/>
+          <a:bodyPr rtlCol="0" anchor="ctr" lIns="228600" rIns="182880" tIns="164592"/>
           <a:lstStyle/>
           <a:p>
             <a:pPr algn="ctr">
-              <a:defRPr sz="3000" b="1">
-                <a:solidFill>
-                  <a:srgbClr val="46D6C8"/>
-                </a:solidFill>
-              </a:defRPr>
-            </a:pPr>
-            <a:r>
-              <a:t>75.7%</a:t>
+              <a:defRPr sz="1200" b="1">
+                <a:solidFill>
+                  <a:srgbClr val="55A7FF"/>
+                </a:solidFill>
+              </a:defRPr>
+            </a:pPr>
+            <a:r>
+              <a:t>自然轮换与停顿</a:t>
             </a:r>
           </a:p>
           <a:p>
@@ -8151,28 +13792,71 @@
               <a:spcBef>
                 <a:spcPts val="800"/>
               </a:spcBef>
-              <a:defRPr sz="1200">
-                <a:solidFill>
-                  <a:srgbClr val="9AB2C8"/>
-                </a:solidFill>
-              </a:defRPr>
-            </a:pPr>
-            <a:r>
-              <a:t>3.2 公开评测结果</a:t>
-            </a:r>
-          </a:p>
-        </p:txBody>
-      </p:sp>
-      <p:sp>
-        <p:nvSpPr>
-          <p:cNvPr id="7" name="Rounded Rectangle 6"/>
-          <p:cNvSpPr/>
-          <p:nvPr/>
-        </p:nvSpPr>
-        <p:spPr>
-          <a:xfrm>
-            <a:off x="8119872" y="1645920"/>
-            <a:ext cx="3429000" cy="1783080"/>
+              <a:defRPr sz="1500">
+                <a:solidFill>
+                  <a:srgbClr val="F4F8FC"/>
+                </a:solidFill>
+              </a:defRPr>
+            </a:pPr>
+            <a:r>
+              <a:t>当前表现判断：相对上一代明显改善；证据：5–10分钟人评偏好显著领先；边界：官方未公开绝对打断时延、误打断率</a:t>
+            </a:r>
+          </a:p>
+        </p:txBody>
+      </p:sp>
+      <p:sp>
+        <p:nvSpPr>
+          <p:cNvPr id="8" name="Rectangle 7"/>
+          <p:cNvSpPr/>
+          <p:nvPr/>
+        </p:nvSpPr>
+        <p:spPr>
+          <a:xfrm>
+            <a:off x="4386071" y="1801368"/>
+            <a:ext cx="54864" cy="438912"/>
+          </a:xfrm>
+          <a:prstGeom prst="rect">
+            <a:avLst/>
+          </a:prstGeom>
+          <a:solidFill>
+            <a:srgbClr val="55A7FF"/>
+          </a:solidFill>
+          <a:ln>
+            <a:noFill/>
+          </a:ln>
+        </p:spPr>
+        <p:style>
+          <a:lnRef idx="1">
+            <a:schemeClr val="accent1"/>
+          </a:lnRef>
+          <a:fillRef idx="3">
+            <a:schemeClr val="accent1"/>
+          </a:fillRef>
+          <a:effectRef idx="2">
+            <a:schemeClr val="accent1"/>
+          </a:effectRef>
+          <a:fontRef idx="minor">
+            <a:schemeClr val="lt1"/>
+          </a:fontRef>
+        </p:style>
+        <p:txBody>
+          <a:bodyPr rtlCol="0" anchor="ctr"/>
+          <a:lstStyle/>
+          <a:p>
+            <a:pPr algn="ctr"/>
+          </a:p>
+        </p:txBody>
+      </p:sp>
+      <p:sp>
+        <p:nvSpPr>
+          <p:cNvPr id="9" name="Rounded Rectangle 8"/>
+          <p:cNvSpPr/>
+          <p:nvPr/>
+        </p:nvSpPr>
+        <p:spPr>
+          <a:xfrm>
+            <a:off x="8113776" y="1600200"/>
+            <a:ext cx="3581400" cy="1965960"/>
           </a:xfrm>
           <a:prstGeom prst="roundRect">
             <a:avLst/>
@@ -8182,7 +13866,7 @@
           </a:solidFill>
           <a:ln>
             <a:solidFill>
-              <a:srgbClr val="2C5675"/>
+              <a:srgbClr val="294B68"/>
             </a:solidFill>
           </a:ln>
         </p:spPr>
@@ -8201,18 +13885,18 @@
           </a:fontRef>
         </p:style>
         <p:txBody>
-          <a:bodyPr rtlCol="0" anchor="ctr"/>
+          <a:bodyPr rtlCol="0" anchor="ctr" lIns="228600" rIns="182880" tIns="164592"/>
           <a:lstStyle/>
           <a:p>
             <a:pPr algn="ctr">
-              <a:defRPr sz="3000" b="1">
-                <a:solidFill>
-                  <a:srgbClr val="46D6C8"/>
-                </a:solidFill>
-              </a:defRPr>
-            </a:pPr>
-            <a:r>
-              <a:t>69.2%</a:t>
+              <a:defRPr sz="1200" b="1">
+                <a:solidFill>
+                  <a:srgbClr val="FFBE55"/>
+                </a:solidFill>
+              </a:defRPr>
+            </a:pPr>
+            <a:r>
+              <a:t>主动倾听/backchannel</a:t>
             </a:r>
           </a:p>
           <a:p>
@@ -8220,28 +13904,71 @@
               <a:spcBef>
                 <a:spcPts val="800"/>
               </a:spcBef>
-              <a:defRPr sz="1200">
-                <a:solidFill>
-                  <a:srgbClr val="9AB2C8"/>
-                </a:solidFill>
-              </a:defRPr>
-            </a:pPr>
-            <a:r>
-              <a:t>3.3 不同场景的已有证据</a:t>
-            </a:r>
-          </a:p>
-        </p:txBody>
-      </p:sp>
-      <p:sp>
-        <p:nvSpPr>
-          <p:cNvPr id="8" name="Rounded Rectangle 7"/>
-          <p:cNvSpPr/>
-          <p:nvPr/>
-        </p:nvSpPr>
-        <p:spPr>
-          <a:xfrm>
-            <a:off x="658368" y="3794760"/>
-            <a:ext cx="3429000" cy="1783080"/>
+              <a:defRPr sz="1500">
+                <a:solidFill>
+                  <a:srgbClr val="F4F8FC"/>
+                </a:solidFill>
+              </a:defRPr>
+            </a:pPr>
+            <a:r>
+              <a:t>当前表现判断：能输出简短应答或保持安静；证据：官方演示与说明；边界：过多“嗯、对”可能显得讨好或干扰</a:t>
+            </a:r>
+          </a:p>
+        </p:txBody>
+      </p:sp>
+      <p:sp>
+        <p:nvSpPr>
+          <p:cNvPr id="10" name="Rectangle 9"/>
+          <p:cNvSpPr/>
+          <p:nvPr/>
+        </p:nvSpPr>
+        <p:spPr>
+          <a:xfrm>
+            <a:off x="8113776" y="1801368"/>
+            <a:ext cx="54864" cy="438912"/>
+          </a:xfrm>
+          <a:prstGeom prst="rect">
+            <a:avLst/>
+          </a:prstGeom>
+          <a:solidFill>
+            <a:srgbClr val="FFBE55"/>
+          </a:solidFill>
+          <a:ln>
+            <a:noFill/>
+          </a:ln>
+        </p:spPr>
+        <p:style>
+          <a:lnRef idx="1">
+            <a:schemeClr val="accent1"/>
+          </a:lnRef>
+          <a:fillRef idx="3">
+            <a:schemeClr val="accent1"/>
+          </a:fillRef>
+          <a:effectRef idx="2">
+            <a:schemeClr val="accent1"/>
+          </a:effectRef>
+          <a:fontRef idx="minor">
+            <a:schemeClr val="lt1"/>
+          </a:fontRef>
+        </p:style>
+        <p:txBody>
+          <a:bodyPr rtlCol="0" anchor="ctr"/>
+          <a:lstStyle/>
+          <a:p>
+            <a:pPr algn="ctr"/>
+          </a:p>
+        </p:txBody>
+      </p:sp>
+      <p:sp>
+        <p:nvSpPr>
+          <p:cNvPr id="11" name="Rounded Rectangle 10"/>
+          <p:cNvSpPr/>
+          <p:nvPr/>
+        </p:nvSpPr>
+        <p:spPr>
+          <a:xfrm>
+            <a:off x="658368" y="3730752"/>
+            <a:ext cx="3581400" cy="1965960"/>
           </a:xfrm>
           <a:prstGeom prst="roundRect">
             <a:avLst/>
@@ -8251,7 +13978,7 @@
           </a:solidFill>
           <a:ln>
             <a:solidFill>
-              <a:srgbClr val="2C5675"/>
+              <a:srgbClr val="294B68"/>
             </a:solidFill>
           </a:ln>
         </p:spPr>
@@ -8270,18 +13997,18 @@
           </a:fontRef>
         </p:style>
         <p:txBody>
-          <a:bodyPr rtlCol="0" anchor="ctr"/>
+          <a:bodyPr rtlCol="0" anchor="ctr" lIns="228600" rIns="182880" tIns="164592"/>
           <a:lstStyle/>
           <a:p>
             <a:pPr algn="ctr">
-              <a:defRPr sz="3000" b="1">
+              <a:defRPr sz="1200" b="1">
                 <a:solidFill>
                   <a:srgbClr val="46D6C8"/>
                 </a:solidFill>
               </a:defRPr>
             </a:pPr>
             <a:r>
-              <a:t>84.2%</a:t>
+              <a:t>背景噪声处理</a:t>
             </a:r>
           </a:p>
           <a:p>
@@ -8289,28 +14016,71 @@
               <a:spcBef>
                 <a:spcPts val="800"/>
               </a:spcBef>
-              <a:defRPr sz="1200">
-                <a:solidFill>
-                  <a:srgbClr val="9AB2C8"/>
-                </a:solidFill>
-              </a:defRPr>
-            </a:pPr>
-            <a:r>
-              <a:t>3.1 能力矩阵</a:t>
-            </a:r>
-          </a:p>
-        </p:txBody>
-      </p:sp>
-      <p:sp>
-        <p:nvSpPr>
-          <p:cNvPr id="9" name="Rounded Rectangle 8"/>
-          <p:cNvSpPr/>
-          <p:nvPr/>
-        </p:nvSpPr>
-        <p:spPr>
-          <a:xfrm>
-            <a:off x="4389120" y="3794760"/>
-            <a:ext cx="3429000" cy="1783080"/>
+              <a:defRPr sz="1500">
+                <a:solidFill>
+                  <a:srgbClr val="F4F8FC"/>
+                </a:solidFill>
+              </a:defRPr>
+            </a:pPr>
+            <a:r>
+              <a:t>当前表现判断：官方称更聚焦主讲人；证据：官方发布；边界：独立小样本测试发现可能误把背景语音当成对话对象</a:t>
+            </a:r>
+          </a:p>
+        </p:txBody>
+      </p:sp>
+      <p:sp>
+        <p:nvSpPr>
+          <p:cNvPr id="12" name="Rectangle 11"/>
+          <p:cNvSpPr/>
+          <p:nvPr/>
+        </p:nvSpPr>
+        <p:spPr>
+          <a:xfrm>
+            <a:off x="658368" y="3931920"/>
+            <a:ext cx="54864" cy="438912"/>
+          </a:xfrm>
+          <a:prstGeom prst="rect">
+            <a:avLst/>
+          </a:prstGeom>
+          <a:solidFill>
+            <a:srgbClr val="46D6C8"/>
+          </a:solidFill>
+          <a:ln>
+            <a:noFill/>
+          </a:ln>
+        </p:spPr>
+        <p:style>
+          <a:lnRef idx="1">
+            <a:schemeClr val="accent1"/>
+          </a:lnRef>
+          <a:fillRef idx="3">
+            <a:schemeClr val="accent1"/>
+          </a:fillRef>
+          <a:effectRef idx="2">
+            <a:schemeClr val="accent1"/>
+          </a:effectRef>
+          <a:fontRef idx="minor">
+            <a:schemeClr val="lt1"/>
+          </a:fontRef>
+        </p:style>
+        <p:txBody>
+          <a:bodyPr rtlCol="0" anchor="ctr"/>
+          <a:lstStyle/>
+          <a:p>
+            <a:pPr algn="ctr"/>
+          </a:p>
+        </p:txBody>
+      </p:sp>
+      <p:sp>
+        <p:nvSpPr>
+          <p:cNvPr id="13" name="Rounded Rectangle 12"/>
+          <p:cNvSpPr/>
+          <p:nvPr/>
+        </p:nvSpPr>
+        <p:spPr>
+          <a:xfrm>
+            <a:off x="4386071" y="3730752"/>
+            <a:ext cx="3581400" cy="1965960"/>
           </a:xfrm>
           <a:prstGeom prst="roundRect">
             <a:avLst/>
@@ -8320,7 +14090,7 @@
           </a:solidFill>
           <a:ln>
             <a:solidFill>
-              <a:srgbClr val="2C5675"/>
+              <a:srgbClr val="294B68"/>
             </a:solidFill>
           </a:ln>
         </p:spPr>
@@ -8339,18 +14109,18 @@
           </a:fontRef>
         </p:style>
         <p:txBody>
-          <a:bodyPr rtlCol="0" anchor="ctr"/>
+          <a:bodyPr rtlCol="0" anchor="ctr" lIns="228600" rIns="182880" tIns="164592"/>
           <a:lstStyle/>
           <a:p>
             <a:pPr algn="ctr">
-              <a:defRPr sz="3000" b="1">
-                <a:solidFill>
-                  <a:srgbClr val="46D6C8"/>
-                </a:solidFill>
-              </a:defRPr>
-            </a:pPr>
-            <a:r>
-              <a:t>45.3%</a:t>
+              <a:defRPr sz="1200" b="1">
+                <a:solidFill>
+                  <a:srgbClr val="55A7FF"/>
+                </a:solidFill>
+              </a:defRPr>
+            </a:pPr>
+            <a:r>
+              <a:t>搜索与复杂推理</a:t>
             </a:r>
           </a:p>
           <a:p>
@@ -8358,28 +14128,71 @@
               <a:spcBef>
                 <a:spcPts val="800"/>
               </a:spcBef>
-              <a:defRPr sz="1200">
-                <a:solidFill>
-                  <a:srgbClr val="9AB2C8"/>
-                </a:solidFill>
-              </a:defRPr>
-            </a:pPr>
-            <a:r>
-              <a:t>3.2 公开评测结果</a:t>
-            </a:r>
-          </a:p>
-        </p:txBody>
-      </p:sp>
-      <p:sp>
-        <p:nvSpPr>
-          <p:cNvPr id="10" name="Rounded Rectangle 9"/>
-          <p:cNvSpPr/>
-          <p:nvPr/>
-        </p:nvSpPr>
-        <p:spPr>
-          <a:xfrm>
-            <a:off x="8119872" y="3794760"/>
-            <a:ext cx="3429000" cy="1783080"/>
+              <a:defRPr sz="1500">
+                <a:solidFill>
+                  <a:srgbClr val="F4F8FC"/>
+                </a:solidFill>
+              </a:defRPr>
+            </a:pPr>
+            <a:r>
+              <a:t>当前表现判断：通过GPT‑5.5委托显著增强；证据：GPQA、BrowseComp厂商评测；边界：不是语音本体单独能力；依赖网络、搜索与委托时延</a:t>
+            </a:r>
+          </a:p>
+        </p:txBody>
+      </p:sp>
+      <p:sp>
+        <p:nvSpPr>
+          <p:cNvPr id="14" name="Rectangle 13"/>
+          <p:cNvSpPr/>
+          <p:nvPr/>
+        </p:nvSpPr>
+        <p:spPr>
+          <a:xfrm>
+            <a:off x="4386071" y="3931920"/>
+            <a:ext cx="54864" cy="438912"/>
+          </a:xfrm>
+          <a:prstGeom prst="rect">
+            <a:avLst/>
+          </a:prstGeom>
+          <a:solidFill>
+            <a:srgbClr val="55A7FF"/>
+          </a:solidFill>
+          <a:ln>
+            <a:noFill/>
+          </a:ln>
+        </p:spPr>
+        <p:style>
+          <a:lnRef idx="1">
+            <a:schemeClr val="accent1"/>
+          </a:lnRef>
+          <a:fillRef idx="3">
+            <a:schemeClr val="accent1"/>
+          </a:fillRef>
+          <a:effectRef idx="2">
+            <a:schemeClr val="accent1"/>
+          </a:effectRef>
+          <a:fontRef idx="minor">
+            <a:schemeClr val="lt1"/>
+          </a:fontRef>
+        </p:style>
+        <p:txBody>
+          <a:bodyPr rtlCol="0" anchor="ctr"/>
+          <a:lstStyle/>
+          <a:p>
+            <a:pPr algn="ctr"/>
+          </a:p>
+        </p:txBody>
+      </p:sp>
+      <p:sp>
+        <p:nvSpPr>
+          <p:cNvPr id="15" name="Rounded Rectangle 14"/>
+          <p:cNvSpPr/>
+          <p:nvPr/>
+        </p:nvSpPr>
+        <p:spPr>
+          <a:xfrm>
+            <a:off x="8113776" y="3730752"/>
+            <a:ext cx="3581400" cy="1965960"/>
           </a:xfrm>
           <a:prstGeom prst="roundRect">
             <a:avLst/>
@@ -8389,7 +14202,7 @@
           </a:solidFill>
           <a:ln>
             <a:solidFill>
-              <a:srgbClr val="2C5675"/>
+              <a:srgbClr val="294B68"/>
             </a:solidFill>
           </a:ln>
         </p:spPr>
@@ -8408,18 +14221,18 @@
           </a:fontRef>
         </p:style>
         <p:txBody>
-          <a:bodyPr rtlCol="0" anchor="ctr"/>
+          <a:bodyPr rtlCol="0" anchor="ctr" lIns="228600" rIns="182880" tIns="164592"/>
           <a:lstStyle/>
           <a:p>
             <a:pPr algn="ctr">
-              <a:defRPr sz="3000" b="1">
-                <a:solidFill>
-                  <a:srgbClr val="46D6C8"/>
-                </a:solidFill>
-              </a:defRPr>
-            </a:pPr>
-            <a:r>
-              <a:t>75.2%</a:t>
+              <a:defRPr sz="1200" b="1">
+                <a:solidFill>
+                  <a:srgbClr val="FFBE55"/>
+                </a:solidFill>
+              </a:defRPr>
+            </a:pPr>
+            <a:r>
+              <a:t>工具/Agent任务</a:t>
             </a:r>
           </a:p>
           <a:p>
@@ -8427,21 +14240,64 @@
               <a:spcBef>
                 <a:spcPts val="800"/>
               </a:spcBef>
-              <a:defRPr sz="1200">
-                <a:solidFill>
-                  <a:srgbClr val="9AB2C8"/>
-                </a:solidFill>
-              </a:defRPr>
-            </a:pPr>
-            <a:r>
-              <a:t>3.3 不同场景的已有证据</a:t>
-            </a:r>
-          </a:p>
-        </p:txBody>
-      </p:sp>
-      <p:sp>
-        <p:nvSpPr>
-          <p:cNvPr id="11" name="TextBox 10"/>
+              <a:defRPr sz="1500">
+                <a:solidFill>
+                  <a:srgbClr val="F4F8FC"/>
+                </a:solidFill>
+              </a:defRPr>
+            </a:pPr>
+            <a:r>
+              <a:t>当前表现判断：可在后台委托并保持交流；证据：官方架构说明；边界：消费端开放工具有限；GPT‑Live API未发布</a:t>
+            </a:r>
+          </a:p>
+        </p:txBody>
+      </p:sp>
+      <p:sp>
+        <p:nvSpPr>
+          <p:cNvPr id="16" name="Rectangle 15"/>
+          <p:cNvSpPr/>
+          <p:nvPr/>
+        </p:nvSpPr>
+        <p:spPr>
+          <a:xfrm>
+            <a:off x="8113776" y="3931920"/>
+            <a:ext cx="54864" cy="438912"/>
+          </a:xfrm>
+          <a:prstGeom prst="rect">
+            <a:avLst/>
+          </a:prstGeom>
+          <a:solidFill>
+            <a:srgbClr val="FFBE55"/>
+          </a:solidFill>
+          <a:ln>
+            <a:noFill/>
+          </a:ln>
+        </p:spPr>
+        <p:style>
+          <a:lnRef idx="1">
+            <a:schemeClr val="accent1"/>
+          </a:lnRef>
+          <a:fillRef idx="3">
+            <a:schemeClr val="accent1"/>
+          </a:fillRef>
+          <a:effectRef idx="2">
+            <a:schemeClr val="accent1"/>
+          </a:effectRef>
+          <a:fontRef idx="minor">
+            <a:schemeClr val="lt1"/>
+          </a:fontRef>
+        </p:style>
+        <p:txBody>
+          <a:bodyPr rtlCol="0" anchor="ctr"/>
+          <a:lstStyle/>
+          <a:p>
+            <a:pPr algn="ctr"/>
+          </a:p>
+        </p:txBody>
+      </p:sp>
+      <p:sp>
+        <p:nvSpPr>
+          <p:cNvPr id="17" name="TextBox 16"/>
           <p:cNvSpPr txBox="1"/>
           <p:nvPr/>
         </p:nvSpPr>
@@ -8469,7 +14325,7 @@
               </a:defRPr>
             </a:pPr>
             <a:r>
-              <a:t>05 / 12</a:t>
+              <a:t>05 / 18</a:t>
             </a:r>
           </a:p>
         </p:txBody>
@@ -8608,7 +14464,7 @@
               </a:defRPr>
             </a:pPr>
             <a:r>
-              <a:t>四、竞品比较</a:t>
+              <a:t>3.2 公开评测结果</a:t>
             </a:r>
           </a:p>
         </p:txBody>
@@ -8662,7 +14518,7 @@
               </a:defRPr>
             </a:pPr>
             <a:r>
-              <a:t>128</a:t>
+              <a:t>84.2%</a:t>
             </a:r>
           </a:p>
           <a:p>
@@ -8677,7 +14533,7 @@
               </a:defRPr>
             </a:pPr>
             <a:r>
-              <a:t>4.1 国外竞品</a:t>
+              <a:t>GPQA，High · GPT‑Live‑1</a:t>
             </a:r>
           </a:p>
         </p:txBody>
@@ -8731,7 +14587,7 @@
               </a:defRPr>
             </a:pPr>
             <a:r>
-              <a:t>70</a:t>
+              <a:t>75.7%</a:t>
             </a:r>
           </a:p>
           <a:p>
@@ -8746,7 +14602,7 @@
               </a:defRPr>
             </a:pPr>
             <a:r>
-              <a:t>4.2 国内竞品</a:t>
+              <a:t>人类偏好，5–10分钟配对对话 · GPT‑Live‑1</a:t>
             </a:r>
           </a:p>
         </p:txBody>
@@ -8800,7 +14656,7 @@
               </a:defRPr>
             </a:pPr>
             <a:r>
-              <a:t>120分钟</a:t>
+              <a:t>75.2%</a:t>
             </a:r>
           </a:p>
           <a:p>
@@ -8815,7 +14671,7 @@
               </a:defRPr>
             </a:pPr>
             <a:r>
-              <a:t>4.3 架构竞争的本质</a:t>
+              <a:t>BrowseComp，High · GPT‑Live‑1</a:t>
             </a:r>
           </a:p>
         </p:txBody>
@@ -8869,7 +14725,7 @@
               </a:defRPr>
             </a:pPr>
             <a:r>
-              <a:t>40</a:t>
+              <a:t>45.3%</a:t>
             </a:r>
           </a:p>
           <a:p>
@@ -8884,7 +14740,7 @@
               </a:defRPr>
             </a:pPr>
             <a:r>
-              <a:t>4.1 国外竞品</a:t>
+              <a:t>GPQA，High · Advanced Voice Mode</a:t>
             </a:r>
           </a:p>
         </p:txBody>
@@ -8938,7 +14794,7 @@
               </a:defRPr>
             </a:pPr>
             <a:r>
-              <a:t>2604.15804</a:t>
+              <a:t>69.2%</a:t>
             </a:r>
           </a:p>
           <a:p>
@@ -8953,7 +14809,7 @@
               </a:defRPr>
             </a:pPr>
             <a:r>
-              <a:t>4.2 国内竞品</a:t>
+              <a:t>人类偏好，5–10分钟配对对话 · GPT‑Live‑1 mini</a:t>
             </a:r>
           </a:p>
         </p:txBody>
@@ -9007,7 +14863,7 @@
               </a:defRPr>
             </a:pPr>
             <a:r>
-              <a:t>6561</a:t>
+              <a:t>31.6%</a:t>
             </a:r>
           </a:p>
           <a:p>
@@ -9022,7 +14878,7 @@
               </a:defRPr>
             </a:pPr>
             <a:r>
-              <a:t>4.3 架构竞争的本质</a:t>
+              <a:t>BrowseComp，High · GPT‑Live‑1 mini</a:t>
             </a:r>
           </a:p>
         </p:txBody>
@@ -9057,7 +14913,7 @@
               </a:defRPr>
             </a:pPr>
             <a:r>
-              <a:t>06 / 12</a:t>
+              <a:t>06 / 18</a:t>
             </a:r>
           </a:p>
         </p:txBody>
@@ -9196,7 +15052,7 @@
               </a:defRPr>
             </a:pPr>
             <a:r>
-              <a:t>五、风险与局限</a:t>
+              <a:t>3.3 不同场景的已有证据</a:t>
             </a:r>
           </a:p>
         </p:txBody>
@@ -9265,7 +15121,7 @@
               </a:defRPr>
             </a:pPr>
             <a:r>
-              <a:t>幻觉被自然声音放大。 流畅、自信和情绪化的语音容易让用户高估答案真实性。</a:t>
+              <a:t>日常对话与语言练习： 人类偏好和流畅度数据直接支持自然对话改善；但没有分语言、口音、儿童或老年用户结果。</a:t>
             </a:r>
           </a:p>
         </p:txBody>
@@ -9357,7 +15213,7 @@
             <a:pPr algn="ctr">
               <a:defRPr sz="1200" b="1">
                 <a:solidFill>
-                  <a:srgbClr val="FFBE55"/>
+                  <a:srgbClr val="55A7FF"/>
                 </a:solidFill>
               </a:defRPr>
             </a:pPr>
@@ -9377,7 +15233,7 @@
               </a:defRPr>
             </a:pPr>
             <a:r>
-              <a:t>说话人归属与误触发。 背景对话、电视、多人会话可能被当作对模型的指令。</a:t>
+              <a:t>科学问答： GPQA显示委托后台推理后能回答复杂科学问题，但语音呈现自然不代表结论可靠，仍需引用和事实核验。</a:t>
             </a:r>
           </a:p>
         </p:txBody>
@@ -9397,7 +15253,7 @@
             <a:avLst/>
           </a:prstGeom>
           <a:solidFill>
-            <a:srgbClr val="FFBE55"/>
+            <a:srgbClr val="55A7FF"/>
           </a:solidFill>
           <a:ln>
             <a:noFill/>
@@ -9469,7 +15325,7 @@
             <a:pPr algn="ctr">
               <a:defRPr sz="1200" b="1">
                 <a:solidFill>
-                  <a:srgbClr val="FF6B6B"/>
+                  <a:srgbClr val="FFBE55"/>
                 </a:solidFill>
               </a:defRPr>
             </a:pPr>
@@ -9489,7 +15345,7 @@
               </a:defRPr>
             </a:pPr>
             <a:r>
-              <a:t>打断竞争。 太敏感会频繁停下，太迟钝会压制用户；网络往返和播放缓冲也是打断时延的一部分。</a:t>
+              <a:t>复杂搜索： BrowseComp证明“语音入口+后台Agent”可完成难检索任务；这是系统Agent能力，而非纯实时语音能力。</a:t>
             </a:r>
           </a:p>
         </p:txBody>
@@ -9509,7 +15365,7 @@
             <a:avLst/>
           </a:prstGeom>
           <a:solidFill>
-            <a:srgbClr val="FF6B6B"/>
+            <a:srgbClr val="FFBE55"/>
           </a:solidFill>
           <a:ln>
             <a:noFill/>
@@ -9601,7 +15457,7 @@
               </a:defRPr>
             </a:pPr>
             <a:r>
-              <a:t>委托链不透明。 用户难以判断当前答案来自GPT‑Live、GPT‑5.5、搜索还是工具，审计需额外记录。</a:t>
+              <a:t>电信客服： τ³‑Voice Telecom显示High模式任务成功率高于旧语音，但High耗时约385秒，Instant成功率约37%，揭示质量—时延权衡。</a:t>
             </a:r>
           </a:p>
         </p:txBody>
@@ -9693,7 +15549,7 @@
             <a:pPr algn="ctr">
               <a:defRPr sz="1200" b="1">
                 <a:solidFill>
-                  <a:srgbClr val="FFBE55"/>
+                  <a:srgbClr val="55A7FF"/>
                 </a:solidFill>
               </a:defRPr>
             </a:pPr>
@@ -9706,14 +15562,14 @@
               <a:spcBef>
                 <a:spcPts val="800"/>
               </a:spcBef>
-              <a:defRPr sz="1500">
+              <a:defRPr sz="1100">
                 <a:solidFill>
                   <a:srgbClr val="F4F8FC"/>
                 </a:solidFill>
               </a:defRPr>
             </a:pPr>
             <a:r>
-              <a:t>上下文漂移。 长会话中摘要、记忆与任务状态可能不一致，尤其是中断和并发工具返回时。</a:t>
+              <a:t>噪声与打断： OpenAI宣称更能聚焦说话人；Agora发布的30次小样本测试中，GPT‑Live没有因背景语音中断当前输出，但在无人对它说话时有4/30窗口主动回应背景语音，提示“说话人归属”仍是风险。Agora测试转录 (https://medium.com/agora-io/openai-didnt-publish-gpt-live-s-latency</a:t>
             </a:r>
           </a:p>
         </p:txBody>
@@ -9733,7 +15589,7 @@
             <a:avLst/>
           </a:prstGeom>
           <a:solidFill>
-            <a:srgbClr val="FFBE55"/>
+            <a:srgbClr val="55A7FF"/>
           </a:solidFill>
           <a:ln>
             <a:noFill/>
@@ -9763,119 +15619,7 @@
       </p:sp>
       <p:sp>
         <p:nvSpPr>
-          <p:cNvPr id="15" name="Rounded Rectangle 14"/>
-          <p:cNvSpPr/>
-          <p:nvPr/>
-        </p:nvSpPr>
-        <p:spPr>
-          <a:xfrm>
-            <a:off x="8113776" y="3730752"/>
-            <a:ext cx="3581400" cy="1965960"/>
-          </a:xfrm>
-          <a:prstGeom prst="roundRect">
-            <a:avLst/>
-          </a:prstGeom>
-          <a:solidFill>
-            <a:srgbClr val="10243C"/>
-          </a:solidFill>
-          <a:ln>
-            <a:solidFill>
-              <a:srgbClr val="294B68"/>
-            </a:solidFill>
-          </a:ln>
-        </p:spPr>
-        <p:style>
-          <a:lnRef idx="1">
-            <a:schemeClr val="accent1"/>
-          </a:lnRef>
-          <a:fillRef idx="3">
-            <a:schemeClr val="accent1"/>
-          </a:fillRef>
-          <a:effectRef idx="2">
-            <a:schemeClr val="accent1"/>
-          </a:effectRef>
-          <a:fontRef idx="minor">
-            <a:schemeClr val="lt1"/>
-          </a:fontRef>
-        </p:style>
-        <p:txBody>
-          <a:bodyPr rtlCol="0" anchor="ctr" lIns="228600" rIns="182880" tIns="164592"/>
-          <a:lstStyle/>
-          <a:p>
-            <a:pPr algn="ctr">
-              <a:defRPr sz="1200" b="1">
-                <a:solidFill>
-                  <a:srgbClr val="FF6B6B"/>
-                </a:solidFill>
-              </a:defRPr>
-            </a:pPr>
-            <a:r>
-              <a:t>06</a:t>
-            </a:r>
-          </a:p>
-          <a:p>
-            <a:pPr>
-              <a:spcBef>
-                <a:spcPts val="800"/>
-              </a:spcBef>
-              <a:defRPr sz="1500">
-                <a:solidFill>
-                  <a:srgbClr val="F4F8FC"/>
-                </a:solidFill>
-              </a:defRPr>
-            </a:pPr>
-            <a:r>
-              <a:t>语言不均衡。 OpenAI承认部分语言有非母语口音或流利度缺口；中文方言和专业术语必须专项评测。</a:t>
-            </a:r>
-          </a:p>
-        </p:txBody>
-      </p:sp>
-      <p:sp>
-        <p:nvSpPr>
-          <p:cNvPr id="16" name="Rectangle 15"/>
-          <p:cNvSpPr/>
-          <p:nvPr/>
-        </p:nvSpPr>
-        <p:spPr>
-          <a:xfrm>
-            <a:off x="8113776" y="3931920"/>
-            <a:ext cx="54864" cy="438912"/>
-          </a:xfrm>
-          <a:prstGeom prst="rect">
-            <a:avLst/>
-          </a:prstGeom>
-          <a:solidFill>
-            <a:srgbClr val="FF6B6B"/>
-          </a:solidFill>
-          <a:ln>
-            <a:noFill/>
-          </a:ln>
-        </p:spPr>
-        <p:style>
-          <a:lnRef idx="1">
-            <a:schemeClr val="accent1"/>
-          </a:lnRef>
-          <a:fillRef idx="3">
-            <a:schemeClr val="accent1"/>
-          </a:fillRef>
-          <a:effectRef idx="2">
-            <a:schemeClr val="accent1"/>
-          </a:effectRef>
-          <a:fontRef idx="minor">
-            <a:schemeClr val="lt1"/>
-          </a:fontRef>
-        </p:style>
-        <p:txBody>
-          <a:bodyPr rtlCol="0" anchor="ctr"/>
-          <a:lstStyle/>
-          <a:p>
-            <a:pPr algn="ctr"/>
-          </a:p>
-        </p:txBody>
-      </p:sp>
-      <p:sp>
-        <p:nvSpPr>
-          <p:cNvPr id="17" name="TextBox 16"/>
+          <p:cNvPr id="15" name="TextBox 14"/>
           <p:cNvSpPr txBox="1"/>
           <p:nvPr/>
         </p:nvSpPr>
@@ -9903,7 +15647,7 @@
               </a:defRPr>
             </a:pPr>
             <a:r>
-              <a:t>07 / 12</a:t>
+              <a:t>07 / 18</a:t>
             </a:r>
           </a:p>
         </p:txBody>
@@ -10042,7 +15786,7 @@
               </a:defRPr>
             </a:pPr>
             <a:r>
-              <a:t>六、市场需求与应用场景</a:t>
+              <a:t>4.1 国外竞品</a:t>
             </a:r>
           </a:p>
         </p:txBody>
@@ -10055,8 +15799,8 @@
         </p:nvSpPr>
         <p:spPr>
           <a:xfrm>
-            <a:off x="658368" y="1645920"/>
-            <a:ext cx="3429000" cy="1783080"/>
+            <a:off x="658368" y="1600200"/>
+            <a:ext cx="3581400" cy="1965960"/>
           </a:xfrm>
           <a:prstGeom prst="roundRect">
             <a:avLst/>
@@ -10066,7 +15810,7 @@
           </a:solidFill>
           <a:ln>
             <a:solidFill>
-              <a:srgbClr val="2C5675"/>
+              <a:srgbClr val="294B68"/>
             </a:solidFill>
           </a:ln>
         </p:spPr>
@@ -10085,18 +15829,18 @@
           </a:fontRef>
         </p:style>
         <p:txBody>
-          <a:bodyPr rtlCol="0" anchor="ctr"/>
+          <a:bodyPr rtlCol="0" anchor="ctr" lIns="228600" rIns="182880" tIns="164592"/>
           <a:lstStyle/>
           <a:p>
             <a:pPr algn="ctr">
-              <a:defRPr sz="3000" b="1">
+              <a:defRPr sz="1200" b="1">
                 <a:solidFill>
                   <a:srgbClr val="46D6C8"/>
                 </a:solidFill>
               </a:defRPr>
             </a:pPr>
             <a:r>
-              <a:t>85%</a:t>
+              <a:t>Google Gemini Live</a:t>
             </a:r>
           </a:p>
           <a:p>
@@ -10104,28 +15848,71 @@
               <a:spcBef>
                 <a:spcPts val="800"/>
               </a:spcBef>
-              <a:defRPr sz="1200">
-                <a:solidFill>
-                  <a:srgbClr val="9AB2C8"/>
-                </a:solidFill>
-              </a:defRPr>
-            </a:pPr>
-            <a:r>
-              <a:t>6.1 需求信号</a:t>
-            </a:r>
-          </a:p>
-        </p:txBody>
-      </p:sp>
-      <p:sp>
-        <p:nvSpPr>
-          <p:cNvPr id="6" name="Rounded Rectangle 5"/>
-          <p:cNvSpPr/>
-          <p:nvPr/>
-        </p:nvSpPr>
-        <p:spPr>
-          <a:xfrm>
-            <a:off x="4389120" y="1645920"/>
-            <a:ext cx="3429000" cy="1783080"/>
+              <a:defRPr sz="1100">
+                <a:solidFill>
+                  <a:srgbClr val="F4F8FC"/>
+                </a:solidFill>
+              </a:defRPr>
+            </a:pPr>
+            <a:r>
+              <a:t>技术路线：原生音频/视觉，状态化WebSocket，音频、图像、文本输入；128K原生音频上下文；主要优势：70种语言、视频/图像、情感对话、主动音频、搜索和函数调用；相对GPT‑Live差异/限制：无压缩时音频15分钟、音视频2分钟；连接约10分钟需恢复；部分版本异步工具受限</a:t>
+            </a:r>
+          </a:p>
+        </p:txBody>
+      </p:sp>
+      <p:sp>
+        <p:nvSpPr>
+          <p:cNvPr id="6" name="Rectangle 5"/>
+          <p:cNvSpPr/>
+          <p:nvPr/>
+        </p:nvSpPr>
+        <p:spPr>
+          <a:xfrm>
+            <a:off x="658368" y="1801368"/>
+            <a:ext cx="54864" cy="438912"/>
+          </a:xfrm>
+          <a:prstGeom prst="rect">
+            <a:avLst/>
+          </a:prstGeom>
+          <a:solidFill>
+            <a:srgbClr val="46D6C8"/>
+          </a:solidFill>
+          <a:ln>
+            <a:noFill/>
+          </a:ln>
+        </p:spPr>
+        <p:style>
+          <a:lnRef idx="1">
+            <a:schemeClr val="accent1"/>
+          </a:lnRef>
+          <a:fillRef idx="3">
+            <a:schemeClr val="accent1"/>
+          </a:fillRef>
+          <a:effectRef idx="2">
+            <a:schemeClr val="accent1"/>
+          </a:effectRef>
+          <a:fontRef idx="minor">
+            <a:schemeClr val="lt1"/>
+          </a:fontRef>
+        </p:style>
+        <p:txBody>
+          <a:bodyPr rtlCol="0" anchor="ctr"/>
+          <a:lstStyle/>
+          <a:p>
+            <a:pPr algn="ctr"/>
+          </a:p>
+        </p:txBody>
+      </p:sp>
+      <p:sp>
+        <p:nvSpPr>
+          <p:cNvPr id="7" name="Rounded Rectangle 6"/>
+          <p:cNvSpPr/>
+          <p:nvPr/>
+        </p:nvSpPr>
+        <p:spPr>
+          <a:xfrm>
+            <a:off x="4386071" y="1600200"/>
+            <a:ext cx="3581400" cy="1965960"/>
           </a:xfrm>
           <a:prstGeom prst="roundRect">
             <a:avLst/>
@@ -10135,7 +15922,7 @@
           </a:solidFill>
           <a:ln>
             <a:solidFill>
-              <a:srgbClr val="2C5675"/>
+              <a:srgbClr val="294B68"/>
             </a:solidFill>
           </a:ln>
         </p:spPr>
@@ -10154,18 +15941,18 @@
           </a:fontRef>
         </p:style>
         <p:txBody>
-          <a:bodyPr rtlCol="0" anchor="ctr"/>
+          <a:bodyPr rtlCol="0" anchor="ctr" lIns="228600" rIns="182880" tIns="164592"/>
           <a:lstStyle/>
           <a:p>
             <a:pPr algn="ctr">
-              <a:defRPr sz="3000" b="1">
-                <a:solidFill>
-                  <a:srgbClr val="46D6C8"/>
-                </a:solidFill>
-              </a:defRPr>
-            </a:pPr>
-            <a:r>
-              <a:t>11%</a:t>
+              <a:defRPr sz="1200" b="1">
+                <a:solidFill>
+                  <a:srgbClr val="55A7FF"/>
+                </a:solidFill>
+              </a:defRPr>
+            </a:pPr>
+            <a:r>
+              <a:t>OpenAI GPT‑Realtime‑2.1</a:t>
             </a:r>
           </a:p>
           <a:p>
@@ -10173,28 +15960,71 @@
               <a:spcBef>
                 <a:spcPts val="800"/>
               </a:spcBef>
-              <a:defRPr sz="1200">
-                <a:solidFill>
-                  <a:srgbClr val="9AB2C8"/>
-                </a:solidFill>
-              </a:defRPr>
-            </a:pPr>
-            <a:r>
-              <a:t>6.2 场景优先级</a:t>
-            </a:r>
-          </a:p>
-        </p:txBody>
-      </p:sp>
-      <p:sp>
-        <p:nvSpPr>
-          <p:cNvPr id="7" name="Rounded Rectangle 6"/>
-          <p:cNvSpPr/>
-          <p:nvPr/>
-        </p:nvSpPr>
-        <p:spPr>
-          <a:xfrm>
-            <a:off x="8119872" y="1645920"/>
-            <a:ext cx="3429000" cy="1783080"/>
+              <a:defRPr sz="1100">
+                <a:solidFill>
+                  <a:srgbClr val="F4F8FC"/>
+                </a:solidFill>
+              </a:defRPr>
+            </a:pPr>
+            <a:r>
+              <a:t>技术路线：原生S2S，WebRTC/WebSocket/SIP，推理与函数调用；主要优势：API已开放、生态成熟、电话和MCP集成直接；相对GPT‑Live差异/限制：不等于GPT‑Live持续交互产品；开发者需自建界面、安全和业务编排</a:t>
+            </a:r>
+          </a:p>
+        </p:txBody>
+      </p:sp>
+      <p:sp>
+        <p:nvSpPr>
+          <p:cNvPr id="8" name="Rectangle 7"/>
+          <p:cNvSpPr/>
+          <p:nvPr/>
+        </p:nvSpPr>
+        <p:spPr>
+          <a:xfrm>
+            <a:off x="4386071" y="1801368"/>
+            <a:ext cx="54864" cy="438912"/>
+          </a:xfrm>
+          <a:prstGeom prst="rect">
+            <a:avLst/>
+          </a:prstGeom>
+          <a:solidFill>
+            <a:srgbClr val="55A7FF"/>
+          </a:solidFill>
+          <a:ln>
+            <a:noFill/>
+          </a:ln>
+        </p:spPr>
+        <p:style>
+          <a:lnRef idx="1">
+            <a:schemeClr val="accent1"/>
+          </a:lnRef>
+          <a:fillRef idx="3">
+            <a:schemeClr val="accent1"/>
+          </a:fillRef>
+          <a:effectRef idx="2">
+            <a:schemeClr val="accent1"/>
+          </a:effectRef>
+          <a:fontRef idx="minor">
+            <a:schemeClr val="lt1"/>
+          </a:fontRef>
+        </p:style>
+        <p:txBody>
+          <a:bodyPr rtlCol="0" anchor="ctr"/>
+          <a:lstStyle/>
+          <a:p>
+            <a:pPr algn="ctr"/>
+          </a:p>
+        </p:txBody>
+      </p:sp>
+      <p:sp>
+        <p:nvSpPr>
+          <p:cNvPr id="9" name="Rounded Rectangle 8"/>
+          <p:cNvSpPr/>
+          <p:nvPr/>
+        </p:nvSpPr>
+        <p:spPr>
+          <a:xfrm>
+            <a:off x="8113776" y="1600200"/>
+            <a:ext cx="3581400" cy="1965960"/>
           </a:xfrm>
           <a:prstGeom prst="roundRect">
             <a:avLst/>
@@ -10204,7 +16034,7 @@
           </a:solidFill>
           <a:ln>
             <a:solidFill>
-              <a:srgbClr val="2C5675"/>
+              <a:srgbClr val="294B68"/>
             </a:solidFill>
           </a:ln>
         </p:spPr>
@@ -10223,18 +16053,18 @@
           </a:fontRef>
         </p:style>
         <p:txBody>
-          <a:bodyPr rtlCol="0" anchor="ctr"/>
+          <a:bodyPr rtlCol="0" anchor="ctr" lIns="228600" rIns="182880" tIns="164592"/>
           <a:lstStyle/>
           <a:p>
             <a:pPr algn="ctr">
-              <a:defRPr sz="3000" b="1">
-                <a:solidFill>
-                  <a:srgbClr val="46D6C8"/>
-                </a:solidFill>
-              </a:defRPr>
-            </a:pPr>
-            <a:r>
-              <a:t>5%</a:t>
+              <a:defRPr sz="1200" b="1">
+                <a:solidFill>
+                  <a:srgbClr val="FFBE55"/>
+                </a:solidFill>
+              </a:defRPr>
+            </a:pPr>
+            <a:r>
+              <a:t>xAI Grok Voice Agent</a:t>
             </a:r>
           </a:p>
           <a:p>
@@ -10242,28 +16072,71 @@
               <a:spcBef>
                 <a:spcPts val="800"/>
               </a:spcBef>
-              <a:defRPr sz="1200">
-                <a:solidFill>
-                  <a:srgbClr val="9AB2C8"/>
-                </a:solidFill>
-              </a:defRPr>
-            </a:pPr>
-            <a:r>
-              <a:t>6.3 最值得验证的三个产品原型</a:t>
-            </a:r>
-          </a:p>
-        </p:txBody>
-      </p:sp>
-      <p:sp>
-        <p:nvSpPr>
-          <p:cNvPr id="8" name="Rounded Rectangle 7"/>
-          <p:cNvSpPr/>
-          <p:nvPr/>
-        </p:nvSpPr>
-        <p:spPr>
-          <a:xfrm>
-            <a:off x="658368" y="3794760"/>
-            <a:ext cx="3429000" cy="1783080"/>
+              <a:defRPr sz="1100">
+                <a:solidFill>
+                  <a:srgbClr val="F4F8FC"/>
+                </a:solidFill>
+              </a:defRPr>
+            </a:pPr>
+            <a:r>
+              <a:t>技术路线：WebSocket原生实时语音，reasoning effort，工具与MCP；主要优势：$0.05/分钟、120分钟会话、X搜索、OpenAI相似事件协议；相对GPT‑Live差异/限制：区域为us-east-1；公开独立语音质量与安全评测较少</a:t>
+            </a:r>
+          </a:p>
+        </p:txBody>
+      </p:sp>
+      <p:sp>
+        <p:nvSpPr>
+          <p:cNvPr id="10" name="Rectangle 9"/>
+          <p:cNvSpPr/>
+          <p:nvPr/>
+        </p:nvSpPr>
+        <p:spPr>
+          <a:xfrm>
+            <a:off x="8113776" y="1801368"/>
+            <a:ext cx="54864" cy="438912"/>
+          </a:xfrm>
+          <a:prstGeom prst="rect">
+            <a:avLst/>
+          </a:prstGeom>
+          <a:solidFill>
+            <a:srgbClr val="FFBE55"/>
+          </a:solidFill>
+          <a:ln>
+            <a:noFill/>
+          </a:ln>
+        </p:spPr>
+        <p:style>
+          <a:lnRef idx="1">
+            <a:schemeClr val="accent1"/>
+          </a:lnRef>
+          <a:fillRef idx="3">
+            <a:schemeClr val="accent1"/>
+          </a:fillRef>
+          <a:effectRef idx="2">
+            <a:schemeClr val="accent1"/>
+          </a:effectRef>
+          <a:fontRef idx="minor">
+            <a:schemeClr val="lt1"/>
+          </a:fontRef>
+        </p:style>
+        <p:txBody>
+          <a:bodyPr rtlCol="0" anchor="ctr"/>
+          <a:lstStyle/>
+          <a:p>
+            <a:pPr algn="ctr"/>
+          </a:p>
+        </p:txBody>
+      </p:sp>
+      <p:sp>
+        <p:nvSpPr>
+          <p:cNvPr id="11" name="Rounded Rectangle 10"/>
+          <p:cNvSpPr/>
+          <p:nvPr/>
+        </p:nvSpPr>
+        <p:spPr>
+          <a:xfrm>
+            <a:off x="658368" y="3730752"/>
+            <a:ext cx="3581400" cy="1965960"/>
           </a:xfrm>
           <a:prstGeom prst="roundRect">
             <a:avLst/>
@@ -10273,7 +16146,7 @@
           </a:solidFill>
           <a:ln>
             <a:solidFill>
-              <a:srgbClr val="2C5675"/>
+              <a:srgbClr val="294B68"/>
             </a:solidFill>
           </a:ln>
         </p:spPr>
@@ -10292,18 +16165,18 @@
           </a:fontRef>
         </p:style>
         <p:txBody>
-          <a:bodyPr rtlCol="0" anchor="ctr"/>
+          <a:bodyPr rtlCol="0" anchor="ctr" lIns="228600" rIns="182880" tIns="164592"/>
           <a:lstStyle/>
           <a:p>
             <a:pPr algn="ctr">
-              <a:defRPr sz="3000" b="1">
+              <a:defRPr sz="1200" b="1">
                 <a:solidFill>
                   <a:srgbClr val="46D6C8"/>
                 </a:solidFill>
               </a:defRPr>
             </a:pPr>
             <a:r>
-              <a:t>2024</a:t>
+              <a:t>Hume EVI</a:t>
             </a:r>
           </a:p>
           <a:p>
@@ -10311,28 +16184,71 @@
               <a:spcBef>
                 <a:spcPts val="800"/>
               </a:spcBef>
-              <a:defRPr sz="1200">
-                <a:solidFill>
-                  <a:srgbClr val="9AB2C8"/>
-                </a:solidFill>
-              </a:defRPr>
-            </a:pPr>
-            <a:r>
-              <a:t>6.1 需求信号</a:t>
-            </a:r>
-          </a:p>
-        </p:txBody>
-      </p:sp>
-      <p:sp>
-        <p:nvSpPr>
-          <p:cNvPr id="9" name="Rounded Rectangle 8"/>
-          <p:cNvSpPr/>
-          <p:nvPr/>
-        </p:nvSpPr>
-        <p:spPr>
-          <a:xfrm>
-            <a:off x="4389120" y="3794760"/>
-            <a:ext cx="3429000" cy="1783080"/>
+              <a:defRPr sz="1100">
+                <a:solidFill>
+                  <a:srgbClr val="F4F8FC"/>
+                </a:solidFill>
+              </a:defRPr>
+            </a:pPr>
+            <a:r>
+              <a:t>技术路线：情感表达与语音韵律导向的原生S2S；主要优势：情绪感知、角色与表达能力突出；相对GPT‑Live差异/限制：通用推理、搜索和企业工具生态不如前沿综合模型体系</a:t>
+            </a:r>
+          </a:p>
+        </p:txBody>
+      </p:sp>
+      <p:sp>
+        <p:nvSpPr>
+          <p:cNvPr id="12" name="Rectangle 11"/>
+          <p:cNvSpPr/>
+          <p:nvPr/>
+        </p:nvSpPr>
+        <p:spPr>
+          <a:xfrm>
+            <a:off x="658368" y="3931920"/>
+            <a:ext cx="54864" cy="438912"/>
+          </a:xfrm>
+          <a:prstGeom prst="rect">
+            <a:avLst/>
+          </a:prstGeom>
+          <a:solidFill>
+            <a:srgbClr val="46D6C8"/>
+          </a:solidFill>
+          <a:ln>
+            <a:noFill/>
+          </a:ln>
+        </p:spPr>
+        <p:style>
+          <a:lnRef idx="1">
+            <a:schemeClr val="accent1"/>
+          </a:lnRef>
+          <a:fillRef idx="3">
+            <a:schemeClr val="accent1"/>
+          </a:fillRef>
+          <a:effectRef idx="2">
+            <a:schemeClr val="accent1"/>
+          </a:effectRef>
+          <a:fontRef idx="minor">
+            <a:schemeClr val="lt1"/>
+          </a:fontRef>
+        </p:style>
+        <p:txBody>
+          <a:bodyPr rtlCol="0" anchor="ctr"/>
+          <a:lstStyle/>
+          <a:p>
+            <a:pPr algn="ctr"/>
+          </a:p>
+        </p:txBody>
+      </p:sp>
+      <p:sp>
+        <p:nvSpPr>
+          <p:cNvPr id="13" name="Rounded Rectangle 12"/>
+          <p:cNvSpPr/>
+          <p:nvPr/>
+        </p:nvSpPr>
+        <p:spPr>
+          <a:xfrm>
+            <a:off x="4386071" y="3730752"/>
+            <a:ext cx="3581400" cy="1965960"/>
           </a:xfrm>
           <a:prstGeom prst="roundRect">
             <a:avLst/>
@@ -10342,7 +16258,7 @@
           </a:solidFill>
           <a:ln>
             <a:solidFill>
-              <a:srgbClr val="2C5675"/>
+              <a:srgbClr val="294B68"/>
             </a:solidFill>
           </a:ln>
         </p:spPr>
@@ -10361,18 +16277,18 @@
           </a:fontRef>
         </p:style>
         <p:txBody>
-          <a:bodyPr rtlCol="0" anchor="ctr"/>
+          <a:bodyPr rtlCol="0" anchor="ctr" lIns="228600" rIns="182880" tIns="164592"/>
           <a:lstStyle/>
           <a:p>
             <a:pPr algn="ctr">
-              <a:defRPr sz="3000" b="1">
-                <a:solidFill>
-                  <a:srgbClr val="46D6C8"/>
-                </a:solidFill>
-              </a:defRPr>
-            </a:pPr>
-            <a:r>
-              <a:t>12</a:t>
+              <a:defRPr sz="1200" b="1">
+                <a:solidFill>
+                  <a:srgbClr val="55A7FF"/>
+                </a:solidFill>
+              </a:defRPr>
+            </a:pPr>
+            <a:r>
+              <a:t>ElevenLabs Conversational AI</a:t>
             </a:r>
           </a:p>
           <a:p>
@@ -10380,39 +16296,37 @@
               <a:spcBef>
                 <a:spcPts val="800"/>
               </a:spcBef>
-              <a:defRPr sz="1200">
-                <a:solidFill>
-                  <a:srgbClr val="9AB2C8"/>
-                </a:solidFill>
-              </a:defRPr>
-            </a:pPr>
-            <a:r>
-              <a:t>6.2 场景优先级</a:t>
-            </a:r>
-          </a:p>
-        </p:txBody>
-      </p:sp>
-      <p:sp>
-        <p:nvSpPr>
-          <p:cNvPr id="10" name="Rounded Rectangle 9"/>
-          <p:cNvSpPr/>
-          <p:nvPr/>
-        </p:nvSpPr>
-        <p:spPr>
-          <a:xfrm>
-            <a:off x="8119872" y="3794760"/>
-            <a:ext cx="3429000" cy="1783080"/>
-          </a:xfrm>
-          <a:prstGeom prst="roundRect">
-            <a:avLst/>
-          </a:prstGeom>
-          <a:solidFill>
-            <a:srgbClr val="10243C"/>
-          </a:solidFill>
-          <a:ln>
-            <a:solidFill>
-              <a:srgbClr val="2C5675"/>
-            </a:solidFill>
+              <a:defRPr sz="1100">
+                <a:solidFill>
+                  <a:srgbClr val="F4F8FC"/>
+                </a:solidFill>
+              </a:defRPr>
+            </a:pPr>
+            <a:r>
+              <a:t>技术路线：多数为STT→LLM→TTS模块化Agent；主要优势：音色、声音克隆、多语言TTS和可替换LLM；相对GPT‑Live差异/限制：级联时延与误差累积；“声音好听”不等同原生音频推理</a:t>
+            </a:r>
+          </a:p>
+        </p:txBody>
+      </p:sp>
+      <p:sp>
+        <p:nvSpPr>
+          <p:cNvPr id="14" name="Rectangle 13"/>
+          <p:cNvSpPr/>
+          <p:nvPr/>
+        </p:nvSpPr>
+        <p:spPr>
+          <a:xfrm>
+            <a:off x="4386071" y="3931920"/>
+            <a:ext cx="54864" cy="438912"/>
+          </a:xfrm>
+          <a:prstGeom prst="rect">
+            <a:avLst/>
+          </a:prstGeom>
+          <a:solidFill>
+            <a:srgbClr val="55A7FF"/>
+          </a:solidFill>
+          <a:ln>
+            <a:noFill/>
           </a:ln>
         </p:spPr>
         <p:style>
@@ -10433,37 +16347,13 @@
           <a:bodyPr rtlCol="0" anchor="ctr"/>
           <a:lstStyle/>
           <a:p>
-            <a:pPr algn="ctr">
-              <a:defRPr sz="3000" b="1">
-                <a:solidFill>
-                  <a:srgbClr val="46D6C8"/>
-                </a:solidFill>
-              </a:defRPr>
-            </a:pPr>
-            <a:r>
-              <a:t>85</a:t>
-            </a:r>
-          </a:p>
-          <a:p>
-            <a:pPr>
-              <a:spcBef>
-                <a:spcPts val="800"/>
-              </a:spcBef>
-              <a:defRPr sz="1200">
-                <a:solidFill>
-                  <a:srgbClr val="9AB2C8"/>
-                </a:solidFill>
-              </a:defRPr>
-            </a:pPr>
-            <a:r>
-              <a:t>6.3 最值得验证的三个产品原型</a:t>
-            </a:r>
-          </a:p>
-        </p:txBody>
-      </p:sp>
-      <p:sp>
-        <p:nvSpPr>
-          <p:cNvPr id="11" name="TextBox 10"/>
+            <a:pPr algn="ctr"/>
+          </a:p>
+        </p:txBody>
+      </p:sp>
+      <p:sp>
+        <p:nvSpPr>
+          <p:cNvPr id="15" name="TextBox 14"/>
           <p:cNvSpPr txBox="1"/>
           <p:nvPr/>
         </p:nvSpPr>
@@ -10491,7 +16381,7 @@
               </a:defRPr>
             </a:pPr>
             <a:r>
-              <a:t>08 / 12</a:t>
+              <a:t>08 / 18</a:t>
             </a:r>
           </a:p>
         </p:txBody>
@@ -10630,7 +16520,7 @@
               </a:defRPr>
             </a:pPr>
             <a:r>
-              <a:t>七、落地路线与决策建议</a:t>
+              <a:t>4.2 国内竞品</a:t>
             </a:r>
           </a:p>
         </p:txBody>
@@ -10644,7 +16534,7 @@
         <p:spPr>
           <a:xfrm>
             <a:off x="658368" y="1600200"/>
-            <a:ext cx="3581400" cy="1965960"/>
+            <a:ext cx="5372100" cy="1965960"/>
           </a:xfrm>
           <a:prstGeom prst="roundRect">
             <a:avLst/>
@@ -10684,7 +16574,7 @@
               </a:defRPr>
             </a:pPr>
             <a:r>
-              <a:t>01</a:t>
+              <a:t>Qwen3.5‑Omni Realtime</a:t>
             </a:r>
           </a:p>
           <a:p>
@@ -10692,14 +16582,14 @@
               <a:spcBef>
                 <a:spcPts val="800"/>
               </a:spcBef>
-              <a:defRPr sz="1500">
+              <a:defRPr sz="1100">
                 <a:solidFill>
                   <a:srgbClr val="F4F8FC"/>
                 </a:solidFill>
               </a:defRPr>
             </a:pPr>
             <a:r>
-              <a:t>从1–2个边界清晰、低损失、可人工兜底的流程选取真实通话样本。</a:t>
+              <a:t>架构/路线：Thinker‑Talker；Hybrid Attention MoE；文本、图像、音频、视频统一理解与流式语音输出；能力特点：可开放权重/技术报告参照，WebRTC/WebSocket，中文与方言、视频、函数调用；最长会话120分钟；主要边界：部分实时型号仅8轮上下文；联网搜索与工具调用不可同时开启</a:t>
             </a:r>
           </a:p>
         </p:txBody>
@@ -10755,8 +16645,8 @@
         </p:nvSpPr>
         <p:spPr>
           <a:xfrm>
-            <a:off x="4386071" y="1600200"/>
-            <a:ext cx="3581400" cy="1965960"/>
+            <a:off x="6176772" y="1600200"/>
+            <a:ext cx="5372100" cy="1965960"/>
           </a:xfrm>
           <a:prstGeom prst="roundRect">
             <a:avLst/>
@@ -10796,7 +16686,7 @@
               </a:defRPr>
             </a:pPr>
             <a:r>
-              <a:t>02</a:t>
+              <a:t>豆包端到端实时语音</a:t>
             </a:r>
           </a:p>
           <a:p>
@@ -10804,14 +16694,14 @@
               <a:spcBef>
                 <a:spcPts val="800"/>
               </a:spcBef>
-              <a:defRPr sz="1500">
+              <a:defRPr sz="1100">
                 <a:solidFill>
                   <a:srgbClr val="F4F8FC"/>
                 </a:solidFill>
               </a:defRPr>
             </a:pPr>
             <a:r>
-              <a:t>建立与厂商无关的Realtime Adapter，统一音频事件、VAD、打断、工具、转写和审计协议。</a:t>
+              <a:t>架构/路线：原生Speech-to-Speech；另有RTC+ASR+LLM+TTS工程方案；能力特点：中文、情绪、人格、客服、车载；支持打断与Function Calling；国内云交付便利；主要边界：厂商文档缺少可与GPT‑Live同口径的公开全双工人评；不同产品路线容易混称</a:t>
             </a:r>
           </a:p>
         </p:txBody>
@@ -10824,7 +16714,7 @@
         </p:nvSpPr>
         <p:spPr>
           <a:xfrm>
-            <a:off x="4386071" y="1801368"/>
+            <a:off x="6176772" y="1801368"/>
             <a:ext cx="54864" cy="438912"/>
           </a:xfrm>
           <a:prstGeom prst="rect">
@@ -10867,8 +16757,8 @@
         </p:nvSpPr>
         <p:spPr>
           <a:xfrm>
-            <a:off x="8113776" y="1600200"/>
-            <a:ext cx="3581400" cy="1965960"/>
+            <a:off x="658368" y="3730752"/>
+            <a:ext cx="5372100" cy="1965960"/>
           </a:xfrm>
           <a:prstGeom prst="roundRect">
             <a:avLst/>
@@ -10908,7 +16798,7 @@
               </a:defRPr>
             </a:pPr>
             <a:r>
-              <a:t>03</a:t>
+              <a:t>MiniMax Realtime / Speech</a:t>
             </a:r>
           </a:p>
           <a:p>
@@ -10916,14 +16806,14 @@
               <a:spcBef>
                 <a:spcPts val="800"/>
               </a:spcBef>
-              <a:defRPr sz="1500">
+              <a:defRPr sz="1100">
                 <a:solidFill>
                   <a:srgbClr val="F4F8FC"/>
                 </a:solidFill>
               </a:defRPr>
             </a:pPr>
             <a:r>
-              <a:t>用已开放的OpenAI Realtime、Gemini Live、Qwen‑Omni Realtime和豆包做同口径对比。</a:t>
+              <a:t>架构/路线：实时API+高表现力语音模型，部分方案为模块组合；能力特点：声音克隆、角色化、40+语言；厂商称Speech 2.8端到端时延低于250ms；主要边界：对复杂推理与业务工具的端到端公开评测不足；声音克隆带来冒用风险</a:t>
             </a:r>
           </a:p>
         </p:txBody>
@@ -10936,7 +16826,7 @@
         </p:nvSpPr>
         <p:spPr>
           <a:xfrm>
-            <a:off x="8113776" y="1801368"/>
+            <a:off x="658368" y="3931920"/>
             <a:ext cx="54864" cy="438912"/>
           </a:xfrm>
           <a:prstGeom prst="rect">
@@ -10979,8 +16869,8 @@
         </p:nvSpPr>
         <p:spPr>
           <a:xfrm>
-            <a:off x="658368" y="3730752"/>
-            <a:ext cx="3581400" cy="1965960"/>
+            <a:off x="6176772" y="3730752"/>
+            <a:ext cx="5372100" cy="1965960"/>
           </a:xfrm>
           <a:prstGeom prst="roundRect">
             <a:avLst/>
@@ -11020,7 +16910,7 @@
               </a:defRPr>
             </a:pPr>
             <a:r>
-              <a:t>04</a:t>
+              <a:t>腾讯TRTC实时对话方案</a:t>
             </a:r>
           </a:p>
           <a:p>
@@ -11028,14 +16918,14 @@
               <a:spcBef>
                 <a:spcPts val="800"/>
               </a:spcBef>
-              <a:defRPr sz="1500">
+              <a:defRPr sz="1100">
                 <a:solidFill>
                   <a:srgbClr val="F4F8FC"/>
                 </a:solidFill>
               </a:defRPr>
             </a:pPr>
             <a:r>
-              <a:t>禁止只用厂商demo评分；至少覆盖中文普通话、目标方言、8kHz电话、弱网、多人和噪声。</a:t>
+              <a:t>架构/路线：RTC+可替换ASR/LLM/TTS级联；能力特点：弱网、降噪、腾讯云集成、可替换混元/第三方模型；官方称全链路约1秒；主要边界：不是GPT‑Live式单一全双工模型；多模块维护和误差累积</a:t>
             </a:r>
           </a:p>
         </p:txBody>
@@ -11048,7 +16938,7 @@
         </p:nvSpPr>
         <p:spPr>
           <a:xfrm>
-            <a:off x="658368" y="3931920"/>
+            <a:off x="6176772" y="3931920"/>
             <a:ext cx="54864" cy="438912"/>
           </a:xfrm>
           <a:prstGeom prst="rect">
@@ -11085,231 +16975,7 @@
       </p:sp>
       <p:sp>
         <p:nvSpPr>
-          <p:cNvPr id="13" name="Rounded Rectangle 12"/>
-          <p:cNvSpPr/>
-          <p:nvPr/>
-        </p:nvSpPr>
-        <p:spPr>
-          <a:xfrm>
-            <a:off x="4386071" y="3730752"/>
-            <a:ext cx="3581400" cy="1965960"/>
-          </a:xfrm>
-          <a:prstGeom prst="roundRect">
-            <a:avLst/>
-          </a:prstGeom>
-          <a:solidFill>
-            <a:srgbClr val="10243C"/>
-          </a:solidFill>
-          <a:ln>
-            <a:solidFill>
-              <a:srgbClr val="294B68"/>
-            </a:solidFill>
-          </a:ln>
-        </p:spPr>
-        <p:style>
-          <a:lnRef idx="1">
-            <a:schemeClr val="accent1"/>
-          </a:lnRef>
-          <a:fillRef idx="3">
-            <a:schemeClr val="accent1"/>
-          </a:fillRef>
-          <a:effectRef idx="2">
-            <a:schemeClr val="accent1"/>
-          </a:effectRef>
-          <a:fontRef idx="minor">
-            <a:schemeClr val="lt1"/>
-          </a:fontRef>
-        </p:style>
-        <p:txBody>
-          <a:bodyPr rtlCol="0" anchor="ctr" lIns="228600" rIns="182880" tIns="164592"/>
-          <a:lstStyle/>
-          <a:p>
-            <a:pPr algn="ctr">
-              <a:defRPr sz="1200" b="1">
-                <a:solidFill>
-                  <a:srgbClr val="55A7FF"/>
-                </a:solidFill>
-              </a:defRPr>
-            </a:pPr>
-            <a:r>
-              <a:t>05</a:t>
-            </a:r>
-          </a:p>
-          <a:p>
-            <a:pPr>
-              <a:spcBef>
-                <a:spcPts val="800"/>
-              </a:spcBef>
-              <a:defRPr sz="1500">
-                <a:solidFill>
-                  <a:srgbClr val="F4F8FC"/>
-                </a:solidFill>
-              </a:defRPr>
-            </a:pPr>
-            <a:r>
-              <a:t>先做“辅助/收集/查询”，后做不可逆动作；所有写操作二次确认。</a:t>
-            </a:r>
-          </a:p>
-        </p:txBody>
-      </p:sp>
-      <p:sp>
-        <p:nvSpPr>
-          <p:cNvPr id="14" name="Rectangle 13"/>
-          <p:cNvSpPr/>
-          <p:nvPr/>
-        </p:nvSpPr>
-        <p:spPr>
-          <a:xfrm>
-            <a:off x="4386071" y="3931920"/>
-            <a:ext cx="54864" cy="438912"/>
-          </a:xfrm>
-          <a:prstGeom prst="rect">
-            <a:avLst/>
-          </a:prstGeom>
-          <a:solidFill>
-            <a:srgbClr val="55A7FF"/>
-          </a:solidFill>
-          <a:ln>
-            <a:noFill/>
-          </a:ln>
-        </p:spPr>
-        <p:style>
-          <a:lnRef idx="1">
-            <a:schemeClr val="accent1"/>
-          </a:lnRef>
-          <a:fillRef idx="3">
-            <a:schemeClr val="accent1"/>
-          </a:fillRef>
-          <a:effectRef idx="2">
-            <a:schemeClr val="accent1"/>
-          </a:effectRef>
-          <a:fontRef idx="minor">
-            <a:schemeClr val="lt1"/>
-          </a:fontRef>
-        </p:style>
-        <p:txBody>
-          <a:bodyPr rtlCol="0" anchor="ctr"/>
-          <a:lstStyle/>
-          <a:p>
-            <a:pPr algn="ctr"/>
-          </a:p>
-        </p:txBody>
-      </p:sp>
-      <p:sp>
-        <p:nvSpPr>
-          <p:cNvPr id="15" name="Rounded Rectangle 14"/>
-          <p:cNvSpPr/>
-          <p:nvPr/>
-        </p:nvSpPr>
-        <p:spPr>
-          <a:xfrm>
-            <a:off x="8113776" y="3730752"/>
-            <a:ext cx="3581400" cy="1965960"/>
-          </a:xfrm>
-          <a:prstGeom prst="roundRect">
-            <a:avLst/>
-          </a:prstGeom>
-          <a:solidFill>
-            <a:srgbClr val="10243C"/>
-          </a:solidFill>
-          <a:ln>
-            <a:solidFill>
-              <a:srgbClr val="294B68"/>
-            </a:solidFill>
-          </a:ln>
-        </p:spPr>
-        <p:style>
-          <a:lnRef idx="1">
-            <a:schemeClr val="accent1"/>
-          </a:lnRef>
-          <a:fillRef idx="3">
-            <a:schemeClr val="accent1"/>
-          </a:fillRef>
-          <a:effectRef idx="2">
-            <a:schemeClr val="accent1"/>
-          </a:effectRef>
-          <a:fontRef idx="minor">
-            <a:schemeClr val="lt1"/>
-          </a:fontRef>
-        </p:style>
-        <p:txBody>
-          <a:bodyPr rtlCol="0" anchor="ctr" lIns="228600" rIns="182880" tIns="164592"/>
-          <a:lstStyle/>
-          <a:p>
-            <a:pPr algn="ctr">
-              <a:defRPr sz="1200" b="1">
-                <a:solidFill>
-                  <a:srgbClr val="FFBE55"/>
-                </a:solidFill>
-              </a:defRPr>
-            </a:pPr>
-            <a:r>
-              <a:t>06</a:t>
-            </a:r>
-          </a:p>
-          <a:p>
-            <a:pPr>
-              <a:spcBef>
-                <a:spcPts val="800"/>
-              </a:spcBef>
-              <a:defRPr sz="1500">
-                <a:solidFill>
-                  <a:srgbClr val="F4F8FC"/>
-                </a:solidFill>
-              </a:defRPr>
-            </a:pPr>
-            <a:r>
-              <a:t>中文与目标方言任务成功率不低于现网；</a:t>
-            </a:r>
-          </a:p>
-        </p:txBody>
-      </p:sp>
-      <p:sp>
-        <p:nvSpPr>
-          <p:cNvPr id="16" name="Rectangle 15"/>
-          <p:cNvSpPr/>
-          <p:nvPr/>
-        </p:nvSpPr>
-        <p:spPr>
-          <a:xfrm>
-            <a:off x="8113776" y="3931920"/>
-            <a:ext cx="54864" cy="438912"/>
-          </a:xfrm>
-          <a:prstGeom prst="rect">
-            <a:avLst/>
-          </a:prstGeom>
-          <a:solidFill>
-            <a:srgbClr val="FFBE55"/>
-          </a:solidFill>
-          <a:ln>
-            <a:noFill/>
-          </a:ln>
-        </p:spPr>
-        <p:style>
-          <a:lnRef idx="1">
-            <a:schemeClr val="accent1"/>
-          </a:lnRef>
-          <a:fillRef idx="3">
-            <a:schemeClr val="accent1"/>
-          </a:fillRef>
-          <a:effectRef idx="2">
-            <a:schemeClr val="accent1"/>
-          </a:effectRef>
-          <a:fontRef idx="minor">
-            <a:schemeClr val="lt1"/>
-          </a:fontRef>
-        </p:style>
-        <p:txBody>
-          <a:bodyPr rtlCol="0" anchor="ctr"/>
-          <a:lstStyle/>
-          <a:p>
-            <a:pPr algn="ctr"/>
-          </a:p>
-        </p:txBody>
-      </p:sp>
-      <p:sp>
-        <p:nvSpPr>
-          <p:cNvPr id="17" name="TextBox 16"/>
+          <p:cNvPr id="13" name="TextBox 12"/>
           <p:cNvSpPr txBox="1"/>
           <p:nvPr/>
         </p:nvSpPr>
@@ -11337,7 +17003,7 @@
               </a:defRPr>
             </a:pPr>
             <a:r>
-              <a:t>09 / 12</a:t>
+              <a:t>09 / 18</a:t>
             </a:r>
           </a:p>
         </p:txBody>

--- a/outputs/gpt-live-application-research/gpt-live应用探索研究报告-汇报版.pptx
+++ b/outputs/gpt-live-application-research/gpt-live应用探索研究报告-汇报版.pptx
@@ -3101,7 +3101,7 @@
     <p:bg>
       <p:bgPr>
         <a:solidFill>
-          <a:srgbClr val="07111F"/>
+          <a:srgbClr val="F4F1E8"/>
         </a:solidFill>
         <a:effectLst/>
       </p:bgPr>
@@ -3130,7 +3130,7 @@
           <a:noFill/>
           <a:ln>
             <a:solidFill>
-              <a:srgbClr val="46D6C8"/>
+              <a:srgbClr val="E6462E"/>
             </a:solidFill>
           </a:ln>
         </p:spPr>
@@ -3181,7 +3181,7 @@
             <a:pPr>
               <a:defRPr sz="1200" b="1">
                 <a:solidFill>
-                  <a:srgbClr val="46D6C8"/>
+                  <a:srgbClr val="E6462E"/>
                 </a:solidFill>
               </a:defRPr>
             </a:pPr>
@@ -3216,7 +3216,7 @@
             <a:pPr>
               <a:defRPr sz="4200" b="1">
                 <a:solidFill>
-                  <a:srgbClr val="F4F8FC"/>
+                  <a:srgbClr val="151515"/>
                 </a:solidFill>
               </a:defRPr>
             </a:pPr>
@@ -3251,7 +3251,7 @@
             <a:pPr>
               <a:defRPr sz="2000">
                 <a:solidFill>
-                  <a:srgbClr val="9AB2C8"/>
+                  <a:srgbClr val="62666A"/>
                 </a:solidFill>
               </a:defRPr>
             </a:pPr>
@@ -3286,7 +3286,7 @@
             <a:pPr>
               <a:defRPr sz="1000">
                 <a:solidFill>
-                  <a:srgbClr val="55A7FF"/>
+                  <a:srgbClr val="176B87"/>
                 </a:solidFill>
               </a:defRPr>
             </a:pPr>
@@ -3310,7 +3310,7 @@
     <p:bg>
       <p:bgPr>
         <a:solidFill>
-          <a:srgbClr val="07111F"/>
+          <a:srgbClr val="F4F1E8"/>
         </a:solidFill>
         <a:effectLst/>
       </p:bgPr>
@@ -3337,7 +3337,7 @@
             <a:avLst/>
           </a:prstGeom>
           <a:solidFill>
-            <a:srgbClr val="46D6C8"/>
+            <a:srgbClr val="E6462E"/>
           </a:solidFill>
           <a:ln>
             <a:noFill/>
@@ -3390,7 +3390,7 @@
             <a:pPr>
               <a:defRPr sz="900" b="1">
                 <a:solidFill>
-                  <a:srgbClr val="46D6C8"/>
+                  <a:srgbClr val="E6462E"/>
                 </a:solidFill>
               </a:defRPr>
             </a:pPr>
@@ -3425,7 +3425,7 @@
             <a:pPr algn="l">
               <a:defRPr sz="2700" b="1">
                 <a:solidFill>
-                  <a:srgbClr val="F4F8FC"/>
+                  <a:srgbClr val="151515"/>
                 </a:solidFill>
               </a:defRPr>
             </a:pPr>
@@ -3450,7 +3450,7 @@
             <a:avLst/>
           </a:prstGeom>
           <a:solidFill>
-            <a:srgbClr val="10243C"/>
+            <a:srgbClr val="FFFFFF"/>
           </a:solidFill>
           <a:ln>
             <a:solidFill>
@@ -3479,7 +3479,7 @@
             <a:pPr algn="ctr">
               <a:defRPr sz="1200" b="1">
                 <a:solidFill>
-                  <a:srgbClr val="46D6C8"/>
+                  <a:srgbClr val="E6462E"/>
                 </a:solidFill>
               </a:defRPr>
             </a:pPr>
@@ -3494,7 +3494,7 @@
               </a:spcBef>
               <a:defRPr sz="1500">
                 <a:solidFill>
-                  <a:srgbClr val="F4F8FC"/>
+                  <a:srgbClr val="151515"/>
                 </a:solidFill>
               </a:defRPr>
             </a:pPr>
@@ -3519,7 +3519,7 @@
             <a:avLst/>
           </a:prstGeom>
           <a:solidFill>
-            <a:srgbClr val="46D6C8"/>
+            <a:srgbClr val="E6462E"/>
           </a:solidFill>
           <a:ln>
             <a:noFill/>
@@ -3562,7 +3562,7 @@
             <a:avLst/>
           </a:prstGeom>
           <a:solidFill>
-            <a:srgbClr val="10243C"/>
+            <a:srgbClr val="FFFFFF"/>
           </a:solidFill>
           <a:ln>
             <a:solidFill>
@@ -3591,7 +3591,7 @@
             <a:pPr algn="ctr">
               <a:defRPr sz="1200" b="1">
                 <a:solidFill>
-                  <a:srgbClr val="55A7FF"/>
+                  <a:srgbClr val="176B87"/>
                 </a:solidFill>
               </a:defRPr>
             </a:pPr>
@@ -3606,7 +3606,7 @@
               </a:spcBef>
               <a:defRPr sz="1500">
                 <a:solidFill>
-                  <a:srgbClr val="F4F8FC"/>
+                  <a:srgbClr val="151515"/>
                 </a:solidFill>
               </a:defRPr>
             </a:pPr>
@@ -3631,7 +3631,7 @@
             <a:avLst/>
           </a:prstGeom>
           <a:solidFill>
-            <a:srgbClr val="55A7FF"/>
+            <a:srgbClr val="176B87"/>
           </a:solidFill>
           <a:ln>
             <a:noFill/>
@@ -3674,7 +3674,7 @@
             <a:avLst/>
           </a:prstGeom>
           <a:solidFill>
-            <a:srgbClr val="10243C"/>
+            <a:srgbClr val="FFFFFF"/>
           </a:solidFill>
           <a:ln>
             <a:solidFill>
@@ -3703,7 +3703,7 @@
             <a:pPr algn="ctr">
               <a:defRPr sz="1200" b="1">
                 <a:solidFill>
-                  <a:srgbClr val="FFBE55"/>
+                  <a:srgbClr val="D39A28"/>
                 </a:solidFill>
               </a:defRPr>
             </a:pPr>
@@ -3718,7 +3718,7 @@
               </a:spcBef>
               <a:defRPr sz="1500">
                 <a:solidFill>
-                  <a:srgbClr val="F4F8FC"/>
+                  <a:srgbClr val="151515"/>
                 </a:solidFill>
               </a:defRPr>
             </a:pPr>
@@ -3743,7 +3743,7 @@
             <a:avLst/>
           </a:prstGeom>
           <a:solidFill>
-            <a:srgbClr val="FFBE55"/>
+            <a:srgbClr val="D39A28"/>
           </a:solidFill>
           <a:ln>
             <a:noFill/>
@@ -3786,7 +3786,7 @@
             <a:avLst/>
           </a:prstGeom>
           <a:solidFill>
-            <a:srgbClr val="10243C"/>
+            <a:srgbClr val="FFFFFF"/>
           </a:solidFill>
           <a:ln>
             <a:solidFill>
@@ -3815,7 +3815,7 @@
             <a:pPr algn="ctr">
               <a:defRPr sz="1200" b="1">
                 <a:solidFill>
-                  <a:srgbClr val="46D6C8"/>
+                  <a:srgbClr val="E6462E"/>
                 </a:solidFill>
               </a:defRPr>
             </a:pPr>
@@ -3830,7 +3830,7 @@
               </a:spcBef>
               <a:defRPr sz="1500">
                 <a:solidFill>
-                  <a:srgbClr val="F4F8FC"/>
+                  <a:srgbClr val="151515"/>
                 </a:solidFill>
               </a:defRPr>
             </a:pPr>
@@ -3855,7 +3855,7 @@
             <a:avLst/>
           </a:prstGeom>
           <a:solidFill>
-            <a:srgbClr val="46D6C8"/>
+            <a:srgbClr val="E6462E"/>
           </a:solidFill>
           <a:ln>
             <a:noFill/>
@@ -3908,7 +3908,7 @@
             <a:pPr>
               <a:defRPr sz="900">
                 <a:solidFill>
-                  <a:srgbClr val="9AB2C8"/>
+                  <a:srgbClr val="62666A"/>
                 </a:solidFill>
               </a:defRPr>
             </a:pPr>
@@ -3932,7 +3932,7 @@
     <p:bg>
       <p:bgPr>
         <a:solidFill>
-          <a:srgbClr val="07111F"/>
+          <a:srgbClr val="F4F1E8"/>
         </a:solidFill>
         <a:effectLst/>
       </p:bgPr>
@@ -3959,7 +3959,7 @@
             <a:avLst/>
           </a:prstGeom>
           <a:solidFill>
-            <a:srgbClr val="46D6C8"/>
+            <a:srgbClr val="E6462E"/>
           </a:solidFill>
           <a:ln>
             <a:noFill/>
@@ -4012,7 +4012,7 @@
             <a:pPr>
               <a:defRPr sz="900" b="1">
                 <a:solidFill>
-                  <a:srgbClr val="46D6C8"/>
+                  <a:srgbClr val="E6462E"/>
                 </a:solidFill>
               </a:defRPr>
             </a:pPr>
@@ -4047,7 +4047,7 @@
             <a:pPr algn="l">
               <a:defRPr sz="2700" b="1">
                 <a:solidFill>
-                  <a:srgbClr val="F4F8FC"/>
+                  <a:srgbClr val="151515"/>
                 </a:solidFill>
               </a:defRPr>
             </a:pPr>
@@ -4072,7 +4072,7 @@
             <a:avLst/>
           </a:prstGeom>
           <a:solidFill>
-            <a:srgbClr val="10243C"/>
+            <a:srgbClr val="FFFFFF"/>
           </a:solidFill>
           <a:ln>
             <a:solidFill>
@@ -4101,7 +4101,7 @@
             <a:pPr algn="ctr">
               <a:defRPr sz="1200" b="1">
                 <a:solidFill>
-                  <a:srgbClr val="46D6C8"/>
+                  <a:srgbClr val="E6462E"/>
                 </a:solidFill>
               </a:defRPr>
             </a:pPr>
@@ -4116,7 +4116,7 @@
               </a:spcBef>
               <a:defRPr sz="1500">
                 <a:solidFill>
-                  <a:srgbClr val="F4F8FC"/>
+                  <a:srgbClr val="151515"/>
                 </a:solidFill>
               </a:defRPr>
             </a:pPr>
@@ -4141,7 +4141,7 @@
             <a:avLst/>
           </a:prstGeom>
           <a:solidFill>
-            <a:srgbClr val="46D6C8"/>
+            <a:srgbClr val="E6462E"/>
           </a:solidFill>
           <a:ln>
             <a:noFill/>
@@ -4184,7 +4184,7 @@
             <a:avLst/>
           </a:prstGeom>
           <a:solidFill>
-            <a:srgbClr val="10243C"/>
+            <a:srgbClr val="FFFFFF"/>
           </a:solidFill>
           <a:ln>
             <a:solidFill>
@@ -4213,7 +4213,7 @@
             <a:pPr algn="ctr">
               <a:defRPr sz="1200" b="1">
                 <a:solidFill>
-                  <a:srgbClr val="FFBE55"/>
+                  <a:srgbClr val="D39A28"/>
                 </a:solidFill>
               </a:defRPr>
             </a:pPr>
@@ -4228,7 +4228,7 @@
               </a:spcBef>
               <a:defRPr sz="1500">
                 <a:solidFill>
-                  <a:srgbClr val="F4F8FC"/>
+                  <a:srgbClr val="151515"/>
                 </a:solidFill>
               </a:defRPr>
             </a:pPr>
@@ -4253,7 +4253,7 @@
             <a:avLst/>
           </a:prstGeom>
           <a:solidFill>
-            <a:srgbClr val="FFBE55"/>
+            <a:srgbClr val="D39A28"/>
           </a:solidFill>
           <a:ln>
             <a:noFill/>
@@ -4296,7 +4296,7 @@
             <a:avLst/>
           </a:prstGeom>
           <a:solidFill>
-            <a:srgbClr val="10243C"/>
+            <a:srgbClr val="FFFFFF"/>
           </a:solidFill>
           <a:ln>
             <a:solidFill>
@@ -4325,7 +4325,7 @@
             <a:pPr algn="ctr">
               <a:defRPr sz="1200" b="1">
                 <a:solidFill>
-                  <a:srgbClr val="FF6B6B"/>
+                  <a:srgbClr val="A82D23"/>
                 </a:solidFill>
               </a:defRPr>
             </a:pPr>
@@ -4340,7 +4340,7 @@
               </a:spcBef>
               <a:defRPr sz="1500">
                 <a:solidFill>
-                  <a:srgbClr val="F4F8FC"/>
+                  <a:srgbClr val="151515"/>
                 </a:solidFill>
               </a:defRPr>
             </a:pPr>
@@ -4365,7 +4365,7 @@
             <a:avLst/>
           </a:prstGeom>
           <a:solidFill>
-            <a:srgbClr val="FF6B6B"/>
+            <a:srgbClr val="A82D23"/>
           </a:solidFill>
           <a:ln>
             <a:noFill/>
@@ -4408,7 +4408,7 @@
             <a:avLst/>
           </a:prstGeom>
           <a:solidFill>
-            <a:srgbClr val="10243C"/>
+            <a:srgbClr val="FFFFFF"/>
           </a:solidFill>
           <a:ln>
             <a:solidFill>
@@ -4437,7 +4437,7 @@
             <a:pPr algn="ctr">
               <a:defRPr sz="1200" b="1">
                 <a:solidFill>
-                  <a:srgbClr val="46D6C8"/>
+                  <a:srgbClr val="E6462E"/>
                 </a:solidFill>
               </a:defRPr>
             </a:pPr>
@@ -4452,7 +4452,7 @@
               </a:spcBef>
               <a:defRPr sz="1500">
                 <a:solidFill>
-                  <a:srgbClr val="F4F8FC"/>
+                  <a:srgbClr val="151515"/>
                 </a:solidFill>
               </a:defRPr>
             </a:pPr>
@@ -4477,7 +4477,7 @@
             <a:avLst/>
           </a:prstGeom>
           <a:solidFill>
-            <a:srgbClr val="46D6C8"/>
+            <a:srgbClr val="E6462E"/>
           </a:solidFill>
           <a:ln>
             <a:noFill/>
@@ -4520,7 +4520,7 @@
             <a:avLst/>
           </a:prstGeom>
           <a:solidFill>
-            <a:srgbClr val="10243C"/>
+            <a:srgbClr val="FFFFFF"/>
           </a:solidFill>
           <a:ln>
             <a:solidFill>
@@ -4549,7 +4549,7 @@
             <a:pPr algn="ctr">
               <a:defRPr sz="1200" b="1">
                 <a:solidFill>
-                  <a:srgbClr val="FFBE55"/>
+                  <a:srgbClr val="D39A28"/>
                 </a:solidFill>
               </a:defRPr>
             </a:pPr>
@@ -4564,7 +4564,7 @@
               </a:spcBef>
               <a:defRPr sz="1500">
                 <a:solidFill>
-                  <a:srgbClr val="F4F8FC"/>
+                  <a:srgbClr val="151515"/>
                 </a:solidFill>
               </a:defRPr>
             </a:pPr>
@@ -4589,7 +4589,7 @@
             <a:avLst/>
           </a:prstGeom>
           <a:solidFill>
-            <a:srgbClr val="FFBE55"/>
+            <a:srgbClr val="D39A28"/>
           </a:solidFill>
           <a:ln>
             <a:noFill/>
@@ -4632,7 +4632,7 @@
             <a:avLst/>
           </a:prstGeom>
           <a:solidFill>
-            <a:srgbClr val="10243C"/>
+            <a:srgbClr val="FFFFFF"/>
           </a:solidFill>
           <a:ln>
             <a:solidFill>
@@ -4661,7 +4661,7 @@
             <a:pPr algn="ctr">
               <a:defRPr sz="1200" b="1">
                 <a:solidFill>
-                  <a:srgbClr val="FF6B6B"/>
+                  <a:srgbClr val="A82D23"/>
                 </a:solidFill>
               </a:defRPr>
             </a:pPr>
@@ -4676,7 +4676,7 @@
               </a:spcBef>
               <a:defRPr sz="1500">
                 <a:solidFill>
-                  <a:srgbClr val="F4F8FC"/>
+                  <a:srgbClr val="151515"/>
                 </a:solidFill>
               </a:defRPr>
             </a:pPr>
@@ -4701,7 +4701,7 @@
             <a:avLst/>
           </a:prstGeom>
           <a:solidFill>
-            <a:srgbClr val="FF6B6B"/>
+            <a:srgbClr val="A82D23"/>
           </a:solidFill>
           <a:ln>
             <a:noFill/>
@@ -4754,7 +4754,7 @@
             <a:pPr>
               <a:defRPr sz="900">
                 <a:solidFill>
-                  <a:srgbClr val="9AB2C8"/>
+                  <a:srgbClr val="62666A"/>
                 </a:solidFill>
               </a:defRPr>
             </a:pPr>
@@ -4778,7 +4778,7 @@
     <p:bg>
       <p:bgPr>
         <a:solidFill>
-          <a:srgbClr val="07111F"/>
+          <a:srgbClr val="F4F1E8"/>
         </a:solidFill>
         <a:effectLst/>
       </p:bgPr>
@@ -4805,7 +4805,7 @@
             <a:avLst/>
           </a:prstGeom>
           <a:solidFill>
-            <a:srgbClr val="46D6C8"/>
+            <a:srgbClr val="E6462E"/>
           </a:solidFill>
           <a:ln>
             <a:noFill/>
@@ -4858,7 +4858,7 @@
             <a:pPr>
               <a:defRPr sz="900" b="1">
                 <a:solidFill>
-                  <a:srgbClr val="46D6C8"/>
+                  <a:srgbClr val="E6462E"/>
                 </a:solidFill>
               </a:defRPr>
             </a:pPr>
@@ -4893,7 +4893,7 @@
             <a:pPr algn="l">
               <a:defRPr sz="2700" b="1">
                 <a:solidFill>
-                  <a:srgbClr val="F4F8FC"/>
+                  <a:srgbClr val="151515"/>
                 </a:solidFill>
               </a:defRPr>
             </a:pPr>
@@ -4918,7 +4918,7 @@
             <a:avLst/>
           </a:prstGeom>
           <a:solidFill>
-            <a:srgbClr val="10243C"/>
+            <a:srgbClr val="FFFFFF"/>
           </a:solidFill>
           <a:ln>
             <a:solidFill>
@@ -4947,7 +4947,7 @@
             <a:pPr algn="ctr">
               <a:defRPr sz="1200" b="1">
                 <a:solidFill>
-                  <a:srgbClr val="46D6C8"/>
+                  <a:srgbClr val="E6462E"/>
                 </a:solidFill>
               </a:defRPr>
             </a:pPr>
@@ -4962,7 +4962,7 @@
               </a:spcBef>
               <a:defRPr sz="1100">
                 <a:solidFill>
-                  <a:srgbClr val="F4F8FC"/>
+                  <a:srgbClr val="151515"/>
                 </a:solidFill>
               </a:defRPr>
             </a:pPr>
@@ -4987,7 +4987,7 @@
             <a:avLst/>
           </a:prstGeom>
           <a:solidFill>
-            <a:srgbClr val="46D6C8"/>
+            <a:srgbClr val="E6462E"/>
           </a:solidFill>
           <a:ln>
             <a:noFill/>
@@ -5030,7 +5030,7 @@
             <a:avLst/>
           </a:prstGeom>
           <a:solidFill>
-            <a:srgbClr val="10243C"/>
+            <a:srgbClr val="FFFFFF"/>
           </a:solidFill>
           <a:ln>
             <a:solidFill>
@@ -5059,7 +5059,7 @@
             <a:pPr algn="ctr">
               <a:defRPr sz="1200" b="1">
                 <a:solidFill>
-                  <a:srgbClr val="55A7FF"/>
+                  <a:srgbClr val="176B87"/>
                 </a:solidFill>
               </a:defRPr>
             </a:pPr>
@@ -5074,7 +5074,7 @@
               </a:spcBef>
               <a:defRPr sz="1100">
                 <a:solidFill>
-                  <a:srgbClr val="F4F8FC"/>
+                  <a:srgbClr val="151515"/>
                 </a:solidFill>
               </a:defRPr>
             </a:pPr>
@@ -5099,7 +5099,7 @@
             <a:avLst/>
           </a:prstGeom>
           <a:solidFill>
-            <a:srgbClr val="55A7FF"/>
+            <a:srgbClr val="176B87"/>
           </a:solidFill>
           <a:ln>
             <a:noFill/>
@@ -5142,7 +5142,7 @@
             <a:avLst/>
           </a:prstGeom>
           <a:solidFill>
-            <a:srgbClr val="10243C"/>
+            <a:srgbClr val="FFFFFF"/>
           </a:solidFill>
           <a:ln>
             <a:solidFill>
@@ -5171,7 +5171,7 @@
             <a:pPr algn="ctr">
               <a:defRPr sz="1200" b="1">
                 <a:solidFill>
-                  <a:srgbClr val="FFBE55"/>
+                  <a:srgbClr val="D39A28"/>
                 </a:solidFill>
               </a:defRPr>
             </a:pPr>
@@ -5186,7 +5186,7 @@
               </a:spcBef>
               <a:defRPr sz="1100">
                 <a:solidFill>
-                  <a:srgbClr val="F4F8FC"/>
+                  <a:srgbClr val="151515"/>
                 </a:solidFill>
               </a:defRPr>
             </a:pPr>
@@ -5211,7 +5211,7 @@
             <a:avLst/>
           </a:prstGeom>
           <a:solidFill>
-            <a:srgbClr val="FFBE55"/>
+            <a:srgbClr val="D39A28"/>
           </a:solidFill>
           <a:ln>
             <a:noFill/>
@@ -5254,7 +5254,7 @@
             <a:avLst/>
           </a:prstGeom>
           <a:solidFill>
-            <a:srgbClr val="10243C"/>
+            <a:srgbClr val="FFFFFF"/>
           </a:solidFill>
           <a:ln>
             <a:solidFill>
@@ -5283,7 +5283,7 @@
             <a:pPr algn="ctr">
               <a:defRPr sz="1200" b="1">
                 <a:solidFill>
-                  <a:srgbClr val="46D6C8"/>
+                  <a:srgbClr val="E6462E"/>
                 </a:solidFill>
               </a:defRPr>
             </a:pPr>
@@ -5298,7 +5298,7 @@
               </a:spcBef>
               <a:defRPr sz="1100">
                 <a:solidFill>
-                  <a:srgbClr val="F4F8FC"/>
+                  <a:srgbClr val="151515"/>
                 </a:solidFill>
               </a:defRPr>
             </a:pPr>
@@ -5323,7 +5323,7 @@
             <a:avLst/>
           </a:prstGeom>
           <a:solidFill>
-            <a:srgbClr val="46D6C8"/>
+            <a:srgbClr val="E6462E"/>
           </a:solidFill>
           <a:ln>
             <a:noFill/>
@@ -5376,7 +5376,7 @@
             <a:pPr>
               <a:defRPr sz="900">
                 <a:solidFill>
-                  <a:srgbClr val="9AB2C8"/>
+                  <a:srgbClr val="62666A"/>
                 </a:solidFill>
               </a:defRPr>
             </a:pPr>
@@ -5400,7 +5400,7 @@
     <p:bg>
       <p:bgPr>
         <a:solidFill>
-          <a:srgbClr val="07111F"/>
+          <a:srgbClr val="F4F1E8"/>
         </a:solidFill>
         <a:effectLst/>
       </p:bgPr>
@@ -5427,7 +5427,7 @@
             <a:avLst/>
           </a:prstGeom>
           <a:solidFill>
-            <a:srgbClr val="46D6C8"/>
+            <a:srgbClr val="E6462E"/>
           </a:solidFill>
           <a:ln>
             <a:noFill/>
@@ -5480,7 +5480,7 @@
             <a:pPr>
               <a:defRPr sz="900" b="1">
                 <a:solidFill>
-                  <a:srgbClr val="46D6C8"/>
+                  <a:srgbClr val="E6462E"/>
                 </a:solidFill>
               </a:defRPr>
             </a:pPr>
@@ -5515,7 +5515,7 @@
             <a:pPr algn="l">
               <a:defRPr sz="2700" b="1">
                 <a:solidFill>
-                  <a:srgbClr val="F4F8FC"/>
+                  <a:srgbClr val="151515"/>
                 </a:solidFill>
               </a:defRPr>
             </a:pPr>
@@ -5540,7 +5540,7 @@
             <a:avLst/>
           </a:prstGeom>
           <a:solidFill>
-            <a:srgbClr val="10243C"/>
+            <a:srgbClr val="FFFFFF"/>
           </a:solidFill>
           <a:ln>
             <a:solidFill>
@@ -5569,7 +5569,7 @@
             <a:pPr algn="ctr">
               <a:defRPr sz="1200" b="1">
                 <a:solidFill>
-                  <a:srgbClr val="46D6C8"/>
+                  <a:srgbClr val="E6462E"/>
                 </a:solidFill>
               </a:defRPr>
             </a:pPr>
@@ -5584,7 +5584,7 @@
               </a:spcBef>
               <a:defRPr sz="1500">
                 <a:solidFill>
-                  <a:srgbClr val="F4F8FC"/>
+                  <a:srgbClr val="151515"/>
                 </a:solidFill>
               </a:defRPr>
             </a:pPr>
@@ -5609,7 +5609,7 @@
             <a:avLst/>
           </a:prstGeom>
           <a:solidFill>
-            <a:srgbClr val="46D6C8"/>
+            <a:srgbClr val="E6462E"/>
           </a:solidFill>
           <a:ln>
             <a:noFill/>
@@ -5652,7 +5652,7 @@
             <a:avLst/>
           </a:prstGeom>
           <a:solidFill>
-            <a:srgbClr val="10243C"/>
+            <a:srgbClr val="FFFFFF"/>
           </a:solidFill>
           <a:ln>
             <a:solidFill>
@@ -5681,7 +5681,7 @@
             <a:pPr algn="ctr">
               <a:defRPr sz="1200" b="1">
                 <a:solidFill>
-                  <a:srgbClr val="55A7FF"/>
+                  <a:srgbClr val="176B87"/>
                 </a:solidFill>
               </a:defRPr>
             </a:pPr>
@@ -5696,7 +5696,7 @@
               </a:spcBef>
               <a:defRPr sz="1500">
                 <a:solidFill>
-                  <a:srgbClr val="F4F8FC"/>
+                  <a:srgbClr val="151515"/>
                 </a:solidFill>
               </a:defRPr>
             </a:pPr>
@@ -5721,7 +5721,7 @@
             <a:avLst/>
           </a:prstGeom>
           <a:solidFill>
-            <a:srgbClr val="55A7FF"/>
+            <a:srgbClr val="176B87"/>
           </a:solidFill>
           <a:ln>
             <a:noFill/>
@@ -5764,7 +5764,7 @@
             <a:avLst/>
           </a:prstGeom>
           <a:solidFill>
-            <a:srgbClr val="10243C"/>
+            <a:srgbClr val="FFFFFF"/>
           </a:solidFill>
           <a:ln>
             <a:solidFill>
@@ -5793,7 +5793,7 @@
             <a:pPr algn="ctr">
               <a:defRPr sz="1200" b="1">
                 <a:solidFill>
-                  <a:srgbClr val="FFBE55"/>
+                  <a:srgbClr val="D39A28"/>
                 </a:solidFill>
               </a:defRPr>
             </a:pPr>
@@ -5808,7 +5808,7 @@
               </a:spcBef>
               <a:defRPr sz="1500">
                 <a:solidFill>
-                  <a:srgbClr val="F4F8FC"/>
+                  <a:srgbClr val="151515"/>
                 </a:solidFill>
               </a:defRPr>
             </a:pPr>
@@ -5833,7 +5833,7 @@
             <a:avLst/>
           </a:prstGeom>
           <a:solidFill>
-            <a:srgbClr val="FFBE55"/>
+            <a:srgbClr val="D39A28"/>
           </a:solidFill>
           <a:ln>
             <a:noFill/>
@@ -5876,7 +5876,7 @@
             <a:avLst/>
           </a:prstGeom>
           <a:solidFill>
-            <a:srgbClr val="10243C"/>
+            <a:srgbClr val="FFFFFF"/>
           </a:solidFill>
           <a:ln>
             <a:solidFill>
@@ -5905,7 +5905,7 @@
             <a:pPr algn="ctr">
               <a:defRPr sz="1200" b="1">
                 <a:solidFill>
-                  <a:srgbClr val="46D6C8"/>
+                  <a:srgbClr val="E6462E"/>
                 </a:solidFill>
               </a:defRPr>
             </a:pPr>
@@ -5920,7 +5920,7 @@
               </a:spcBef>
               <a:defRPr sz="1500">
                 <a:solidFill>
-                  <a:srgbClr val="F4F8FC"/>
+                  <a:srgbClr val="151515"/>
                 </a:solidFill>
               </a:defRPr>
             </a:pPr>
@@ -5945,7 +5945,7 @@
             <a:avLst/>
           </a:prstGeom>
           <a:solidFill>
-            <a:srgbClr val="46D6C8"/>
+            <a:srgbClr val="E6462E"/>
           </a:solidFill>
           <a:ln>
             <a:noFill/>
@@ -5988,7 +5988,7 @@
             <a:avLst/>
           </a:prstGeom>
           <a:solidFill>
-            <a:srgbClr val="10243C"/>
+            <a:srgbClr val="FFFFFF"/>
           </a:solidFill>
           <a:ln>
             <a:solidFill>
@@ -6017,7 +6017,7 @@
             <a:pPr algn="ctr">
               <a:defRPr sz="1200" b="1">
                 <a:solidFill>
-                  <a:srgbClr val="55A7FF"/>
+                  <a:srgbClr val="176B87"/>
                 </a:solidFill>
               </a:defRPr>
             </a:pPr>
@@ -6032,7 +6032,7 @@
               </a:spcBef>
               <a:defRPr sz="1500">
                 <a:solidFill>
-                  <a:srgbClr val="F4F8FC"/>
+                  <a:srgbClr val="151515"/>
                 </a:solidFill>
               </a:defRPr>
             </a:pPr>
@@ -6057,7 +6057,7 @@
             <a:avLst/>
           </a:prstGeom>
           <a:solidFill>
-            <a:srgbClr val="55A7FF"/>
+            <a:srgbClr val="176B87"/>
           </a:solidFill>
           <a:ln>
             <a:noFill/>
@@ -6100,7 +6100,7 @@
             <a:avLst/>
           </a:prstGeom>
           <a:solidFill>
-            <a:srgbClr val="10243C"/>
+            <a:srgbClr val="FFFFFF"/>
           </a:solidFill>
           <a:ln>
             <a:solidFill>
@@ -6129,7 +6129,7 @@
             <a:pPr algn="ctr">
               <a:defRPr sz="1200" b="1">
                 <a:solidFill>
-                  <a:srgbClr val="FFBE55"/>
+                  <a:srgbClr val="D39A28"/>
                 </a:solidFill>
               </a:defRPr>
             </a:pPr>
@@ -6144,7 +6144,7 @@
               </a:spcBef>
               <a:defRPr sz="1500">
                 <a:solidFill>
-                  <a:srgbClr val="F4F8FC"/>
+                  <a:srgbClr val="151515"/>
                 </a:solidFill>
               </a:defRPr>
             </a:pPr>
@@ -6169,7 +6169,7 @@
             <a:avLst/>
           </a:prstGeom>
           <a:solidFill>
-            <a:srgbClr val="FFBE55"/>
+            <a:srgbClr val="D39A28"/>
           </a:solidFill>
           <a:ln>
             <a:noFill/>
@@ -6222,7 +6222,7 @@
             <a:pPr>
               <a:defRPr sz="900">
                 <a:solidFill>
-                  <a:srgbClr val="9AB2C8"/>
+                  <a:srgbClr val="62666A"/>
                 </a:solidFill>
               </a:defRPr>
             </a:pPr>
@@ -6246,7 +6246,7 @@
     <p:bg>
       <p:bgPr>
         <a:solidFill>
-          <a:srgbClr val="07111F"/>
+          <a:srgbClr val="F4F1E8"/>
         </a:solidFill>
         <a:effectLst/>
       </p:bgPr>
@@ -6273,7 +6273,7 @@
             <a:avLst/>
           </a:prstGeom>
           <a:solidFill>
-            <a:srgbClr val="46D6C8"/>
+            <a:srgbClr val="E6462E"/>
           </a:solidFill>
           <a:ln>
             <a:noFill/>
@@ -6326,7 +6326,7 @@
             <a:pPr>
               <a:defRPr sz="900" b="1">
                 <a:solidFill>
-                  <a:srgbClr val="46D6C8"/>
+                  <a:srgbClr val="E6462E"/>
                 </a:solidFill>
               </a:defRPr>
             </a:pPr>
@@ -6361,7 +6361,7 @@
             <a:pPr algn="l">
               <a:defRPr sz="2700" b="1">
                 <a:solidFill>
-                  <a:srgbClr val="F4F8FC"/>
+                  <a:srgbClr val="151515"/>
                 </a:solidFill>
               </a:defRPr>
             </a:pPr>
@@ -6386,7 +6386,7 @@
             <a:avLst/>
           </a:prstGeom>
           <a:solidFill>
-            <a:srgbClr val="10243C"/>
+            <a:srgbClr val="FFFFFF"/>
           </a:solidFill>
           <a:ln>
             <a:solidFill>
@@ -6415,7 +6415,7 @@
             <a:pPr algn="ctr">
               <a:defRPr sz="1200" b="1">
                 <a:solidFill>
-                  <a:srgbClr val="46D6C8"/>
+                  <a:srgbClr val="E6462E"/>
                 </a:solidFill>
               </a:defRPr>
             </a:pPr>
@@ -6430,7 +6430,7 @@
               </a:spcBef>
               <a:defRPr sz="1500">
                 <a:solidFill>
-                  <a:srgbClr val="F4F8FC"/>
+                  <a:srgbClr val="151515"/>
                 </a:solidFill>
               </a:defRPr>
             </a:pPr>
@@ -6455,7 +6455,7 @@
             <a:avLst/>
           </a:prstGeom>
           <a:solidFill>
-            <a:srgbClr val="46D6C8"/>
+            <a:srgbClr val="E6462E"/>
           </a:solidFill>
           <a:ln>
             <a:noFill/>
@@ -6498,7 +6498,7 @@
             <a:avLst/>
           </a:prstGeom>
           <a:solidFill>
-            <a:srgbClr val="10243C"/>
+            <a:srgbClr val="FFFFFF"/>
           </a:solidFill>
           <a:ln>
             <a:solidFill>
@@ -6527,7 +6527,7 @@
             <a:pPr algn="ctr">
               <a:defRPr sz="1200" b="1">
                 <a:solidFill>
-                  <a:srgbClr val="55A7FF"/>
+                  <a:srgbClr val="176B87"/>
                 </a:solidFill>
               </a:defRPr>
             </a:pPr>
@@ -6542,7 +6542,7 @@
               </a:spcBef>
               <a:defRPr sz="1500">
                 <a:solidFill>
-                  <a:srgbClr val="F4F8FC"/>
+                  <a:srgbClr val="151515"/>
                 </a:solidFill>
               </a:defRPr>
             </a:pPr>
@@ -6567,7 +6567,7 @@
             <a:avLst/>
           </a:prstGeom>
           <a:solidFill>
-            <a:srgbClr val="55A7FF"/>
+            <a:srgbClr val="176B87"/>
           </a:solidFill>
           <a:ln>
             <a:noFill/>
@@ -6610,7 +6610,7 @@
             <a:avLst/>
           </a:prstGeom>
           <a:solidFill>
-            <a:srgbClr val="10243C"/>
+            <a:srgbClr val="FFFFFF"/>
           </a:solidFill>
           <a:ln>
             <a:solidFill>
@@ -6639,7 +6639,7 @@
             <a:pPr algn="ctr">
               <a:defRPr sz="1200" b="1">
                 <a:solidFill>
-                  <a:srgbClr val="FFBE55"/>
+                  <a:srgbClr val="D39A28"/>
                 </a:solidFill>
               </a:defRPr>
             </a:pPr>
@@ -6654,7 +6654,7 @@
               </a:spcBef>
               <a:defRPr sz="1500">
                 <a:solidFill>
-                  <a:srgbClr val="F4F8FC"/>
+                  <a:srgbClr val="151515"/>
                 </a:solidFill>
               </a:defRPr>
             </a:pPr>
@@ -6679,7 +6679,7 @@
             <a:avLst/>
           </a:prstGeom>
           <a:solidFill>
-            <a:srgbClr val="FFBE55"/>
+            <a:srgbClr val="D39A28"/>
           </a:solidFill>
           <a:ln>
             <a:noFill/>
@@ -6722,7 +6722,7 @@
             <a:avLst/>
           </a:prstGeom>
           <a:solidFill>
-            <a:srgbClr val="10243C"/>
+            <a:srgbClr val="FFFFFF"/>
           </a:solidFill>
           <a:ln>
             <a:solidFill>
@@ -6751,7 +6751,7 @@
             <a:pPr algn="ctr">
               <a:defRPr sz="1200" b="1">
                 <a:solidFill>
-                  <a:srgbClr val="46D6C8"/>
+                  <a:srgbClr val="E6462E"/>
                 </a:solidFill>
               </a:defRPr>
             </a:pPr>
@@ -6766,7 +6766,7 @@
               </a:spcBef>
               <a:defRPr sz="1500">
                 <a:solidFill>
-                  <a:srgbClr val="F4F8FC"/>
+                  <a:srgbClr val="151515"/>
                 </a:solidFill>
               </a:defRPr>
             </a:pPr>
@@ -6791,7 +6791,7 @@
             <a:avLst/>
           </a:prstGeom>
           <a:solidFill>
-            <a:srgbClr val="46D6C8"/>
+            <a:srgbClr val="E6462E"/>
           </a:solidFill>
           <a:ln>
             <a:noFill/>
@@ -6834,7 +6834,7 @@
             <a:avLst/>
           </a:prstGeom>
           <a:solidFill>
-            <a:srgbClr val="10243C"/>
+            <a:srgbClr val="FFFFFF"/>
           </a:solidFill>
           <a:ln>
             <a:solidFill>
@@ -6863,7 +6863,7 @@
             <a:pPr algn="ctr">
               <a:defRPr sz="1200" b="1">
                 <a:solidFill>
-                  <a:srgbClr val="55A7FF"/>
+                  <a:srgbClr val="176B87"/>
                 </a:solidFill>
               </a:defRPr>
             </a:pPr>
@@ -6878,7 +6878,7 @@
               </a:spcBef>
               <a:defRPr sz="1500">
                 <a:solidFill>
-                  <a:srgbClr val="F4F8FC"/>
+                  <a:srgbClr val="151515"/>
                 </a:solidFill>
               </a:defRPr>
             </a:pPr>
@@ -6903,7 +6903,7 @@
             <a:avLst/>
           </a:prstGeom>
           <a:solidFill>
-            <a:srgbClr val="55A7FF"/>
+            <a:srgbClr val="176B87"/>
           </a:solidFill>
           <a:ln>
             <a:noFill/>
@@ -6946,7 +6946,7 @@
             <a:avLst/>
           </a:prstGeom>
           <a:solidFill>
-            <a:srgbClr val="10243C"/>
+            <a:srgbClr val="FFFFFF"/>
           </a:solidFill>
           <a:ln>
             <a:solidFill>
@@ -6975,7 +6975,7 @@
             <a:pPr algn="ctr">
               <a:defRPr sz="1200" b="1">
                 <a:solidFill>
-                  <a:srgbClr val="FFBE55"/>
+                  <a:srgbClr val="D39A28"/>
                 </a:solidFill>
               </a:defRPr>
             </a:pPr>
@@ -6990,7 +6990,7 @@
               </a:spcBef>
               <a:defRPr sz="1500">
                 <a:solidFill>
-                  <a:srgbClr val="F4F8FC"/>
+                  <a:srgbClr val="151515"/>
                 </a:solidFill>
               </a:defRPr>
             </a:pPr>
@@ -7015,7 +7015,7 @@
             <a:avLst/>
           </a:prstGeom>
           <a:solidFill>
-            <a:srgbClr val="FFBE55"/>
+            <a:srgbClr val="D39A28"/>
           </a:solidFill>
           <a:ln>
             <a:noFill/>
@@ -7068,7 +7068,7 @@
             <a:pPr>
               <a:defRPr sz="900">
                 <a:solidFill>
-                  <a:srgbClr val="9AB2C8"/>
+                  <a:srgbClr val="62666A"/>
                 </a:solidFill>
               </a:defRPr>
             </a:pPr>
@@ -7092,7 +7092,7 @@
     <p:bg>
       <p:bgPr>
         <a:solidFill>
-          <a:srgbClr val="07111F"/>
+          <a:srgbClr val="F4F1E8"/>
         </a:solidFill>
         <a:effectLst/>
       </p:bgPr>
@@ -7119,7 +7119,7 @@
             <a:avLst/>
           </a:prstGeom>
           <a:solidFill>
-            <a:srgbClr val="46D6C8"/>
+            <a:srgbClr val="E6462E"/>
           </a:solidFill>
           <a:ln>
             <a:noFill/>
@@ -7172,7 +7172,7 @@
             <a:pPr>
               <a:defRPr sz="900" b="1">
                 <a:solidFill>
-                  <a:srgbClr val="46D6C8"/>
+                  <a:srgbClr val="E6462E"/>
                 </a:solidFill>
               </a:defRPr>
             </a:pPr>
@@ -7207,7 +7207,7 @@
             <a:pPr algn="l">
               <a:defRPr sz="2700" b="1">
                 <a:solidFill>
-                  <a:srgbClr val="F4F8FC"/>
+                  <a:srgbClr val="151515"/>
                 </a:solidFill>
               </a:defRPr>
             </a:pPr>
@@ -7232,7 +7232,7 @@
             <a:avLst/>
           </a:prstGeom>
           <a:solidFill>
-            <a:srgbClr val="10243C"/>
+            <a:srgbClr val="FFFFFF"/>
           </a:solidFill>
           <a:ln>
             <a:solidFill>
@@ -7261,7 +7261,7 @@
             <a:pPr algn="ctr">
               <a:defRPr sz="1200" b="1">
                 <a:solidFill>
-                  <a:srgbClr val="46D6C8"/>
+                  <a:srgbClr val="E6462E"/>
                 </a:solidFill>
               </a:defRPr>
             </a:pPr>
@@ -7276,7 +7276,7 @@
               </a:spcBef>
               <a:defRPr sz="1500">
                 <a:solidFill>
-                  <a:srgbClr val="F4F8FC"/>
+                  <a:srgbClr val="151515"/>
                 </a:solidFill>
               </a:defRPr>
             </a:pPr>
@@ -7301,7 +7301,7 @@
             <a:avLst/>
           </a:prstGeom>
           <a:solidFill>
-            <a:srgbClr val="46D6C8"/>
+            <a:srgbClr val="E6462E"/>
           </a:solidFill>
           <a:ln>
             <a:noFill/>
@@ -7344,7 +7344,7 @@
             <a:avLst/>
           </a:prstGeom>
           <a:solidFill>
-            <a:srgbClr val="10243C"/>
+            <a:srgbClr val="FFFFFF"/>
           </a:solidFill>
           <a:ln>
             <a:solidFill>
@@ -7373,7 +7373,7 @@
             <a:pPr algn="ctr">
               <a:defRPr sz="1200" b="1">
                 <a:solidFill>
-                  <a:srgbClr val="55A7FF"/>
+                  <a:srgbClr val="176B87"/>
                 </a:solidFill>
               </a:defRPr>
             </a:pPr>
@@ -7388,7 +7388,7 @@
               </a:spcBef>
               <a:defRPr sz="1500">
                 <a:solidFill>
-                  <a:srgbClr val="F4F8FC"/>
+                  <a:srgbClr val="151515"/>
                 </a:solidFill>
               </a:defRPr>
             </a:pPr>
@@ -7413,7 +7413,7 @@
             <a:avLst/>
           </a:prstGeom>
           <a:solidFill>
-            <a:srgbClr val="55A7FF"/>
+            <a:srgbClr val="176B87"/>
           </a:solidFill>
           <a:ln>
             <a:noFill/>
@@ -7456,7 +7456,7 @@
             <a:avLst/>
           </a:prstGeom>
           <a:solidFill>
-            <a:srgbClr val="10243C"/>
+            <a:srgbClr val="FFFFFF"/>
           </a:solidFill>
           <a:ln>
             <a:solidFill>
@@ -7485,7 +7485,7 @@
             <a:pPr algn="ctr">
               <a:defRPr sz="1200" b="1">
                 <a:solidFill>
-                  <a:srgbClr val="FFBE55"/>
+                  <a:srgbClr val="D39A28"/>
                 </a:solidFill>
               </a:defRPr>
             </a:pPr>
@@ -7500,7 +7500,7 @@
               </a:spcBef>
               <a:defRPr sz="1500">
                 <a:solidFill>
-                  <a:srgbClr val="F4F8FC"/>
+                  <a:srgbClr val="151515"/>
                 </a:solidFill>
               </a:defRPr>
             </a:pPr>
@@ -7525,7 +7525,7 @@
             <a:avLst/>
           </a:prstGeom>
           <a:solidFill>
-            <a:srgbClr val="FFBE55"/>
+            <a:srgbClr val="D39A28"/>
           </a:solidFill>
           <a:ln>
             <a:noFill/>
@@ -7568,7 +7568,7 @@
             <a:avLst/>
           </a:prstGeom>
           <a:solidFill>
-            <a:srgbClr val="10243C"/>
+            <a:srgbClr val="FFFFFF"/>
           </a:solidFill>
           <a:ln>
             <a:solidFill>
@@ -7597,7 +7597,7 @@
             <a:pPr algn="ctr">
               <a:defRPr sz="1200" b="1">
                 <a:solidFill>
-                  <a:srgbClr val="46D6C8"/>
+                  <a:srgbClr val="E6462E"/>
                 </a:solidFill>
               </a:defRPr>
             </a:pPr>
@@ -7612,7 +7612,7 @@
               </a:spcBef>
               <a:defRPr sz="1500">
                 <a:solidFill>
-                  <a:srgbClr val="F4F8FC"/>
+                  <a:srgbClr val="151515"/>
                 </a:solidFill>
               </a:defRPr>
             </a:pPr>
@@ -7637,7 +7637,7 @@
             <a:avLst/>
           </a:prstGeom>
           <a:solidFill>
-            <a:srgbClr val="46D6C8"/>
+            <a:srgbClr val="E6462E"/>
           </a:solidFill>
           <a:ln>
             <a:noFill/>
@@ -7680,7 +7680,7 @@
             <a:avLst/>
           </a:prstGeom>
           <a:solidFill>
-            <a:srgbClr val="10243C"/>
+            <a:srgbClr val="FFFFFF"/>
           </a:solidFill>
           <a:ln>
             <a:solidFill>
@@ -7709,7 +7709,7 @@
             <a:pPr algn="ctr">
               <a:defRPr sz="1200" b="1">
                 <a:solidFill>
-                  <a:srgbClr val="55A7FF"/>
+                  <a:srgbClr val="176B87"/>
                 </a:solidFill>
               </a:defRPr>
             </a:pPr>
@@ -7724,7 +7724,7 @@
               </a:spcBef>
               <a:defRPr sz="1500">
                 <a:solidFill>
-                  <a:srgbClr val="F4F8FC"/>
+                  <a:srgbClr val="151515"/>
                 </a:solidFill>
               </a:defRPr>
             </a:pPr>
@@ -7749,7 +7749,7 @@
             <a:avLst/>
           </a:prstGeom>
           <a:solidFill>
-            <a:srgbClr val="55A7FF"/>
+            <a:srgbClr val="176B87"/>
           </a:solidFill>
           <a:ln>
             <a:noFill/>
@@ -7792,7 +7792,7 @@
             <a:avLst/>
           </a:prstGeom>
           <a:solidFill>
-            <a:srgbClr val="10243C"/>
+            <a:srgbClr val="FFFFFF"/>
           </a:solidFill>
           <a:ln>
             <a:solidFill>
@@ -7821,7 +7821,7 @@
             <a:pPr algn="ctr">
               <a:defRPr sz="1200" b="1">
                 <a:solidFill>
-                  <a:srgbClr val="FFBE55"/>
+                  <a:srgbClr val="D39A28"/>
                 </a:solidFill>
               </a:defRPr>
             </a:pPr>
@@ -7836,7 +7836,7 @@
               </a:spcBef>
               <a:defRPr sz="1500">
                 <a:solidFill>
-                  <a:srgbClr val="F4F8FC"/>
+                  <a:srgbClr val="151515"/>
                 </a:solidFill>
               </a:defRPr>
             </a:pPr>
@@ -7861,7 +7861,7 @@
             <a:avLst/>
           </a:prstGeom>
           <a:solidFill>
-            <a:srgbClr val="FFBE55"/>
+            <a:srgbClr val="D39A28"/>
           </a:solidFill>
           <a:ln>
             <a:noFill/>
@@ -7914,7 +7914,7 @@
             <a:pPr>
               <a:defRPr sz="900">
                 <a:solidFill>
-                  <a:srgbClr val="9AB2C8"/>
+                  <a:srgbClr val="62666A"/>
                 </a:solidFill>
               </a:defRPr>
             </a:pPr>
@@ -7938,7 +7938,7 @@
     <p:bg>
       <p:bgPr>
         <a:solidFill>
-          <a:srgbClr val="07111F"/>
+          <a:srgbClr val="F4F1E8"/>
         </a:solidFill>
         <a:effectLst/>
       </p:bgPr>
@@ -7965,7 +7965,7 @@
             <a:avLst/>
           </a:prstGeom>
           <a:solidFill>
-            <a:srgbClr val="46D6C8"/>
+            <a:srgbClr val="E6462E"/>
           </a:solidFill>
           <a:ln>
             <a:noFill/>
@@ -8018,7 +8018,7 @@
             <a:pPr>
               <a:defRPr sz="900" b="1">
                 <a:solidFill>
-                  <a:srgbClr val="46D6C8"/>
+                  <a:srgbClr val="E6462E"/>
                 </a:solidFill>
               </a:defRPr>
             </a:pPr>
@@ -8053,7 +8053,7 @@
             <a:pPr algn="l">
               <a:defRPr sz="2700" b="1">
                 <a:solidFill>
-                  <a:srgbClr val="F4F8FC"/>
+                  <a:srgbClr val="151515"/>
                 </a:solidFill>
               </a:defRPr>
             </a:pPr>
@@ -8078,7 +8078,7 @@
             <a:avLst/>
           </a:prstGeom>
           <a:solidFill>
-            <a:srgbClr val="10243C"/>
+            <a:srgbClr val="FFFFFF"/>
           </a:solidFill>
           <a:ln>
             <a:solidFill>
@@ -8107,7 +8107,7 @@
             <a:pPr algn="ctr">
               <a:defRPr sz="1200" b="1">
                 <a:solidFill>
-                  <a:srgbClr val="46D6C8"/>
+                  <a:srgbClr val="E6462E"/>
                 </a:solidFill>
               </a:defRPr>
             </a:pPr>
@@ -8122,7 +8122,7 @@
               </a:spcBef>
               <a:defRPr sz="1500">
                 <a:solidFill>
-                  <a:srgbClr val="F4F8FC"/>
+                  <a:srgbClr val="151515"/>
                 </a:solidFill>
               </a:defRPr>
             </a:pPr>
@@ -8147,7 +8147,7 @@
             <a:avLst/>
           </a:prstGeom>
           <a:solidFill>
-            <a:srgbClr val="46D6C8"/>
+            <a:srgbClr val="E6462E"/>
           </a:solidFill>
           <a:ln>
             <a:noFill/>
@@ -8190,7 +8190,7 @@
             <a:avLst/>
           </a:prstGeom>
           <a:solidFill>
-            <a:srgbClr val="10243C"/>
+            <a:srgbClr val="FFFFFF"/>
           </a:solidFill>
           <a:ln>
             <a:solidFill>
@@ -8219,7 +8219,7 @@
             <a:pPr algn="ctr">
               <a:defRPr sz="1200" b="1">
                 <a:solidFill>
-                  <a:srgbClr val="55A7FF"/>
+                  <a:srgbClr val="176B87"/>
                 </a:solidFill>
               </a:defRPr>
             </a:pPr>
@@ -8234,7 +8234,7 @@
               </a:spcBef>
               <a:defRPr sz="1500">
                 <a:solidFill>
-                  <a:srgbClr val="F4F8FC"/>
+                  <a:srgbClr val="151515"/>
                 </a:solidFill>
               </a:defRPr>
             </a:pPr>
@@ -8259,7 +8259,7 @@
             <a:avLst/>
           </a:prstGeom>
           <a:solidFill>
-            <a:srgbClr val="55A7FF"/>
+            <a:srgbClr val="176B87"/>
           </a:solidFill>
           <a:ln>
             <a:noFill/>
@@ -8302,7 +8302,7 @@
             <a:avLst/>
           </a:prstGeom>
           <a:solidFill>
-            <a:srgbClr val="10243C"/>
+            <a:srgbClr val="FFFFFF"/>
           </a:solidFill>
           <a:ln>
             <a:solidFill>
@@ -8331,7 +8331,7 @@
             <a:pPr algn="ctr">
               <a:defRPr sz="1200" b="1">
                 <a:solidFill>
-                  <a:srgbClr val="FFBE55"/>
+                  <a:srgbClr val="D39A28"/>
                 </a:solidFill>
               </a:defRPr>
             </a:pPr>
@@ -8346,7 +8346,7 @@
               </a:spcBef>
               <a:defRPr sz="1500">
                 <a:solidFill>
-                  <a:srgbClr val="F4F8FC"/>
+                  <a:srgbClr val="151515"/>
                 </a:solidFill>
               </a:defRPr>
             </a:pPr>
@@ -8371,7 +8371,7 @@
             <a:avLst/>
           </a:prstGeom>
           <a:solidFill>
-            <a:srgbClr val="FFBE55"/>
+            <a:srgbClr val="D39A28"/>
           </a:solidFill>
           <a:ln>
             <a:noFill/>
@@ -8414,7 +8414,7 @@
             <a:avLst/>
           </a:prstGeom>
           <a:solidFill>
-            <a:srgbClr val="10243C"/>
+            <a:srgbClr val="FFFFFF"/>
           </a:solidFill>
           <a:ln>
             <a:solidFill>
@@ -8443,7 +8443,7 @@
             <a:pPr algn="ctr">
               <a:defRPr sz="1200" b="1">
                 <a:solidFill>
-                  <a:srgbClr val="46D6C8"/>
+                  <a:srgbClr val="E6462E"/>
                 </a:solidFill>
               </a:defRPr>
             </a:pPr>
@@ -8458,7 +8458,7 @@
               </a:spcBef>
               <a:defRPr sz="1500">
                 <a:solidFill>
-                  <a:srgbClr val="F4F8FC"/>
+                  <a:srgbClr val="151515"/>
                 </a:solidFill>
               </a:defRPr>
             </a:pPr>
@@ -8483,7 +8483,7 @@
             <a:avLst/>
           </a:prstGeom>
           <a:solidFill>
-            <a:srgbClr val="46D6C8"/>
+            <a:srgbClr val="E6462E"/>
           </a:solidFill>
           <a:ln>
             <a:noFill/>
@@ -8526,7 +8526,7 @@
             <a:avLst/>
           </a:prstGeom>
           <a:solidFill>
-            <a:srgbClr val="10243C"/>
+            <a:srgbClr val="FFFFFF"/>
           </a:solidFill>
           <a:ln>
             <a:solidFill>
@@ -8555,7 +8555,7 @@
             <a:pPr algn="ctr">
               <a:defRPr sz="1200" b="1">
                 <a:solidFill>
-                  <a:srgbClr val="55A7FF"/>
+                  <a:srgbClr val="176B87"/>
                 </a:solidFill>
               </a:defRPr>
             </a:pPr>
@@ -8570,7 +8570,7 @@
               </a:spcBef>
               <a:defRPr sz="1500">
                 <a:solidFill>
-                  <a:srgbClr val="F4F8FC"/>
+                  <a:srgbClr val="151515"/>
                 </a:solidFill>
               </a:defRPr>
             </a:pPr>
@@ -8595,7 +8595,7 @@
             <a:avLst/>
           </a:prstGeom>
           <a:solidFill>
-            <a:srgbClr val="55A7FF"/>
+            <a:srgbClr val="176B87"/>
           </a:solidFill>
           <a:ln>
             <a:noFill/>
@@ -8638,7 +8638,7 @@
             <a:avLst/>
           </a:prstGeom>
           <a:solidFill>
-            <a:srgbClr val="10243C"/>
+            <a:srgbClr val="FFFFFF"/>
           </a:solidFill>
           <a:ln>
             <a:solidFill>
@@ -8667,7 +8667,7 @@
             <a:pPr algn="ctr">
               <a:defRPr sz="1200" b="1">
                 <a:solidFill>
-                  <a:srgbClr val="FFBE55"/>
+                  <a:srgbClr val="D39A28"/>
                 </a:solidFill>
               </a:defRPr>
             </a:pPr>
@@ -8682,7 +8682,7 @@
               </a:spcBef>
               <a:defRPr sz="1500">
                 <a:solidFill>
-                  <a:srgbClr val="F4F8FC"/>
+                  <a:srgbClr val="151515"/>
                 </a:solidFill>
               </a:defRPr>
             </a:pPr>
@@ -8707,7 +8707,7 @@
             <a:avLst/>
           </a:prstGeom>
           <a:solidFill>
-            <a:srgbClr val="FFBE55"/>
+            <a:srgbClr val="D39A28"/>
           </a:solidFill>
           <a:ln>
             <a:noFill/>
@@ -8760,7 +8760,7 @@
             <a:pPr>
               <a:defRPr sz="900">
                 <a:solidFill>
-                  <a:srgbClr val="9AB2C8"/>
+                  <a:srgbClr val="62666A"/>
                 </a:solidFill>
               </a:defRPr>
             </a:pPr>
@@ -8784,7 +8784,7 @@
     <p:bg>
       <p:bgPr>
         <a:solidFill>
-          <a:srgbClr val="07111F"/>
+          <a:srgbClr val="F4F1E8"/>
         </a:solidFill>
         <a:effectLst/>
       </p:bgPr>
@@ -8811,7 +8811,7 @@
             <a:avLst/>
           </a:prstGeom>
           <a:solidFill>
-            <a:srgbClr val="46D6C8"/>
+            <a:srgbClr val="E6462E"/>
           </a:solidFill>
           <a:ln>
             <a:noFill/>
@@ -8864,7 +8864,7 @@
             <a:pPr>
               <a:defRPr sz="900" b="1">
                 <a:solidFill>
-                  <a:srgbClr val="46D6C8"/>
+                  <a:srgbClr val="E6462E"/>
                 </a:solidFill>
               </a:defRPr>
             </a:pPr>
@@ -8899,7 +8899,7 @@
             <a:pPr algn="l">
               <a:defRPr sz="2700" b="1">
                 <a:solidFill>
-                  <a:srgbClr val="F4F8FC"/>
+                  <a:srgbClr val="151515"/>
                 </a:solidFill>
               </a:defRPr>
             </a:pPr>
@@ -8924,7 +8924,7 @@
             <a:avLst/>
           </a:prstGeom>
           <a:solidFill>
-            <a:srgbClr val="10243C"/>
+            <a:srgbClr val="FFFFFF"/>
           </a:solidFill>
           <a:ln>
             <a:solidFill>
@@ -8953,7 +8953,7 @@
             <a:pPr algn="ctr">
               <a:defRPr sz="1200" b="1">
                 <a:solidFill>
-                  <a:srgbClr val="46D6C8"/>
+                  <a:srgbClr val="E6462E"/>
                 </a:solidFill>
               </a:defRPr>
             </a:pPr>
@@ -8968,7 +8968,7 @@
               </a:spcBef>
               <a:defRPr sz="1500">
                 <a:solidFill>
-                  <a:srgbClr val="F4F8FC"/>
+                  <a:srgbClr val="151515"/>
                 </a:solidFill>
               </a:defRPr>
             </a:pPr>
@@ -8993,7 +8993,7 @@
             <a:avLst/>
           </a:prstGeom>
           <a:solidFill>
-            <a:srgbClr val="46D6C8"/>
+            <a:srgbClr val="E6462E"/>
           </a:solidFill>
           <a:ln>
             <a:noFill/>
@@ -9036,7 +9036,7 @@
             <a:avLst/>
           </a:prstGeom>
           <a:solidFill>
-            <a:srgbClr val="10243C"/>
+            <a:srgbClr val="FFFFFF"/>
           </a:solidFill>
           <a:ln>
             <a:solidFill>
@@ -9065,7 +9065,7 @@
             <a:pPr algn="ctr">
               <a:defRPr sz="1200" b="1">
                 <a:solidFill>
-                  <a:srgbClr val="55A7FF"/>
+                  <a:srgbClr val="176B87"/>
                 </a:solidFill>
               </a:defRPr>
             </a:pPr>
@@ -9080,7 +9080,7 @@
               </a:spcBef>
               <a:defRPr sz="1500">
                 <a:solidFill>
-                  <a:srgbClr val="F4F8FC"/>
+                  <a:srgbClr val="151515"/>
                 </a:solidFill>
               </a:defRPr>
             </a:pPr>
@@ -9105,7 +9105,7 @@
             <a:avLst/>
           </a:prstGeom>
           <a:solidFill>
-            <a:srgbClr val="55A7FF"/>
+            <a:srgbClr val="176B87"/>
           </a:solidFill>
           <a:ln>
             <a:noFill/>
@@ -9148,7 +9148,7 @@
             <a:avLst/>
           </a:prstGeom>
           <a:solidFill>
-            <a:srgbClr val="10243C"/>
+            <a:srgbClr val="FFFFFF"/>
           </a:solidFill>
           <a:ln>
             <a:solidFill>
@@ -9177,7 +9177,7 @@
             <a:pPr algn="ctr">
               <a:defRPr sz="1200" b="1">
                 <a:solidFill>
-                  <a:srgbClr val="FFBE55"/>
+                  <a:srgbClr val="D39A28"/>
                 </a:solidFill>
               </a:defRPr>
             </a:pPr>
@@ -9192,7 +9192,7 @@
               </a:spcBef>
               <a:defRPr sz="1100">
                 <a:solidFill>
-                  <a:srgbClr val="F4F8FC"/>
+                  <a:srgbClr val="151515"/>
                 </a:solidFill>
               </a:defRPr>
             </a:pPr>
@@ -9217,7 +9217,7 @@
             <a:avLst/>
           </a:prstGeom>
           <a:solidFill>
-            <a:srgbClr val="FFBE55"/>
+            <a:srgbClr val="D39A28"/>
           </a:solidFill>
           <a:ln>
             <a:noFill/>
@@ -9260,7 +9260,7 @@
             <a:avLst/>
           </a:prstGeom>
           <a:solidFill>
-            <a:srgbClr val="10243C"/>
+            <a:srgbClr val="FFFFFF"/>
           </a:solidFill>
           <a:ln>
             <a:solidFill>
@@ -9289,7 +9289,7 @@
             <a:pPr algn="ctr">
               <a:defRPr sz="1200" b="1">
                 <a:solidFill>
-                  <a:srgbClr val="46D6C8"/>
+                  <a:srgbClr val="E6462E"/>
                 </a:solidFill>
               </a:defRPr>
             </a:pPr>
@@ -9304,7 +9304,7 @@
               </a:spcBef>
               <a:defRPr sz="1100">
                 <a:solidFill>
-                  <a:srgbClr val="F4F8FC"/>
+                  <a:srgbClr val="151515"/>
                 </a:solidFill>
               </a:defRPr>
             </a:pPr>
@@ -9329,7 +9329,7 @@
             <a:avLst/>
           </a:prstGeom>
           <a:solidFill>
-            <a:srgbClr val="46D6C8"/>
+            <a:srgbClr val="E6462E"/>
           </a:solidFill>
           <a:ln>
             <a:noFill/>
@@ -9372,7 +9372,7 @@
             <a:avLst/>
           </a:prstGeom>
           <a:solidFill>
-            <a:srgbClr val="10243C"/>
+            <a:srgbClr val="FFFFFF"/>
           </a:solidFill>
           <a:ln>
             <a:solidFill>
@@ -9401,7 +9401,7 @@
             <a:pPr algn="ctr">
               <a:defRPr sz="1200" b="1">
                 <a:solidFill>
-                  <a:srgbClr val="55A7FF"/>
+                  <a:srgbClr val="176B87"/>
                 </a:solidFill>
               </a:defRPr>
             </a:pPr>
@@ -9416,7 +9416,7 @@
               </a:spcBef>
               <a:defRPr sz="1100">
                 <a:solidFill>
-                  <a:srgbClr val="F4F8FC"/>
+                  <a:srgbClr val="151515"/>
                 </a:solidFill>
               </a:defRPr>
             </a:pPr>
@@ -9441,7 +9441,7 @@
             <a:avLst/>
           </a:prstGeom>
           <a:solidFill>
-            <a:srgbClr val="55A7FF"/>
+            <a:srgbClr val="176B87"/>
           </a:solidFill>
           <a:ln>
             <a:noFill/>
@@ -9484,7 +9484,7 @@
             <a:avLst/>
           </a:prstGeom>
           <a:solidFill>
-            <a:srgbClr val="10243C"/>
+            <a:srgbClr val="FFFFFF"/>
           </a:solidFill>
           <a:ln>
             <a:solidFill>
@@ -9513,7 +9513,7 @@
             <a:pPr algn="ctr">
               <a:defRPr sz="1200" b="1">
                 <a:solidFill>
-                  <a:srgbClr val="FFBE55"/>
+                  <a:srgbClr val="D39A28"/>
                 </a:solidFill>
               </a:defRPr>
             </a:pPr>
@@ -9528,7 +9528,7 @@
               </a:spcBef>
               <a:defRPr sz="1500">
                 <a:solidFill>
-                  <a:srgbClr val="F4F8FC"/>
+                  <a:srgbClr val="151515"/>
                 </a:solidFill>
               </a:defRPr>
             </a:pPr>
@@ -9553,7 +9553,7 @@
             <a:avLst/>
           </a:prstGeom>
           <a:solidFill>
-            <a:srgbClr val="FFBE55"/>
+            <a:srgbClr val="D39A28"/>
           </a:solidFill>
           <a:ln>
             <a:noFill/>
@@ -9606,7 +9606,7 @@
             <a:pPr>
               <a:defRPr sz="900">
                 <a:solidFill>
-                  <a:srgbClr val="9AB2C8"/>
+                  <a:srgbClr val="62666A"/>
                 </a:solidFill>
               </a:defRPr>
             </a:pPr>
@@ -9630,7 +9630,7 @@
     <p:bg>
       <p:bgPr>
         <a:solidFill>
-          <a:srgbClr val="07111F"/>
+          <a:srgbClr val="F4F1E8"/>
         </a:solidFill>
         <a:effectLst/>
       </p:bgPr>
@@ -9657,7 +9657,7 @@
             <a:avLst/>
           </a:prstGeom>
           <a:solidFill>
-            <a:srgbClr val="46D6C8"/>
+            <a:srgbClr val="E6462E"/>
           </a:solidFill>
           <a:ln>
             <a:noFill/>
@@ -9710,7 +9710,7 @@
             <a:pPr>
               <a:defRPr sz="900" b="1">
                 <a:solidFill>
-                  <a:srgbClr val="46D6C8"/>
+                  <a:srgbClr val="E6462E"/>
                 </a:solidFill>
               </a:defRPr>
             </a:pPr>
@@ -9745,7 +9745,7 @@
             <a:pPr algn="l">
               <a:defRPr sz="2700" b="1">
                 <a:solidFill>
-                  <a:srgbClr val="F4F8FC"/>
+                  <a:srgbClr val="151515"/>
                 </a:solidFill>
               </a:defRPr>
             </a:pPr>
@@ -9770,7 +9770,7 @@
             <a:avLst/>
           </a:prstGeom>
           <a:solidFill>
-            <a:srgbClr val="10243C"/>
+            <a:srgbClr val="FFFFFF"/>
           </a:solidFill>
           <a:ln>
             <a:solidFill>
@@ -9799,7 +9799,7 @@
             <a:pPr algn="ctr">
               <a:defRPr sz="1200" b="1">
                 <a:solidFill>
-                  <a:srgbClr val="46D6C8"/>
+                  <a:srgbClr val="E6462E"/>
                 </a:solidFill>
               </a:defRPr>
             </a:pPr>
@@ -9814,7 +9814,7 @@
               </a:spcBef>
               <a:defRPr sz="1500">
                 <a:solidFill>
-                  <a:srgbClr val="F4F8FC"/>
+                  <a:srgbClr val="151515"/>
                 </a:solidFill>
               </a:defRPr>
             </a:pPr>
@@ -9839,7 +9839,7 @@
             <a:avLst/>
           </a:prstGeom>
           <a:solidFill>
-            <a:srgbClr val="46D6C8"/>
+            <a:srgbClr val="E6462E"/>
           </a:solidFill>
           <a:ln>
             <a:noFill/>
@@ -9882,7 +9882,7 @@
             <a:avLst/>
           </a:prstGeom>
           <a:solidFill>
-            <a:srgbClr val="10243C"/>
+            <a:srgbClr val="FFFFFF"/>
           </a:solidFill>
           <a:ln>
             <a:solidFill>
@@ -9911,7 +9911,7 @@
             <a:pPr algn="ctr">
               <a:defRPr sz="1200" b="1">
                 <a:solidFill>
-                  <a:srgbClr val="55A7FF"/>
+                  <a:srgbClr val="176B87"/>
                 </a:solidFill>
               </a:defRPr>
             </a:pPr>
@@ -9926,7 +9926,7 @@
               </a:spcBef>
               <a:defRPr sz="1100">
                 <a:solidFill>
-                  <a:srgbClr val="F4F8FC"/>
+                  <a:srgbClr val="151515"/>
                 </a:solidFill>
               </a:defRPr>
             </a:pPr>
@@ -9951,7 +9951,7 @@
             <a:avLst/>
           </a:prstGeom>
           <a:solidFill>
-            <a:srgbClr val="55A7FF"/>
+            <a:srgbClr val="176B87"/>
           </a:solidFill>
           <a:ln>
             <a:noFill/>
@@ -9994,7 +9994,7 @@
             <a:avLst/>
           </a:prstGeom>
           <a:solidFill>
-            <a:srgbClr val="10243C"/>
+            <a:srgbClr val="FFFFFF"/>
           </a:solidFill>
           <a:ln>
             <a:solidFill>
@@ -10023,7 +10023,7 @@
             <a:pPr algn="ctr">
               <a:defRPr sz="1200" b="1">
                 <a:solidFill>
-                  <a:srgbClr val="FFBE55"/>
+                  <a:srgbClr val="D39A28"/>
                 </a:solidFill>
               </a:defRPr>
             </a:pPr>
@@ -10038,7 +10038,7 @@
               </a:spcBef>
               <a:defRPr sz="1500">
                 <a:solidFill>
-                  <a:srgbClr val="F4F8FC"/>
+                  <a:srgbClr val="151515"/>
                 </a:solidFill>
               </a:defRPr>
             </a:pPr>
@@ -10063,7 +10063,7 @@
             <a:avLst/>
           </a:prstGeom>
           <a:solidFill>
-            <a:srgbClr val="FFBE55"/>
+            <a:srgbClr val="D39A28"/>
           </a:solidFill>
           <a:ln>
             <a:noFill/>
@@ -10106,7 +10106,7 @@
             <a:avLst/>
           </a:prstGeom>
           <a:solidFill>
-            <a:srgbClr val="10243C"/>
+            <a:srgbClr val="FFFFFF"/>
           </a:solidFill>
           <a:ln>
             <a:solidFill>
@@ -10135,7 +10135,7 @@
             <a:pPr algn="ctr">
               <a:defRPr sz="1200" b="1">
                 <a:solidFill>
-                  <a:srgbClr val="46D6C8"/>
+                  <a:srgbClr val="E6462E"/>
                 </a:solidFill>
               </a:defRPr>
             </a:pPr>
@@ -10150,7 +10150,7 @@
               </a:spcBef>
               <a:defRPr sz="1500">
                 <a:solidFill>
-                  <a:srgbClr val="F4F8FC"/>
+                  <a:srgbClr val="151515"/>
                 </a:solidFill>
               </a:defRPr>
             </a:pPr>
@@ -10175,7 +10175,7 @@
             <a:avLst/>
           </a:prstGeom>
           <a:solidFill>
-            <a:srgbClr val="46D6C8"/>
+            <a:srgbClr val="E6462E"/>
           </a:solidFill>
           <a:ln>
             <a:noFill/>
@@ -10218,7 +10218,7 @@
             <a:avLst/>
           </a:prstGeom>
           <a:solidFill>
-            <a:srgbClr val="10243C"/>
+            <a:srgbClr val="FFFFFF"/>
           </a:solidFill>
           <a:ln>
             <a:solidFill>
@@ -10247,7 +10247,7 @@
             <a:pPr algn="ctr">
               <a:defRPr sz="1200" b="1">
                 <a:solidFill>
-                  <a:srgbClr val="55A7FF"/>
+                  <a:srgbClr val="176B87"/>
                 </a:solidFill>
               </a:defRPr>
             </a:pPr>
@@ -10262,7 +10262,7 @@
               </a:spcBef>
               <a:defRPr sz="1500">
                 <a:solidFill>
-                  <a:srgbClr val="F4F8FC"/>
+                  <a:srgbClr val="151515"/>
                 </a:solidFill>
               </a:defRPr>
             </a:pPr>
@@ -10287,7 +10287,7 @@
             <a:avLst/>
           </a:prstGeom>
           <a:solidFill>
-            <a:srgbClr val="55A7FF"/>
+            <a:srgbClr val="176B87"/>
           </a:solidFill>
           <a:ln>
             <a:noFill/>
@@ -10330,7 +10330,7 @@
             <a:avLst/>
           </a:prstGeom>
           <a:solidFill>
-            <a:srgbClr val="10243C"/>
+            <a:srgbClr val="FFFFFF"/>
           </a:solidFill>
           <a:ln>
             <a:solidFill>
@@ -10359,7 +10359,7 @@
             <a:pPr algn="ctr">
               <a:defRPr sz="1200" b="1">
                 <a:solidFill>
-                  <a:srgbClr val="FFBE55"/>
+                  <a:srgbClr val="D39A28"/>
                 </a:solidFill>
               </a:defRPr>
             </a:pPr>
@@ -10374,7 +10374,7 @@
               </a:spcBef>
               <a:defRPr sz="1100">
                 <a:solidFill>
-                  <a:srgbClr val="F4F8FC"/>
+                  <a:srgbClr val="151515"/>
                 </a:solidFill>
               </a:defRPr>
             </a:pPr>
@@ -10399,7 +10399,7 @@
             <a:avLst/>
           </a:prstGeom>
           <a:solidFill>
-            <a:srgbClr val="FFBE55"/>
+            <a:srgbClr val="D39A28"/>
           </a:solidFill>
           <a:ln>
             <a:noFill/>
@@ -10452,7 +10452,7 @@
             <a:pPr>
               <a:defRPr sz="900">
                 <a:solidFill>
-                  <a:srgbClr val="9AB2C8"/>
+                  <a:srgbClr val="62666A"/>
                 </a:solidFill>
               </a:defRPr>
             </a:pPr>
@@ -10476,7 +10476,7 @@
     <p:bg>
       <p:bgPr>
         <a:solidFill>
-          <a:srgbClr val="07111F"/>
+          <a:srgbClr val="F4F1E8"/>
         </a:solidFill>
         <a:effectLst/>
       </p:bgPr>
@@ -10503,7 +10503,7 @@
             <a:avLst/>
           </a:prstGeom>
           <a:solidFill>
-            <a:srgbClr val="46D6C8"/>
+            <a:srgbClr val="E6462E"/>
           </a:solidFill>
           <a:ln>
             <a:noFill/>
@@ -10556,7 +10556,7 @@
             <a:pPr>
               <a:defRPr sz="900" b="1">
                 <a:solidFill>
-                  <a:srgbClr val="46D6C8"/>
+                  <a:srgbClr val="E6462E"/>
                 </a:solidFill>
               </a:defRPr>
             </a:pPr>
@@ -10591,7 +10591,7 @@
             <a:pPr algn="l">
               <a:defRPr sz="2700" b="1">
                 <a:solidFill>
-                  <a:srgbClr val="F4F8FC"/>
+                  <a:srgbClr val="151515"/>
                 </a:solidFill>
               </a:defRPr>
             </a:pPr>
@@ -10616,7 +10616,7 @@
             <a:avLst/>
           </a:prstGeom>
           <a:solidFill>
-            <a:srgbClr val="10243C"/>
+            <a:srgbClr val="FFFFFF"/>
           </a:solidFill>
           <a:ln>
             <a:solidFill>
@@ -10645,7 +10645,7 @@
             <a:pPr algn="ctr">
               <a:defRPr sz="1200" b="1">
                 <a:solidFill>
-                  <a:srgbClr val="46D6C8"/>
+                  <a:srgbClr val="E6462E"/>
                 </a:solidFill>
               </a:defRPr>
             </a:pPr>
@@ -10660,7 +10660,7 @@
               </a:spcBef>
               <a:defRPr sz="1100">
                 <a:solidFill>
-                  <a:srgbClr val="F4F8FC"/>
+                  <a:srgbClr val="151515"/>
                 </a:solidFill>
               </a:defRPr>
             </a:pPr>
@@ -10685,7 +10685,7 @@
             <a:avLst/>
           </a:prstGeom>
           <a:solidFill>
-            <a:srgbClr val="46D6C8"/>
+            <a:srgbClr val="E6462E"/>
           </a:solidFill>
           <a:ln>
             <a:noFill/>
@@ -10728,7 +10728,7 @@
             <a:avLst/>
           </a:prstGeom>
           <a:solidFill>
-            <a:srgbClr val="10243C"/>
+            <a:srgbClr val="FFFFFF"/>
           </a:solidFill>
           <a:ln>
             <a:solidFill>
@@ -10757,7 +10757,7 @@
             <a:pPr algn="ctr">
               <a:defRPr sz="1200" b="1">
                 <a:solidFill>
-                  <a:srgbClr val="55A7FF"/>
+                  <a:srgbClr val="176B87"/>
                 </a:solidFill>
               </a:defRPr>
             </a:pPr>
@@ -10772,7 +10772,7 @@
               </a:spcBef>
               <a:defRPr sz="1100">
                 <a:solidFill>
-                  <a:srgbClr val="F4F8FC"/>
+                  <a:srgbClr val="151515"/>
                 </a:solidFill>
               </a:defRPr>
             </a:pPr>
@@ -10797,7 +10797,7 @@
             <a:avLst/>
           </a:prstGeom>
           <a:solidFill>
-            <a:srgbClr val="55A7FF"/>
+            <a:srgbClr val="176B87"/>
           </a:solidFill>
           <a:ln>
             <a:noFill/>
@@ -10840,7 +10840,7 @@
             <a:avLst/>
           </a:prstGeom>
           <a:solidFill>
-            <a:srgbClr val="10243C"/>
+            <a:srgbClr val="FFFFFF"/>
           </a:solidFill>
           <a:ln>
             <a:solidFill>
@@ -10869,7 +10869,7 @@
             <a:pPr algn="ctr">
               <a:defRPr sz="1200" b="1">
                 <a:solidFill>
-                  <a:srgbClr val="FFBE55"/>
+                  <a:srgbClr val="D39A28"/>
                 </a:solidFill>
               </a:defRPr>
             </a:pPr>
@@ -10884,7 +10884,7 @@
               </a:spcBef>
               <a:defRPr sz="1100">
                 <a:solidFill>
-                  <a:srgbClr val="F4F8FC"/>
+                  <a:srgbClr val="151515"/>
                 </a:solidFill>
               </a:defRPr>
             </a:pPr>
@@ -10909,7 +10909,7 @@
             <a:avLst/>
           </a:prstGeom>
           <a:solidFill>
-            <a:srgbClr val="FFBE55"/>
+            <a:srgbClr val="D39A28"/>
           </a:solidFill>
           <a:ln>
             <a:noFill/>
@@ -10952,7 +10952,7 @@
             <a:avLst/>
           </a:prstGeom>
           <a:solidFill>
-            <a:srgbClr val="10243C"/>
+            <a:srgbClr val="FFFFFF"/>
           </a:solidFill>
           <a:ln>
             <a:solidFill>
@@ -10981,7 +10981,7 @@
             <a:pPr algn="ctr">
               <a:defRPr sz="1200" b="1">
                 <a:solidFill>
-                  <a:srgbClr val="46D6C8"/>
+                  <a:srgbClr val="E6462E"/>
                 </a:solidFill>
               </a:defRPr>
             </a:pPr>
@@ -10996,7 +10996,7 @@
               </a:spcBef>
               <a:defRPr sz="1100">
                 <a:solidFill>
-                  <a:srgbClr val="F4F8FC"/>
+                  <a:srgbClr val="151515"/>
                 </a:solidFill>
               </a:defRPr>
             </a:pPr>
@@ -11021,7 +11021,7 @@
             <a:avLst/>
           </a:prstGeom>
           <a:solidFill>
-            <a:srgbClr val="46D6C8"/>
+            <a:srgbClr val="E6462E"/>
           </a:solidFill>
           <a:ln>
             <a:noFill/>
@@ -11074,7 +11074,7 @@
             <a:pPr>
               <a:defRPr sz="900">
                 <a:solidFill>
-                  <a:srgbClr val="9AB2C8"/>
+                  <a:srgbClr val="62666A"/>
                 </a:solidFill>
               </a:defRPr>
             </a:pPr>
@@ -11098,7 +11098,7 @@
     <p:bg>
       <p:bgPr>
         <a:solidFill>
-          <a:srgbClr val="07111F"/>
+          <a:srgbClr val="F4F1E8"/>
         </a:solidFill>
         <a:effectLst/>
       </p:bgPr>
@@ -11125,7 +11125,7 @@
             <a:avLst/>
           </a:prstGeom>
           <a:solidFill>
-            <a:srgbClr val="46D6C8"/>
+            <a:srgbClr val="E6462E"/>
           </a:solidFill>
           <a:ln>
             <a:noFill/>
@@ -11178,7 +11178,7 @@
             <a:pPr>
               <a:defRPr sz="900" b="1">
                 <a:solidFill>
-                  <a:srgbClr val="46D6C8"/>
+                  <a:srgbClr val="E6462E"/>
                 </a:solidFill>
               </a:defRPr>
             </a:pPr>
@@ -11213,7 +11213,7 @@
             <a:pPr algn="l">
               <a:defRPr sz="2700" b="1">
                 <a:solidFill>
-                  <a:srgbClr val="F4F8FC"/>
+                  <a:srgbClr val="151515"/>
                 </a:solidFill>
               </a:defRPr>
             </a:pPr>
@@ -11238,7 +11238,7 @@
             <a:avLst/>
           </a:prstGeom>
           <a:solidFill>
-            <a:srgbClr val="10243C"/>
+            <a:srgbClr val="FFFFFF"/>
           </a:solidFill>
           <a:ln>
             <a:solidFill>
@@ -11267,7 +11267,7 @@
             <a:pPr algn="ctr">
               <a:defRPr sz="1200" b="1">
                 <a:solidFill>
-                  <a:srgbClr val="46D6C8"/>
+                  <a:srgbClr val="E6462E"/>
                 </a:solidFill>
               </a:defRPr>
             </a:pPr>
@@ -11282,7 +11282,7 @@
               </a:spcBef>
               <a:defRPr sz="1100">
                 <a:solidFill>
-                  <a:srgbClr val="F4F8FC"/>
+                  <a:srgbClr val="151515"/>
                 </a:solidFill>
               </a:defRPr>
             </a:pPr>
@@ -11307,7 +11307,7 @@
             <a:avLst/>
           </a:prstGeom>
           <a:solidFill>
-            <a:srgbClr val="46D6C8"/>
+            <a:srgbClr val="E6462E"/>
           </a:solidFill>
           <a:ln>
             <a:noFill/>
@@ -11350,7 +11350,7 @@
             <a:avLst/>
           </a:prstGeom>
           <a:solidFill>
-            <a:srgbClr val="10243C"/>
+            <a:srgbClr val="FFFFFF"/>
           </a:solidFill>
           <a:ln>
             <a:solidFill>
@@ -11379,7 +11379,7 @@
             <a:pPr algn="ctr">
               <a:defRPr sz="1200" b="1">
                 <a:solidFill>
-                  <a:srgbClr val="55A7FF"/>
+                  <a:srgbClr val="176B87"/>
                 </a:solidFill>
               </a:defRPr>
             </a:pPr>
@@ -11394,7 +11394,7 @@
               </a:spcBef>
               <a:defRPr sz="1500">
                 <a:solidFill>
-                  <a:srgbClr val="F4F8FC"/>
+                  <a:srgbClr val="151515"/>
                 </a:solidFill>
               </a:defRPr>
             </a:pPr>
@@ -11419,7 +11419,7 @@
             <a:avLst/>
           </a:prstGeom>
           <a:solidFill>
-            <a:srgbClr val="55A7FF"/>
+            <a:srgbClr val="176B87"/>
           </a:solidFill>
           <a:ln>
             <a:noFill/>
@@ -11462,7 +11462,7 @@
             <a:avLst/>
           </a:prstGeom>
           <a:solidFill>
-            <a:srgbClr val="10243C"/>
+            <a:srgbClr val="FFFFFF"/>
           </a:solidFill>
           <a:ln>
             <a:solidFill>
@@ -11491,7 +11491,7 @@
             <a:pPr algn="ctr">
               <a:defRPr sz="1200" b="1">
                 <a:solidFill>
-                  <a:srgbClr val="FFBE55"/>
+                  <a:srgbClr val="D39A28"/>
                 </a:solidFill>
               </a:defRPr>
             </a:pPr>
@@ -11506,7 +11506,7 @@
               </a:spcBef>
               <a:defRPr sz="1100">
                 <a:solidFill>
-                  <a:srgbClr val="F4F8FC"/>
+                  <a:srgbClr val="151515"/>
                 </a:solidFill>
               </a:defRPr>
             </a:pPr>
@@ -11531,7 +11531,7 @@
             <a:avLst/>
           </a:prstGeom>
           <a:solidFill>
-            <a:srgbClr val="FFBE55"/>
+            <a:srgbClr val="D39A28"/>
           </a:solidFill>
           <a:ln>
             <a:noFill/>
@@ -11584,7 +11584,7 @@
             <a:pPr>
               <a:defRPr sz="900">
                 <a:solidFill>
-                  <a:srgbClr val="9AB2C8"/>
+                  <a:srgbClr val="62666A"/>
                 </a:solidFill>
               </a:defRPr>
             </a:pPr>
@@ -11608,7 +11608,7 @@
     <p:bg>
       <p:bgPr>
         <a:solidFill>
-          <a:srgbClr val="07111F"/>
+          <a:srgbClr val="F4F1E8"/>
         </a:solidFill>
         <a:effectLst/>
       </p:bgPr>
@@ -11635,7 +11635,7 @@
             <a:avLst/>
           </a:prstGeom>
           <a:solidFill>
-            <a:srgbClr val="46D6C8"/>
+            <a:srgbClr val="E6462E"/>
           </a:solidFill>
           <a:ln>
             <a:noFill/>
@@ -11688,7 +11688,7 @@
             <a:pPr>
               <a:defRPr sz="900" b="1">
                 <a:solidFill>
-                  <a:srgbClr val="46D6C8"/>
+                  <a:srgbClr val="E6462E"/>
                 </a:solidFill>
               </a:defRPr>
             </a:pPr>
@@ -11723,7 +11723,7 @@
             <a:pPr algn="l">
               <a:defRPr sz="2700" b="1">
                 <a:solidFill>
-                  <a:srgbClr val="F4F8FC"/>
+                  <a:srgbClr val="151515"/>
                 </a:solidFill>
               </a:defRPr>
             </a:pPr>
@@ -11748,11 +11748,11 @@
             <a:avLst/>
           </a:prstGeom>
           <a:solidFill>
-            <a:srgbClr val="163451"/>
+            <a:srgbClr val="E8E3D8"/>
           </a:solidFill>
           <a:ln>
             <a:solidFill>
-              <a:srgbClr val="55A7FF"/>
+              <a:srgbClr val="176B87"/>
             </a:solidFill>
           </a:ln>
         </p:spPr>
@@ -11777,7 +11777,7 @@
             <a:pPr algn="ctr">
               <a:defRPr sz="1100" b="1">
                 <a:solidFill>
-                  <a:srgbClr val="F4F8FC"/>
+                  <a:srgbClr val="151515"/>
                 </a:solidFill>
               </a:defRPr>
             </a:pPr>
@@ -11802,11 +11802,11 @@
             <a:avLst/>
           </a:prstGeom>
           <a:solidFill>
-            <a:srgbClr val="163451"/>
+            <a:srgbClr val="E8E3D8"/>
           </a:solidFill>
           <a:ln>
             <a:solidFill>
-              <a:srgbClr val="55A7FF"/>
+              <a:srgbClr val="176B87"/>
             </a:solidFill>
           </a:ln>
         </p:spPr>
@@ -11831,7 +11831,7 @@
             <a:pPr algn="ctr">
               <a:defRPr sz="1100" b="1">
                 <a:solidFill>
-                  <a:srgbClr val="F4F8FC"/>
+                  <a:srgbClr val="151515"/>
                 </a:solidFill>
               </a:defRPr>
             </a:pPr>
@@ -11866,7 +11866,7 @@
             <a:pPr algn="ctr">
               <a:defRPr sz="1100">
                 <a:solidFill>
-                  <a:srgbClr val="46D6C8"/>
+                  <a:srgbClr val="E6462E"/>
                 </a:solidFill>
               </a:defRPr>
             </a:pPr>
@@ -11891,11 +11891,11 @@
             <a:avLst/>
           </a:prstGeom>
           <a:solidFill>
-            <a:srgbClr val="163451"/>
+            <a:srgbClr val="E8E3D8"/>
           </a:solidFill>
           <a:ln>
             <a:solidFill>
-              <a:srgbClr val="55A7FF"/>
+              <a:srgbClr val="176B87"/>
             </a:solidFill>
           </a:ln>
         </p:spPr>
@@ -11920,7 +11920,7 @@
             <a:pPr algn="ctr">
               <a:defRPr sz="1100" b="1">
                 <a:solidFill>
-                  <a:srgbClr val="F4F8FC"/>
+                  <a:srgbClr val="151515"/>
                 </a:solidFill>
               </a:defRPr>
             </a:pPr>
@@ -11945,11 +11945,11 @@
             <a:avLst/>
           </a:prstGeom>
           <a:solidFill>
-            <a:srgbClr val="163451"/>
+            <a:srgbClr val="E8E3D8"/>
           </a:solidFill>
           <a:ln>
             <a:solidFill>
-              <a:srgbClr val="55A7FF"/>
+              <a:srgbClr val="176B87"/>
             </a:solidFill>
           </a:ln>
         </p:spPr>
@@ -11974,7 +11974,7 @@
             <a:pPr algn="ctr">
               <a:defRPr sz="1100" b="1">
                 <a:solidFill>
-                  <a:srgbClr val="F4F8FC"/>
+                  <a:srgbClr val="151515"/>
                 </a:solidFill>
               </a:defRPr>
             </a:pPr>
@@ -12009,7 +12009,7 @@
             <a:pPr algn="ctr">
               <a:defRPr sz="1100">
                 <a:solidFill>
-                  <a:srgbClr val="46D6C8"/>
+                  <a:srgbClr val="E6462E"/>
                 </a:solidFill>
               </a:defRPr>
             </a:pPr>
@@ -12034,11 +12034,11 @@
             <a:avLst/>
           </a:prstGeom>
           <a:solidFill>
-            <a:srgbClr val="163451"/>
+            <a:srgbClr val="E8E3D8"/>
           </a:solidFill>
           <a:ln>
             <a:solidFill>
-              <a:srgbClr val="55A7FF"/>
+              <a:srgbClr val="176B87"/>
             </a:solidFill>
           </a:ln>
         </p:spPr>
@@ -12063,7 +12063,7 @@
             <a:pPr algn="ctr">
               <a:defRPr sz="1100" b="1">
                 <a:solidFill>
-                  <a:srgbClr val="F4F8FC"/>
+                  <a:srgbClr val="151515"/>
                 </a:solidFill>
               </a:defRPr>
             </a:pPr>
@@ -12088,11 +12088,11 @@
             <a:avLst/>
           </a:prstGeom>
           <a:solidFill>
-            <a:srgbClr val="163451"/>
+            <a:srgbClr val="E8E3D8"/>
           </a:solidFill>
           <a:ln>
             <a:solidFill>
-              <a:srgbClr val="55A7FF"/>
+              <a:srgbClr val="176B87"/>
             </a:solidFill>
           </a:ln>
         </p:spPr>
@@ -12117,7 +12117,7 @@
             <a:pPr algn="ctr">
               <a:defRPr sz="1100" b="1">
                 <a:solidFill>
-                  <a:srgbClr val="F4F8FC"/>
+                  <a:srgbClr val="151515"/>
                 </a:solidFill>
               </a:defRPr>
             </a:pPr>
@@ -12152,7 +12152,7 @@
             <a:pPr algn="ctr">
               <a:defRPr sz="1100">
                 <a:solidFill>
-                  <a:srgbClr val="46D6C8"/>
+                  <a:srgbClr val="E6462E"/>
                 </a:solidFill>
               </a:defRPr>
             </a:pPr>
@@ -12177,11 +12177,11 @@
             <a:avLst/>
           </a:prstGeom>
           <a:solidFill>
-            <a:srgbClr val="163451"/>
+            <a:srgbClr val="E8E3D8"/>
           </a:solidFill>
           <a:ln>
             <a:solidFill>
-              <a:srgbClr val="55A7FF"/>
+              <a:srgbClr val="176B87"/>
             </a:solidFill>
           </a:ln>
         </p:spPr>
@@ -12206,7 +12206,7 @@
             <a:pPr algn="ctr">
               <a:defRPr sz="1100" b="1">
                 <a:solidFill>
-                  <a:srgbClr val="F4F8FC"/>
+                  <a:srgbClr val="151515"/>
                 </a:solidFill>
               </a:defRPr>
             </a:pPr>
@@ -12231,11 +12231,11 @@
             <a:avLst/>
           </a:prstGeom>
           <a:solidFill>
-            <a:srgbClr val="163451"/>
+            <a:srgbClr val="E8E3D8"/>
           </a:solidFill>
           <a:ln>
             <a:solidFill>
-              <a:srgbClr val="55A7FF"/>
+              <a:srgbClr val="176B87"/>
             </a:solidFill>
           </a:ln>
         </p:spPr>
@@ -12260,7 +12260,7 @@
             <a:pPr algn="ctr">
               <a:defRPr sz="1100" b="1">
                 <a:solidFill>
-                  <a:srgbClr val="F4F8FC"/>
+                  <a:srgbClr val="151515"/>
                 </a:solidFill>
               </a:defRPr>
             </a:pPr>
@@ -12295,7 +12295,7 @@
             <a:pPr algn="ctr">
               <a:defRPr sz="1100">
                 <a:solidFill>
-                  <a:srgbClr val="46D6C8"/>
+                  <a:srgbClr val="E6462E"/>
                 </a:solidFill>
               </a:defRPr>
             </a:pPr>
@@ -12320,11 +12320,11 @@
             <a:avLst/>
           </a:prstGeom>
           <a:solidFill>
-            <a:srgbClr val="163451"/>
+            <a:srgbClr val="E8E3D8"/>
           </a:solidFill>
           <a:ln>
             <a:solidFill>
-              <a:srgbClr val="55A7FF"/>
+              <a:srgbClr val="176B87"/>
             </a:solidFill>
           </a:ln>
         </p:spPr>
@@ -12349,7 +12349,7 @@
             <a:pPr algn="ctr">
               <a:defRPr sz="1100" b="1">
                 <a:solidFill>
-                  <a:srgbClr val="F4F8FC"/>
+                  <a:srgbClr val="151515"/>
                 </a:solidFill>
               </a:defRPr>
             </a:pPr>
@@ -12374,11 +12374,11 @@
             <a:avLst/>
           </a:prstGeom>
           <a:solidFill>
-            <a:srgbClr val="163451"/>
+            <a:srgbClr val="E8E3D8"/>
           </a:solidFill>
           <a:ln>
             <a:solidFill>
-              <a:srgbClr val="55A7FF"/>
+              <a:srgbClr val="176B87"/>
             </a:solidFill>
           </a:ln>
         </p:spPr>
@@ -12403,7 +12403,7 @@
             <a:pPr algn="ctr">
               <a:defRPr sz="1100" b="1">
                 <a:solidFill>
-                  <a:srgbClr val="F4F8FC"/>
+                  <a:srgbClr val="151515"/>
                 </a:solidFill>
               </a:defRPr>
             </a:pPr>
@@ -12438,7 +12438,7 @@
             <a:pPr algn="ctr">
               <a:defRPr sz="1100">
                 <a:solidFill>
-                  <a:srgbClr val="46D6C8"/>
+                  <a:srgbClr val="E6462E"/>
                 </a:solidFill>
               </a:defRPr>
             </a:pPr>
@@ -12463,11 +12463,11 @@
             <a:avLst/>
           </a:prstGeom>
           <a:solidFill>
-            <a:srgbClr val="163451"/>
+            <a:srgbClr val="E8E3D8"/>
           </a:solidFill>
           <a:ln>
             <a:solidFill>
-              <a:srgbClr val="55A7FF"/>
+              <a:srgbClr val="176B87"/>
             </a:solidFill>
           </a:ln>
         </p:spPr>
@@ -12492,7 +12492,7 @@
             <a:pPr algn="ctr">
               <a:defRPr sz="1100" b="1">
                 <a:solidFill>
-                  <a:srgbClr val="F4F8FC"/>
+                  <a:srgbClr val="151515"/>
                 </a:solidFill>
               </a:defRPr>
             </a:pPr>
@@ -12517,11 +12517,11 @@
             <a:avLst/>
           </a:prstGeom>
           <a:solidFill>
-            <a:srgbClr val="163451"/>
+            <a:srgbClr val="E8E3D8"/>
           </a:solidFill>
           <a:ln>
             <a:solidFill>
-              <a:srgbClr val="55A7FF"/>
+              <a:srgbClr val="176B87"/>
             </a:solidFill>
           </a:ln>
         </p:spPr>
@@ -12546,7 +12546,7 @@
             <a:pPr algn="ctr">
               <a:defRPr sz="1100" b="1">
                 <a:solidFill>
-                  <a:srgbClr val="F4F8FC"/>
+                  <a:srgbClr val="151515"/>
                 </a:solidFill>
               </a:defRPr>
             </a:pPr>
@@ -12581,7 +12581,7 @@
             <a:pPr algn="ctr">
               <a:defRPr sz="1100">
                 <a:solidFill>
-                  <a:srgbClr val="46D6C8"/>
+                  <a:srgbClr val="E6462E"/>
                 </a:solidFill>
               </a:defRPr>
             </a:pPr>
@@ -12606,11 +12606,11 @@
             <a:avLst/>
           </a:prstGeom>
           <a:solidFill>
-            <a:srgbClr val="163451"/>
+            <a:srgbClr val="E8E3D8"/>
           </a:solidFill>
           <a:ln>
             <a:solidFill>
-              <a:srgbClr val="55A7FF"/>
+              <a:srgbClr val="176B87"/>
             </a:solidFill>
           </a:ln>
         </p:spPr>
@@ -12635,7 +12635,7 @@
             <a:pPr algn="ctr">
               <a:defRPr sz="1100" b="1">
                 <a:solidFill>
-                  <a:srgbClr val="F4F8FC"/>
+                  <a:srgbClr val="151515"/>
                 </a:solidFill>
               </a:defRPr>
             </a:pPr>
@@ -12660,11 +12660,11 @@
             <a:avLst/>
           </a:prstGeom>
           <a:solidFill>
-            <a:srgbClr val="163451"/>
+            <a:srgbClr val="E8E3D8"/>
           </a:solidFill>
           <a:ln>
             <a:solidFill>
-              <a:srgbClr val="55A7FF"/>
+              <a:srgbClr val="176B87"/>
             </a:solidFill>
           </a:ln>
         </p:spPr>
@@ -12689,7 +12689,7 @@
             <a:pPr algn="ctr">
               <a:defRPr sz="1100" b="1">
                 <a:solidFill>
-                  <a:srgbClr val="F4F8FC"/>
+                  <a:srgbClr val="151515"/>
                 </a:solidFill>
               </a:defRPr>
             </a:pPr>
@@ -12724,7 +12724,7 @@
             <a:pPr algn="ctr">
               <a:defRPr sz="1100">
                 <a:solidFill>
-                  <a:srgbClr val="46D6C8"/>
+                  <a:srgbClr val="E6462E"/>
                 </a:solidFill>
               </a:defRPr>
             </a:pPr>
@@ -12749,11 +12749,11 @@
             <a:avLst/>
           </a:prstGeom>
           <a:solidFill>
-            <a:srgbClr val="163451"/>
+            <a:srgbClr val="E8E3D8"/>
           </a:solidFill>
           <a:ln>
             <a:solidFill>
-              <a:srgbClr val="55A7FF"/>
+              <a:srgbClr val="176B87"/>
             </a:solidFill>
           </a:ln>
         </p:spPr>
@@ -12778,7 +12778,7 @@
             <a:pPr algn="ctr">
               <a:defRPr sz="1100" b="1">
                 <a:solidFill>
-                  <a:srgbClr val="F4F8FC"/>
+                  <a:srgbClr val="151515"/>
                 </a:solidFill>
               </a:defRPr>
             </a:pPr>
@@ -12803,11 +12803,11 @@
             <a:avLst/>
           </a:prstGeom>
           <a:solidFill>
-            <a:srgbClr val="163451"/>
+            <a:srgbClr val="E8E3D8"/>
           </a:solidFill>
           <a:ln>
             <a:solidFill>
-              <a:srgbClr val="55A7FF"/>
+              <a:srgbClr val="176B87"/>
             </a:solidFill>
           </a:ln>
         </p:spPr>
@@ -12832,7 +12832,7 @@
             <a:pPr algn="ctr">
               <a:defRPr sz="1100" b="1">
                 <a:solidFill>
-                  <a:srgbClr val="F4F8FC"/>
+                  <a:srgbClr val="151515"/>
                 </a:solidFill>
               </a:defRPr>
             </a:pPr>
@@ -12867,7 +12867,7 @@
             <a:pPr algn="ctr">
               <a:defRPr sz="1100">
                 <a:solidFill>
-                  <a:srgbClr val="46D6C8"/>
+                  <a:srgbClr val="E6462E"/>
                 </a:solidFill>
               </a:defRPr>
             </a:pPr>
@@ -12892,11 +12892,11 @@
             <a:avLst/>
           </a:prstGeom>
           <a:solidFill>
-            <a:srgbClr val="163451"/>
+            <a:srgbClr val="E8E3D8"/>
           </a:solidFill>
           <a:ln>
             <a:solidFill>
-              <a:srgbClr val="55A7FF"/>
+              <a:srgbClr val="176B87"/>
             </a:solidFill>
           </a:ln>
         </p:spPr>
@@ -12921,7 +12921,7 @@
             <a:pPr algn="ctr">
               <a:defRPr sz="1100" b="1">
                 <a:solidFill>
-                  <a:srgbClr val="F4F8FC"/>
+                  <a:srgbClr val="151515"/>
                 </a:solidFill>
               </a:defRPr>
             </a:pPr>
@@ -12946,11 +12946,11 @@
             <a:avLst/>
           </a:prstGeom>
           <a:solidFill>
-            <a:srgbClr val="163451"/>
+            <a:srgbClr val="E8E3D8"/>
           </a:solidFill>
           <a:ln>
             <a:solidFill>
-              <a:srgbClr val="55A7FF"/>
+              <a:srgbClr val="176B87"/>
             </a:solidFill>
           </a:ln>
         </p:spPr>
@@ -12975,7 +12975,7 @@
             <a:pPr algn="ctr">
               <a:defRPr sz="1100" b="1">
                 <a:solidFill>
-                  <a:srgbClr val="F4F8FC"/>
+                  <a:srgbClr val="151515"/>
                 </a:solidFill>
               </a:defRPr>
             </a:pPr>
@@ -13010,7 +13010,7 @@
             <a:pPr algn="ctr">
               <a:defRPr sz="1100">
                 <a:solidFill>
-                  <a:srgbClr val="46D6C8"/>
+                  <a:srgbClr val="E6462E"/>
                 </a:solidFill>
               </a:defRPr>
             </a:pPr>
@@ -13035,11 +13035,11 @@
             <a:avLst/>
           </a:prstGeom>
           <a:solidFill>
-            <a:srgbClr val="163451"/>
+            <a:srgbClr val="E8E3D8"/>
           </a:solidFill>
           <a:ln>
             <a:solidFill>
-              <a:srgbClr val="55A7FF"/>
+              <a:srgbClr val="176B87"/>
             </a:solidFill>
           </a:ln>
         </p:spPr>
@@ -13064,7 +13064,7 @@
             <a:pPr algn="ctr">
               <a:defRPr sz="1100" b="1">
                 <a:solidFill>
-                  <a:srgbClr val="F4F8FC"/>
+                  <a:srgbClr val="151515"/>
                 </a:solidFill>
               </a:defRPr>
             </a:pPr>
@@ -13089,11 +13089,11 @@
             <a:avLst/>
           </a:prstGeom>
           <a:solidFill>
-            <a:srgbClr val="163451"/>
+            <a:srgbClr val="E8E3D8"/>
           </a:solidFill>
           <a:ln>
             <a:solidFill>
-              <a:srgbClr val="55A7FF"/>
+              <a:srgbClr val="176B87"/>
             </a:solidFill>
           </a:ln>
         </p:spPr>
@@ -13118,7 +13118,7 @@
             <a:pPr algn="ctr">
               <a:defRPr sz="1100" b="1">
                 <a:solidFill>
-                  <a:srgbClr val="F4F8FC"/>
+                  <a:srgbClr val="151515"/>
                 </a:solidFill>
               </a:defRPr>
             </a:pPr>
@@ -13153,7 +13153,7 @@
             <a:pPr algn="ctr">
               <a:defRPr sz="1100">
                 <a:solidFill>
-                  <a:srgbClr val="46D6C8"/>
+                  <a:srgbClr val="E6462E"/>
                 </a:solidFill>
               </a:defRPr>
             </a:pPr>
@@ -13178,11 +13178,11 @@
             <a:avLst/>
           </a:prstGeom>
           <a:solidFill>
-            <a:srgbClr val="163451"/>
+            <a:srgbClr val="E8E3D8"/>
           </a:solidFill>
           <a:ln>
             <a:solidFill>
-              <a:srgbClr val="55A7FF"/>
+              <a:srgbClr val="176B87"/>
             </a:solidFill>
           </a:ln>
         </p:spPr>
@@ -13207,7 +13207,7 @@
             <a:pPr algn="ctr">
               <a:defRPr sz="1100" b="1">
                 <a:solidFill>
-                  <a:srgbClr val="F4F8FC"/>
+                  <a:srgbClr val="151515"/>
                 </a:solidFill>
               </a:defRPr>
             </a:pPr>
@@ -13232,11 +13232,11 @@
             <a:avLst/>
           </a:prstGeom>
           <a:solidFill>
-            <a:srgbClr val="163451"/>
+            <a:srgbClr val="E8E3D8"/>
           </a:solidFill>
           <a:ln>
             <a:solidFill>
-              <a:srgbClr val="55A7FF"/>
+              <a:srgbClr val="176B87"/>
             </a:solidFill>
           </a:ln>
         </p:spPr>
@@ -13261,7 +13261,7 @@
             <a:pPr algn="ctr">
               <a:defRPr sz="1100" b="1">
                 <a:solidFill>
-                  <a:srgbClr val="F4F8FC"/>
+                  <a:srgbClr val="151515"/>
                 </a:solidFill>
               </a:defRPr>
             </a:pPr>
@@ -13296,7 +13296,7 @@
             <a:pPr algn="ctr">
               <a:defRPr sz="1100">
                 <a:solidFill>
-                  <a:srgbClr val="46D6C8"/>
+                  <a:srgbClr val="E6462E"/>
                 </a:solidFill>
               </a:defRPr>
             </a:pPr>
@@ -13321,11 +13321,11 @@
             <a:avLst/>
           </a:prstGeom>
           <a:solidFill>
-            <a:srgbClr val="163451"/>
+            <a:srgbClr val="E8E3D8"/>
           </a:solidFill>
           <a:ln>
             <a:solidFill>
-              <a:srgbClr val="55A7FF"/>
+              <a:srgbClr val="176B87"/>
             </a:solidFill>
           </a:ln>
         </p:spPr>
@@ -13350,7 +13350,7 @@
             <a:pPr algn="ctr">
               <a:defRPr sz="1100" b="1">
                 <a:solidFill>
-                  <a:srgbClr val="F4F8FC"/>
+                  <a:srgbClr val="151515"/>
                 </a:solidFill>
               </a:defRPr>
             </a:pPr>
@@ -13375,11 +13375,11 @@
             <a:avLst/>
           </a:prstGeom>
           <a:solidFill>
-            <a:srgbClr val="163451"/>
+            <a:srgbClr val="E8E3D8"/>
           </a:solidFill>
           <a:ln>
             <a:solidFill>
-              <a:srgbClr val="55A7FF"/>
+              <a:srgbClr val="176B87"/>
             </a:solidFill>
           </a:ln>
         </p:spPr>
@@ -13404,7 +13404,7 @@
             <a:pPr algn="ctr">
               <a:defRPr sz="1100" b="1">
                 <a:solidFill>
-                  <a:srgbClr val="F4F8FC"/>
+                  <a:srgbClr val="151515"/>
                 </a:solidFill>
               </a:defRPr>
             </a:pPr>
@@ -13439,7 +13439,7 @@
             <a:pPr algn="ctr">
               <a:defRPr sz="1100">
                 <a:solidFill>
-                  <a:srgbClr val="46D6C8"/>
+                  <a:srgbClr val="E6462E"/>
                 </a:solidFill>
               </a:defRPr>
             </a:pPr>
@@ -13474,7 +13474,7 @@
             <a:pPr>
               <a:defRPr sz="900">
                 <a:solidFill>
-                  <a:srgbClr val="9AB2C8"/>
+                  <a:srgbClr val="62666A"/>
                 </a:solidFill>
               </a:defRPr>
             </a:pPr>
@@ -13498,7 +13498,7 @@
     <p:bg>
       <p:bgPr>
         <a:solidFill>
-          <a:srgbClr val="07111F"/>
+          <a:srgbClr val="F4F1E8"/>
         </a:solidFill>
         <a:effectLst/>
       </p:bgPr>
@@ -13525,7 +13525,7 @@
             <a:avLst/>
           </a:prstGeom>
           <a:solidFill>
-            <a:srgbClr val="46D6C8"/>
+            <a:srgbClr val="E6462E"/>
           </a:solidFill>
           <a:ln>
             <a:noFill/>
@@ -13578,7 +13578,7 @@
             <a:pPr>
               <a:defRPr sz="900" b="1">
                 <a:solidFill>
-                  <a:srgbClr val="46D6C8"/>
+                  <a:srgbClr val="E6462E"/>
                 </a:solidFill>
               </a:defRPr>
             </a:pPr>
@@ -13613,7 +13613,7 @@
             <a:pPr algn="l">
               <a:defRPr sz="2700" b="1">
                 <a:solidFill>
-                  <a:srgbClr val="F4F8FC"/>
+                  <a:srgbClr val="151515"/>
                 </a:solidFill>
               </a:defRPr>
             </a:pPr>
@@ -13638,7 +13638,7 @@
             <a:avLst/>
           </a:prstGeom>
           <a:solidFill>
-            <a:srgbClr val="10243C"/>
+            <a:srgbClr val="FFFFFF"/>
           </a:solidFill>
           <a:ln>
             <a:solidFill>
@@ -13667,7 +13667,7 @@
             <a:pPr algn="ctr">
               <a:defRPr sz="1200" b="1">
                 <a:solidFill>
-                  <a:srgbClr val="46D6C8"/>
+                  <a:srgbClr val="E6462E"/>
                 </a:solidFill>
               </a:defRPr>
             </a:pPr>
@@ -13682,7 +13682,7 @@
               </a:spcBef>
               <a:defRPr sz="1500">
                 <a:solidFill>
-                  <a:srgbClr val="F4F8FC"/>
+                  <a:srgbClr val="151515"/>
                 </a:solidFill>
               </a:defRPr>
             </a:pPr>
@@ -13707,7 +13707,7 @@
             <a:avLst/>
           </a:prstGeom>
           <a:solidFill>
-            <a:srgbClr val="46D6C8"/>
+            <a:srgbClr val="E6462E"/>
           </a:solidFill>
           <a:ln>
             <a:noFill/>
@@ -13750,7 +13750,7 @@
             <a:avLst/>
           </a:prstGeom>
           <a:solidFill>
-            <a:srgbClr val="10243C"/>
+            <a:srgbClr val="FFFFFF"/>
           </a:solidFill>
           <a:ln>
             <a:solidFill>
@@ -13779,7 +13779,7 @@
             <a:pPr algn="ctr">
               <a:defRPr sz="1200" b="1">
                 <a:solidFill>
-                  <a:srgbClr val="55A7FF"/>
+                  <a:srgbClr val="176B87"/>
                 </a:solidFill>
               </a:defRPr>
             </a:pPr>
@@ -13794,7 +13794,7 @@
               </a:spcBef>
               <a:defRPr sz="1500">
                 <a:solidFill>
-                  <a:srgbClr val="F4F8FC"/>
+                  <a:srgbClr val="151515"/>
                 </a:solidFill>
               </a:defRPr>
             </a:pPr>
@@ -13819,7 +13819,7 @@
             <a:avLst/>
           </a:prstGeom>
           <a:solidFill>
-            <a:srgbClr val="55A7FF"/>
+            <a:srgbClr val="176B87"/>
           </a:solidFill>
           <a:ln>
             <a:noFill/>
@@ -13862,7 +13862,7 @@
             <a:avLst/>
           </a:prstGeom>
           <a:solidFill>
-            <a:srgbClr val="10243C"/>
+            <a:srgbClr val="FFFFFF"/>
           </a:solidFill>
           <a:ln>
             <a:solidFill>
@@ -13891,7 +13891,7 @@
             <a:pPr algn="ctr">
               <a:defRPr sz="1200" b="1">
                 <a:solidFill>
-                  <a:srgbClr val="FFBE55"/>
+                  <a:srgbClr val="D39A28"/>
                 </a:solidFill>
               </a:defRPr>
             </a:pPr>
@@ -13906,7 +13906,7 @@
               </a:spcBef>
               <a:defRPr sz="1500">
                 <a:solidFill>
-                  <a:srgbClr val="F4F8FC"/>
+                  <a:srgbClr val="151515"/>
                 </a:solidFill>
               </a:defRPr>
             </a:pPr>
@@ -13931,7 +13931,7 @@
             <a:avLst/>
           </a:prstGeom>
           <a:solidFill>
-            <a:srgbClr val="FFBE55"/>
+            <a:srgbClr val="D39A28"/>
           </a:solidFill>
           <a:ln>
             <a:noFill/>
@@ -13974,7 +13974,7 @@
             <a:avLst/>
           </a:prstGeom>
           <a:solidFill>
-            <a:srgbClr val="10243C"/>
+            <a:srgbClr val="FFFFFF"/>
           </a:solidFill>
           <a:ln>
             <a:solidFill>
@@ -14003,7 +14003,7 @@
             <a:pPr algn="ctr">
               <a:defRPr sz="1200" b="1">
                 <a:solidFill>
-                  <a:srgbClr val="46D6C8"/>
+                  <a:srgbClr val="E6462E"/>
                 </a:solidFill>
               </a:defRPr>
             </a:pPr>
@@ -14018,7 +14018,7 @@
               </a:spcBef>
               <a:defRPr sz="1500">
                 <a:solidFill>
-                  <a:srgbClr val="F4F8FC"/>
+                  <a:srgbClr val="151515"/>
                 </a:solidFill>
               </a:defRPr>
             </a:pPr>
@@ -14043,7 +14043,7 @@
             <a:avLst/>
           </a:prstGeom>
           <a:solidFill>
-            <a:srgbClr val="46D6C8"/>
+            <a:srgbClr val="E6462E"/>
           </a:solidFill>
           <a:ln>
             <a:noFill/>
@@ -14086,7 +14086,7 @@
             <a:avLst/>
           </a:prstGeom>
           <a:solidFill>
-            <a:srgbClr val="10243C"/>
+            <a:srgbClr val="FFFFFF"/>
           </a:solidFill>
           <a:ln>
             <a:solidFill>
@@ -14115,7 +14115,7 @@
             <a:pPr algn="ctr">
               <a:defRPr sz="1200" b="1">
                 <a:solidFill>
-                  <a:srgbClr val="55A7FF"/>
+                  <a:srgbClr val="176B87"/>
                 </a:solidFill>
               </a:defRPr>
             </a:pPr>
@@ -14130,7 +14130,7 @@
               </a:spcBef>
               <a:defRPr sz="1500">
                 <a:solidFill>
-                  <a:srgbClr val="F4F8FC"/>
+                  <a:srgbClr val="151515"/>
                 </a:solidFill>
               </a:defRPr>
             </a:pPr>
@@ -14155,7 +14155,7 @@
             <a:avLst/>
           </a:prstGeom>
           <a:solidFill>
-            <a:srgbClr val="55A7FF"/>
+            <a:srgbClr val="176B87"/>
           </a:solidFill>
           <a:ln>
             <a:noFill/>
@@ -14198,7 +14198,7 @@
             <a:avLst/>
           </a:prstGeom>
           <a:solidFill>
-            <a:srgbClr val="10243C"/>
+            <a:srgbClr val="FFFFFF"/>
           </a:solidFill>
           <a:ln>
             <a:solidFill>
@@ -14227,7 +14227,7 @@
             <a:pPr algn="ctr">
               <a:defRPr sz="1200" b="1">
                 <a:solidFill>
-                  <a:srgbClr val="FFBE55"/>
+                  <a:srgbClr val="D39A28"/>
                 </a:solidFill>
               </a:defRPr>
             </a:pPr>
@@ -14242,7 +14242,7 @@
               </a:spcBef>
               <a:defRPr sz="1500">
                 <a:solidFill>
-                  <a:srgbClr val="F4F8FC"/>
+                  <a:srgbClr val="151515"/>
                 </a:solidFill>
               </a:defRPr>
             </a:pPr>
@@ -14267,7 +14267,7 @@
             <a:avLst/>
           </a:prstGeom>
           <a:solidFill>
-            <a:srgbClr val="FFBE55"/>
+            <a:srgbClr val="D39A28"/>
           </a:solidFill>
           <a:ln>
             <a:noFill/>
@@ -14320,7 +14320,7 @@
             <a:pPr>
               <a:defRPr sz="900">
                 <a:solidFill>
-                  <a:srgbClr val="9AB2C8"/>
+                  <a:srgbClr val="62666A"/>
                 </a:solidFill>
               </a:defRPr>
             </a:pPr>
@@ -14344,7 +14344,7 @@
     <p:bg>
       <p:bgPr>
         <a:solidFill>
-          <a:srgbClr val="07111F"/>
+          <a:srgbClr val="F4F1E8"/>
         </a:solidFill>
         <a:effectLst/>
       </p:bgPr>
@@ -14371,7 +14371,7 @@
             <a:avLst/>
           </a:prstGeom>
           <a:solidFill>
-            <a:srgbClr val="46D6C8"/>
+            <a:srgbClr val="E6462E"/>
           </a:solidFill>
           <a:ln>
             <a:noFill/>
@@ -14424,7 +14424,7 @@
             <a:pPr>
               <a:defRPr sz="900" b="1">
                 <a:solidFill>
-                  <a:srgbClr val="46D6C8"/>
+                  <a:srgbClr val="E6462E"/>
                 </a:solidFill>
               </a:defRPr>
             </a:pPr>
@@ -14459,7 +14459,7 @@
             <a:pPr algn="l">
               <a:defRPr sz="2700" b="1">
                 <a:solidFill>
-                  <a:srgbClr val="F4F8FC"/>
+                  <a:srgbClr val="151515"/>
                 </a:solidFill>
               </a:defRPr>
             </a:pPr>
@@ -14484,7 +14484,7 @@
             <a:avLst/>
           </a:prstGeom>
           <a:solidFill>
-            <a:srgbClr val="10243C"/>
+            <a:srgbClr val="FFFFFF"/>
           </a:solidFill>
           <a:ln>
             <a:solidFill>
@@ -14513,7 +14513,7 @@
             <a:pPr algn="ctr">
               <a:defRPr sz="3000" b="1">
                 <a:solidFill>
-                  <a:srgbClr val="46D6C8"/>
+                  <a:srgbClr val="E6462E"/>
                 </a:solidFill>
               </a:defRPr>
             </a:pPr>
@@ -14528,7 +14528,7 @@
               </a:spcBef>
               <a:defRPr sz="1200">
                 <a:solidFill>
-                  <a:srgbClr val="9AB2C8"/>
+                  <a:srgbClr val="62666A"/>
                 </a:solidFill>
               </a:defRPr>
             </a:pPr>
@@ -14553,7 +14553,7 @@
             <a:avLst/>
           </a:prstGeom>
           <a:solidFill>
-            <a:srgbClr val="10243C"/>
+            <a:srgbClr val="FFFFFF"/>
           </a:solidFill>
           <a:ln>
             <a:solidFill>
@@ -14582,7 +14582,7 @@
             <a:pPr algn="ctr">
               <a:defRPr sz="3000" b="1">
                 <a:solidFill>
-                  <a:srgbClr val="46D6C8"/>
+                  <a:srgbClr val="E6462E"/>
                 </a:solidFill>
               </a:defRPr>
             </a:pPr>
@@ -14597,7 +14597,7 @@
               </a:spcBef>
               <a:defRPr sz="1200">
                 <a:solidFill>
-                  <a:srgbClr val="9AB2C8"/>
+                  <a:srgbClr val="62666A"/>
                 </a:solidFill>
               </a:defRPr>
             </a:pPr>
@@ -14622,7 +14622,7 @@
             <a:avLst/>
           </a:prstGeom>
           <a:solidFill>
-            <a:srgbClr val="10243C"/>
+            <a:srgbClr val="FFFFFF"/>
           </a:solidFill>
           <a:ln>
             <a:solidFill>
@@ -14651,7 +14651,7 @@
             <a:pPr algn="ctr">
               <a:defRPr sz="3000" b="1">
                 <a:solidFill>
-                  <a:srgbClr val="46D6C8"/>
+                  <a:srgbClr val="E6462E"/>
                 </a:solidFill>
               </a:defRPr>
             </a:pPr>
@@ -14666,7 +14666,7 @@
               </a:spcBef>
               <a:defRPr sz="1200">
                 <a:solidFill>
-                  <a:srgbClr val="9AB2C8"/>
+                  <a:srgbClr val="62666A"/>
                 </a:solidFill>
               </a:defRPr>
             </a:pPr>
@@ -14691,7 +14691,7 @@
             <a:avLst/>
           </a:prstGeom>
           <a:solidFill>
-            <a:srgbClr val="10243C"/>
+            <a:srgbClr val="FFFFFF"/>
           </a:solidFill>
           <a:ln>
             <a:solidFill>
@@ -14720,7 +14720,7 @@
             <a:pPr algn="ctr">
               <a:defRPr sz="3000" b="1">
                 <a:solidFill>
-                  <a:srgbClr val="46D6C8"/>
+                  <a:srgbClr val="E6462E"/>
                 </a:solidFill>
               </a:defRPr>
             </a:pPr>
@@ -14735,7 +14735,7 @@
               </a:spcBef>
               <a:defRPr sz="1200">
                 <a:solidFill>
-                  <a:srgbClr val="9AB2C8"/>
+                  <a:srgbClr val="62666A"/>
                 </a:solidFill>
               </a:defRPr>
             </a:pPr>
@@ -14760,7 +14760,7 @@
             <a:avLst/>
           </a:prstGeom>
           <a:solidFill>
-            <a:srgbClr val="10243C"/>
+            <a:srgbClr val="FFFFFF"/>
           </a:solidFill>
           <a:ln>
             <a:solidFill>
@@ -14789,7 +14789,7 @@
             <a:pPr algn="ctr">
               <a:defRPr sz="3000" b="1">
                 <a:solidFill>
-                  <a:srgbClr val="46D6C8"/>
+                  <a:srgbClr val="E6462E"/>
                 </a:solidFill>
               </a:defRPr>
             </a:pPr>
@@ -14804,7 +14804,7 @@
               </a:spcBef>
               <a:defRPr sz="1200">
                 <a:solidFill>
-                  <a:srgbClr val="9AB2C8"/>
+                  <a:srgbClr val="62666A"/>
                 </a:solidFill>
               </a:defRPr>
             </a:pPr>
@@ -14829,7 +14829,7 @@
             <a:avLst/>
           </a:prstGeom>
           <a:solidFill>
-            <a:srgbClr val="10243C"/>
+            <a:srgbClr val="FFFFFF"/>
           </a:solidFill>
           <a:ln>
             <a:solidFill>
@@ -14858,7 +14858,7 @@
             <a:pPr algn="ctr">
               <a:defRPr sz="3000" b="1">
                 <a:solidFill>
-                  <a:srgbClr val="46D6C8"/>
+                  <a:srgbClr val="E6462E"/>
                 </a:solidFill>
               </a:defRPr>
             </a:pPr>
@@ -14873,7 +14873,7 @@
               </a:spcBef>
               <a:defRPr sz="1200">
                 <a:solidFill>
-                  <a:srgbClr val="9AB2C8"/>
+                  <a:srgbClr val="62666A"/>
                 </a:solidFill>
               </a:defRPr>
             </a:pPr>
@@ -14908,7 +14908,7 @@
             <a:pPr>
               <a:defRPr sz="900">
                 <a:solidFill>
-                  <a:srgbClr val="9AB2C8"/>
+                  <a:srgbClr val="62666A"/>
                 </a:solidFill>
               </a:defRPr>
             </a:pPr>
@@ -14932,7 +14932,7 @@
     <p:bg>
       <p:bgPr>
         <a:solidFill>
-          <a:srgbClr val="07111F"/>
+          <a:srgbClr val="F4F1E8"/>
         </a:solidFill>
         <a:effectLst/>
       </p:bgPr>
@@ -14959,7 +14959,7 @@
             <a:avLst/>
           </a:prstGeom>
           <a:solidFill>
-            <a:srgbClr val="46D6C8"/>
+            <a:srgbClr val="E6462E"/>
           </a:solidFill>
           <a:ln>
             <a:noFill/>
@@ -15012,7 +15012,7 @@
             <a:pPr>
               <a:defRPr sz="900" b="1">
                 <a:solidFill>
-                  <a:srgbClr val="46D6C8"/>
+                  <a:srgbClr val="E6462E"/>
                 </a:solidFill>
               </a:defRPr>
             </a:pPr>
@@ -15047,7 +15047,7 @@
             <a:pPr algn="l">
               <a:defRPr sz="2700" b="1">
                 <a:solidFill>
-                  <a:srgbClr val="F4F8FC"/>
+                  <a:srgbClr val="151515"/>
                 </a:solidFill>
               </a:defRPr>
             </a:pPr>
@@ -15072,7 +15072,7 @@
             <a:avLst/>
           </a:prstGeom>
           <a:solidFill>
-            <a:srgbClr val="10243C"/>
+            <a:srgbClr val="FFFFFF"/>
           </a:solidFill>
           <a:ln>
             <a:solidFill>
@@ -15101,7 +15101,7 @@
             <a:pPr algn="ctr">
               <a:defRPr sz="1200" b="1">
                 <a:solidFill>
-                  <a:srgbClr val="46D6C8"/>
+                  <a:srgbClr val="E6462E"/>
                 </a:solidFill>
               </a:defRPr>
             </a:pPr>
@@ -15116,7 +15116,7 @@
               </a:spcBef>
               <a:defRPr sz="1500">
                 <a:solidFill>
-                  <a:srgbClr val="F4F8FC"/>
+                  <a:srgbClr val="151515"/>
                 </a:solidFill>
               </a:defRPr>
             </a:pPr>
@@ -15141,7 +15141,7 @@
             <a:avLst/>
           </a:prstGeom>
           <a:solidFill>
-            <a:srgbClr val="46D6C8"/>
+            <a:srgbClr val="E6462E"/>
           </a:solidFill>
           <a:ln>
             <a:noFill/>
@@ -15184,7 +15184,7 @@
             <a:avLst/>
           </a:prstGeom>
           <a:solidFill>
-            <a:srgbClr val="10243C"/>
+            <a:srgbClr val="FFFFFF"/>
           </a:solidFill>
           <a:ln>
             <a:solidFill>
@@ -15213,7 +15213,7 @@
             <a:pPr algn="ctr">
               <a:defRPr sz="1200" b="1">
                 <a:solidFill>
-                  <a:srgbClr val="55A7FF"/>
+                  <a:srgbClr val="176B87"/>
                 </a:solidFill>
               </a:defRPr>
             </a:pPr>
@@ -15228,7 +15228,7 @@
               </a:spcBef>
               <a:defRPr sz="1500">
                 <a:solidFill>
-                  <a:srgbClr val="F4F8FC"/>
+                  <a:srgbClr val="151515"/>
                 </a:solidFill>
               </a:defRPr>
             </a:pPr>
@@ -15253,7 +15253,7 @@
             <a:avLst/>
           </a:prstGeom>
           <a:solidFill>
-            <a:srgbClr val="55A7FF"/>
+            <a:srgbClr val="176B87"/>
           </a:solidFill>
           <a:ln>
             <a:noFill/>
@@ -15296,7 +15296,7 @@
             <a:avLst/>
           </a:prstGeom>
           <a:solidFill>
-            <a:srgbClr val="10243C"/>
+            <a:srgbClr val="FFFFFF"/>
           </a:solidFill>
           <a:ln>
             <a:solidFill>
@@ -15325,7 +15325,7 @@
             <a:pPr algn="ctr">
               <a:defRPr sz="1200" b="1">
                 <a:solidFill>
-                  <a:srgbClr val="FFBE55"/>
+                  <a:srgbClr val="D39A28"/>
                 </a:solidFill>
               </a:defRPr>
             </a:pPr>
@@ -15340,7 +15340,7 @@
               </a:spcBef>
               <a:defRPr sz="1500">
                 <a:solidFill>
-                  <a:srgbClr val="F4F8FC"/>
+                  <a:srgbClr val="151515"/>
                 </a:solidFill>
               </a:defRPr>
             </a:pPr>
@@ -15365,7 +15365,7 @@
             <a:avLst/>
           </a:prstGeom>
           <a:solidFill>
-            <a:srgbClr val="FFBE55"/>
+            <a:srgbClr val="D39A28"/>
           </a:solidFill>
           <a:ln>
             <a:noFill/>
@@ -15408,7 +15408,7 @@
             <a:avLst/>
           </a:prstGeom>
           <a:solidFill>
-            <a:srgbClr val="10243C"/>
+            <a:srgbClr val="FFFFFF"/>
           </a:solidFill>
           <a:ln>
             <a:solidFill>
@@ -15437,7 +15437,7 @@
             <a:pPr algn="ctr">
               <a:defRPr sz="1200" b="1">
                 <a:solidFill>
-                  <a:srgbClr val="46D6C8"/>
+                  <a:srgbClr val="E6462E"/>
                 </a:solidFill>
               </a:defRPr>
             </a:pPr>
@@ -15452,7 +15452,7 @@
               </a:spcBef>
               <a:defRPr sz="1500">
                 <a:solidFill>
-                  <a:srgbClr val="F4F8FC"/>
+                  <a:srgbClr val="151515"/>
                 </a:solidFill>
               </a:defRPr>
             </a:pPr>
@@ -15477,7 +15477,7 @@
             <a:avLst/>
           </a:prstGeom>
           <a:solidFill>
-            <a:srgbClr val="46D6C8"/>
+            <a:srgbClr val="E6462E"/>
           </a:solidFill>
           <a:ln>
             <a:noFill/>
@@ -15520,7 +15520,7 @@
             <a:avLst/>
           </a:prstGeom>
           <a:solidFill>
-            <a:srgbClr val="10243C"/>
+            <a:srgbClr val="FFFFFF"/>
           </a:solidFill>
           <a:ln>
             <a:solidFill>
@@ -15549,7 +15549,7 @@
             <a:pPr algn="ctr">
               <a:defRPr sz="1200" b="1">
                 <a:solidFill>
-                  <a:srgbClr val="55A7FF"/>
+                  <a:srgbClr val="176B87"/>
                 </a:solidFill>
               </a:defRPr>
             </a:pPr>
@@ -15564,7 +15564,7 @@
               </a:spcBef>
               <a:defRPr sz="1100">
                 <a:solidFill>
-                  <a:srgbClr val="F4F8FC"/>
+                  <a:srgbClr val="151515"/>
                 </a:solidFill>
               </a:defRPr>
             </a:pPr>
@@ -15589,7 +15589,7 @@
             <a:avLst/>
           </a:prstGeom>
           <a:solidFill>
-            <a:srgbClr val="55A7FF"/>
+            <a:srgbClr val="176B87"/>
           </a:solidFill>
           <a:ln>
             <a:noFill/>
@@ -15642,7 +15642,7 @@
             <a:pPr>
               <a:defRPr sz="900">
                 <a:solidFill>
-                  <a:srgbClr val="9AB2C8"/>
+                  <a:srgbClr val="62666A"/>
                 </a:solidFill>
               </a:defRPr>
             </a:pPr>
@@ -15666,7 +15666,7 @@
     <p:bg>
       <p:bgPr>
         <a:solidFill>
-          <a:srgbClr val="07111F"/>
+          <a:srgbClr val="F4F1E8"/>
         </a:solidFill>
         <a:effectLst/>
       </p:bgPr>
@@ -15693,7 +15693,7 @@
             <a:avLst/>
           </a:prstGeom>
           <a:solidFill>
-            <a:srgbClr val="46D6C8"/>
+            <a:srgbClr val="E6462E"/>
           </a:solidFill>
           <a:ln>
             <a:noFill/>
@@ -15746,7 +15746,7 @@
             <a:pPr>
               <a:defRPr sz="900" b="1">
                 <a:solidFill>
-                  <a:srgbClr val="46D6C8"/>
+                  <a:srgbClr val="E6462E"/>
                 </a:solidFill>
               </a:defRPr>
             </a:pPr>
@@ -15781,7 +15781,7 @@
             <a:pPr algn="l">
               <a:defRPr sz="2700" b="1">
                 <a:solidFill>
-                  <a:srgbClr val="F4F8FC"/>
+                  <a:srgbClr val="151515"/>
                 </a:solidFill>
               </a:defRPr>
             </a:pPr>
@@ -15806,7 +15806,7 @@
             <a:avLst/>
           </a:prstGeom>
           <a:solidFill>
-            <a:srgbClr val="10243C"/>
+            <a:srgbClr val="FFFFFF"/>
           </a:solidFill>
           <a:ln>
             <a:solidFill>
@@ -15835,7 +15835,7 @@
             <a:pPr algn="ctr">
               <a:defRPr sz="1200" b="1">
                 <a:solidFill>
-                  <a:srgbClr val="46D6C8"/>
+                  <a:srgbClr val="E6462E"/>
                 </a:solidFill>
               </a:defRPr>
             </a:pPr>
@@ -15850,7 +15850,7 @@
               </a:spcBef>
               <a:defRPr sz="1100">
                 <a:solidFill>
-                  <a:srgbClr val="F4F8FC"/>
+                  <a:srgbClr val="151515"/>
                 </a:solidFill>
               </a:defRPr>
             </a:pPr>
@@ -15875,7 +15875,7 @@
             <a:avLst/>
           </a:prstGeom>
           <a:solidFill>
-            <a:srgbClr val="46D6C8"/>
+            <a:srgbClr val="E6462E"/>
           </a:solidFill>
           <a:ln>
             <a:noFill/>
@@ -15918,7 +15918,7 @@
             <a:avLst/>
           </a:prstGeom>
           <a:solidFill>
-            <a:srgbClr val="10243C"/>
+            <a:srgbClr val="FFFFFF"/>
           </a:solidFill>
           <a:ln>
             <a:solidFill>
@@ -15947,7 +15947,7 @@
             <a:pPr algn="ctr">
               <a:defRPr sz="1200" b="1">
                 <a:solidFill>
-                  <a:srgbClr val="55A7FF"/>
+                  <a:srgbClr val="176B87"/>
                 </a:solidFill>
               </a:defRPr>
             </a:pPr>
@@ -15962,7 +15962,7 @@
               </a:spcBef>
               <a:defRPr sz="1100">
                 <a:solidFill>
-                  <a:srgbClr val="F4F8FC"/>
+                  <a:srgbClr val="151515"/>
                 </a:solidFill>
               </a:defRPr>
             </a:pPr>
@@ -15987,7 +15987,7 @@
             <a:avLst/>
           </a:prstGeom>
           <a:solidFill>
-            <a:srgbClr val="55A7FF"/>
+            <a:srgbClr val="176B87"/>
           </a:solidFill>
           <a:ln>
             <a:noFill/>
@@ -16030,7 +16030,7 @@
             <a:avLst/>
           </a:prstGeom>
           <a:solidFill>
-            <a:srgbClr val="10243C"/>
+            <a:srgbClr val="FFFFFF"/>
           </a:solidFill>
           <a:ln>
             <a:solidFill>
@@ -16059,7 +16059,7 @@
             <a:pPr algn="ctr">
               <a:defRPr sz="1200" b="1">
                 <a:solidFill>
-                  <a:srgbClr val="FFBE55"/>
+                  <a:srgbClr val="D39A28"/>
                 </a:solidFill>
               </a:defRPr>
             </a:pPr>
@@ -16074,7 +16074,7 @@
               </a:spcBef>
               <a:defRPr sz="1100">
                 <a:solidFill>
-                  <a:srgbClr val="F4F8FC"/>
+                  <a:srgbClr val="151515"/>
                 </a:solidFill>
               </a:defRPr>
             </a:pPr>
@@ -16099,7 +16099,7 @@
             <a:avLst/>
           </a:prstGeom>
           <a:solidFill>
-            <a:srgbClr val="FFBE55"/>
+            <a:srgbClr val="D39A28"/>
           </a:solidFill>
           <a:ln>
             <a:noFill/>
@@ -16142,7 +16142,7 @@
             <a:avLst/>
           </a:prstGeom>
           <a:solidFill>
-            <a:srgbClr val="10243C"/>
+            <a:srgbClr val="FFFFFF"/>
           </a:solidFill>
           <a:ln>
             <a:solidFill>
@@ -16171,7 +16171,7 @@
             <a:pPr algn="ctr">
               <a:defRPr sz="1200" b="1">
                 <a:solidFill>
-                  <a:srgbClr val="46D6C8"/>
+                  <a:srgbClr val="E6462E"/>
                 </a:solidFill>
               </a:defRPr>
             </a:pPr>
@@ -16186,7 +16186,7 @@
               </a:spcBef>
               <a:defRPr sz="1100">
                 <a:solidFill>
-                  <a:srgbClr val="F4F8FC"/>
+                  <a:srgbClr val="151515"/>
                 </a:solidFill>
               </a:defRPr>
             </a:pPr>
@@ -16211,7 +16211,7 @@
             <a:avLst/>
           </a:prstGeom>
           <a:solidFill>
-            <a:srgbClr val="46D6C8"/>
+            <a:srgbClr val="E6462E"/>
           </a:solidFill>
           <a:ln>
             <a:noFill/>
@@ -16254,7 +16254,7 @@
             <a:avLst/>
           </a:prstGeom>
           <a:solidFill>
-            <a:srgbClr val="10243C"/>
+            <a:srgbClr val="FFFFFF"/>
           </a:solidFill>
           <a:ln>
             <a:solidFill>
@@ -16283,7 +16283,7 @@
             <a:pPr algn="ctr">
               <a:defRPr sz="1200" b="1">
                 <a:solidFill>
-                  <a:srgbClr val="55A7FF"/>
+                  <a:srgbClr val="176B87"/>
                 </a:solidFill>
               </a:defRPr>
             </a:pPr>
@@ -16298,7 +16298,7 @@
               </a:spcBef>
               <a:defRPr sz="1100">
                 <a:solidFill>
-                  <a:srgbClr val="F4F8FC"/>
+                  <a:srgbClr val="151515"/>
                 </a:solidFill>
               </a:defRPr>
             </a:pPr>
@@ -16323,7 +16323,7 @@
             <a:avLst/>
           </a:prstGeom>
           <a:solidFill>
-            <a:srgbClr val="55A7FF"/>
+            <a:srgbClr val="176B87"/>
           </a:solidFill>
           <a:ln>
             <a:noFill/>
@@ -16376,7 +16376,7 @@
             <a:pPr>
               <a:defRPr sz="900">
                 <a:solidFill>
-                  <a:srgbClr val="9AB2C8"/>
+                  <a:srgbClr val="62666A"/>
                 </a:solidFill>
               </a:defRPr>
             </a:pPr>
@@ -16400,7 +16400,7 @@
     <p:bg>
       <p:bgPr>
         <a:solidFill>
-          <a:srgbClr val="07111F"/>
+          <a:srgbClr val="F4F1E8"/>
         </a:solidFill>
         <a:effectLst/>
       </p:bgPr>
@@ -16427,7 +16427,7 @@
             <a:avLst/>
           </a:prstGeom>
           <a:solidFill>
-            <a:srgbClr val="46D6C8"/>
+            <a:srgbClr val="E6462E"/>
           </a:solidFill>
           <a:ln>
             <a:noFill/>
@@ -16480,7 +16480,7 @@
             <a:pPr>
               <a:defRPr sz="900" b="1">
                 <a:solidFill>
-                  <a:srgbClr val="46D6C8"/>
+                  <a:srgbClr val="E6462E"/>
                 </a:solidFill>
               </a:defRPr>
             </a:pPr>
@@ -16515,7 +16515,7 @@
             <a:pPr algn="l">
               <a:defRPr sz="2700" b="1">
                 <a:solidFill>
-                  <a:srgbClr val="F4F8FC"/>
+                  <a:srgbClr val="151515"/>
                 </a:solidFill>
               </a:defRPr>
             </a:pPr>
@@ -16540,7 +16540,7 @@
             <a:avLst/>
           </a:prstGeom>
           <a:solidFill>
-            <a:srgbClr val="10243C"/>
+            <a:srgbClr val="FFFFFF"/>
           </a:solidFill>
           <a:ln>
             <a:solidFill>
@@ -16569,7 +16569,7 @@
             <a:pPr algn="ctr">
               <a:defRPr sz="1200" b="1">
                 <a:solidFill>
-                  <a:srgbClr val="46D6C8"/>
+                  <a:srgbClr val="E6462E"/>
                 </a:solidFill>
               </a:defRPr>
             </a:pPr>
@@ -16584,7 +16584,7 @@
               </a:spcBef>
               <a:defRPr sz="1100">
                 <a:solidFill>
-                  <a:srgbClr val="F4F8FC"/>
+                  <a:srgbClr val="151515"/>
                 </a:solidFill>
               </a:defRPr>
             </a:pPr>
@@ -16609,7 +16609,7 @@
             <a:avLst/>
           </a:prstGeom>
           <a:solidFill>
-            <a:srgbClr val="46D6C8"/>
+            <a:srgbClr val="E6462E"/>
           </a:solidFill>
           <a:ln>
             <a:noFill/>
@@ -16652,7 +16652,7 @@
             <a:avLst/>
           </a:prstGeom>
           <a:solidFill>
-            <a:srgbClr val="10243C"/>
+            <a:srgbClr val="FFFFFF"/>
           </a:solidFill>
           <a:ln>
             <a:solidFill>
@@ -16681,7 +16681,7 @@
             <a:pPr algn="ctr">
               <a:defRPr sz="1200" b="1">
                 <a:solidFill>
-                  <a:srgbClr val="55A7FF"/>
+                  <a:srgbClr val="176B87"/>
                 </a:solidFill>
               </a:defRPr>
             </a:pPr>
@@ -16696,7 +16696,7 @@
               </a:spcBef>
               <a:defRPr sz="1100">
                 <a:solidFill>
-                  <a:srgbClr val="F4F8FC"/>
+                  <a:srgbClr val="151515"/>
                 </a:solidFill>
               </a:defRPr>
             </a:pPr>
@@ -16721,7 +16721,7 @@
             <a:avLst/>
           </a:prstGeom>
           <a:solidFill>
-            <a:srgbClr val="55A7FF"/>
+            <a:srgbClr val="176B87"/>
           </a:solidFill>
           <a:ln>
             <a:noFill/>
@@ -16764,7 +16764,7 @@
             <a:avLst/>
           </a:prstGeom>
           <a:solidFill>
-            <a:srgbClr val="10243C"/>
+            <a:srgbClr val="FFFFFF"/>
           </a:solidFill>
           <a:ln>
             <a:solidFill>
@@ -16793,7 +16793,7 @@
             <a:pPr algn="ctr">
               <a:defRPr sz="1200" b="1">
                 <a:solidFill>
-                  <a:srgbClr val="FFBE55"/>
+                  <a:srgbClr val="D39A28"/>
                 </a:solidFill>
               </a:defRPr>
             </a:pPr>
@@ -16808,7 +16808,7 @@
               </a:spcBef>
               <a:defRPr sz="1100">
                 <a:solidFill>
-                  <a:srgbClr val="F4F8FC"/>
+                  <a:srgbClr val="151515"/>
                 </a:solidFill>
               </a:defRPr>
             </a:pPr>
@@ -16833,7 +16833,7 @@
             <a:avLst/>
           </a:prstGeom>
           <a:solidFill>
-            <a:srgbClr val="FFBE55"/>
+            <a:srgbClr val="D39A28"/>
           </a:solidFill>
           <a:ln>
             <a:noFill/>
@@ -16876,7 +16876,7 @@
             <a:avLst/>
           </a:prstGeom>
           <a:solidFill>
-            <a:srgbClr val="10243C"/>
+            <a:srgbClr val="FFFFFF"/>
           </a:solidFill>
           <a:ln>
             <a:solidFill>
@@ -16905,7 +16905,7 @@
             <a:pPr algn="ctr">
               <a:defRPr sz="1200" b="1">
                 <a:solidFill>
-                  <a:srgbClr val="46D6C8"/>
+                  <a:srgbClr val="E6462E"/>
                 </a:solidFill>
               </a:defRPr>
             </a:pPr>
@@ -16920,7 +16920,7 @@
               </a:spcBef>
               <a:defRPr sz="1100">
                 <a:solidFill>
-                  <a:srgbClr val="F4F8FC"/>
+                  <a:srgbClr val="151515"/>
                 </a:solidFill>
               </a:defRPr>
             </a:pPr>
@@ -16945,7 +16945,7 @@
             <a:avLst/>
           </a:prstGeom>
           <a:solidFill>
-            <a:srgbClr val="46D6C8"/>
+            <a:srgbClr val="E6462E"/>
           </a:solidFill>
           <a:ln>
             <a:noFill/>
@@ -16998,7 +16998,7 @@
             <a:pPr>
               <a:defRPr sz="900">
                 <a:solidFill>
-                  <a:srgbClr val="9AB2C8"/>
+                  <a:srgbClr val="62666A"/>
                 </a:solidFill>
               </a:defRPr>
             </a:pPr>
